--- a/Documentos/Banner/BANNER_FECAP_CCOMP6_ARKANIS_2026.pptx
+++ b/Documentos/Banner/BANNER_FECAP_CCOMP6_ARKANIS_2026.pptx
@@ -1,28 +1,28 @@
 
 <file path=ppt/presentation.xml><?xml version="1.0" encoding="utf-8"?>
-<p:presentation xmlns:a="http://schemas.openxmlformats.org/drawingml/2006/main" xmlns:r="http://schemas.openxmlformats.org/officeDocument/2006/relationships" xmlns:mc="http://schemas.openxmlformats.org/markup-compatibility/2006" xmlns:mv="urn:schemas-microsoft-com:mac:vml" xmlns:p="http://schemas.openxmlformats.org/presentationml/2006/main" xmlns:c="http://schemas.openxmlformats.org/drawingml/2006/chart" xmlns:dgm="http://schemas.openxmlformats.org/drawingml/2006/diagram" xmlns:o="urn:schemas-microsoft-com:office:office" xmlns:v="urn:schemas-microsoft-com:vml" xmlns:pvml="urn:schemas-microsoft-com:office:powerpoint" xmlns:com="http://schemas.openxmlformats.org/drawingml/2006/compatibility" xmlns:p14="http://schemas.microsoft.com/office/powerpoint/2010/main" xmlns:p15="http://schemas.microsoft.com/office/powerpoint/2012/main" xmlns:ahyp="http://schemas.microsoft.com/office/drawing/2018/hyperlinkcolor" autoCompressPictures="0" embedTrueTypeFonts="1" strictFirstAndLastChars="0" saveSubsetFonts="1">
+<p:presentation xmlns:a="http://schemas.openxmlformats.org/drawingml/2006/main" xmlns:r="http://schemas.openxmlformats.org/officeDocument/2006/relationships" xmlns:p="http://schemas.openxmlformats.org/presentationml/2006/main" strictFirstAndLastChars="0" embedTrueTypeFonts="1" saveSubsetFonts="1" autoCompressPictures="0">
   <p:sldMasterIdLst>
-    <p:sldMasterId id="2147483648" r:id="rId4"/>
+    <p:sldMasterId id="2147483648" r:id="rId1"/>
   </p:sldMasterIdLst>
   <p:notesMasterIdLst>
-    <p:notesMasterId r:id="rId5"/>
+    <p:notesMasterId r:id="rId3"/>
   </p:notesMasterIdLst>
   <p:sldIdLst>
-    <p:sldId id="256" r:id="rId6"/>
+    <p:sldId id="256" r:id="rId2"/>
   </p:sldIdLst>
-  <p:sldSz cy="43200625" cx="28800425"/>
+  <p:sldSz cx="28800425" cy="43200638"/>
   <p:notesSz cx="6858000" cy="9144000"/>
   <p:embeddedFontLst>
     <p:embeddedFont>
-      <p:font typeface="Open Sans"/>
-      <p:regular r:id="rId7"/>
-      <p:bold r:id="rId8"/>
-      <p:italic r:id="rId9"/>
-      <p:boldItalic r:id="rId10"/>
+      <p:font typeface="Open Sans" panose="020B0606030504020204" pitchFamily="34" charset="0"/>
+      <p:regular r:id="rId4"/>
+      <p:bold r:id="rId5"/>
+      <p:italic r:id="rId6"/>
+      <p:boldItalic r:id="rId7"/>
     </p:embeddedFont>
   </p:embeddedFontLst>
   <p:defaultTextStyle>
-    <a:defPPr lvl="0" marR="0" rtl="0" algn="l">
+    <a:defPPr marR="0" lvl="0" algn="l" rtl="0">
       <a:lnSpc>
         <a:spcPct val="100000"/>
       </a:lnSpc>
@@ -33,7 +33,7 @@
         <a:spcPts val="0"/>
       </a:spcAft>
     </a:defPPr>
-    <a:lvl1pPr lvl="0" marR="0" rtl="0" algn="l">
+    <a:lvl1pPr marR="0" lvl="0" algn="l" rtl="0">
       <a:lnSpc>
         <a:spcPct val="100000"/>
       </a:lnSpc>
@@ -47,7 +47,7 @@
         <a:srgbClr val="000000"/>
       </a:buClr>
       <a:buFont typeface="Arial"/>
-      <a:defRPr b="0" i="0" sz="1400" u="none" cap="none" strike="noStrike">
+      <a:defRPr sz="1400" b="0" i="0" u="none" strike="noStrike" cap="none">
         <a:solidFill>
           <a:srgbClr val="000000"/>
         </a:solidFill>
@@ -57,7 +57,7 @@
         <a:sym typeface="Arial"/>
       </a:defRPr>
     </a:lvl1pPr>
-    <a:lvl2pPr lvl="1" marR="0" rtl="0" algn="l">
+    <a:lvl2pPr marR="0" lvl="1" algn="l" rtl="0">
       <a:lnSpc>
         <a:spcPct val="100000"/>
       </a:lnSpc>
@@ -71,7 +71,7 @@
         <a:srgbClr val="000000"/>
       </a:buClr>
       <a:buFont typeface="Arial"/>
-      <a:defRPr b="0" i="0" sz="1400" u="none" cap="none" strike="noStrike">
+      <a:defRPr sz="1400" b="0" i="0" u="none" strike="noStrike" cap="none">
         <a:solidFill>
           <a:srgbClr val="000000"/>
         </a:solidFill>
@@ -81,7 +81,7 @@
         <a:sym typeface="Arial"/>
       </a:defRPr>
     </a:lvl2pPr>
-    <a:lvl3pPr lvl="2" marR="0" rtl="0" algn="l">
+    <a:lvl3pPr marR="0" lvl="2" algn="l" rtl="0">
       <a:lnSpc>
         <a:spcPct val="100000"/>
       </a:lnSpc>
@@ -95,7 +95,7 @@
         <a:srgbClr val="000000"/>
       </a:buClr>
       <a:buFont typeface="Arial"/>
-      <a:defRPr b="0" i="0" sz="1400" u="none" cap="none" strike="noStrike">
+      <a:defRPr sz="1400" b="0" i="0" u="none" strike="noStrike" cap="none">
         <a:solidFill>
           <a:srgbClr val="000000"/>
         </a:solidFill>
@@ -105,7 +105,7 @@
         <a:sym typeface="Arial"/>
       </a:defRPr>
     </a:lvl3pPr>
-    <a:lvl4pPr lvl="3" marR="0" rtl="0" algn="l">
+    <a:lvl4pPr marR="0" lvl="3" algn="l" rtl="0">
       <a:lnSpc>
         <a:spcPct val="100000"/>
       </a:lnSpc>
@@ -119,7 +119,7 @@
         <a:srgbClr val="000000"/>
       </a:buClr>
       <a:buFont typeface="Arial"/>
-      <a:defRPr b="0" i="0" sz="1400" u="none" cap="none" strike="noStrike">
+      <a:defRPr sz="1400" b="0" i="0" u="none" strike="noStrike" cap="none">
         <a:solidFill>
           <a:srgbClr val="000000"/>
         </a:solidFill>
@@ -129,7 +129,7 @@
         <a:sym typeface="Arial"/>
       </a:defRPr>
     </a:lvl4pPr>
-    <a:lvl5pPr lvl="4" marR="0" rtl="0" algn="l">
+    <a:lvl5pPr marR="0" lvl="4" algn="l" rtl="0">
       <a:lnSpc>
         <a:spcPct val="100000"/>
       </a:lnSpc>
@@ -143,7 +143,7 @@
         <a:srgbClr val="000000"/>
       </a:buClr>
       <a:buFont typeface="Arial"/>
-      <a:defRPr b="0" i="0" sz="1400" u="none" cap="none" strike="noStrike">
+      <a:defRPr sz="1400" b="0" i="0" u="none" strike="noStrike" cap="none">
         <a:solidFill>
           <a:srgbClr val="000000"/>
         </a:solidFill>
@@ -153,7 +153,7 @@
         <a:sym typeface="Arial"/>
       </a:defRPr>
     </a:lvl5pPr>
-    <a:lvl6pPr lvl="5" marR="0" rtl="0" algn="l">
+    <a:lvl6pPr marR="0" lvl="5" algn="l" rtl="0">
       <a:lnSpc>
         <a:spcPct val="100000"/>
       </a:lnSpc>
@@ -167,7 +167,7 @@
         <a:srgbClr val="000000"/>
       </a:buClr>
       <a:buFont typeface="Arial"/>
-      <a:defRPr b="0" i="0" sz="1400" u="none" cap="none" strike="noStrike">
+      <a:defRPr sz="1400" b="0" i="0" u="none" strike="noStrike" cap="none">
         <a:solidFill>
           <a:srgbClr val="000000"/>
         </a:solidFill>
@@ -177,7 +177,7 @@
         <a:sym typeface="Arial"/>
       </a:defRPr>
     </a:lvl6pPr>
-    <a:lvl7pPr lvl="6" marR="0" rtl="0" algn="l">
+    <a:lvl7pPr marR="0" lvl="6" algn="l" rtl="0">
       <a:lnSpc>
         <a:spcPct val="100000"/>
       </a:lnSpc>
@@ -191,7 +191,7 @@
         <a:srgbClr val="000000"/>
       </a:buClr>
       <a:buFont typeface="Arial"/>
-      <a:defRPr b="0" i="0" sz="1400" u="none" cap="none" strike="noStrike">
+      <a:defRPr sz="1400" b="0" i="0" u="none" strike="noStrike" cap="none">
         <a:solidFill>
           <a:srgbClr val="000000"/>
         </a:solidFill>
@@ -201,7 +201,7 @@
         <a:sym typeface="Arial"/>
       </a:defRPr>
     </a:lvl7pPr>
-    <a:lvl8pPr lvl="7" marR="0" rtl="0" algn="l">
+    <a:lvl8pPr marR="0" lvl="7" algn="l" rtl="0">
       <a:lnSpc>
         <a:spcPct val="100000"/>
       </a:lnSpc>
@@ -215,7 +215,7 @@
         <a:srgbClr val="000000"/>
       </a:buClr>
       <a:buFont typeface="Arial"/>
-      <a:defRPr b="0" i="0" sz="1400" u="none" cap="none" strike="noStrike">
+      <a:defRPr sz="1400" b="0" i="0" u="none" strike="noStrike" cap="none">
         <a:solidFill>
           <a:srgbClr val="000000"/>
         </a:solidFill>
@@ -225,7 +225,7 @@
         <a:sym typeface="Arial"/>
       </a:defRPr>
     </a:lvl8pPr>
-    <a:lvl9pPr lvl="8" marR="0" rtl="0" algn="l">
+    <a:lvl9pPr marR="0" lvl="8" algn="l" rtl="0">
       <a:lnSpc>
         <a:spcPct val="100000"/>
       </a:lnSpc>
@@ -239,7 +239,7 @@
         <a:srgbClr val="000000"/>
       </a:buClr>
       <a:buFont typeface="Arial"/>
-      <a:defRPr b="0" i="0" sz="1400" u="none" cap="none" strike="noStrike">
+      <a:defRPr sz="1400" b="0" i="0" u="none" strike="noStrike" cap="none">
         <a:solidFill>
           <a:srgbClr val="000000"/>
         </a:solidFill>
@@ -252,7 +252,7 @@
   </p:defaultTextStyle>
   <p:extLst>
     <p:ext uri="{EFAFB233-063F-42B5-8137-9DF3F51BA10A}">
-      <p15:sldGuideLst>
+      <p15:sldGuideLst xmlns:p15="http://schemas.microsoft.com/office/powerpoint/2012/main">
         <p15:guide id="1" orient="horz" pos="4366">
           <p15:clr>
             <a:srgbClr val="A4A3A4"/>
@@ -266,25 +266,55 @@
       </p15:sldGuideLst>
     </p:ext>
     <p:ext uri="GoogleSlidesCustomDataVersion2">
-      <go:slidesCustomData xmlns:go="http://customooxmlschemas.google.com/" r:id="rId11" roundtripDataSignature="AMtx7mhZd7mQSxpDiSW/xakS/zmC5oJUpg=="/>
+      <go:slidesCustomData xmlns:go="http://customooxmlschemas.google.com/" xmlns:ahyp="http://schemas.microsoft.com/office/drawing/2018/hyperlinkcolor" xmlns:p15="http://schemas.microsoft.com/office/powerpoint/2012/main" xmlns:p14="http://schemas.microsoft.com/office/powerpoint/2010/main" xmlns:com="http://schemas.openxmlformats.org/drawingml/2006/compatibility" xmlns:pvml="urn:schemas-microsoft-com:office:powerpoint" xmlns:v="urn:schemas-microsoft-com:vml" xmlns:o="urn:schemas-microsoft-com:office:office" xmlns:dgm="http://schemas.openxmlformats.org/drawingml/2006/diagram" xmlns:c="http://schemas.openxmlformats.org/drawingml/2006/chart" xmlns:mv="urn:schemas-microsoft-com:mac:vml" xmlns:mc="http://schemas.openxmlformats.org/markup-compatibility/2006" xmlns="" r:id="rId11" roundtripDataSignature="AMtx7mhZd7mQSxpDiSW/xakS/zmC5oJUpg=="/>
     </p:ext>
   </p:extLst>
 </p:presentation>
 </file>
 
+<file path=ppt/changesInfos/changesInfo1.xml><?xml version="1.0" encoding="utf-8"?>
+<pc:chgInfo xmlns:a="http://schemas.openxmlformats.org/drawingml/2006/main" xmlns:r="http://schemas.openxmlformats.org/officeDocument/2006/relationships" xmlns:ac="http://schemas.microsoft.com/office/drawing/2013/main/command" xmlns:pc="http://schemas.microsoft.com/office/powerpoint/2013/main/command">
+  <pc:docChgLst>
+    <pc:chgData name="Luciano Massaro 23025304" userId="fde12354-1d2e-4839-aad9-0ba14edd3215" providerId="ADAL" clId="{44148CF8-8859-488F-AFF6-45DF634DA2E0}"/>
+    <pc:docChg chg="modSld">
+      <pc:chgData name="Luciano Massaro 23025304" userId="fde12354-1d2e-4839-aad9-0ba14edd3215" providerId="ADAL" clId="{44148CF8-8859-488F-AFF6-45DF634DA2E0}" dt="2026-05-10T22:56:20.759" v="0" actId="20577"/>
+      <pc:docMkLst>
+        <pc:docMk/>
+      </pc:docMkLst>
+      <pc:sldChg chg="modSp mod">
+        <pc:chgData name="Luciano Massaro 23025304" userId="fde12354-1d2e-4839-aad9-0ba14edd3215" providerId="ADAL" clId="{44148CF8-8859-488F-AFF6-45DF634DA2E0}" dt="2026-05-10T22:56:20.759" v="0" actId="20577"/>
+        <pc:sldMkLst>
+          <pc:docMk/>
+          <pc:sldMk cId="0" sldId="256"/>
+        </pc:sldMkLst>
+        <pc:spChg chg="mod">
+          <ac:chgData name="Luciano Massaro 23025304" userId="fde12354-1d2e-4839-aad9-0ba14edd3215" providerId="ADAL" clId="{44148CF8-8859-488F-AFF6-45DF634DA2E0}" dt="2026-05-10T22:56:20.759" v="0" actId="20577"/>
+          <ac:spMkLst>
+            <pc:docMk/>
+            <pc:sldMk cId="0" sldId="256"/>
+            <ac:spMk id="126" creationId="{00000000-0000-0000-0000-000000000000}"/>
+          </ac:spMkLst>
+        </pc:spChg>
+      </pc:sldChg>
+    </pc:docChg>
+  </pc:docChgLst>
+</pc:chgInfo>
+</file>
+
 <file path=ppt/notesMasters/notesMaster1.xml><?xml version="1.0" encoding="utf-8"?>
-<p:notesMaster xmlns:a="http://schemas.openxmlformats.org/drawingml/2006/main" xmlns:r="http://schemas.openxmlformats.org/officeDocument/2006/relationships" xmlns:mc="http://schemas.openxmlformats.org/markup-compatibility/2006" xmlns:mv="urn:schemas-microsoft-com:mac:vml" xmlns:p="http://schemas.openxmlformats.org/presentationml/2006/main" xmlns:c="http://schemas.openxmlformats.org/drawingml/2006/chart" xmlns:dgm="http://schemas.openxmlformats.org/drawingml/2006/diagram" xmlns:o="urn:schemas-microsoft-com:office:office" xmlns:v="urn:schemas-microsoft-com:vml" xmlns:pvml="urn:schemas-microsoft-com:office:powerpoint" xmlns:com="http://schemas.openxmlformats.org/drawingml/2006/compatibility" xmlns:p14="http://schemas.microsoft.com/office/powerpoint/2010/main" xmlns:p15="http://schemas.microsoft.com/office/powerpoint/2012/main" xmlns:ahyp="http://schemas.microsoft.com/office/drawing/2018/hyperlinkcolor">
+<p:notesMaster xmlns:a="http://schemas.openxmlformats.org/drawingml/2006/main" xmlns:r="http://schemas.openxmlformats.org/officeDocument/2006/relationships" xmlns:p="http://schemas.openxmlformats.org/presentationml/2006/main">
   <p:cSld>
     <p:bg>
       <p:bgPr>
         <a:solidFill>
           <a:schemeClr val="lt1"/>
         </a:solidFill>
+        <a:effectLst/>
       </p:bgPr>
     </p:bg>
     <p:spTree>
       <p:nvGrpSpPr>
-        <p:cNvPr id="2" name="Shape 2"/>
+        <p:cNvPr id="1" name="Shape 2"/>
         <p:cNvGrpSpPr/>
         <p:nvPr/>
       </p:nvGrpSpPr>
@@ -299,9 +329,11 @@
       <p:sp>
         <p:nvSpPr>
           <p:cNvPr id="3" name="Google Shape;3;n"/>
-          <p:cNvSpPr/>
+          <p:cNvSpPr>
+            <a:spLocks noGrp="1" noRot="1" noChangeAspect="1"/>
+          </p:cNvSpPr>
           <p:nvPr>
-            <p:ph idx="2" type="sldImg"/>
+            <p:ph type="sldImg" idx="2"/>
           </p:nvPr>
         </p:nvSpPr>
         <p:spPr>
@@ -310,9 +342,13 @@
             <a:ext cx="4572225" cy="3429000"/>
           </a:xfrm>
           <a:custGeom>
-            <a:rect b="b" l="l" r="r" t="t"/>
+            <a:avLst/>
+            <a:gdLst/>
+            <a:ahLst/>
+            <a:cxnLst/>
+            <a:rect l="l" t="t" r="r" b="b"/>
             <a:pathLst>
-              <a:path extrusionOk="0" h="120000" w="120000">
+              <a:path w="120000" h="120000" extrusionOk="0">
                 <a:moveTo>
                   <a:pt x="0" y="0"/>
                 </a:moveTo>
@@ -330,23 +366,25 @@
             </a:pathLst>
           </a:custGeom>
           <a:noFill/>
-          <a:ln cap="flat" cmpd="sng" w="9525">
+          <a:ln w="9525" cap="flat" cmpd="sng">
             <a:solidFill>
               <a:srgbClr val="000000"/>
             </a:solidFill>
             <a:prstDash val="solid"/>
             <a:round/>
-            <a:headEnd len="sm" w="sm" type="none"/>
-            <a:tailEnd len="sm" w="sm" type="none"/>
+            <a:headEnd type="none" w="sm" len="sm"/>
+            <a:tailEnd type="none" w="sm" len="sm"/>
           </a:ln>
         </p:spPr>
       </p:sp>
       <p:sp>
         <p:nvSpPr>
           <p:cNvPr id="4" name="Google Shape;4;n"/>
-          <p:cNvSpPr txBox="1"/>
+          <p:cNvSpPr txBox="1">
+            <a:spLocks noGrp="1"/>
+          </p:cNvSpPr>
           <p:nvPr>
-            <p:ph idx="1" type="body"/>
+            <p:ph type="body" idx="1"/>
           </p:nvPr>
         </p:nvSpPr>
         <p:spPr>
@@ -363,11 +401,11 @@
           </a:ln>
         </p:spPr>
         <p:txBody>
-          <a:bodyPr anchorCtr="0" anchor="t" bIns="91425" lIns="91425" spcFirstLastPara="1" rIns="91425" wrap="square" tIns="91425">
+          <a:bodyPr spcFirstLastPara="1" wrap="square" lIns="91425" tIns="91425" rIns="91425" bIns="91425" anchor="t" anchorCtr="0">
             <a:noAutofit/>
           </a:bodyPr>
           <a:lstStyle>
-            <a:lvl1pPr indent="-298450" lvl="0" marL="457200" marR="0" rtl="0" algn="l">
+            <a:lvl1pPr marL="457200" marR="0" lvl="0" indent="-298450" algn="l" rtl="0">
               <a:lnSpc>
                 <a:spcPct val="100000"/>
               </a:lnSpc>
@@ -383,7 +421,7 @@
               <a:buSzPts val="1100"/>
               <a:buFont typeface="Arial"/>
               <a:buChar char="●"/>
-              <a:defRPr b="0" i="0" sz="1100" u="none" cap="none" strike="noStrike">
+              <a:defRPr sz="1100" b="0" i="0" u="none" strike="noStrike" cap="none">
                 <a:solidFill>
                   <a:srgbClr val="000000"/>
                 </a:solidFill>
@@ -393,7 +431,7 @@
                 <a:sym typeface="Arial"/>
               </a:defRPr>
             </a:lvl1pPr>
-            <a:lvl2pPr indent="-298450" lvl="1" marL="914400" marR="0" rtl="0" algn="l">
+            <a:lvl2pPr marL="914400" marR="0" lvl="1" indent="-298450" algn="l" rtl="0">
               <a:lnSpc>
                 <a:spcPct val="100000"/>
               </a:lnSpc>
@@ -409,7 +447,7 @@
               <a:buSzPts val="1100"/>
               <a:buFont typeface="Arial"/>
               <a:buChar char="○"/>
-              <a:defRPr b="0" i="0" sz="1100" u="none" cap="none" strike="noStrike">
+              <a:defRPr sz="1100" b="0" i="0" u="none" strike="noStrike" cap="none">
                 <a:solidFill>
                   <a:srgbClr val="000000"/>
                 </a:solidFill>
@@ -419,7 +457,7 @@
                 <a:sym typeface="Arial"/>
               </a:defRPr>
             </a:lvl2pPr>
-            <a:lvl3pPr indent="-298450" lvl="2" marL="1371600" marR="0" rtl="0" algn="l">
+            <a:lvl3pPr marL="1371600" marR="0" lvl="2" indent="-298450" algn="l" rtl="0">
               <a:lnSpc>
                 <a:spcPct val="100000"/>
               </a:lnSpc>
@@ -435,7 +473,7 @@
               <a:buSzPts val="1100"/>
               <a:buFont typeface="Arial"/>
               <a:buChar char="■"/>
-              <a:defRPr b="0" i="0" sz="1100" u="none" cap="none" strike="noStrike">
+              <a:defRPr sz="1100" b="0" i="0" u="none" strike="noStrike" cap="none">
                 <a:solidFill>
                   <a:srgbClr val="000000"/>
                 </a:solidFill>
@@ -445,7 +483,7 @@
                 <a:sym typeface="Arial"/>
               </a:defRPr>
             </a:lvl3pPr>
-            <a:lvl4pPr indent="-298450" lvl="3" marL="1828800" marR="0" rtl="0" algn="l">
+            <a:lvl4pPr marL="1828800" marR="0" lvl="3" indent="-298450" algn="l" rtl="0">
               <a:lnSpc>
                 <a:spcPct val="100000"/>
               </a:lnSpc>
@@ -461,7 +499,7 @@
               <a:buSzPts val="1100"/>
               <a:buFont typeface="Arial"/>
               <a:buChar char="●"/>
-              <a:defRPr b="0" i="0" sz="1100" u="none" cap="none" strike="noStrike">
+              <a:defRPr sz="1100" b="0" i="0" u="none" strike="noStrike" cap="none">
                 <a:solidFill>
                   <a:srgbClr val="000000"/>
                 </a:solidFill>
@@ -471,7 +509,7 @@
                 <a:sym typeface="Arial"/>
               </a:defRPr>
             </a:lvl4pPr>
-            <a:lvl5pPr indent="-298450" lvl="4" marL="2286000" marR="0" rtl="0" algn="l">
+            <a:lvl5pPr marL="2286000" marR="0" lvl="4" indent="-298450" algn="l" rtl="0">
               <a:lnSpc>
                 <a:spcPct val="100000"/>
               </a:lnSpc>
@@ -487,7 +525,7 @@
               <a:buSzPts val="1100"/>
               <a:buFont typeface="Arial"/>
               <a:buChar char="○"/>
-              <a:defRPr b="0" i="0" sz="1100" u="none" cap="none" strike="noStrike">
+              <a:defRPr sz="1100" b="0" i="0" u="none" strike="noStrike" cap="none">
                 <a:solidFill>
                   <a:srgbClr val="000000"/>
                 </a:solidFill>
@@ -497,7 +535,7 @@
                 <a:sym typeface="Arial"/>
               </a:defRPr>
             </a:lvl5pPr>
-            <a:lvl6pPr indent="-298450" lvl="5" marL="2743200" marR="0" rtl="0" algn="l">
+            <a:lvl6pPr marL="2743200" marR="0" lvl="5" indent="-298450" algn="l" rtl="0">
               <a:lnSpc>
                 <a:spcPct val="100000"/>
               </a:lnSpc>
@@ -513,7 +551,7 @@
               <a:buSzPts val="1100"/>
               <a:buFont typeface="Arial"/>
               <a:buChar char="■"/>
-              <a:defRPr b="0" i="0" sz="1100" u="none" cap="none" strike="noStrike">
+              <a:defRPr sz="1100" b="0" i="0" u="none" strike="noStrike" cap="none">
                 <a:solidFill>
                   <a:srgbClr val="000000"/>
                 </a:solidFill>
@@ -523,7 +561,7 @@
                 <a:sym typeface="Arial"/>
               </a:defRPr>
             </a:lvl6pPr>
-            <a:lvl7pPr indent="-298450" lvl="6" marL="3200400" marR="0" rtl="0" algn="l">
+            <a:lvl7pPr marL="3200400" marR="0" lvl="6" indent="-298450" algn="l" rtl="0">
               <a:lnSpc>
                 <a:spcPct val="100000"/>
               </a:lnSpc>
@@ -539,7 +577,7 @@
               <a:buSzPts val="1100"/>
               <a:buFont typeface="Arial"/>
               <a:buChar char="●"/>
-              <a:defRPr b="0" i="0" sz="1100" u="none" cap="none" strike="noStrike">
+              <a:defRPr sz="1100" b="0" i="0" u="none" strike="noStrike" cap="none">
                 <a:solidFill>
                   <a:srgbClr val="000000"/>
                 </a:solidFill>
@@ -549,7 +587,7 @@
                 <a:sym typeface="Arial"/>
               </a:defRPr>
             </a:lvl7pPr>
-            <a:lvl8pPr indent="-298450" lvl="7" marL="3657600" marR="0" rtl="0" algn="l">
+            <a:lvl8pPr marL="3657600" marR="0" lvl="7" indent="-298450" algn="l" rtl="0">
               <a:lnSpc>
                 <a:spcPct val="100000"/>
               </a:lnSpc>
@@ -565,7 +603,7 @@
               <a:buSzPts val="1100"/>
               <a:buFont typeface="Arial"/>
               <a:buChar char="○"/>
-              <a:defRPr b="0" i="0" sz="1100" u="none" cap="none" strike="noStrike">
+              <a:defRPr sz="1100" b="0" i="0" u="none" strike="noStrike" cap="none">
                 <a:solidFill>
                   <a:srgbClr val="000000"/>
                 </a:solidFill>
@@ -575,7 +613,7 @@
                 <a:sym typeface="Arial"/>
               </a:defRPr>
             </a:lvl8pPr>
-            <a:lvl9pPr indent="-298450" lvl="8" marL="4114800" marR="0" rtl="0" algn="l">
+            <a:lvl9pPr marL="4114800" marR="0" lvl="8" indent="-298450" algn="l" rtl="0">
               <a:lnSpc>
                 <a:spcPct val="100000"/>
               </a:lnSpc>
@@ -591,7 +629,7 @@
               <a:buSzPts val="1100"/>
               <a:buFont typeface="Arial"/>
               <a:buChar char="■"/>
-              <a:defRPr b="0" i="0" sz="1100" u="none" cap="none" strike="noStrike">
+              <a:defRPr sz="1100" b="0" i="0" u="none" strike="noStrike" cap="none">
                 <a:solidFill>
                   <a:srgbClr val="000000"/>
                 </a:solidFill>
@@ -602,14 +640,16 @@
               </a:defRPr>
             </a:lvl9pPr>
           </a:lstStyle>
-          <a:p/>
+          <a:p>
+            <a:endParaRPr/>
+          </a:p>
         </p:txBody>
       </p:sp>
     </p:spTree>
   </p:cSld>
-  <p:clrMap accent1="accent1" accent2="accent2" accent3="accent3" accent4="accent4" accent5="accent5" accent6="accent6" bg1="lt1" bg2="dk2" tx1="dk1" tx2="lt2" folHlink="folHlink" hlink="hlink"/>
+  <p:clrMap bg1="lt1" tx1="dk1" bg2="dk2" tx2="lt2" accent1="accent1" accent2="accent2" accent3="accent3" accent4="accent4" accent5="accent5" accent6="accent6" hlink="hlink" folHlink="folHlink"/>
   <p:notesStyle>
-    <a:defPPr lvl="0" marR="0" rtl="0" algn="l">
+    <a:defPPr marR="0" lvl="0" algn="l" rtl="0">
       <a:lnSpc>
         <a:spcPct val="100000"/>
       </a:lnSpc>
@@ -620,7 +660,7 @@
         <a:spcPts val="0"/>
       </a:spcAft>
     </a:defPPr>
-    <a:lvl1pPr lvl="0" marR="0" rtl="0" algn="l">
+    <a:lvl1pPr marR="0" lvl="0" algn="l" rtl="0">
       <a:lnSpc>
         <a:spcPct val="100000"/>
       </a:lnSpc>
@@ -634,7 +674,7 @@
         <a:srgbClr val="000000"/>
       </a:buClr>
       <a:buFont typeface="Arial"/>
-      <a:defRPr b="0" i="0" sz="1400" u="none" cap="none" strike="noStrike">
+      <a:defRPr sz="1400" b="0" i="0" u="none" strike="noStrike" cap="none">
         <a:solidFill>
           <a:srgbClr val="000000"/>
         </a:solidFill>
@@ -644,7 +684,7 @@
         <a:sym typeface="Arial"/>
       </a:defRPr>
     </a:lvl1pPr>
-    <a:lvl2pPr lvl="1" marR="0" rtl="0" algn="l">
+    <a:lvl2pPr marR="0" lvl="1" algn="l" rtl="0">
       <a:lnSpc>
         <a:spcPct val="100000"/>
       </a:lnSpc>
@@ -658,7 +698,7 @@
         <a:srgbClr val="000000"/>
       </a:buClr>
       <a:buFont typeface="Arial"/>
-      <a:defRPr b="0" i="0" sz="1400" u="none" cap="none" strike="noStrike">
+      <a:defRPr sz="1400" b="0" i="0" u="none" strike="noStrike" cap="none">
         <a:solidFill>
           <a:srgbClr val="000000"/>
         </a:solidFill>
@@ -668,7 +708,7 @@
         <a:sym typeface="Arial"/>
       </a:defRPr>
     </a:lvl2pPr>
-    <a:lvl3pPr lvl="2" marR="0" rtl="0" algn="l">
+    <a:lvl3pPr marR="0" lvl="2" algn="l" rtl="0">
       <a:lnSpc>
         <a:spcPct val="100000"/>
       </a:lnSpc>
@@ -682,7 +722,7 @@
         <a:srgbClr val="000000"/>
       </a:buClr>
       <a:buFont typeface="Arial"/>
-      <a:defRPr b="0" i="0" sz="1400" u="none" cap="none" strike="noStrike">
+      <a:defRPr sz="1400" b="0" i="0" u="none" strike="noStrike" cap="none">
         <a:solidFill>
           <a:srgbClr val="000000"/>
         </a:solidFill>
@@ -692,7 +732,7 @@
         <a:sym typeface="Arial"/>
       </a:defRPr>
     </a:lvl3pPr>
-    <a:lvl4pPr lvl="3" marR="0" rtl="0" algn="l">
+    <a:lvl4pPr marR="0" lvl="3" algn="l" rtl="0">
       <a:lnSpc>
         <a:spcPct val="100000"/>
       </a:lnSpc>
@@ -706,7 +746,7 @@
         <a:srgbClr val="000000"/>
       </a:buClr>
       <a:buFont typeface="Arial"/>
-      <a:defRPr b="0" i="0" sz="1400" u="none" cap="none" strike="noStrike">
+      <a:defRPr sz="1400" b="0" i="0" u="none" strike="noStrike" cap="none">
         <a:solidFill>
           <a:srgbClr val="000000"/>
         </a:solidFill>
@@ -716,7 +756,7 @@
         <a:sym typeface="Arial"/>
       </a:defRPr>
     </a:lvl4pPr>
-    <a:lvl5pPr lvl="4" marR="0" rtl="0" algn="l">
+    <a:lvl5pPr marR="0" lvl="4" algn="l" rtl="0">
       <a:lnSpc>
         <a:spcPct val="100000"/>
       </a:lnSpc>
@@ -730,7 +770,7 @@
         <a:srgbClr val="000000"/>
       </a:buClr>
       <a:buFont typeface="Arial"/>
-      <a:defRPr b="0" i="0" sz="1400" u="none" cap="none" strike="noStrike">
+      <a:defRPr sz="1400" b="0" i="0" u="none" strike="noStrike" cap="none">
         <a:solidFill>
           <a:srgbClr val="000000"/>
         </a:solidFill>
@@ -740,7 +780,7 @@
         <a:sym typeface="Arial"/>
       </a:defRPr>
     </a:lvl5pPr>
-    <a:lvl6pPr lvl="5" marR="0" rtl="0" algn="l">
+    <a:lvl6pPr marR="0" lvl="5" algn="l" rtl="0">
       <a:lnSpc>
         <a:spcPct val="100000"/>
       </a:lnSpc>
@@ -754,7 +794,7 @@
         <a:srgbClr val="000000"/>
       </a:buClr>
       <a:buFont typeface="Arial"/>
-      <a:defRPr b="0" i="0" sz="1400" u="none" cap="none" strike="noStrike">
+      <a:defRPr sz="1400" b="0" i="0" u="none" strike="noStrike" cap="none">
         <a:solidFill>
           <a:srgbClr val="000000"/>
         </a:solidFill>
@@ -764,7 +804,7 @@
         <a:sym typeface="Arial"/>
       </a:defRPr>
     </a:lvl6pPr>
-    <a:lvl7pPr lvl="6" marR="0" rtl="0" algn="l">
+    <a:lvl7pPr marR="0" lvl="6" algn="l" rtl="0">
       <a:lnSpc>
         <a:spcPct val="100000"/>
       </a:lnSpc>
@@ -778,7 +818,7 @@
         <a:srgbClr val="000000"/>
       </a:buClr>
       <a:buFont typeface="Arial"/>
-      <a:defRPr b="0" i="0" sz="1400" u="none" cap="none" strike="noStrike">
+      <a:defRPr sz="1400" b="0" i="0" u="none" strike="noStrike" cap="none">
         <a:solidFill>
           <a:srgbClr val="000000"/>
         </a:solidFill>
@@ -788,7 +828,7 @@
         <a:sym typeface="Arial"/>
       </a:defRPr>
     </a:lvl7pPr>
-    <a:lvl8pPr lvl="7" marR="0" rtl="0" algn="l">
+    <a:lvl8pPr marR="0" lvl="7" algn="l" rtl="0">
       <a:lnSpc>
         <a:spcPct val="100000"/>
       </a:lnSpc>
@@ -802,7 +842,7 @@
         <a:srgbClr val="000000"/>
       </a:buClr>
       <a:buFont typeface="Arial"/>
-      <a:defRPr b="0" i="0" sz="1400" u="none" cap="none" strike="noStrike">
+      <a:defRPr sz="1400" b="0" i="0" u="none" strike="noStrike" cap="none">
         <a:solidFill>
           <a:srgbClr val="000000"/>
         </a:solidFill>
@@ -812,7 +852,7 @@
         <a:sym typeface="Arial"/>
       </a:defRPr>
     </a:lvl8pPr>
-    <a:lvl9pPr lvl="8" marR="0" rtl="0" algn="l">
+    <a:lvl9pPr marR="0" lvl="8" algn="l" rtl="0">
       <a:lnSpc>
         <a:spcPct val="100000"/>
       </a:lnSpc>
@@ -826,7 +866,7 @@
         <a:srgbClr val="000000"/>
       </a:buClr>
       <a:buFont typeface="Arial"/>
-      <a:defRPr b="0" i="0" sz="1400" u="none" cap="none" strike="noStrike">
+      <a:defRPr sz="1400" b="0" i="0" u="none" strike="noStrike" cap="none">
         <a:solidFill>
           <a:srgbClr val="000000"/>
         </a:solidFill>
@@ -841,11 +881,11 @@
 </file>
 
 <file path=ppt/notesSlides/notesSlide1.xml><?xml version="1.0" encoding="utf-8"?>
-<p:notes xmlns:a="http://schemas.openxmlformats.org/drawingml/2006/main" xmlns:r="http://schemas.openxmlformats.org/officeDocument/2006/relationships" xmlns:mc="http://schemas.openxmlformats.org/markup-compatibility/2006" xmlns:mv="urn:schemas-microsoft-com:mac:vml" xmlns:p="http://schemas.openxmlformats.org/presentationml/2006/main" xmlns:c="http://schemas.openxmlformats.org/drawingml/2006/chart" xmlns:dgm="http://schemas.openxmlformats.org/drawingml/2006/diagram" xmlns:o="urn:schemas-microsoft-com:office:office" xmlns:v="urn:schemas-microsoft-com:vml" xmlns:pvml="urn:schemas-microsoft-com:office:powerpoint" xmlns:com="http://schemas.openxmlformats.org/drawingml/2006/compatibility" xmlns:p14="http://schemas.microsoft.com/office/powerpoint/2010/main" xmlns:p15="http://schemas.microsoft.com/office/powerpoint/2012/main" xmlns:ahyp="http://schemas.microsoft.com/office/drawing/2018/hyperlinkcolor" showMasterPhAnim="0" showMasterSp="0">
+<p:notes xmlns:a="http://schemas.openxmlformats.org/drawingml/2006/main" xmlns:r="http://schemas.openxmlformats.org/officeDocument/2006/relationships" xmlns:p="http://schemas.openxmlformats.org/presentationml/2006/main" showMasterSp="0" showMasterPhAnim="0">
   <p:cSld>
     <p:spTree>
       <p:nvGrpSpPr>
-        <p:cNvPr id="80" name="Shape 80"/>
+        <p:cNvPr id="1" name="Shape 80"/>
         <p:cNvGrpSpPr/>
         <p:nvPr/>
       </p:nvGrpSpPr>
@@ -860,9 +900,11 @@
       <p:sp>
         <p:nvSpPr>
           <p:cNvPr id="81" name="Google Shape;81;p1:notes"/>
-          <p:cNvSpPr txBox="1"/>
+          <p:cNvSpPr txBox="1">
+            <a:spLocks noGrp="1"/>
+          </p:cNvSpPr>
           <p:nvPr>
-            <p:ph idx="1" type="body"/>
+            <p:ph type="body" idx="1"/>
           </p:nvPr>
         </p:nvSpPr>
         <p:spPr>
@@ -879,12 +921,12 @@
           </a:ln>
         </p:spPr>
         <p:txBody>
-          <a:bodyPr anchorCtr="0" anchor="t" bIns="91425" lIns="91425" spcFirstLastPara="1" rIns="91425" wrap="square" tIns="91425">
+          <a:bodyPr spcFirstLastPara="1" wrap="square" lIns="91425" tIns="91425" rIns="91425" bIns="91425" anchor="t" anchorCtr="0">
             <a:noAutofit/>
           </a:bodyPr>
           <a:lstStyle/>
           <a:p>
-            <a:pPr indent="0" lvl="0" marL="0" rtl="0" algn="l">
+            <a:pPr marL="0" lvl="0" indent="0" algn="l" rtl="0">
               <a:lnSpc>
                 <a:spcPct val="100000"/>
               </a:lnSpc>
@@ -897,9 +939,6 @@
               <a:buSzPts val="1100"/>
               <a:buNone/>
             </a:pPr>
-            <a:r>
-              <a:t/>
-            </a:r>
             <a:endParaRPr/>
           </a:p>
         </p:txBody>
@@ -907,9 +946,11 @@
       <p:sp>
         <p:nvSpPr>
           <p:cNvPr id="82" name="Google Shape;82;p1:notes"/>
-          <p:cNvSpPr/>
+          <p:cNvSpPr>
+            <a:spLocks noGrp="1" noRot="1" noChangeAspect="1"/>
+          </p:cNvSpPr>
           <p:nvPr>
-            <p:ph idx="2" type="sldImg"/>
+            <p:ph type="sldImg" idx="2"/>
           </p:nvPr>
         </p:nvSpPr>
         <p:spPr>
@@ -918,9 +959,13 @@
             <a:ext cx="2286000" cy="3429000"/>
           </a:xfrm>
           <a:custGeom>
-            <a:rect b="b" l="l" r="r" t="t"/>
+            <a:avLst/>
+            <a:gdLst/>
+            <a:ahLst/>
+            <a:cxnLst/>
+            <a:rect l="l" t="t" r="r" b="b"/>
             <a:pathLst>
-              <a:path extrusionOk="0" h="120000" w="120000">
+              <a:path w="120000" h="120000" extrusionOk="0">
                 <a:moveTo>
                   <a:pt x="0" y="0"/>
                 </a:moveTo>
@@ -938,14 +983,14 @@
             </a:pathLst>
           </a:custGeom>
           <a:noFill/>
-          <a:ln cap="flat" cmpd="sng" w="9525">
+          <a:ln w="9525" cap="flat" cmpd="sng">
             <a:solidFill>
               <a:srgbClr val="000000"/>
             </a:solidFill>
             <a:prstDash val="solid"/>
             <a:round/>
-            <a:headEnd len="sm" w="sm" type="none"/>
-            <a:tailEnd len="sm" w="sm" type="none"/>
+            <a:headEnd type="none" w="sm" len="sm"/>
+            <a:tailEnd type="none" w="sm" len="sm"/>
           </a:ln>
         </p:spPr>
       </p:sp>
@@ -958,11 +1003,11 @@
 </file>
 
 <file path=ppt/slideLayouts/slideLayout1.xml><?xml version="1.0" encoding="utf-8"?>
-<p:sldLayout xmlns:a="http://schemas.openxmlformats.org/drawingml/2006/main" xmlns:r="http://schemas.openxmlformats.org/officeDocument/2006/relationships" xmlns:mc="http://schemas.openxmlformats.org/markup-compatibility/2006" xmlns:mv="urn:schemas-microsoft-com:mac:vml" xmlns:p="http://schemas.openxmlformats.org/presentationml/2006/main" xmlns:c="http://schemas.openxmlformats.org/drawingml/2006/chart" xmlns:dgm="http://schemas.openxmlformats.org/drawingml/2006/diagram" xmlns:o="urn:schemas-microsoft-com:office:office" xmlns:v="urn:schemas-microsoft-com:vml" xmlns:pvml="urn:schemas-microsoft-com:office:powerpoint" xmlns:com="http://schemas.openxmlformats.org/drawingml/2006/compatibility" xmlns:p14="http://schemas.microsoft.com/office/powerpoint/2010/main" xmlns:p15="http://schemas.microsoft.com/office/powerpoint/2012/main" xmlns:ahyp="http://schemas.microsoft.com/office/drawing/2018/hyperlinkcolor" matchingName="Blank" type="blank">
+<p:sldLayout xmlns:a="http://schemas.openxmlformats.org/drawingml/2006/main" xmlns:r="http://schemas.openxmlformats.org/officeDocument/2006/relationships" xmlns:p="http://schemas.openxmlformats.org/presentationml/2006/main" matchingName="Blank" type="blank">
   <p:cSld name="BLANK">
     <p:spTree>
       <p:nvGrpSpPr>
-        <p:cNvPr id="11" name="Shape 11"/>
+        <p:cNvPr id="1" name="Shape 11"/>
         <p:cNvGrpSpPr/>
         <p:nvPr/>
       </p:nvGrpSpPr>
@@ -977,9 +1022,11 @@
       <p:sp>
         <p:nvSpPr>
           <p:cNvPr id="12" name="Google Shape;12;p3"/>
-          <p:cNvSpPr txBox="1"/>
+          <p:cNvSpPr txBox="1">
+            <a:spLocks noGrp="1"/>
+          </p:cNvSpPr>
           <p:nvPr>
-            <p:ph idx="10" type="dt"/>
+            <p:ph type="dt" idx="10"/>
           </p:nvPr>
         </p:nvSpPr>
         <p:spPr>
@@ -996,7 +1043,7 @@
           </a:ln>
         </p:spPr>
         <p:txBody>
-          <a:bodyPr anchorCtr="0" anchor="ctr" bIns="45700" lIns="91425" spcFirstLastPara="1" rIns="91425" wrap="square" tIns="45700">
+          <a:bodyPr spcFirstLastPara="1" wrap="square" lIns="91425" tIns="45700" rIns="91425" bIns="45700" anchor="ctr" anchorCtr="0">
             <a:noAutofit/>
           </a:bodyPr>
           <a:lstStyle>
@@ -1127,15 +1174,19 @@
               <a:defRPr/>
             </a:lvl9pPr>
           </a:lstStyle>
-          <a:p/>
+          <a:p>
+            <a:endParaRPr/>
+          </a:p>
         </p:txBody>
       </p:sp>
       <p:sp>
         <p:nvSpPr>
           <p:cNvPr id="13" name="Google Shape;13;p3"/>
-          <p:cNvSpPr txBox="1"/>
+          <p:cNvSpPr txBox="1">
+            <a:spLocks noGrp="1"/>
+          </p:cNvSpPr>
           <p:nvPr>
-            <p:ph idx="11" type="ftr"/>
+            <p:ph type="ftr" idx="11"/>
           </p:nvPr>
         </p:nvSpPr>
         <p:spPr>
@@ -1152,7 +1203,7 @@
           </a:ln>
         </p:spPr>
         <p:txBody>
-          <a:bodyPr anchorCtr="0" anchor="ctr" bIns="45700" lIns="91425" spcFirstLastPara="1" rIns="91425" wrap="square" tIns="45700">
+          <a:bodyPr spcFirstLastPara="1" wrap="square" lIns="91425" tIns="45700" rIns="91425" bIns="45700" anchor="ctr" anchorCtr="0">
             <a:noAutofit/>
           </a:bodyPr>
           <a:lstStyle>
@@ -1283,15 +1334,19 @@
               <a:defRPr/>
             </a:lvl9pPr>
           </a:lstStyle>
-          <a:p/>
+          <a:p>
+            <a:endParaRPr/>
+          </a:p>
         </p:txBody>
       </p:sp>
       <p:sp>
         <p:nvSpPr>
           <p:cNvPr id="14" name="Google Shape;14;p3"/>
-          <p:cNvSpPr txBox="1"/>
+          <p:cNvSpPr txBox="1">
+            <a:spLocks noGrp="1"/>
+          </p:cNvSpPr>
           <p:nvPr>
-            <p:ph idx="12" type="sldNum"/>
+            <p:ph type="sldNum" idx="12"/>
           </p:nvPr>
         </p:nvSpPr>
         <p:spPr>
@@ -1308,11 +1363,11 @@
           </a:ln>
         </p:spPr>
         <p:txBody>
-          <a:bodyPr anchorCtr="0" anchor="ctr" bIns="45700" lIns="91425" spcFirstLastPara="1" rIns="91425" wrap="square" tIns="45700">
+          <a:bodyPr spcFirstLastPara="1" wrap="square" lIns="91425" tIns="45700" rIns="91425" bIns="45700" anchor="ctr" anchorCtr="0">
             <a:noAutofit/>
           </a:bodyPr>
           <a:lstStyle>
-            <a:lvl1pPr indent="0" lvl="0" marL="0" marR="0" algn="r">
+            <a:lvl1pPr marL="0" marR="0" lvl="0" indent="0" algn="r">
               <a:lnSpc>
                 <a:spcPct val="100000"/>
               </a:lnSpc>
@@ -1328,7 +1383,7 @@
               <a:buSzPts val="2287"/>
               <a:buFont typeface="Arial"/>
               <a:buNone/>
-              <a:defRPr b="0" i="0" sz="2287" u="none" cap="none" strike="noStrike">
+              <a:defRPr sz="2287" b="0" i="0" u="none" strike="noStrike" cap="none">
                 <a:solidFill>
                   <a:srgbClr val="888888"/>
                 </a:solidFill>
@@ -1338,7 +1393,7 @@
                 <a:sym typeface="Calibri"/>
               </a:defRPr>
             </a:lvl1pPr>
-            <a:lvl2pPr indent="0" lvl="1" marL="0" marR="0" algn="r">
+            <a:lvl2pPr marL="0" marR="0" lvl="1" indent="0" algn="r">
               <a:lnSpc>
                 <a:spcPct val="100000"/>
               </a:lnSpc>
@@ -1354,7 +1409,7 @@
               <a:buSzPts val="2287"/>
               <a:buFont typeface="Arial"/>
               <a:buNone/>
-              <a:defRPr b="0" i="0" sz="2287" u="none" cap="none" strike="noStrike">
+              <a:defRPr sz="2287" b="0" i="0" u="none" strike="noStrike" cap="none">
                 <a:solidFill>
                   <a:srgbClr val="888888"/>
                 </a:solidFill>
@@ -1364,7 +1419,7 @@
                 <a:sym typeface="Calibri"/>
               </a:defRPr>
             </a:lvl2pPr>
-            <a:lvl3pPr indent="0" lvl="2" marL="0" marR="0" algn="r">
+            <a:lvl3pPr marL="0" marR="0" lvl="2" indent="0" algn="r">
               <a:lnSpc>
                 <a:spcPct val="100000"/>
               </a:lnSpc>
@@ -1380,7 +1435,7 @@
               <a:buSzPts val="2287"/>
               <a:buFont typeface="Arial"/>
               <a:buNone/>
-              <a:defRPr b="0" i="0" sz="2287" u="none" cap="none" strike="noStrike">
+              <a:defRPr sz="2287" b="0" i="0" u="none" strike="noStrike" cap="none">
                 <a:solidFill>
                   <a:srgbClr val="888888"/>
                 </a:solidFill>
@@ -1390,7 +1445,7 @@
                 <a:sym typeface="Calibri"/>
               </a:defRPr>
             </a:lvl3pPr>
-            <a:lvl4pPr indent="0" lvl="3" marL="0" marR="0" algn="r">
+            <a:lvl4pPr marL="0" marR="0" lvl="3" indent="0" algn="r">
               <a:lnSpc>
                 <a:spcPct val="100000"/>
               </a:lnSpc>
@@ -1406,7 +1461,7 @@
               <a:buSzPts val="2287"/>
               <a:buFont typeface="Arial"/>
               <a:buNone/>
-              <a:defRPr b="0" i="0" sz="2287" u="none" cap="none" strike="noStrike">
+              <a:defRPr sz="2287" b="0" i="0" u="none" strike="noStrike" cap="none">
                 <a:solidFill>
                   <a:srgbClr val="888888"/>
                 </a:solidFill>
@@ -1416,7 +1471,7 @@
                 <a:sym typeface="Calibri"/>
               </a:defRPr>
             </a:lvl4pPr>
-            <a:lvl5pPr indent="0" lvl="4" marL="0" marR="0" algn="r">
+            <a:lvl5pPr marL="0" marR="0" lvl="4" indent="0" algn="r">
               <a:lnSpc>
                 <a:spcPct val="100000"/>
               </a:lnSpc>
@@ -1432,7 +1487,7 @@
               <a:buSzPts val="2287"/>
               <a:buFont typeface="Arial"/>
               <a:buNone/>
-              <a:defRPr b="0" i="0" sz="2287" u="none" cap="none" strike="noStrike">
+              <a:defRPr sz="2287" b="0" i="0" u="none" strike="noStrike" cap="none">
                 <a:solidFill>
                   <a:srgbClr val="888888"/>
                 </a:solidFill>
@@ -1442,7 +1497,7 @@
                 <a:sym typeface="Calibri"/>
               </a:defRPr>
             </a:lvl5pPr>
-            <a:lvl6pPr indent="0" lvl="5" marL="0" marR="0" algn="r">
+            <a:lvl6pPr marL="0" marR="0" lvl="5" indent="0" algn="r">
               <a:lnSpc>
                 <a:spcPct val="100000"/>
               </a:lnSpc>
@@ -1458,7 +1513,7 @@
               <a:buSzPts val="2287"/>
               <a:buFont typeface="Arial"/>
               <a:buNone/>
-              <a:defRPr b="0" i="0" sz="2287" u="none" cap="none" strike="noStrike">
+              <a:defRPr sz="2287" b="0" i="0" u="none" strike="noStrike" cap="none">
                 <a:solidFill>
                   <a:srgbClr val="888888"/>
                 </a:solidFill>
@@ -1468,7 +1523,7 @@
                 <a:sym typeface="Calibri"/>
               </a:defRPr>
             </a:lvl6pPr>
-            <a:lvl7pPr indent="0" lvl="6" marL="0" marR="0" algn="r">
+            <a:lvl7pPr marL="0" marR="0" lvl="6" indent="0" algn="r">
               <a:lnSpc>
                 <a:spcPct val="100000"/>
               </a:lnSpc>
@@ -1484,7 +1539,7 @@
               <a:buSzPts val="2287"/>
               <a:buFont typeface="Arial"/>
               <a:buNone/>
-              <a:defRPr b="0" i="0" sz="2287" u="none" cap="none" strike="noStrike">
+              <a:defRPr sz="2287" b="0" i="0" u="none" strike="noStrike" cap="none">
                 <a:solidFill>
                   <a:srgbClr val="888888"/>
                 </a:solidFill>
@@ -1494,7 +1549,7 @@
                 <a:sym typeface="Calibri"/>
               </a:defRPr>
             </a:lvl7pPr>
-            <a:lvl8pPr indent="0" lvl="7" marL="0" marR="0" algn="r">
+            <a:lvl8pPr marL="0" marR="0" lvl="7" indent="0" algn="r">
               <a:lnSpc>
                 <a:spcPct val="100000"/>
               </a:lnSpc>
@@ -1510,7 +1565,7 @@
               <a:buSzPts val="2287"/>
               <a:buFont typeface="Arial"/>
               <a:buNone/>
-              <a:defRPr b="0" i="0" sz="2287" u="none" cap="none" strike="noStrike">
+              <a:defRPr sz="2287" b="0" i="0" u="none" strike="noStrike" cap="none">
                 <a:solidFill>
                   <a:srgbClr val="888888"/>
                 </a:solidFill>
@@ -1520,7 +1575,7 @@
                 <a:sym typeface="Calibri"/>
               </a:defRPr>
             </a:lvl8pPr>
-            <a:lvl9pPr indent="0" lvl="8" marL="0" marR="0" algn="r">
+            <a:lvl9pPr marL="0" marR="0" lvl="8" indent="0" algn="r">
               <a:lnSpc>
                 <a:spcPct val="100000"/>
               </a:lnSpc>
@@ -1536,7 +1591,7 @@
               <a:buSzPts val="2287"/>
               <a:buFont typeface="Arial"/>
               <a:buNone/>
-              <a:defRPr b="0" i="0" sz="2287" u="none" cap="none" strike="noStrike">
+              <a:defRPr sz="2287" b="0" i="0" u="none" strike="noStrike" cap="none">
                 <a:solidFill>
                   <a:srgbClr val="888888"/>
                 </a:solidFill>
@@ -1548,7 +1603,7 @@
             </a:lvl9pPr>
           </a:lstStyle>
           <a:p>
-            <a:pPr indent="0" lvl="0" marL="0" rtl="0" algn="r">
+            <a:pPr marL="0" lvl="0" indent="0" algn="r" rtl="0">
               <a:spcBef>
                 <a:spcPts val="0"/>
               </a:spcBef>
@@ -1559,7 +1614,7 @@
             </a:pPr>
             <a:fld id="{00000000-1234-1234-1234-123412341234}" type="slidenum">
               <a:rPr lang="en-US"/>
-              <a:t>‹#›</a:t>
+              <a:t>‹nº›</a:t>
             </a:fld>
             <a:endParaRPr/>
           </a:p>
@@ -1574,11 +1629,11 @@
 </file>
 
 <file path=ppt/slideLayouts/slideLayout10.xml><?xml version="1.0" encoding="utf-8"?>
-<p:sldLayout xmlns:a="http://schemas.openxmlformats.org/drawingml/2006/main" xmlns:r="http://schemas.openxmlformats.org/officeDocument/2006/relationships" xmlns:mc="http://schemas.openxmlformats.org/markup-compatibility/2006" xmlns:mv="urn:schemas-microsoft-com:mac:vml" xmlns:p="http://schemas.openxmlformats.org/presentationml/2006/main" xmlns:c="http://schemas.openxmlformats.org/drawingml/2006/chart" xmlns:dgm="http://schemas.openxmlformats.org/drawingml/2006/diagram" xmlns:o="urn:schemas-microsoft-com:office:office" xmlns:v="urn:schemas-microsoft-com:vml" xmlns:pvml="urn:schemas-microsoft-com:office:powerpoint" xmlns:com="http://schemas.openxmlformats.org/drawingml/2006/compatibility" xmlns:p14="http://schemas.microsoft.com/office/powerpoint/2010/main" xmlns:p15="http://schemas.microsoft.com/office/powerpoint/2012/main" xmlns:ahyp="http://schemas.microsoft.com/office/drawing/2018/hyperlinkcolor" matchingName="Title and Vertical Text" type="vertTx">
+<p:sldLayout xmlns:a="http://schemas.openxmlformats.org/drawingml/2006/main" xmlns:r="http://schemas.openxmlformats.org/officeDocument/2006/relationships" xmlns:p="http://schemas.openxmlformats.org/presentationml/2006/main" matchingName="Title and Vertical Text" type="vertTx">
   <p:cSld name="VERTICAL_TEXT">
     <p:spTree>
       <p:nvGrpSpPr>
-        <p:cNvPr id="68" name="Shape 68"/>
+        <p:cNvPr id="1" name="Shape 68"/>
         <p:cNvGrpSpPr/>
         <p:nvPr/>
       </p:nvGrpSpPr>
@@ -1593,7 +1648,9 @@
       <p:sp>
         <p:nvSpPr>
           <p:cNvPr id="69" name="Google Shape;69;p12"/>
-          <p:cNvSpPr txBox="1"/>
+          <p:cNvSpPr txBox="1">
+            <a:spLocks noGrp="1"/>
+          </p:cNvSpPr>
           <p:nvPr>
             <p:ph type="title"/>
           </p:nvPr>
@@ -1612,7 +1669,7 @@
           </a:ln>
         </p:spPr>
         <p:txBody>
-          <a:bodyPr anchorCtr="0" anchor="ctr" bIns="45700" lIns="91425" spcFirstLastPara="1" rIns="91425" wrap="square" tIns="45700">
+          <a:bodyPr spcFirstLastPara="1" wrap="square" lIns="91425" tIns="45700" rIns="91425" bIns="45700" anchor="ctr" anchorCtr="0">
             <a:normAutofit/>
           </a:bodyPr>
           <a:lstStyle>
@@ -1746,15 +1803,19 @@
               <a:defRPr/>
             </a:lvl9pPr>
           </a:lstStyle>
-          <a:p/>
+          <a:p>
+            <a:endParaRPr/>
+          </a:p>
         </p:txBody>
       </p:sp>
       <p:sp>
         <p:nvSpPr>
           <p:cNvPr id="70" name="Google Shape;70;p12"/>
-          <p:cNvSpPr txBox="1"/>
+          <p:cNvSpPr txBox="1">
+            <a:spLocks noGrp="1"/>
+          </p:cNvSpPr>
           <p:nvPr>
-            <p:ph idx="1" type="body"/>
+            <p:ph type="body" idx="1"/>
           </p:nvPr>
         </p:nvSpPr>
         <p:spPr>
@@ -1771,11 +1832,11 @@
           </a:ln>
         </p:spPr>
         <p:txBody>
-          <a:bodyPr anchorCtr="0" anchor="t" bIns="45700" lIns="91425" spcFirstLastPara="1" rIns="91425" wrap="square" tIns="45700">
+          <a:bodyPr spcFirstLastPara="1" wrap="square" lIns="91425" tIns="45700" rIns="91425" bIns="45700" anchor="t" anchorCtr="0">
             <a:normAutofit/>
           </a:bodyPr>
           <a:lstStyle>
-            <a:lvl1pPr indent="-342900" lvl="0" marL="457200" algn="l">
+            <a:lvl1pPr marL="457200" lvl="0" indent="-342900" algn="l">
               <a:lnSpc>
                 <a:spcPct val="100000"/>
               </a:lnSpc>
@@ -1792,7 +1853,7 @@
               <a:buChar char="•"/>
               <a:defRPr/>
             </a:lvl1pPr>
-            <a:lvl2pPr indent="-342900" lvl="1" marL="914400" algn="l">
+            <a:lvl2pPr marL="914400" lvl="1" indent="-342900" algn="l">
               <a:lnSpc>
                 <a:spcPct val="100000"/>
               </a:lnSpc>
@@ -1809,7 +1870,7 @@
               <a:buChar char="–"/>
               <a:defRPr/>
             </a:lvl2pPr>
-            <a:lvl3pPr indent="-342900" lvl="2" marL="1371600" algn="l">
+            <a:lvl3pPr marL="1371600" lvl="2" indent="-342900" algn="l">
               <a:lnSpc>
                 <a:spcPct val="100000"/>
               </a:lnSpc>
@@ -1826,7 +1887,7 @@
               <a:buChar char="•"/>
               <a:defRPr/>
             </a:lvl3pPr>
-            <a:lvl4pPr indent="-342900" lvl="3" marL="1828800" algn="l">
+            <a:lvl4pPr marL="1828800" lvl="3" indent="-342900" algn="l">
               <a:lnSpc>
                 <a:spcPct val="100000"/>
               </a:lnSpc>
@@ -1843,7 +1904,7 @@
               <a:buChar char="–"/>
               <a:defRPr/>
             </a:lvl4pPr>
-            <a:lvl5pPr indent="-342900" lvl="4" marL="2286000" algn="l">
+            <a:lvl5pPr marL="2286000" lvl="4" indent="-342900" algn="l">
               <a:lnSpc>
                 <a:spcPct val="100000"/>
               </a:lnSpc>
@@ -1860,7 +1921,7 @@
               <a:buChar char="»"/>
               <a:defRPr/>
             </a:lvl5pPr>
-            <a:lvl6pPr indent="-342900" lvl="5" marL="2743200" algn="l">
+            <a:lvl6pPr marL="2743200" lvl="5" indent="-342900" algn="l">
               <a:lnSpc>
                 <a:spcPct val="100000"/>
               </a:lnSpc>
@@ -1877,7 +1938,7 @@
               <a:buChar char="•"/>
               <a:defRPr/>
             </a:lvl6pPr>
-            <a:lvl7pPr indent="-342900" lvl="6" marL="3200400" algn="l">
+            <a:lvl7pPr marL="3200400" lvl="6" indent="-342900" algn="l">
               <a:lnSpc>
                 <a:spcPct val="100000"/>
               </a:lnSpc>
@@ -1894,7 +1955,7 @@
               <a:buChar char="•"/>
               <a:defRPr/>
             </a:lvl7pPr>
-            <a:lvl8pPr indent="-342900" lvl="7" marL="3657600" algn="l">
+            <a:lvl8pPr marL="3657600" lvl="7" indent="-342900" algn="l">
               <a:lnSpc>
                 <a:spcPct val="100000"/>
               </a:lnSpc>
@@ -1911,7 +1972,7 @@
               <a:buChar char="•"/>
               <a:defRPr/>
             </a:lvl8pPr>
-            <a:lvl9pPr indent="-342900" lvl="8" marL="4114800" algn="l">
+            <a:lvl9pPr marL="4114800" lvl="8" indent="-342900" algn="l">
               <a:lnSpc>
                 <a:spcPct val="100000"/>
               </a:lnSpc>
@@ -1929,15 +1990,19 @@
               <a:defRPr/>
             </a:lvl9pPr>
           </a:lstStyle>
-          <a:p/>
+          <a:p>
+            <a:endParaRPr/>
+          </a:p>
         </p:txBody>
       </p:sp>
       <p:sp>
         <p:nvSpPr>
           <p:cNvPr id="71" name="Google Shape;71;p12"/>
-          <p:cNvSpPr txBox="1"/>
+          <p:cNvSpPr txBox="1">
+            <a:spLocks noGrp="1"/>
+          </p:cNvSpPr>
           <p:nvPr>
-            <p:ph idx="10" type="dt"/>
+            <p:ph type="dt" idx="10"/>
           </p:nvPr>
         </p:nvSpPr>
         <p:spPr>
@@ -1954,7 +2019,7 @@
           </a:ln>
         </p:spPr>
         <p:txBody>
-          <a:bodyPr anchorCtr="0" anchor="ctr" bIns="45700" lIns="91425" spcFirstLastPara="1" rIns="91425" wrap="square" tIns="45700">
+          <a:bodyPr spcFirstLastPara="1" wrap="square" lIns="91425" tIns="45700" rIns="91425" bIns="45700" anchor="ctr" anchorCtr="0">
             <a:noAutofit/>
           </a:bodyPr>
           <a:lstStyle>
@@ -2085,15 +2150,19 @@
               <a:defRPr/>
             </a:lvl9pPr>
           </a:lstStyle>
-          <a:p/>
+          <a:p>
+            <a:endParaRPr/>
+          </a:p>
         </p:txBody>
       </p:sp>
       <p:sp>
         <p:nvSpPr>
           <p:cNvPr id="72" name="Google Shape;72;p12"/>
-          <p:cNvSpPr txBox="1"/>
+          <p:cNvSpPr txBox="1">
+            <a:spLocks noGrp="1"/>
+          </p:cNvSpPr>
           <p:nvPr>
-            <p:ph idx="11" type="ftr"/>
+            <p:ph type="ftr" idx="11"/>
           </p:nvPr>
         </p:nvSpPr>
         <p:spPr>
@@ -2110,7 +2179,7 @@
           </a:ln>
         </p:spPr>
         <p:txBody>
-          <a:bodyPr anchorCtr="0" anchor="ctr" bIns="45700" lIns="91425" spcFirstLastPara="1" rIns="91425" wrap="square" tIns="45700">
+          <a:bodyPr spcFirstLastPara="1" wrap="square" lIns="91425" tIns="45700" rIns="91425" bIns="45700" anchor="ctr" anchorCtr="0">
             <a:noAutofit/>
           </a:bodyPr>
           <a:lstStyle>
@@ -2241,15 +2310,19 @@
               <a:defRPr/>
             </a:lvl9pPr>
           </a:lstStyle>
-          <a:p/>
+          <a:p>
+            <a:endParaRPr/>
+          </a:p>
         </p:txBody>
       </p:sp>
       <p:sp>
         <p:nvSpPr>
           <p:cNvPr id="73" name="Google Shape;73;p12"/>
-          <p:cNvSpPr txBox="1"/>
+          <p:cNvSpPr txBox="1">
+            <a:spLocks noGrp="1"/>
+          </p:cNvSpPr>
           <p:nvPr>
-            <p:ph idx="12" type="sldNum"/>
+            <p:ph type="sldNum" idx="12"/>
           </p:nvPr>
         </p:nvSpPr>
         <p:spPr>
@@ -2266,11 +2339,11 @@
           </a:ln>
         </p:spPr>
         <p:txBody>
-          <a:bodyPr anchorCtr="0" anchor="ctr" bIns="45700" lIns="91425" spcFirstLastPara="1" rIns="91425" wrap="square" tIns="45700">
+          <a:bodyPr spcFirstLastPara="1" wrap="square" lIns="91425" tIns="45700" rIns="91425" bIns="45700" anchor="ctr" anchorCtr="0">
             <a:noAutofit/>
           </a:bodyPr>
           <a:lstStyle>
-            <a:lvl1pPr indent="0" lvl="0" marL="0" marR="0" algn="r">
+            <a:lvl1pPr marL="0" marR="0" lvl="0" indent="0" algn="r">
               <a:lnSpc>
                 <a:spcPct val="100000"/>
               </a:lnSpc>
@@ -2286,7 +2359,7 @@
               <a:buSzPts val="2287"/>
               <a:buFont typeface="Arial"/>
               <a:buNone/>
-              <a:defRPr b="0" i="0" sz="2287" u="none" cap="none" strike="noStrike">
+              <a:defRPr sz="2287" b="0" i="0" u="none" strike="noStrike" cap="none">
                 <a:solidFill>
                   <a:srgbClr val="888888"/>
                 </a:solidFill>
@@ -2296,7 +2369,7 @@
                 <a:sym typeface="Calibri"/>
               </a:defRPr>
             </a:lvl1pPr>
-            <a:lvl2pPr indent="0" lvl="1" marL="0" marR="0" algn="r">
+            <a:lvl2pPr marL="0" marR="0" lvl="1" indent="0" algn="r">
               <a:lnSpc>
                 <a:spcPct val="100000"/>
               </a:lnSpc>
@@ -2312,7 +2385,7 @@
               <a:buSzPts val="2287"/>
               <a:buFont typeface="Arial"/>
               <a:buNone/>
-              <a:defRPr b="0" i="0" sz="2287" u="none" cap="none" strike="noStrike">
+              <a:defRPr sz="2287" b="0" i="0" u="none" strike="noStrike" cap="none">
                 <a:solidFill>
                   <a:srgbClr val="888888"/>
                 </a:solidFill>
@@ -2322,7 +2395,7 @@
                 <a:sym typeface="Calibri"/>
               </a:defRPr>
             </a:lvl2pPr>
-            <a:lvl3pPr indent="0" lvl="2" marL="0" marR="0" algn="r">
+            <a:lvl3pPr marL="0" marR="0" lvl="2" indent="0" algn="r">
               <a:lnSpc>
                 <a:spcPct val="100000"/>
               </a:lnSpc>
@@ -2338,7 +2411,7 @@
               <a:buSzPts val="2287"/>
               <a:buFont typeface="Arial"/>
               <a:buNone/>
-              <a:defRPr b="0" i="0" sz="2287" u="none" cap="none" strike="noStrike">
+              <a:defRPr sz="2287" b="0" i="0" u="none" strike="noStrike" cap="none">
                 <a:solidFill>
                   <a:srgbClr val="888888"/>
                 </a:solidFill>
@@ -2348,7 +2421,7 @@
                 <a:sym typeface="Calibri"/>
               </a:defRPr>
             </a:lvl3pPr>
-            <a:lvl4pPr indent="0" lvl="3" marL="0" marR="0" algn="r">
+            <a:lvl4pPr marL="0" marR="0" lvl="3" indent="0" algn="r">
               <a:lnSpc>
                 <a:spcPct val="100000"/>
               </a:lnSpc>
@@ -2364,7 +2437,7 @@
               <a:buSzPts val="2287"/>
               <a:buFont typeface="Arial"/>
               <a:buNone/>
-              <a:defRPr b="0" i="0" sz="2287" u="none" cap="none" strike="noStrike">
+              <a:defRPr sz="2287" b="0" i="0" u="none" strike="noStrike" cap="none">
                 <a:solidFill>
                   <a:srgbClr val="888888"/>
                 </a:solidFill>
@@ -2374,7 +2447,7 @@
                 <a:sym typeface="Calibri"/>
               </a:defRPr>
             </a:lvl4pPr>
-            <a:lvl5pPr indent="0" lvl="4" marL="0" marR="0" algn="r">
+            <a:lvl5pPr marL="0" marR="0" lvl="4" indent="0" algn="r">
               <a:lnSpc>
                 <a:spcPct val="100000"/>
               </a:lnSpc>
@@ -2390,7 +2463,7 @@
               <a:buSzPts val="2287"/>
               <a:buFont typeface="Arial"/>
               <a:buNone/>
-              <a:defRPr b="0" i="0" sz="2287" u="none" cap="none" strike="noStrike">
+              <a:defRPr sz="2287" b="0" i="0" u="none" strike="noStrike" cap="none">
                 <a:solidFill>
                   <a:srgbClr val="888888"/>
                 </a:solidFill>
@@ -2400,7 +2473,7 @@
                 <a:sym typeface="Calibri"/>
               </a:defRPr>
             </a:lvl5pPr>
-            <a:lvl6pPr indent="0" lvl="5" marL="0" marR="0" algn="r">
+            <a:lvl6pPr marL="0" marR="0" lvl="5" indent="0" algn="r">
               <a:lnSpc>
                 <a:spcPct val="100000"/>
               </a:lnSpc>
@@ -2416,7 +2489,7 @@
               <a:buSzPts val="2287"/>
               <a:buFont typeface="Arial"/>
               <a:buNone/>
-              <a:defRPr b="0" i="0" sz="2287" u="none" cap="none" strike="noStrike">
+              <a:defRPr sz="2287" b="0" i="0" u="none" strike="noStrike" cap="none">
                 <a:solidFill>
                   <a:srgbClr val="888888"/>
                 </a:solidFill>
@@ -2426,7 +2499,7 @@
                 <a:sym typeface="Calibri"/>
               </a:defRPr>
             </a:lvl6pPr>
-            <a:lvl7pPr indent="0" lvl="6" marL="0" marR="0" algn="r">
+            <a:lvl7pPr marL="0" marR="0" lvl="6" indent="0" algn="r">
               <a:lnSpc>
                 <a:spcPct val="100000"/>
               </a:lnSpc>
@@ -2442,7 +2515,7 @@
               <a:buSzPts val="2287"/>
               <a:buFont typeface="Arial"/>
               <a:buNone/>
-              <a:defRPr b="0" i="0" sz="2287" u="none" cap="none" strike="noStrike">
+              <a:defRPr sz="2287" b="0" i="0" u="none" strike="noStrike" cap="none">
                 <a:solidFill>
                   <a:srgbClr val="888888"/>
                 </a:solidFill>
@@ -2452,7 +2525,7 @@
                 <a:sym typeface="Calibri"/>
               </a:defRPr>
             </a:lvl7pPr>
-            <a:lvl8pPr indent="0" lvl="7" marL="0" marR="0" algn="r">
+            <a:lvl8pPr marL="0" marR="0" lvl="7" indent="0" algn="r">
               <a:lnSpc>
                 <a:spcPct val="100000"/>
               </a:lnSpc>
@@ -2468,7 +2541,7 @@
               <a:buSzPts val="2287"/>
               <a:buFont typeface="Arial"/>
               <a:buNone/>
-              <a:defRPr b="0" i="0" sz="2287" u="none" cap="none" strike="noStrike">
+              <a:defRPr sz="2287" b="0" i="0" u="none" strike="noStrike" cap="none">
                 <a:solidFill>
                   <a:srgbClr val="888888"/>
                 </a:solidFill>
@@ -2478,7 +2551,7 @@
                 <a:sym typeface="Calibri"/>
               </a:defRPr>
             </a:lvl8pPr>
-            <a:lvl9pPr indent="0" lvl="8" marL="0" marR="0" algn="r">
+            <a:lvl9pPr marL="0" marR="0" lvl="8" indent="0" algn="r">
               <a:lnSpc>
                 <a:spcPct val="100000"/>
               </a:lnSpc>
@@ -2494,7 +2567,7 @@
               <a:buSzPts val="2287"/>
               <a:buFont typeface="Arial"/>
               <a:buNone/>
-              <a:defRPr b="0" i="0" sz="2287" u="none" cap="none" strike="noStrike">
+              <a:defRPr sz="2287" b="0" i="0" u="none" strike="noStrike" cap="none">
                 <a:solidFill>
                   <a:srgbClr val="888888"/>
                 </a:solidFill>
@@ -2506,7 +2579,7 @@
             </a:lvl9pPr>
           </a:lstStyle>
           <a:p>
-            <a:pPr indent="0" lvl="0" marL="0" rtl="0" algn="r">
+            <a:pPr marL="0" lvl="0" indent="0" algn="r" rtl="0">
               <a:spcBef>
                 <a:spcPts val="0"/>
               </a:spcBef>
@@ -2517,7 +2590,7 @@
             </a:pPr>
             <a:fld id="{00000000-1234-1234-1234-123412341234}" type="slidenum">
               <a:rPr lang="en-US"/>
-              <a:t>‹#›</a:t>
+              <a:t>‹nº›</a:t>
             </a:fld>
             <a:endParaRPr/>
           </a:p>
@@ -2532,11 +2605,11 @@
 </file>
 
 <file path=ppt/slideLayouts/slideLayout11.xml><?xml version="1.0" encoding="utf-8"?>
-<p:sldLayout xmlns:a="http://schemas.openxmlformats.org/drawingml/2006/main" xmlns:r="http://schemas.openxmlformats.org/officeDocument/2006/relationships" xmlns:mc="http://schemas.openxmlformats.org/markup-compatibility/2006" xmlns:mv="urn:schemas-microsoft-com:mac:vml" xmlns:p="http://schemas.openxmlformats.org/presentationml/2006/main" xmlns:c="http://schemas.openxmlformats.org/drawingml/2006/chart" xmlns:dgm="http://schemas.openxmlformats.org/drawingml/2006/diagram" xmlns:o="urn:schemas-microsoft-com:office:office" xmlns:v="urn:schemas-microsoft-com:vml" xmlns:pvml="urn:schemas-microsoft-com:office:powerpoint" xmlns:com="http://schemas.openxmlformats.org/drawingml/2006/compatibility" xmlns:p14="http://schemas.microsoft.com/office/powerpoint/2010/main" xmlns:p15="http://schemas.microsoft.com/office/powerpoint/2012/main" xmlns:ahyp="http://schemas.microsoft.com/office/drawing/2018/hyperlinkcolor" matchingName="Vertical Title and Text" type="vertTitleAndTx">
+<p:sldLayout xmlns:a="http://schemas.openxmlformats.org/drawingml/2006/main" xmlns:r="http://schemas.openxmlformats.org/officeDocument/2006/relationships" xmlns:p="http://schemas.openxmlformats.org/presentationml/2006/main" matchingName="Vertical Title and Text" type="vertTitleAndTx">
   <p:cSld name="VERTICAL_TITLE_AND_VERTICAL_TEXT">
     <p:spTree>
       <p:nvGrpSpPr>
-        <p:cNvPr id="74" name="Shape 74"/>
+        <p:cNvPr id="1" name="Shape 74"/>
         <p:cNvGrpSpPr/>
         <p:nvPr/>
       </p:nvGrpSpPr>
@@ -2551,7 +2624,9 @@
       <p:sp>
         <p:nvSpPr>
           <p:cNvPr id="75" name="Google Shape;75;p13"/>
-          <p:cNvSpPr txBox="1"/>
+          <p:cNvSpPr txBox="1">
+            <a:spLocks noGrp="1"/>
+          </p:cNvSpPr>
           <p:nvPr>
             <p:ph type="title"/>
           </p:nvPr>
@@ -2570,7 +2645,7 @@
           </a:ln>
         </p:spPr>
         <p:txBody>
-          <a:bodyPr anchorCtr="0" anchor="ctr" bIns="45700" lIns="91425" spcFirstLastPara="1" rIns="91425" wrap="square" tIns="45700">
+          <a:bodyPr spcFirstLastPara="1" wrap="square" lIns="91425" tIns="45700" rIns="91425" bIns="45700" anchor="ctr" anchorCtr="0">
             <a:normAutofit/>
           </a:bodyPr>
           <a:lstStyle>
@@ -2704,15 +2779,19 @@
               <a:defRPr/>
             </a:lvl9pPr>
           </a:lstStyle>
-          <a:p/>
+          <a:p>
+            <a:endParaRPr/>
+          </a:p>
         </p:txBody>
       </p:sp>
       <p:sp>
         <p:nvSpPr>
           <p:cNvPr id="76" name="Google Shape;76;p13"/>
-          <p:cNvSpPr txBox="1"/>
+          <p:cNvSpPr txBox="1">
+            <a:spLocks noGrp="1"/>
+          </p:cNvSpPr>
           <p:nvPr>
-            <p:ph idx="1" type="body"/>
+            <p:ph type="body" idx="1"/>
           </p:nvPr>
         </p:nvSpPr>
         <p:spPr>
@@ -2729,11 +2808,11 @@
           </a:ln>
         </p:spPr>
         <p:txBody>
-          <a:bodyPr anchorCtr="0" anchor="t" bIns="45700" lIns="91425" spcFirstLastPara="1" rIns="91425" wrap="square" tIns="45700">
+          <a:bodyPr spcFirstLastPara="1" wrap="square" lIns="91425" tIns="45700" rIns="91425" bIns="45700" anchor="t" anchorCtr="0">
             <a:normAutofit/>
           </a:bodyPr>
           <a:lstStyle>
-            <a:lvl1pPr indent="-342900" lvl="0" marL="457200" algn="l">
+            <a:lvl1pPr marL="457200" lvl="0" indent="-342900" algn="l">
               <a:lnSpc>
                 <a:spcPct val="100000"/>
               </a:lnSpc>
@@ -2750,7 +2829,7 @@
               <a:buChar char="•"/>
               <a:defRPr/>
             </a:lvl1pPr>
-            <a:lvl2pPr indent="-342900" lvl="1" marL="914400" algn="l">
+            <a:lvl2pPr marL="914400" lvl="1" indent="-342900" algn="l">
               <a:lnSpc>
                 <a:spcPct val="100000"/>
               </a:lnSpc>
@@ -2767,7 +2846,7 @@
               <a:buChar char="–"/>
               <a:defRPr/>
             </a:lvl2pPr>
-            <a:lvl3pPr indent="-342900" lvl="2" marL="1371600" algn="l">
+            <a:lvl3pPr marL="1371600" lvl="2" indent="-342900" algn="l">
               <a:lnSpc>
                 <a:spcPct val="100000"/>
               </a:lnSpc>
@@ -2784,7 +2863,7 @@
               <a:buChar char="•"/>
               <a:defRPr/>
             </a:lvl3pPr>
-            <a:lvl4pPr indent="-342900" lvl="3" marL="1828800" algn="l">
+            <a:lvl4pPr marL="1828800" lvl="3" indent="-342900" algn="l">
               <a:lnSpc>
                 <a:spcPct val="100000"/>
               </a:lnSpc>
@@ -2801,7 +2880,7 @@
               <a:buChar char="–"/>
               <a:defRPr/>
             </a:lvl4pPr>
-            <a:lvl5pPr indent="-342900" lvl="4" marL="2286000" algn="l">
+            <a:lvl5pPr marL="2286000" lvl="4" indent="-342900" algn="l">
               <a:lnSpc>
                 <a:spcPct val="100000"/>
               </a:lnSpc>
@@ -2818,7 +2897,7 @@
               <a:buChar char="»"/>
               <a:defRPr/>
             </a:lvl5pPr>
-            <a:lvl6pPr indent="-342900" lvl="5" marL="2743200" algn="l">
+            <a:lvl6pPr marL="2743200" lvl="5" indent="-342900" algn="l">
               <a:lnSpc>
                 <a:spcPct val="100000"/>
               </a:lnSpc>
@@ -2835,7 +2914,7 @@
               <a:buChar char="•"/>
               <a:defRPr/>
             </a:lvl6pPr>
-            <a:lvl7pPr indent="-342900" lvl="6" marL="3200400" algn="l">
+            <a:lvl7pPr marL="3200400" lvl="6" indent="-342900" algn="l">
               <a:lnSpc>
                 <a:spcPct val="100000"/>
               </a:lnSpc>
@@ -2852,7 +2931,7 @@
               <a:buChar char="•"/>
               <a:defRPr/>
             </a:lvl7pPr>
-            <a:lvl8pPr indent="-342900" lvl="7" marL="3657600" algn="l">
+            <a:lvl8pPr marL="3657600" lvl="7" indent="-342900" algn="l">
               <a:lnSpc>
                 <a:spcPct val="100000"/>
               </a:lnSpc>
@@ -2869,7 +2948,7 @@
               <a:buChar char="•"/>
               <a:defRPr/>
             </a:lvl8pPr>
-            <a:lvl9pPr indent="-342900" lvl="8" marL="4114800" algn="l">
+            <a:lvl9pPr marL="4114800" lvl="8" indent="-342900" algn="l">
               <a:lnSpc>
                 <a:spcPct val="100000"/>
               </a:lnSpc>
@@ -2887,15 +2966,19 @@
               <a:defRPr/>
             </a:lvl9pPr>
           </a:lstStyle>
-          <a:p/>
+          <a:p>
+            <a:endParaRPr/>
+          </a:p>
         </p:txBody>
       </p:sp>
       <p:sp>
         <p:nvSpPr>
           <p:cNvPr id="77" name="Google Shape;77;p13"/>
-          <p:cNvSpPr txBox="1"/>
+          <p:cNvSpPr txBox="1">
+            <a:spLocks noGrp="1"/>
+          </p:cNvSpPr>
           <p:nvPr>
-            <p:ph idx="10" type="dt"/>
+            <p:ph type="dt" idx="10"/>
           </p:nvPr>
         </p:nvSpPr>
         <p:spPr>
@@ -2912,7 +2995,7 @@
           </a:ln>
         </p:spPr>
         <p:txBody>
-          <a:bodyPr anchorCtr="0" anchor="ctr" bIns="45700" lIns="91425" spcFirstLastPara="1" rIns="91425" wrap="square" tIns="45700">
+          <a:bodyPr spcFirstLastPara="1" wrap="square" lIns="91425" tIns="45700" rIns="91425" bIns="45700" anchor="ctr" anchorCtr="0">
             <a:noAutofit/>
           </a:bodyPr>
           <a:lstStyle>
@@ -3043,15 +3126,19 @@
               <a:defRPr/>
             </a:lvl9pPr>
           </a:lstStyle>
-          <a:p/>
+          <a:p>
+            <a:endParaRPr/>
+          </a:p>
         </p:txBody>
       </p:sp>
       <p:sp>
         <p:nvSpPr>
           <p:cNvPr id="78" name="Google Shape;78;p13"/>
-          <p:cNvSpPr txBox="1"/>
+          <p:cNvSpPr txBox="1">
+            <a:spLocks noGrp="1"/>
+          </p:cNvSpPr>
           <p:nvPr>
-            <p:ph idx="11" type="ftr"/>
+            <p:ph type="ftr" idx="11"/>
           </p:nvPr>
         </p:nvSpPr>
         <p:spPr>
@@ -3068,7 +3155,7 @@
           </a:ln>
         </p:spPr>
         <p:txBody>
-          <a:bodyPr anchorCtr="0" anchor="ctr" bIns="45700" lIns="91425" spcFirstLastPara="1" rIns="91425" wrap="square" tIns="45700">
+          <a:bodyPr spcFirstLastPara="1" wrap="square" lIns="91425" tIns="45700" rIns="91425" bIns="45700" anchor="ctr" anchorCtr="0">
             <a:noAutofit/>
           </a:bodyPr>
           <a:lstStyle>
@@ -3199,15 +3286,19 @@
               <a:defRPr/>
             </a:lvl9pPr>
           </a:lstStyle>
-          <a:p/>
+          <a:p>
+            <a:endParaRPr/>
+          </a:p>
         </p:txBody>
       </p:sp>
       <p:sp>
         <p:nvSpPr>
           <p:cNvPr id="79" name="Google Shape;79;p13"/>
-          <p:cNvSpPr txBox="1"/>
+          <p:cNvSpPr txBox="1">
+            <a:spLocks noGrp="1"/>
+          </p:cNvSpPr>
           <p:nvPr>
-            <p:ph idx="12" type="sldNum"/>
+            <p:ph type="sldNum" idx="12"/>
           </p:nvPr>
         </p:nvSpPr>
         <p:spPr>
@@ -3224,11 +3315,11 @@
           </a:ln>
         </p:spPr>
         <p:txBody>
-          <a:bodyPr anchorCtr="0" anchor="ctr" bIns="45700" lIns="91425" spcFirstLastPara="1" rIns="91425" wrap="square" tIns="45700">
+          <a:bodyPr spcFirstLastPara="1" wrap="square" lIns="91425" tIns="45700" rIns="91425" bIns="45700" anchor="ctr" anchorCtr="0">
             <a:noAutofit/>
           </a:bodyPr>
           <a:lstStyle>
-            <a:lvl1pPr indent="0" lvl="0" marL="0" marR="0" algn="r">
+            <a:lvl1pPr marL="0" marR="0" lvl="0" indent="0" algn="r">
               <a:lnSpc>
                 <a:spcPct val="100000"/>
               </a:lnSpc>
@@ -3244,7 +3335,7 @@
               <a:buSzPts val="2287"/>
               <a:buFont typeface="Arial"/>
               <a:buNone/>
-              <a:defRPr b="0" i="0" sz="2287" u="none" cap="none" strike="noStrike">
+              <a:defRPr sz="2287" b="0" i="0" u="none" strike="noStrike" cap="none">
                 <a:solidFill>
                   <a:srgbClr val="888888"/>
                 </a:solidFill>
@@ -3254,7 +3345,7 @@
                 <a:sym typeface="Calibri"/>
               </a:defRPr>
             </a:lvl1pPr>
-            <a:lvl2pPr indent="0" lvl="1" marL="0" marR="0" algn="r">
+            <a:lvl2pPr marL="0" marR="0" lvl="1" indent="0" algn="r">
               <a:lnSpc>
                 <a:spcPct val="100000"/>
               </a:lnSpc>
@@ -3270,7 +3361,7 @@
               <a:buSzPts val="2287"/>
               <a:buFont typeface="Arial"/>
               <a:buNone/>
-              <a:defRPr b="0" i="0" sz="2287" u="none" cap="none" strike="noStrike">
+              <a:defRPr sz="2287" b="0" i="0" u="none" strike="noStrike" cap="none">
                 <a:solidFill>
                   <a:srgbClr val="888888"/>
                 </a:solidFill>
@@ -3280,7 +3371,7 @@
                 <a:sym typeface="Calibri"/>
               </a:defRPr>
             </a:lvl2pPr>
-            <a:lvl3pPr indent="0" lvl="2" marL="0" marR="0" algn="r">
+            <a:lvl3pPr marL="0" marR="0" lvl="2" indent="0" algn="r">
               <a:lnSpc>
                 <a:spcPct val="100000"/>
               </a:lnSpc>
@@ -3296,7 +3387,7 @@
               <a:buSzPts val="2287"/>
               <a:buFont typeface="Arial"/>
               <a:buNone/>
-              <a:defRPr b="0" i="0" sz="2287" u="none" cap="none" strike="noStrike">
+              <a:defRPr sz="2287" b="0" i="0" u="none" strike="noStrike" cap="none">
                 <a:solidFill>
                   <a:srgbClr val="888888"/>
                 </a:solidFill>
@@ -3306,7 +3397,7 @@
                 <a:sym typeface="Calibri"/>
               </a:defRPr>
             </a:lvl3pPr>
-            <a:lvl4pPr indent="0" lvl="3" marL="0" marR="0" algn="r">
+            <a:lvl4pPr marL="0" marR="0" lvl="3" indent="0" algn="r">
               <a:lnSpc>
                 <a:spcPct val="100000"/>
               </a:lnSpc>
@@ -3322,7 +3413,7 @@
               <a:buSzPts val="2287"/>
               <a:buFont typeface="Arial"/>
               <a:buNone/>
-              <a:defRPr b="0" i="0" sz="2287" u="none" cap="none" strike="noStrike">
+              <a:defRPr sz="2287" b="0" i="0" u="none" strike="noStrike" cap="none">
                 <a:solidFill>
                   <a:srgbClr val="888888"/>
                 </a:solidFill>
@@ -3332,7 +3423,7 @@
                 <a:sym typeface="Calibri"/>
               </a:defRPr>
             </a:lvl4pPr>
-            <a:lvl5pPr indent="0" lvl="4" marL="0" marR="0" algn="r">
+            <a:lvl5pPr marL="0" marR="0" lvl="4" indent="0" algn="r">
               <a:lnSpc>
                 <a:spcPct val="100000"/>
               </a:lnSpc>
@@ -3348,7 +3439,7 @@
               <a:buSzPts val="2287"/>
               <a:buFont typeface="Arial"/>
               <a:buNone/>
-              <a:defRPr b="0" i="0" sz="2287" u="none" cap="none" strike="noStrike">
+              <a:defRPr sz="2287" b="0" i="0" u="none" strike="noStrike" cap="none">
                 <a:solidFill>
                   <a:srgbClr val="888888"/>
                 </a:solidFill>
@@ -3358,7 +3449,7 @@
                 <a:sym typeface="Calibri"/>
               </a:defRPr>
             </a:lvl5pPr>
-            <a:lvl6pPr indent="0" lvl="5" marL="0" marR="0" algn="r">
+            <a:lvl6pPr marL="0" marR="0" lvl="5" indent="0" algn="r">
               <a:lnSpc>
                 <a:spcPct val="100000"/>
               </a:lnSpc>
@@ -3374,7 +3465,7 @@
               <a:buSzPts val="2287"/>
               <a:buFont typeface="Arial"/>
               <a:buNone/>
-              <a:defRPr b="0" i="0" sz="2287" u="none" cap="none" strike="noStrike">
+              <a:defRPr sz="2287" b="0" i="0" u="none" strike="noStrike" cap="none">
                 <a:solidFill>
                   <a:srgbClr val="888888"/>
                 </a:solidFill>
@@ -3384,7 +3475,7 @@
                 <a:sym typeface="Calibri"/>
               </a:defRPr>
             </a:lvl6pPr>
-            <a:lvl7pPr indent="0" lvl="6" marL="0" marR="0" algn="r">
+            <a:lvl7pPr marL="0" marR="0" lvl="6" indent="0" algn="r">
               <a:lnSpc>
                 <a:spcPct val="100000"/>
               </a:lnSpc>
@@ -3400,7 +3491,7 @@
               <a:buSzPts val="2287"/>
               <a:buFont typeface="Arial"/>
               <a:buNone/>
-              <a:defRPr b="0" i="0" sz="2287" u="none" cap="none" strike="noStrike">
+              <a:defRPr sz="2287" b="0" i="0" u="none" strike="noStrike" cap="none">
                 <a:solidFill>
                   <a:srgbClr val="888888"/>
                 </a:solidFill>
@@ -3410,7 +3501,7 @@
                 <a:sym typeface="Calibri"/>
               </a:defRPr>
             </a:lvl7pPr>
-            <a:lvl8pPr indent="0" lvl="7" marL="0" marR="0" algn="r">
+            <a:lvl8pPr marL="0" marR="0" lvl="7" indent="0" algn="r">
               <a:lnSpc>
                 <a:spcPct val="100000"/>
               </a:lnSpc>
@@ -3426,7 +3517,7 @@
               <a:buSzPts val="2287"/>
               <a:buFont typeface="Arial"/>
               <a:buNone/>
-              <a:defRPr b="0" i="0" sz="2287" u="none" cap="none" strike="noStrike">
+              <a:defRPr sz="2287" b="0" i="0" u="none" strike="noStrike" cap="none">
                 <a:solidFill>
                   <a:srgbClr val="888888"/>
                 </a:solidFill>
@@ -3436,7 +3527,7 @@
                 <a:sym typeface="Calibri"/>
               </a:defRPr>
             </a:lvl8pPr>
-            <a:lvl9pPr indent="0" lvl="8" marL="0" marR="0" algn="r">
+            <a:lvl9pPr marL="0" marR="0" lvl="8" indent="0" algn="r">
               <a:lnSpc>
                 <a:spcPct val="100000"/>
               </a:lnSpc>
@@ -3452,7 +3543,7 @@
               <a:buSzPts val="2287"/>
               <a:buFont typeface="Arial"/>
               <a:buNone/>
-              <a:defRPr b="0" i="0" sz="2287" u="none" cap="none" strike="noStrike">
+              <a:defRPr sz="2287" b="0" i="0" u="none" strike="noStrike" cap="none">
                 <a:solidFill>
                   <a:srgbClr val="888888"/>
                 </a:solidFill>
@@ -3464,7 +3555,7 @@
             </a:lvl9pPr>
           </a:lstStyle>
           <a:p>
-            <a:pPr indent="0" lvl="0" marL="0" rtl="0" algn="r">
+            <a:pPr marL="0" lvl="0" indent="0" algn="r" rtl="0">
               <a:spcBef>
                 <a:spcPts val="0"/>
               </a:spcBef>
@@ -3475,7 +3566,7 @@
             </a:pPr>
             <a:fld id="{00000000-1234-1234-1234-123412341234}" type="slidenum">
               <a:rPr lang="en-US"/>
-              <a:t>‹#›</a:t>
+              <a:t>‹nº›</a:t>
             </a:fld>
             <a:endParaRPr/>
           </a:p>
@@ -3490,11 +3581,11 @@
 </file>
 
 <file path=ppt/slideLayouts/slideLayout2.xml><?xml version="1.0" encoding="utf-8"?>
-<p:sldLayout xmlns:a="http://schemas.openxmlformats.org/drawingml/2006/main" xmlns:r="http://schemas.openxmlformats.org/officeDocument/2006/relationships" xmlns:mc="http://schemas.openxmlformats.org/markup-compatibility/2006" xmlns:mv="urn:schemas-microsoft-com:mac:vml" xmlns:p="http://schemas.openxmlformats.org/presentationml/2006/main" xmlns:c="http://schemas.openxmlformats.org/drawingml/2006/chart" xmlns:dgm="http://schemas.openxmlformats.org/drawingml/2006/diagram" xmlns:o="urn:schemas-microsoft-com:office:office" xmlns:v="urn:schemas-microsoft-com:vml" xmlns:pvml="urn:schemas-microsoft-com:office:powerpoint" xmlns:com="http://schemas.openxmlformats.org/drawingml/2006/compatibility" xmlns:p14="http://schemas.microsoft.com/office/powerpoint/2010/main" xmlns:p15="http://schemas.microsoft.com/office/powerpoint/2012/main" xmlns:ahyp="http://schemas.microsoft.com/office/drawing/2018/hyperlinkcolor" matchingName="Title Slide" type="title">
+<p:sldLayout xmlns:a="http://schemas.openxmlformats.org/drawingml/2006/main" xmlns:r="http://schemas.openxmlformats.org/officeDocument/2006/relationships" xmlns:p="http://schemas.openxmlformats.org/presentationml/2006/main" matchingName="Title Slide" type="title">
   <p:cSld name="TITLE">
     <p:spTree>
       <p:nvGrpSpPr>
-        <p:cNvPr id="15" name="Shape 15"/>
+        <p:cNvPr id="1" name="Shape 15"/>
         <p:cNvGrpSpPr/>
         <p:nvPr/>
       </p:nvGrpSpPr>
@@ -3509,7 +3600,9 @@
       <p:sp>
         <p:nvSpPr>
           <p:cNvPr id="16" name="Google Shape;16;p4"/>
-          <p:cNvSpPr txBox="1"/>
+          <p:cNvSpPr txBox="1">
+            <a:spLocks noGrp="1"/>
+          </p:cNvSpPr>
           <p:nvPr>
             <p:ph type="ctrTitle"/>
           </p:nvPr>
@@ -3528,7 +3621,7 @@
           </a:ln>
         </p:spPr>
         <p:txBody>
-          <a:bodyPr anchorCtr="0" anchor="ctr" bIns="45700" lIns="91425" spcFirstLastPara="1" rIns="91425" wrap="square" tIns="45700">
+          <a:bodyPr spcFirstLastPara="1" wrap="square" lIns="91425" tIns="45700" rIns="91425" bIns="45700" anchor="ctr" anchorCtr="0">
             <a:normAutofit/>
           </a:bodyPr>
           <a:lstStyle>
@@ -3662,15 +3755,19 @@
               <a:defRPr/>
             </a:lvl9pPr>
           </a:lstStyle>
-          <a:p/>
+          <a:p>
+            <a:endParaRPr/>
+          </a:p>
         </p:txBody>
       </p:sp>
       <p:sp>
         <p:nvSpPr>
           <p:cNvPr id="17" name="Google Shape;17;p4"/>
-          <p:cNvSpPr txBox="1"/>
+          <p:cNvSpPr txBox="1">
+            <a:spLocks noGrp="1"/>
+          </p:cNvSpPr>
           <p:nvPr>
-            <p:ph idx="1" type="subTitle"/>
+            <p:ph type="subTitle" idx="1"/>
           </p:nvPr>
         </p:nvSpPr>
         <p:spPr>
@@ -3687,7 +3784,7 @@
           </a:ln>
         </p:spPr>
         <p:txBody>
-          <a:bodyPr anchorCtr="0" anchor="t" bIns="45700" lIns="91425" spcFirstLastPara="1" rIns="91425" wrap="square" tIns="45700">
+          <a:bodyPr spcFirstLastPara="1" wrap="square" lIns="91425" tIns="45700" rIns="91425" bIns="45700" anchor="t" anchorCtr="0">
             <a:normAutofit/>
           </a:bodyPr>
           <a:lstStyle>
@@ -3881,15 +3978,19 @@
               </a:defRPr>
             </a:lvl9pPr>
           </a:lstStyle>
-          <a:p/>
+          <a:p>
+            <a:endParaRPr/>
+          </a:p>
         </p:txBody>
       </p:sp>
       <p:sp>
         <p:nvSpPr>
           <p:cNvPr id="18" name="Google Shape;18;p4"/>
-          <p:cNvSpPr txBox="1"/>
+          <p:cNvSpPr txBox="1">
+            <a:spLocks noGrp="1"/>
+          </p:cNvSpPr>
           <p:nvPr>
-            <p:ph idx="10" type="dt"/>
+            <p:ph type="dt" idx="10"/>
           </p:nvPr>
         </p:nvSpPr>
         <p:spPr>
@@ -3906,7 +4007,7 @@
           </a:ln>
         </p:spPr>
         <p:txBody>
-          <a:bodyPr anchorCtr="0" anchor="ctr" bIns="45700" lIns="91425" spcFirstLastPara="1" rIns="91425" wrap="square" tIns="45700">
+          <a:bodyPr spcFirstLastPara="1" wrap="square" lIns="91425" tIns="45700" rIns="91425" bIns="45700" anchor="ctr" anchorCtr="0">
             <a:noAutofit/>
           </a:bodyPr>
           <a:lstStyle>
@@ -4037,15 +4138,19 @@
               <a:defRPr/>
             </a:lvl9pPr>
           </a:lstStyle>
-          <a:p/>
+          <a:p>
+            <a:endParaRPr/>
+          </a:p>
         </p:txBody>
       </p:sp>
       <p:sp>
         <p:nvSpPr>
           <p:cNvPr id="19" name="Google Shape;19;p4"/>
-          <p:cNvSpPr txBox="1"/>
+          <p:cNvSpPr txBox="1">
+            <a:spLocks noGrp="1"/>
+          </p:cNvSpPr>
           <p:nvPr>
-            <p:ph idx="11" type="ftr"/>
+            <p:ph type="ftr" idx="11"/>
           </p:nvPr>
         </p:nvSpPr>
         <p:spPr>
@@ -4062,7 +4167,7 @@
           </a:ln>
         </p:spPr>
         <p:txBody>
-          <a:bodyPr anchorCtr="0" anchor="ctr" bIns="45700" lIns="91425" spcFirstLastPara="1" rIns="91425" wrap="square" tIns="45700">
+          <a:bodyPr spcFirstLastPara="1" wrap="square" lIns="91425" tIns="45700" rIns="91425" bIns="45700" anchor="ctr" anchorCtr="0">
             <a:noAutofit/>
           </a:bodyPr>
           <a:lstStyle>
@@ -4193,15 +4298,19 @@
               <a:defRPr/>
             </a:lvl9pPr>
           </a:lstStyle>
-          <a:p/>
+          <a:p>
+            <a:endParaRPr/>
+          </a:p>
         </p:txBody>
       </p:sp>
       <p:sp>
         <p:nvSpPr>
           <p:cNvPr id="20" name="Google Shape;20;p4"/>
-          <p:cNvSpPr txBox="1"/>
+          <p:cNvSpPr txBox="1">
+            <a:spLocks noGrp="1"/>
+          </p:cNvSpPr>
           <p:nvPr>
-            <p:ph idx="12" type="sldNum"/>
+            <p:ph type="sldNum" idx="12"/>
           </p:nvPr>
         </p:nvSpPr>
         <p:spPr>
@@ -4218,11 +4327,11 @@
           </a:ln>
         </p:spPr>
         <p:txBody>
-          <a:bodyPr anchorCtr="0" anchor="ctr" bIns="45700" lIns="91425" spcFirstLastPara="1" rIns="91425" wrap="square" tIns="45700">
+          <a:bodyPr spcFirstLastPara="1" wrap="square" lIns="91425" tIns="45700" rIns="91425" bIns="45700" anchor="ctr" anchorCtr="0">
             <a:noAutofit/>
           </a:bodyPr>
           <a:lstStyle>
-            <a:lvl1pPr indent="0" lvl="0" marL="0" marR="0" algn="r">
+            <a:lvl1pPr marL="0" marR="0" lvl="0" indent="0" algn="r">
               <a:lnSpc>
                 <a:spcPct val="100000"/>
               </a:lnSpc>
@@ -4238,7 +4347,7 @@
               <a:buSzPts val="2287"/>
               <a:buFont typeface="Arial"/>
               <a:buNone/>
-              <a:defRPr b="0" i="0" sz="2287" u="none" cap="none" strike="noStrike">
+              <a:defRPr sz="2287" b="0" i="0" u="none" strike="noStrike" cap="none">
                 <a:solidFill>
                   <a:srgbClr val="888888"/>
                 </a:solidFill>
@@ -4248,7 +4357,7 @@
                 <a:sym typeface="Calibri"/>
               </a:defRPr>
             </a:lvl1pPr>
-            <a:lvl2pPr indent="0" lvl="1" marL="0" marR="0" algn="r">
+            <a:lvl2pPr marL="0" marR="0" lvl="1" indent="0" algn="r">
               <a:lnSpc>
                 <a:spcPct val="100000"/>
               </a:lnSpc>
@@ -4264,7 +4373,7 @@
               <a:buSzPts val="2287"/>
               <a:buFont typeface="Arial"/>
               <a:buNone/>
-              <a:defRPr b="0" i="0" sz="2287" u="none" cap="none" strike="noStrike">
+              <a:defRPr sz="2287" b="0" i="0" u="none" strike="noStrike" cap="none">
                 <a:solidFill>
                   <a:srgbClr val="888888"/>
                 </a:solidFill>
@@ -4274,7 +4383,7 @@
                 <a:sym typeface="Calibri"/>
               </a:defRPr>
             </a:lvl2pPr>
-            <a:lvl3pPr indent="0" lvl="2" marL="0" marR="0" algn="r">
+            <a:lvl3pPr marL="0" marR="0" lvl="2" indent="0" algn="r">
               <a:lnSpc>
                 <a:spcPct val="100000"/>
               </a:lnSpc>
@@ -4290,7 +4399,7 @@
               <a:buSzPts val="2287"/>
               <a:buFont typeface="Arial"/>
               <a:buNone/>
-              <a:defRPr b="0" i="0" sz="2287" u="none" cap="none" strike="noStrike">
+              <a:defRPr sz="2287" b="0" i="0" u="none" strike="noStrike" cap="none">
                 <a:solidFill>
                   <a:srgbClr val="888888"/>
                 </a:solidFill>
@@ -4300,7 +4409,7 @@
                 <a:sym typeface="Calibri"/>
               </a:defRPr>
             </a:lvl3pPr>
-            <a:lvl4pPr indent="0" lvl="3" marL="0" marR="0" algn="r">
+            <a:lvl4pPr marL="0" marR="0" lvl="3" indent="0" algn="r">
               <a:lnSpc>
                 <a:spcPct val="100000"/>
               </a:lnSpc>
@@ -4316,7 +4425,7 @@
               <a:buSzPts val="2287"/>
               <a:buFont typeface="Arial"/>
               <a:buNone/>
-              <a:defRPr b="0" i="0" sz="2287" u="none" cap="none" strike="noStrike">
+              <a:defRPr sz="2287" b="0" i="0" u="none" strike="noStrike" cap="none">
                 <a:solidFill>
                   <a:srgbClr val="888888"/>
                 </a:solidFill>
@@ -4326,7 +4435,7 @@
                 <a:sym typeface="Calibri"/>
               </a:defRPr>
             </a:lvl4pPr>
-            <a:lvl5pPr indent="0" lvl="4" marL="0" marR="0" algn="r">
+            <a:lvl5pPr marL="0" marR="0" lvl="4" indent="0" algn="r">
               <a:lnSpc>
                 <a:spcPct val="100000"/>
               </a:lnSpc>
@@ -4342,7 +4451,7 @@
               <a:buSzPts val="2287"/>
               <a:buFont typeface="Arial"/>
               <a:buNone/>
-              <a:defRPr b="0" i="0" sz="2287" u="none" cap="none" strike="noStrike">
+              <a:defRPr sz="2287" b="0" i="0" u="none" strike="noStrike" cap="none">
                 <a:solidFill>
                   <a:srgbClr val="888888"/>
                 </a:solidFill>
@@ -4352,7 +4461,7 @@
                 <a:sym typeface="Calibri"/>
               </a:defRPr>
             </a:lvl5pPr>
-            <a:lvl6pPr indent="0" lvl="5" marL="0" marR="0" algn="r">
+            <a:lvl6pPr marL="0" marR="0" lvl="5" indent="0" algn="r">
               <a:lnSpc>
                 <a:spcPct val="100000"/>
               </a:lnSpc>
@@ -4368,7 +4477,7 @@
               <a:buSzPts val="2287"/>
               <a:buFont typeface="Arial"/>
               <a:buNone/>
-              <a:defRPr b="0" i="0" sz="2287" u="none" cap="none" strike="noStrike">
+              <a:defRPr sz="2287" b="0" i="0" u="none" strike="noStrike" cap="none">
                 <a:solidFill>
                   <a:srgbClr val="888888"/>
                 </a:solidFill>
@@ -4378,7 +4487,7 @@
                 <a:sym typeface="Calibri"/>
               </a:defRPr>
             </a:lvl6pPr>
-            <a:lvl7pPr indent="0" lvl="6" marL="0" marR="0" algn="r">
+            <a:lvl7pPr marL="0" marR="0" lvl="6" indent="0" algn="r">
               <a:lnSpc>
                 <a:spcPct val="100000"/>
               </a:lnSpc>
@@ -4394,7 +4503,7 @@
               <a:buSzPts val="2287"/>
               <a:buFont typeface="Arial"/>
               <a:buNone/>
-              <a:defRPr b="0" i="0" sz="2287" u="none" cap="none" strike="noStrike">
+              <a:defRPr sz="2287" b="0" i="0" u="none" strike="noStrike" cap="none">
                 <a:solidFill>
                   <a:srgbClr val="888888"/>
                 </a:solidFill>
@@ -4404,7 +4513,7 @@
                 <a:sym typeface="Calibri"/>
               </a:defRPr>
             </a:lvl7pPr>
-            <a:lvl8pPr indent="0" lvl="7" marL="0" marR="0" algn="r">
+            <a:lvl8pPr marL="0" marR="0" lvl="7" indent="0" algn="r">
               <a:lnSpc>
                 <a:spcPct val="100000"/>
               </a:lnSpc>
@@ -4420,7 +4529,7 @@
               <a:buSzPts val="2287"/>
               <a:buFont typeface="Arial"/>
               <a:buNone/>
-              <a:defRPr b="0" i="0" sz="2287" u="none" cap="none" strike="noStrike">
+              <a:defRPr sz="2287" b="0" i="0" u="none" strike="noStrike" cap="none">
                 <a:solidFill>
                   <a:srgbClr val="888888"/>
                 </a:solidFill>
@@ -4430,7 +4539,7 @@
                 <a:sym typeface="Calibri"/>
               </a:defRPr>
             </a:lvl8pPr>
-            <a:lvl9pPr indent="0" lvl="8" marL="0" marR="0" algn="r">
+            <a:lvl9pPr marL="0" marR="0" lvl="8" indent="0" algn="r">
               <a:lnSpc>
                 <a:spcPct val="100000"/>
               </a:lnSpc>
@@ -4446,7 +4555,7 @@
               <a:buSzPts val="2287"/>
               <a:buFont typeface="Arial"/>
               <a:buNone/>
-              <a:defRPr b="0" i="0" sz="2287" u="none" cap="none" strike="noStrike">
+              <a:defRPr sz="2287" b="0" i="0" u="none" strike="noStrike" cap="none">
                 <a:solidFill>
                   <a:srgbClr val="888888"/>
                 </a:solidFill>
@@ -4458,7 +4567,7 @@
             </a:lvl9pPr>
           </a:lstStyle>
           <a:p>
-            <a:pPr indent="0" lvl="0" marL="0" rtl="0" algn="r">
+            <a:pPr marL="0" lvl="0" indent="0" algn="r" rtl="0">
               <a:spcBef>
                 <a:spcPts val="0"/>
               </a:spcBef>
@@ -4469,7 +4578,7 @@
             </a:pPr>
             <a:fld id="{00000000-1234-1234-1234-123412341234}" type="slidenum">
               <a:rPr lang="en-US"/>
-              <a:t>‹#›</a:t>
+              <a:t>‹nº›</a:t>
             </a:fld>
             <a:endParaRPr/>
           </a:p>
@@ -4484,11 +4593,11 @@
 </file>
 
 <file path=ppt/slideLayouts/slideLayout3.xml><?xml version="1.0" encoding="utf-8"?>
-<p:sldLayout xmlns:a="http://schemas.openxmlformats.org/drawingml/2006/main" xmlns:r="http://schemas.openxmlformats.org/officeDocument/2006/relationships" xmlns:mc="http://schemas.openxmlformats.org/markup-compatibility/2006" xmlns:mv="urn:schemas-microsoft-com:mac:vml" xmlns:p="http://schemas.openxmlformats.org/presentationml/2006/main" xmlns:c="http://schemas.openxmlformats.org/drawingml/2006/chart" xmlns:dgm="http://schemas.openxmlformats.org/drawingml/2006/diagram" xmlns:o="urn:schemas-microsoft-com:office:office" xmlns:v="urn:schemas-microsoft-com:vml" xmlns:pvml="urn:schemas-microsoft-com:office:powerpoint" xmlns:com="http://schemas.openxmlformats.org/drawingml/2006/compatibility" xmlns:p14="http://schemas.microsoft.com/office/powerpoint/2010/main" xmlns:p15="http://schemas.microsoft.com/office/powerpoint/2012/main" xmlns:ahyp="http://schemas.microsoft.com/office/drawing/2018/hyperlinkcolor" matchingName="Title and Content" type="obj">
+<p:sldLayout xmlns:a="http://schemas.openxmlformats.org/drawingml/2006/main" xmlns:r="http://schemas.openxmlformats.org/officeDocument/2006/relationships" xmlns:p="http://schemas.openxmlformats.org/presentationml/2006/main" matchingName="Title and Content" type="obj">
   <p:cSld name="OBJECT">
     <p:spTree>
       <p:nvGrpSpPr>
-        <p:cNvPr id="21" name="Shape 21"/>
+        <p:cNvPr id="1" name="Shape 21"/>
         <p:cNvGrpSpPr/>
         <p:nvPr/>
       </p:nvGrpSpPr>
@@ -4503,7 +4612,9 @@
       <p:sp>
         <p:nvSpPr>
           <p:cNvPr id="22" name="Google Shape;22;p5"/>
-          <p:cNvSpPr txBox="1"/>
+          <p:cNvSpPr txBox="1">
+            <a:spLocks noGrp="1"/>
+          </p:cNvSpPr>
           <p:nvPr>
             <p:ph type="title"/>
           </p:nvPr>
@@ -4522,7 +4633,7 @@
           </a:ln>
         </p:spPr>
         <p:txBody>
-          <a:bodyPr anchorCtr="0" anchor="ctr" bIns="45700" lIns="91425" spcFirstLastPara="1" rIns="91425" wrap="square" tIns="45700">
+          <a:bodyPr spcFirstLastPara="1" wrap="square" lIns="91425" tIns="45700" rIns="91425" bIns="45700" anchor="ctr" anchorCtr="0">
             <a:normAutofit/>
           </a:bodyPr>
           <a:lstStyle>
@@ -4656,15 +4767,19 @@
               <a:defRPr/>
             </a:lvl9pPr>
           </a:lstStyle>
-          <a:p/>
+          <a:p>
+            <a:endParaRPr/>
+          </a:p>
         </p:txBody>
       </p:sp>
       <p:sp>
         <p:nvSpPr>
           <p:cNvPr id="23" name="Google Shape;23;p5"/>
-          <p:cNvSpPr txBox="1"/>
+          <p:cNvSpPr txBox="1">
+            <a:spLocks noGrp="1"/>
+          </p:cNvSpPr>
           <p:nvPr>
-            <p:ph idx="1" type="body"/>
+            <p:ph type="body" idx="1"/>
           </p:nvPr>
         </p:nvSpPr>
         <p:spPr>
@@ -4681,11 +4796,11 @@
           </a:ln>
         </p:spPr>
         <p:txBody>
-          <a:bodyPr anchorCtr="0" anchor="t" bIns="45700" lIns="91425" spcFirstLastPara="1" rIns="91425" wrap="square" tIns="45700">
+          <a:bodyPr spcFirstLastPara="1" wrap="square" lIns="91425" tIns="45700" rIns="91425" bIns="45700" anchor="t" anchorCtr="0">
             <a:normAutofit/>
           </a:bodyPr>
           <a:lstStyle>
-            <a:lvl1pPr indent="-342900" lvl="0" marL="457200" algn="l">
+            <a:lvl1pPr marL="457200" lvl="0" indent="-342900" algn="l">
               <a:lnSpc>
                 <a:spcPct val="100000"/>
               </a:lnSpc>
@@ -4702,7 +4817,7 @@
               <a:buChar char="•"/>
               <a:defRPr/>
             </a:lvl1pPr>
-            <a:lvl2pPr indent="-342900" lvl="1" marL="914400" algn="l">
+            <a:lvl2pPr marL="914400" lvl="1" indent="-342900" algn="l">
               <a:lnSpc>
                 <a:spcPct val="100000"/>
               </a:lnSpc>
@@ -4719,7 +4834,7 @@
               <a:buChar char="–"/>
               <a:defRPr/>
             </a:lvl2pPr>
-            <a:lvl3pPr indent="-342900" lvl="2" marL="1371600" algn="l">
+            <a:lvl3pPr marL="1371600" lvl="2" indent="-342900" algn="l">
               <a:lnSpc>
                 <a:spcPct val="100000"/>
               </a:lnSpc>
@@ -4736,7 +4851,7 @@
               <a:buChar char="•"/>
               <a:defRPr/>
             </a:lvl3pPr>
-            <a:lvl4pPr indent="-342900" lvl="3" marL="1828800" algn="l">
+            <a:lvl4pPr marL="1828800" lvl="3" indent="-342900" algn="l">
               <a:lnSpc>
                 <a:spcPct val="100000"/>
               </a:lnSpc>
@@ -4753,7 +4868,7 @@
               <a:buChar char="–"/>
               <a:defRPr/>
             </a:lvl4pPr>
-            <a:lvl5pPr indent="-342900" lvl="4" marL="2286000" algn="l">
+            <a:lvl5pPr marL="2286000" lvl="4" indent="-342900" algn="l">
               <a:lnSpc>
                 <a:spcPct val="100000"/>
               </a:lnSpc>
@@ -4770,7 +4885,7 @@
               <a:buChar char="»"/>
               <a:defRPr/>
             </a:lvl5pPr>
-            <a:lvl6pPr indent="-342900" lvl="5" marL="2743200" algn="l">
+            <a:lvl6pPr marL="2743200" lvl="5" indent="-342900" algn="l">
               <a:lnSpc>
                 <a:spcPct val="100000"/>
               </a:lnSpc>
@@ -4787,7 +4902,7 @@
               <a:buChar char="•"/>
               <a:defRPr/>
             </a:lvl6pPr>
-            <a:lvl7pPr indent="-342900" lvl="6" marL="3200400" algn="l">
+            <a:lvl7pPr marL="3200400" lvl="6" indent="-342900" algn="l">
               <a:lnSpc>
                 <a:spcPct val="100000"/>
               </a:lnSpc>
@@ -4804,7 +4919,7 @@
               <a:buChar char="•"/>
               <a:defRPr/>
             </a:lvl7pPr>
-            <a:lvl8pPr indent="-342900" lvl="7" marL="3657600" algn="l">
+            <a:lvl8pPr marL="3657600" lvl="7" indent="-342900" algn="l">
               <a:lnSpc>
                 <a:spcPct val="100000"/>
               </a:lnSpc>
@@ -4821,7 +4936,7 @@
               <a:buChar char="•"/>
               <a:defRPr/>
             </a:lvl8pPr>
-            <a:lvl9pPr indent="-342900" lvl="8" marL="4114800" algn="l">
+            <a:lvl9pPr marL="4114800" lvl="8" indent="-342900" algn="l">
               <a:lnSpc>
                 <a:spcPct val="100000"/>
               </a:lnSpc>
@@ -4839,15 +4954,19 @@
               <a:defRPr/>
             </a:lvl9pPr>
           </a:lstStyle>
-          <a:p/>
+          <a:p>
+            <a:endParaRPr/>
+          </a:p>
         </p:txBody>
       </p:sp>
       <p:sp>
         <p:nvSpPr>
           <p:cNvPr id="24" name="Google Shape;24;p5"/>
-          <p:cNvSpPr txBox="1"/>
+          <p:cNvSpPr txBox="1">
+            <a:spLocks noGrp="1"/>
+          </p:cNvSpPr>
           <p:nvPr>
-            <p:ph idx="10" type="dt"/>
+            <p:ph type="dt" idx="10"/>
           </p:nvPr>
         </p:nvSpPr>
         <p:spPr>
@@ -4864,7 +4983,7 @@
           </a:ln>
         </p:spPr>
         <p:txBody>
-          <a:bodyPr anchorCtr="0" anchor="ctr" bIns="45700" lIns="91425" spcFirstLastPara="1" rIns="91425" wrap="square" tIns="45700">
+          <a:bodyPr spcFirstLastPara="1" wrap="square" lIns="91425" tIns="45700" rIns="91425" bIns="45700" anchor="ctr" anchorCtr="0">
             <a:noAutofit/>
           </a:bodyPr>
           <a:lstStyle>
@@ -4995,15 +5114,19 @@
               <a:defRPr/>
             </a:lvl9pPr>
           </a:lstStyle>
-          <a:p/>
+          <a:p>
+            <a:endParaRPr/>
+          </a:p>
         </p:txBody>
       </p:sp>
       <p:sp>
         <p:nvSpPr>
           <p:cNvPr id="25" name="Google Shape;25;p5"/>
-          <p:cNvSpPr txBox="1"/>
+          <p:cNvSpPr txBox="1">
+            <a:spLocks noGrp="1"/>
+          </p:cNvSpPr>
           <p:nvPr>
-            <p:ph idx="11" type="ftr"/>
+            <p:ph type="ftr" idx="11"/>
           </p:nvPr>
         </p:nvSpPr>
         <p:spPr>
@@ -5020,7 +5143,7 @@
           </a:ln>
         </p:spPr>
         <p:txBody>
-          <a:bodyPr anchorCtr="0" anchor="ctr" bIns="45700" lIns="91425" spcFirstLastPara="1" rIns="91425" wrap="square" tIns="45700">
+          <a:bodyPr spcFirstLastPara="1" wrap="square" lIns="91425" tIns="45700" rIns="91425" bIns="45700" anchor="ctr" anchorCtr="0">
             <a:noAutofit/>
           </a:bodyPr>
           <a:lstStyle>
@@ -5151,15 +5274,19 @@
               <a:defRPr/>
             </a:lvl9pPr>
           </a:lstStyle>
-          <a:p/>
+          <a:p>
+            <a:endParaRPr/>
+          </a:p>
         </p:txBody>
       </p:sp>
       <p:sp>
         <p:nvSpPr>
           <p:cNvPr id="26" name="Google Shape;26;p5"/>
-          <p:cNvSpPr txBox="1"/>
+          <p:cNvSpPr txBox="1">
+            <a:spLocks noGrp="1"/>
+          </p:cNvSpPr>
           <p:nvPr>
-            <p:ph idx="12" type="sldNum"/>
+            <p:ph type="sldNum" idx="12"/>
           </p:nvPr>
         </p:nvSpPr>
         <p:spPr>
@@ -5176,11 +5303,11 @@
           </a:ln>
         </p:spPr>
         <p:txBody>
-          <a:bodyPr anchorCtr="0" anchor="ctr" bIns="45700" lIns="91425" spcFirstLastPara="1" rIns="91425" wrap="square" tIns="45700">
+          <a:bodyPr spcFirstLastPara="1" wrap="square" lIns="91425" tIns="45700" rIns="91425" bIns="45700" anchor="ctr" anchorCtr="0">
             <a:noAutofit/>
           </a:bodyPr>
           <a:lstStyle>
-            <a:lvl1pPr indent="0" lvl="0" marL="0" marR="0" algn="r">
+            <a:lvl1pPr marL="0" marR="0" lvl="0" indent="0" algn="r">
               <a:lnSpc>
                 <a:spcPct val="100000"/>
               </a:lnSpc>
@@ -5196,7 +5323,7 @@
               <a:buSzPts val="2287"/>
               <a:buFont typeface="Arial"/>
               <a:buNone/>
-              <a:defRPr b="0" i="0" sz="2287" u="none" cap="none" strike="noStrike">
+              <a:defRPr sz="2287" b="0" i="0" u="none" strike="noStrike" cap="none">
                 <a:solidFill>
                   <a:srgbClr val="888888"/>
                 </a:solidFill>
@@ -5206,7 +5333,7 @@
                 <a:sym typeface="Calibri"/>
               </a:defRPr>
             </a:lvl1pPr>
-            <a:lvl2pPr indent="0" lvl="1" marL="0" marR="0" algn="r">
+            <a:lvl2pPr marL="0" marR="0" lvl="1" indent="0" algn="r">
               <a:lnSpc>
                 <a:spcPct val="100000"/>
               </a:lnSpc>
@@ -5222,7 +5349,7 @@
               <a:buSzPts val="2287"/>
               <a:buFont typeface="Arial"/>
               <a:buNone/>
-              <a:defRPr b="0" i="0" sz="2287" u="none" cap="none" strike="noStrike">
+              <a:defRPr sz="2287" b="0" i="0" u="none" strike="noStrike" cap="none">
                 <a:solidFill>
                   <a:srgbClr val="888888"/>
                 </a:solidFill>
@@ -5232,7 +5359,7 @@
                 <a:sym typeface="Calibri"/>
               </a:defRPr>
             </a:lvl2pPr>
-            <a:lvl3pPr indent="0" lvl="2" marL="0" marR="0" algn="r">
+            <a:lvl3pPr marL="0" marR="0" lvl="2" indent="0" algn="r">
               <a:lnSpc>
                 <a:spcPct val="100000"/>
               </a:lnSpc>
@@ -5248,7 +5375,7 @@
               <a:buSzPts val="2287"/>
               <a:buFont typeface="Arial"/>
               <a:buNone/>
-              <a:defRPr b="0" i="0" sz="2287" u="none" cap="none" strike="noStrike">
+              <a:defRPr sz="2287" b="0" i="0" u="none" strike="noStrike" cap="none">
                 <a:solidFill>
                   <a:srgbClr val="888888"/>
                 </a:solidFill>
@@ -5258,7 +5385,7 @@
                 <a:sym typeface="Calibri"/>
               </a:defRPr>
             </a:lvl3pPr>
-            <a:lvl4pPr indent="0" lvl="3" marL="0" marR="0" algn="r">
+            <a:lvl4pPr marL="0" marR="0" lvl="3" indent="0" algn="r">
               <a:lnSpc>
                 <a:spcPct val="100000"/>
               </a:lnSpc>
@@ -5274,7 +5401,7 @@
               <a:buSzPts val="2287"/>
               <a:buFont typeface="Arial"/>
               <a:buNone/>
-              <a:defRPr b="0" i="0" sz="2287" u="none" cap="none" strike="noStrike">
+              <a:defRPr sz="2287" b="0" i="0" u="none" strike="noStrike" cap="none">
                 <a:solidFill>
                   <a:srgbClr val="888888"/>
                 </a:solidFill>
@@ -5284,7 +5411,7 @@
                 <a:sym typeface="Calibri"/>
               </a:defRPr>
             </a:lvl4pPr>
-            <a:lvl5pPr indent="0" lvl="4" marL="0" marR="0" algn="r">
+            <a:lvl5pPr marL="0" marR="0" lvl="4" indent="0" algn="r">
               <a:lnSpc>
                 <a:spcPct val="100000"/>
               </a:lnSpc>
@@ -5300,7 +5427,7 @@
               <a:buSzPts val="2287"/>
               <a:buFont typeface="Arial"/>
               <a:buNone/>
-              <a:defRPr b="0" i="0" sz="2287" u="none" cap="none" strike="noStrike">
+              <a:defRPr sz="2287" b="0" i="0" u="none" strike="noStrike" cap="none">
                 <a:solidFill>
                   <a:srgbClr val="888888"/>
                 </a:solidFill>
@@ -5310,7 +5437,7 @@
                 <a:sym typeface="Calibri"/>
               </a:defRPr>
             </a:lvl5pPr>
-            <a:lvl6pPr indent="0" lvl="5" marL="0" marR="0" algn="r">
+            <a:lvl6pPr marL="0" marR="0" lvl="5" indent="0" algn="r">
               <a:lnSpc>
                 <a:spcPct val="100000"/>
               </a:lnSpc>
@@ -5326,7 +5453,7 @@
               <a:buSzPts val="2287"/>
               <a:buFont typeface="Arial"/>
               <a:buNone/>
-              <a:defRPr b="0" i="0" sz="2287" u="none" cap="none" strike="noStrike">
+              <a:defRPr sz="2287" b="0" i="0" u="none" strike="noStrike" cap="none">
                 <a:solidFill>
                   <a:srgbClr val="888888"/>
                 </a:solidFill>
@@ -5336,7 +5463,7 @@
                 <a:sym typeface="Calibri"/>
               </a:defRPr>
             </a:lvl6pPr>
-            <a:lvl7pPr indent="0" lvl="6" marL="0" marR="0" algn="r">
+            <a:lvl7pPr marL="0" marR="0" lvl="6" indent="0" algn="r">
               <a:lnSpc>
                 <a:spcPct val="100000"/>
               </a:lnSpc>
@@ -5352,7 +5479,7 @@
               <a:buSzPts val="2287"/>
               <a:buFont typeface="Arial"/>
               <a:buNone/>
-              <a:defRPr b="0" i="0" sz="2287" u="none" cap="none" strike="noStrike">
+              <a:defRPr sz="2287" b="0" i="0" u="none" strike="noStrike" cap="none">
                 <a:solidFill>
                   <a:srgbClr val="888888"/>
                 </a:solidFill>
@@ -5362,7 +5489,7 @@
                 <a:sym typeface="Calibri"/>
               </a:defRPr>
             </a:lvl7pPr>
-            <a:lvl8pPr indent="0" lvl="7" marL="0" marR="0" algn="r">
+            <a:lvl8pPr marL="0" marR="0" lvl="7" indent="0" algn="r">
               <a:lnSpc>
                 <a:spcPct val="100000"/>
               </a:lnSpc>
@@ -5378,7 +5505,7 @@
               <a:buSzPts val="2287"/>
               <a:buFont typeface="Arial"/>
               <a:buNone/>
-              <a:defRPr b="0" i="0" sz="2287" u="none" cap="none" strike="noStrike">
+              <a:defRPr sz="2287" b="0" i="0" u="none" strike="noStrike" cap="none">
                 <a:solidFill>
                   <a:srgbClr val="888888"/>
                 </a:solidFill>
@@ -5388,7 +5515,7 @@
                 <a:sym typeface="Calibri"/>
               </a:defRPr>
             </a:lvl8pPr>
-            <a:lvl9pPr indent="0" lvl="8" marL="0" marR="0" algn="r">
+            <a:lvl9pPr marL="0" marR="0" lvl="8" indent="0" algn="r">
               <a:lnSpc>
                 <a:spcPct val="100000"/>
               </a:lnSpc>
@@ -5404,7 +5531,7 @@
               <a:buSzPts val="2287"/>
               <a:buFont typeface="Arial"/>
               <a:buNone/>
-              <a:defRPr b="0" i="0" sz="2287" u="none" cap="none" strike="noStrike">
+              <a:defRPr sz="2287" b="0" i="0" u="none" strike="noStrike" cap="none">
                 <a:solidFill>
                   <a:srgbClr val="888888"/>
                 </a:solidFill>
@@ -5416,7 +5543,7 @@
             </a:lvl9pPr>
           </a:lstStyle>
           <a:p>
-            <a:pPr indent="0" lvl="0" marL="0" rtl="0" algn="r">
+            <a:pPr marL="0" lvl="0" indent="0" algn="r" rtl="0">
               <a:spcBef>
                 <a:spcPts val="0"/>
               </a:spcBef>
@@ -5427,7 +5554,7 @@
             </a:pPr>
             <a:fld id="{00000000-1234-1234-1234-123412341234}" type="slidenum">
               <a:rPr lang="en-US"/>
-              <a:t>‹#›</a:t>
+              <a:t>‹nº›</a:t>
             </a:fld>
             <a:endParaRPr/>
           </a:p>
@@ -5442,11 +5569,11 @@
 </file>
 
 <file path=ppt/slideLayouts/slideLayout4.xml><?xml version="1.0" encoding="utf-8"?>
-<p:sldLayout xmlns:a="http://schemas.openxmlformats.org/drawingml/2006/main" xmlns:r="http://schemas.openxmlformats.org/officeDocument/2006/relationships" xmlns:mc="http://schemas.openxmlformats.org/markup-compatibility/2006" xmlns:mv="urn:schemas-microsoft-com:mac:vml" xmlns:p="http://schemas.openxmlformats.org/presentationml/2006/main" xmlns:c="http://schemas.openxmlformats.org/drawingml/2006/chart" xmlns:dgm="http://schemas.openxmlformats.org/drawingml/2006/diagram" xmlns:o="urn:schemas-microsoft-com:office:office" xmlns:v="urn:schemas-microsoft-com:vml" xmlns:pvml="urn:schemas-microsoft-com:office:powerpoint" xmlns:com="http://schemas.openxmlformats.org/drawingml/2006/compatibility" xmlns:p14="http://schemas.microsoft.com/office/powerpoint/2010/main" xmlns:p15="http://schemas.microsoft.com/office/powerpoint/2012/main" xmlns:ahyp="http://schemas.microsoft.com/office/drawing/2018/hyperlinkcolor" matchingName="Section Header" type="secHead">
+<p:sldLayout xmlns:a="http://schemas.openxmlformats.org/drawingml/2006/main" xmlns:r="http://schemas.openxmlformats.org/officeDocument/2006/relationships" xmlns:p="http://schemas.openxmlformats.org/presentationml/2006/main" matchingName="Section Header" type="secHead">
   <p:cSld name="SECTION_HEADER">
     <p:spTree>
       <p:nvGrpSpPr>
-        <p:cNvPr id="27" name="Shape 27"/>
+        <p:cNvPr id="1" name="Shape 27"/>
         <p:cNvGrpSpPr/>
         <p:nvPr/>
       </p:nvGrpSpPr>
@@ -5461,7 +5588,9 @@
       <p:sp>
         <p:nvSpPr>
           <p:cNvPr id="28" name="Google Shape;28;p6"/>
-          <p:cNvSpPr txBox="1"/>
+          <p:cNvSpPr txBox="1">
+            <a:spLocks noGrp="1"/>
+          </p:cNvSpPr>
           <p:nvPr>
             <p:ph type="title"/>
           </p:nvPr>
@@ -5480,7 +5609,7 @@
           </a:ln>
         </p:spPr>
         <p:txBody>
-          <a:bodyPr anchorCtr="0" anchor="t" bIns="45700" lIns="91425" spcFirstLastPara="1" rIns="91425" wrap="square" tIns="45700">
+          <a:bodyPr spcFirstLastPara="1" wrap="square" lIns="91425" tIns="45700" rIns="91425" bIns="45700" anchor="t" anchorCtr="0">
             <a:normAutofit/>
           </a:bodyPr>
           <a:lstStyle>
@@ -5500,7 +5629,7 @@
               <a:buSzPts val="7623"/>
               <a:buFont typeface="Calibri"/>
               <a:buNone/>
-              <a:defRPr b="1" sz="7623" cap="none"/>
+              <a:defRPr sz="7623" b="1" cap="none"/>
             </a:lvl1pPr>
             <a:lvl2pPr lvl="1" algn="l">
               <a:lnSpc>
@@ -5615,15 +5744,19 @@
               <a:defRPr/>
             </a:lvl9pPr>
           </a:lstStyle>
-          <a:p/>
+          <a:p>
+            <a:endParaRPr/>
+          </a:p>
         </p:txBody>
       </p:sp>
       <p:sp>
         <p:nvSpPr>
           <p:cNvPr id="29" name="Google Shape;29;p6"/>
-          <p:cNvSpPr txBox="1"/>
+          <p:cNvSpPr txBox="1">
+            <a:spLocks noGrp="1"/>
+          </p:cNvSpPr>
           <p:nvPr>
-            <p:ph idx="1" type="body"/>
+            <p:ph type="body" idx="1"/>
           </p:nvPr>
         </p:nvSpPr>
         <p:spPr>
@@ -5640,11 +5773,11 @@
           </a:ln>
         </p:spPr>
         <p:txBody>
-          <a:bodyPr anchorCtr="0" anchor="b" bIns="45700" lIns="91425" spcFirstLastPara="1" rIns="91425" wrap="square" tIns="45700">
+          <a:bodyPr spcFirstLastPara="1" wrap="square" lIns="91425" tIns="45700" rIns="91425" bIns="45700" anchor="b" anchorCtr="0">
             <a:normAutofit/>
           </a:bodyPr>
           <a:lstStyle>
-            <a:lvl1pPr indent="-228600" lvl="0" marL="457200" algn="l">
+            <a:lvl1pPr marL="457200" lvl="0" indent="-228600" algn="l">
               <a:lnSpc>
                 <a:spcPct val="100000"/>
               </a:lnSpc>
@@ -5665,7 +5798,7 @@
                 </a:solidFill>
               </a:defRPr>
             </a:lvl1pPr>
-            <a:lvl2pPr indent="-228600" lvl="1" marL="914400" algn="l">
+            <a:lvl2pPr marL="914400" lvl="1" indent="-228600" algn="l">
               <a:lnSpc>
                 <a:spcPct val="100000"/>
               </a:lnSpc>
@@ -5686,7 +5819,7 @@
                 </a:solidFill>
               </a:defRPr>
             </a:lvl2pPr>
-            <a:lvl3pPr indent="-228600" lvl="2" marL="1371600" algn="l">
+            <a:lvl3pPr marL="1371600" lvl="2" indent="-228600" algn="l">
               <a:lnSpc>
                 <a:spcPct val="100000"/>
               </a:lnSpc>
@@ -5707,7 +5840,7 @@
                 </a:solidFill>
               </a:defRPr>
             </a:lvl3pPr>
-            <a:lvl4pPr indent="-228600" lvl="3" marL="1828800" algn="l">
+            <a:lvl4pPr marL="1828800" lvl="3" indent="-228600" algn="l">
               <a:lnSpc>
                 <a:spcPct val="100000"/>
               </a:lnSpc>
@@ -5728,7 +5861,7 @@
                 </a:solidFill>
               </a:defRPr>
             </a:lvl4pPr>
-            <a:lvl5pPr indent="-228600" lvl="4" marL="2286000" algn="l">
+            <a:lvl5pPr marL="2286000" lvl="4" indent="-228600" algn="l">
               <a:lnSpc>
                 <a:spcPct val="100000"/>
               </a:lnSpc>
@@ -5749,7 +5882,7 @@
                 </a:solidFill>
               </a:defRPr>
             </a:lvl5pPr>
-            <a:lvl6pPr indent="-228600" lvl="5" marL="2743200" algn="l">
+            <a:lvl6pPr marL="2743200" lvl="5" indent="-228600" algn="l">
               <a:lnSpc>
                 <a:spcPct val="100000"/>
               </a:lnSpc>
@@ -5770,7 +5903,7 @@
                 </a:solidFill>
               </a:defRPr>
             </a:lvl6pPr>
-            <a:lvl7pPr indent="-228600" lvl="6" marL="3200400" algn="l">
+            <a:lvl7pPr marL="3200400" lvl="6" indent="-228600" algn="l">
               <a:lnSpc>
                 <a:spcPct val="100000"/>
               </a:lnSpc>
@@ -5791,7 +5924,7 @@
                 </a:solidFill>
               </a:defRPr>
             </a:lvl7pPr>
-            <a:lvl8pPr indent="-228600" lvl="7" marL="3657600" algn="l">
+            <a:lvl8pPr marL="3657600" lvl="7" indent="-228600" algn="l">
               <a:lnSpc>
                 <a:spcPct val="100000"/>
               </a:lnSpc>
@@ -5812,7 +5945,7 @@
                 </a:solidFill>
               </a:defRPr>
             </a:lvl8pPr>
-            <a:lvl9pPr indent="-228600" lvl="8" marL="4114800" algn="l">
+            <a:lvl9pPr marL="4114800" lvl="8" indent="-228600" algn="l">
               <a:lnSpc>
                 <a:spcPct val="100000"/>
               </a:lnSpc>
@@ -5834,15 +5967,19 @@
               </a:defRPr>
             </a:lvl9pPr>
           </a:lstStyle>
-          <a:p/>
+          <a:p>
+            <a:endParaRPr/>
+          </a:p>
         </p:txBody>
       </p:sp>
       <p:sp>
         <p:nvSpPr>
           <p:cNvPr id="30" name="Google Shape;30;p6"/>
-          <p:cNvSpPr txBox="1"/>
+          <p:cNvSpPr txBox="1">
+            <a:spLocks noGrp="1"/>
+          </p:cNvSpPr>
           <p:nvPr>
-            <p:ph idx="10" type="dt"/>
+            <p:ph type="dt" idx="10"/>
           </p:nvPr>
         </p:nvSpPr>
         <p:spPr>
@@ -5859,7 +5996,7 @@
           </a:ln>
         </p:spPr>
         <p:txBody>
-          <a:bodyPr anchorCtr="0" anchor="ctr" bIns="45700" lIns="91425" spcFirstLastPara="1" rIns="91425" wrap="square" tIns="45700">
+          <a:bodyPr spcFirstLastPara="1" wrap="square" lIns="91425" tIns="45700" rIns="91425" bIns="45700" anchor="ctr" anchorCtr="0">
             <a:noAutofit/>
           </a:bodyPr>
           <a:lstStyle>
@@ -5990,15 +6127,19 @@
               <a:defRPr/>
             </a:lvl9pPr>
           </a:lstStyle>
-          <a:p/>
+          <a:p>
+            <a:endParaRPr/>
+          </a:p>
         </p:txBody>
       </p:sp>
       <p:sp>
         <p:nvSpPr>
           <p:cNvPr id="31" name="Google Shape;31;p6"/>
-          <p:cNvSpPr txBox="1"/>
+          <p:cNvSpPr txBox="1">
+            <a:spLocks noGrp="1"/>
+          </p:cNvSpPr>
           <p:nvPr>
-            <p:ph idx="11" type="ftr"/>
+            <p:ph type="ftr" idx="11"/>
           </p:nvPr>
         </p:nvSpPr>
         <p:spPr>
@@ -6015,7 +6156,7 @@
           </a:ln>
         </p:spPr>
         <p:txBody>
-          <a:bodyPr anchorCtr="0" anchor="ctr" bIns="45700" lIns="91425" spcFirstLastPara="1" rIns="91425" wrap="square" tIns="45700">
+          <a:bodyPr spcFirstLastPara="1" wrap="square" lIns="91425" tIns="45700" rIns="91425" bIns="45700" anchor="ctr" anchorCtr="0">
             <a:noAutofit/>
           </a:bodyPr>
           <a:lstStyle>
@@ -6146,15 +6287,19 @@
               <a:defRPr/>
             </a:lvl9pPr>
           </a:lstStyle>
-          <a:p/>
+          <a:p>
+            <a:endParaRPr/>
+          </a:p>
         </p:txBody>
       </p:sp>
       <p:sp>
         <p:nvSpPr>
           <p:cNvPr id="32" name="Google Shape;32;p6"/>
-          <p:cNvSpPr txBox="1"/>
+          <p:cNvSpPr txBox="1">
+            <a:spLocks noGrp="1"/>
+          </p:cNvSpPr>
           <p:nvPr>
-            <p:ph idx="12" type="sldNum"/>
+            <p:ph type="sldNum" idx="12"/>
           </p:nvPr>
         </p:nvSpPr>
         <p:spPr>
@@ -6171,11 +6316,11 @@
           </a:ln>
         </p:spPr>
         <p:txBody>
-          <a:bodyPr anchorCtr="0" anchor="ctr" bIns="45700" lIns="91425" spcFirstLastPara="1" rIns="91425" wrap="square" tIns="45700">
+          <a:bodyPr spcFirstLastPara="1" wrap="square" lIns="91425" tIns="45700" rIns="91425" bIns="45700" anchor="ctr" anchorCtr="0">
             <a:noAutofit/>
           </a:bodyPr>
           <a:lstStyle>
-            <a:lvl1pPr indent="0" lvl="0" marL="0" marR="0" algn="r">
+            <a:lvl1pPr marL="0" marR="0" lvl="0" indent="0" algn="r">
               <a:lnSpc>
                 <a:spcPct val="100000"/>
               </a:lnSpc>
@@ -6191,7 +6336,7 @@
               <a:buSzPts val="2287"/>
               <a:buFont typeface="Arial"/>
               <a:buNone/>
-              <a:defRPr b="0" i="0" sz="2287" u="none" cap="none" strike="noStrike">
+              <a:defRPr sz="2287" b="0" i="0" u="none" strike="noStrike" cap="none">
                 <a:solidFill>
                   <a:srgbClr val="888888"/>
                 </a:solidFill>
@@ -6201,7 +6346,7 @@
                 <a:sym typeface="Calibri"/>
               </a:defRPr>
             </a:lvl1pPr>
-            <a:lvl2pPr indent="0" lvl="1" marL="0" marR="0" algn="r">
+            <a:lvl2pPr marL="0" marR="0" lvl="1" indent="0" algn="r">
               <a:lnSpc>
                 <a:spcPct val="100000"/>
               </a:lnSpc>
@@ -6217,7 +6362,7 @@
               <a:buSzPts val="2287"/>
               <a:buFont typeface="Arial"/>
               <a:buNone/>
-              <a:defRPr b="0" i="0" sz="2287" u="none" cap="none" strike="noStrike">
+              <a:defRPr sz="2287" b="0" i="0" u="none" strike="noStrike" cap="none">
                 <a:solidFill>
                   <a:srgbClr val="888888"/>
                 </a:solidFill>
@@ -6227,7 +6372,7 @@
                 <a:sym typeface="Calibri"/>
               </a:defRPr>
             </a:lvl2pPr>
-            <a:lvl3pPr indent="0" lvl="2" marL="0" marR="0" algn="r">
+            <a:lvl3pPr marL="0" marR="0" lvl="2" indent="0" algn="r">
               <a:lnSpc>
                 <a:spcPct val="100000"/>
               </a:lnSpc>
@@ -6243,7 +6388,7 @@
               <a:buSzPts val="2287"/>
               <a:buFont typeface="Arial"/>
               <a:buNone/>
-              <a:defRPr b="0" i="0" sz="2287" u="none" cap="none" strike="noStrike">
+              <a:defRPr sz="2287" b="0" i="0" u="none" strike="noStrike" cap="none">
                 <a:solidFill>
                   <a:srgbClr val="888888"/>
                 </a:solidFill>
@@ -6253,7 +6398,7 @@
                 <a:sym typeface="Calibri"/>
               </a:defRPr>
             </a:lvl3pPr>
-            <a:lvl4pPr indent="0" lvl="3" marL="0" marR="0" algn="r">
+            <a:lvl4pPr marL="0" marR="0" lvl="3" indent="0" algn="r">
               <a:lnSpc>
                 <a:spcPct val="100000"/>
               </a:lnSpc>
@@ -6269,7 +6414,7 @@
               <a:buSzPts val="2287"/>
               <a:buFont typeface="Arial"/>
               <a:buNone/>
-              <a:defRPr b="0" i="0" sz="2287" u="none" cap="none" strike="noStrike">
+              <a:defRPr sz="2287" b="0" i="0" u="none" strike="noStrike" cap="none">
                 <a:solidFill>
                   <a:srgbClr val="888888"/>
                 </a:solidFill>
@@ -6279,7 +6424,7 @@
                 <a:sym typeface="Calibri"/>
               </a:defRPr>
             </a:lvl4pPr>
-            <a:lvl5pPr indent="0" lvl="4" marL="0" marR="0" algn="r">
+            <a:lvl5pPr marL="0" marR="0" lvl="4" indent="0" algn="r">
               <a:lnSpc>
                 <a:spcPct val="100000"/>
               </a:lnSpc>
@@ -6295,7 +6440,7 @@
               <a:buSzPts val="2287"/>
               <a:buFont typeface="Arial"/>
               <a:buNone/>
-              <a:defRPr b="0" i="0" sz="2287" u="none" cap="none" strike="noStrike">
+              <a:defRPr sz="2287" b="0" i="0" u="none" strike="noStrike" cap="none">
                 <a:solidFill>
                   <a:srgbClr val="888888"/>
                 </a:solidFill>
@@ -6305,7 +6450,7 @@
                 <a:sym typeface="Calibri"/>
               </a:defRPr>
             </a:lvl5pPr>
-            <a:lvl6pPr indent="0" lvl="5" marL="0" marR="0" algn="r">
+            <a:lvl6pPr marL="0" marR="0" lvl="5" indent="0" algn="r">
               <a:lnSpc>
                 <a:spcPct val="100000"/>
               </a:lnSpc>
@@ -6321,7 +6466,7 @@
               <a:buSzPts val="2287"/>
               <a:buFont typeface="Arial"/>
               <a:buNone/>
-              <a:defRPr b="0" i="0" sz="2287" u="none" cap="none" strike="noStrike">
+              <a:defRPr sz="2287" b="0" i="0" u="none" strike="noStrike" cap="none">
                 <a:solidFill>
                   <a:srgbClr val="888888"/>
                 </a:solidFill>
@@ -6331,7 +6476,7 @@
                 <a:sym typeface="Calibri"/>
               </a:defRPr>
             </a:lvl6pPr>
-            <a:lvl7pPr indent="0" lvl="6" marL="0" marR="0" algn="r">
+            <a:lvl7pPr marL="0" marR="0" lvl="6" indent="0" algn="r">
               <a:lnSpc>
                 <a:spcPct val="100000"/>
               </a:lnSpc>
@@ -6347,7 +6492,7 @@
               <a:buSzPts val="2287"/>
               <a:buFont typeface="Arial"/>
               <a:buNone/>
-              <a:defRPr b="0" i="0" sz="2287" u="none" cap="none" strike="noStrike">
+              <a:defRPr sz="2287" b="0" i="0" u="none" strike="noStrike" cap="none">
                 <a:solidFill>
                   <a:srgbClr val="888888"/>
                 </a:solidFill>
@@ -6357,7 +6502,7 @@
                 <a:sym typeface="Calibri"/>
               </a:defRPr>
             </a:lvl7pPr>
-            <a:lvl8pPr indent="0" lvl="7" marL="0" marR="0" algn="r">
+            <a:lvl8pPr marL="0" marR="0" lvl="7" indent="0" algn="r">
               <a:lnSpc>
                 <a:spcPct val="100000"/>
               </a:lnSpc>
@@ -6373,7 +6518,7 @@
               <a:buSzPts val="2287"/>
               <a:buFont typeface="Arial"/>
               <a:buNone/>
-              <a:defRPr b="0" i="0" sz="2287" u="none" cap="none" strike="noStrike">
+              <a:defRPr sz="2287" b="0" i="0" u="none" strike="noStrike" cap="none">
                 <a:solidFill>
                   <a:srgbClr val="888888"/>
                 </a:solidFill>
@@ -6383,7 +6528,7 @@
                 <a:sym typeface="Calibri"/>
               </a:defRPr>
             </a:lvl8pPr>
-            <a:lvl9pPr indent="0" lvl="8" marL="0" marR="0" algn="r">
+            <a:lvl9pPr marL="0" marR="0" lvl="8" indent="0" algn="r">
               <a:lnSpc>
                 <a:spcPct val="100000"/>
               </a:lnSpc>
@@ -6399,7 +6544,7 @@
               <a:buSzPts val="2287"/>
               <a:buFont typeface="Arial"/>
               <a:buNone/>
-              <a:defRPr b="0" i="0" sz="2287" u="none" cap="none" strike="noStrike">
+              <a:defRPr sz="2287" b="0" i="0" u="none" strike="noStrike" cap="none">
                 <a:solidFill>
                   <a:srgbClr val="888888"/>
                 </a:solidFill>
@@ -6411,7 +6556,7 @@
             </a:lvl9pPr>
           </a:lstStyle>
           <a:p>
-            <a:pPr indent="0" lvl="0" marL="0" rtl="0" algn="r">
+            <a:pPr marL="0" lvl="0" indent="0" algn="r" rtl="0">
               <a:spcBef>
                 <a:spcPts val="0"/>
               </a:spcBef>
@@ -6422,7 +6567,7 @@
             </a:pPr>
             <a:fld id="{00000000-1234-1234-1234-123412341234}" type="slidenum">
               <a:rPr lang="en-US"/>
-              <a:t>‹#›</a:t>
+              <a:t>‹nº›</a:t>
             </a:fld>
             <a:endParaRPr/>
           </a:p>
@@ -6437,11 +6582,11 @@
 </file>
 
 <file path=ppt/slideLayouts/slideLayout5.xml><?xml version="1.0" encoding="utf-8"?>
-<p:sldLayout xmlns:a="http://schemas.openxmlformats.org/drawingml/2006/main" xmlns:r="http://schemas.openxmlformats.org/officeDocument/2006/relationships" xmlns:mc="http://schemas.openxmlformats.org/markup-compatibility/2006" xmlns:mv="urn:schemas-microsoft-com:mac:vml" xmlns:p="http://schemas.openxmlformats.org/presentationml/2006/main" xmlns:c="http://schemas.openxmlformats.org/drawingml/2006/chart" xmlns:dgm="http://schemas.openxmlformats.org/drawingml/2006/diagram" xmlns:o="urn:schemas-microsoft-com:office:office" xmlns:v="urn:schemas-microsoft-com:vml" xmlns:pvml="urn:schemas-microsoft-com:office:powerpoint" xmlns:com="http://schemas.openxmlformats.org/drawingml/2006/compatibility" xmlns:p14="http://schemas.microsoft.com/office/powerpoint/2010/main" xmlns:p15="http://schemas.microsoft.com/office/powerpoint/2012/main" xmlns:ahyp="http://schemas.microsoft.com/office/drawing/2018/hyperlinkcolor" matchingName="Two Content" type="twoObj">
+<p:sldLayout xmlns:a="http://schemas.openxmlformats.org/drawingml/2006/main" xmlns:r="http://schemas.openxmlformats.org/officeDocument/2006/relationships" xmlns:p="http://schemas.openxmlformats.org/presentationml/2006/main" matchingName="Two Content" type="twoObj">
   <p:cSld name="TWO_OBJECTS">
     <p:spTree>
       <p:nvGrpSpPr>
-        <p:cNvPr id="33" name="Shape 33"/>
+        <p:cNvPr id="1" name="Shape 33"/>
         <p:cNvGrpSpPr/>
         <p:nvPr/>
       </p:nvGrpSpPr>
@@ -6456,7 +6601,9 @@
       <p:sp>
         <p:nvSpPr>
           <p:cNvPr id="34" name="Google Shape;34;p7"/>
-          <p:cNvSpPr txBox="1"/>
+          <p:cNvSpPr txBox="1">
+            <a:spLocks noGrp="1"/>
+          </p:cNvSpPr>
           <p:nvPr>
             <p:ph type="title"/>
           </p:nvPr>
@@ -6475,7 +6622,7 @@
           </a:ln>
         </p:spPr>
         <p:txBody>
-          <a:bodyPr anchorCtr="0" anchor="ctr" bIns="45700" lIns="91425" spcFirstLastPara="1" rIns="91425" wrap="square" tIns="45700">
+          <a:bodyPr spcFirstLastPara="1" wrap="square" lIns="91425" tIns="45700" rIns="91425" bIns="45700" anchor="ctr" anchorCtr="0">
             <a:normAutofit/>
           </a:bodyPr>
           <a:lstStyle>
@@ -6609,15 +6756,19 @@
               <a:defRPr/>
             </a:lvl9pPr>
           </a:lstStyle>
-          <a:p/>
+          <a:p>
+            <a:endParaRPr/>
+          </a:p>
         </p:txBody>
       </p:sp>
       <p:sp>
         <p:nvSpPr>
           <p:cNvPr id="35" name="Google Shape;35;p7"/>
-          <p:cNvSpPr txBox="1"/>
+          <p:cNvSpPr txBox="1">
+            <a:spLocks noGrp="1"/>
+          </p:cNvSpPr>
           <p:nvPr>
-            <p:ph idx="1" type="body"/>
+            <p:ph type="body" idx="1"/>
           </p:nvPr>
         </p:nvSpPr>
         <p:spPr>
@@ -6634,11 +6785,11 @@
           </a:ln>
         </p:spPr>
         <p:txBody>
-          <a:bodyPr anchorCtr="0" anchor="t" bIns="45700" lIns="91425" spcFirstLastPara="1" rIns="91425" wrap="square" tIns="45700">
+          <a:bodyPr spcFirstLastPara="1" wrap="square" lIns="91425" tIns="45700" rIns="91425" bIns="45700" anchor="t" anchorCtr="0">
             <a:normAutofit/>
           </a:bodyPr>
           <a:lstStyle>
-            <a:lvl1pPr indent="-567436" lvl="0" marL="457200" algn="l">
+            <a:lvl1pPr marL="457200" lvl="0" indent="-567436" algn="l">
               <a:lnSpc>
                 <a:spcPct val="100000"/>
               </a:lnSpc>
@@ -6655,7 +6806,7 @@
               <a:buChar char="•"/>
               <a:defRPr sz="5336"/>
             </a:lvl1pPr>
-            <a:lvl2pPr indent="-519049" lvl="1" marL="914400" algn="l">
+            <a:lvl2pPr marL="914400" lvl="1" indent="-519049" algn="l">
               <a:lnSpc>
                 <a:spcPct val="100000"/>
               </a:lnSpc>
@@ -6672,7 +6823,7 @@
               <a:buChar char="–"/>
               <a:defRPr sz="4574"/>
             </a:lvl2pPr>
-            <a:lvl3pPr indent="-470599" lvl="2" marL="1371600" algn="l">
+            <a:lvl3pPr marL="1371600" lvl="2" indent="-470599" algn="l">
               <a:lnSpc>
                 <a:spcPct val="100000"/>
               </a:lnSpc>
@@ -6689,7 +6840,7 @@
               <a:buChar char="•"/>
               <a:defRPr sz="3811"/>
             </a:lvl3pPr>
-            <a:lvl4pPr indent="-446405" lvl="3" marL="1828800" algn="l">
+            <a:lvl4pPr marL="1828800" lvl="3" indent="-446405" algn="l">
               <a:lnSpc>
                 <a:spcPct val="100000"/>
               </a:lnSpc>
@@ -6706,7 +6857,7 @@
               <a:buChar char="–"/>
               <a:defRPr sz="3430"/>
             </a:lvl4pPr>
-            <a:lvl5pPr indent="-446405" lvl="4" marL="2286000" algn="l">
+            <a:lvl5pPr marL="2286000" lvl="4" indent="-446405" algn="l">
               <a:lnSpc>
                 <a:spcPct val="100000"/>
               </a:lnSpc>
@@ -6723,7 +6874,7 @@
               <a:buChar char="»"/>
               <a:defRPr sz="3430"/>
             </a:lvl5pPr>
-            <a:lvl6pPr indent="-446405" lvl="5" marL="2743200" algn="l">
+            <a:lvl6pPr marL="2743200" lvl="5" indent="-446405" algn="l">
               <a:lnSpc>
                 <a:spcPct val="100000"/>
               </a:lnSpc>
@@ -6740,7 +6891,7 @@
               <a:buChar char="•"/>
               <a:defRPr sz="3430"/>
             </a:lvl6pPr>
-            <a:lvl7pPr indent="-446405" lvl="6" marL="3200400" algn="l">
+            <a:lvl7pPr marL="3200400" lvl="6" indent="-446405" algn="l">
               <a:lnSpc>
                 <a:spcPct val="100000"/>
               </a:lnSpc>
@@ -6757,7 +6908,7 @@
               <a:buChar char="•"/>
               <a:defRPr sz="3430"/>
             </a:lvl7pPr>
-            <a:lvl8pPr indent="-446405" lvl="7" marL="3657600" algn="l">
+            <a:lvl8pPr marL="3657600" lvl="7" indent="-446405" algn="l">
               <a:lnSpc>
                 <a:spcPct val="100000"/>
               </a:lnSpc>
@@ -6774,7 +6925,7 @@
               <a:buChar char="•"/>
               <a:defRPr sz="3430"/>
             </a:lvl8pPr>
-            <a:lvl9pPr indent="-446405" lvl="8" marL="4114800" algn="l">
+            <a:lvl9pPr marL="4114800" lvl="8" indent="-446405" algn="l">
               <a:lnSpc>
                 <a:spcPct val="100000"/>
               </a:lnSpc>
@@ -6792,15 +6943,19 @@
               <a:defRPr sz="3430"/>
             </a:lvl9pPr>
           </a:lstStyle>
-          <a:p/>
+          <a:p>
+            <a:endParaRPr/>
+          </a:p>
         </p:txBody>
       </p:sp>
       <p:sp>
         <p:nvSpPr>
           <p:cNvPr id="36" name="Google Shape;36;p7"/>
-          <p:cNvSpPr txBox="1"/>
+          <p:cNvSpPr txBox="1">
+            <a:spLocks noGrp="1"/>
+          </p:cNvSpPr>
           <p:nvPr>
-            <p:ph idx="2" type="body"/>
+            <p:ph type="body" idx="2"/>
           </p:nvPr>
         </p:nvSpPr>
         <p:spPr>
@@ -6817,11 +6972,11 @@
           </a:ln>
         </p:spPr>
         <p:txBody>
-          <a:bodyPr anchorCtr="0" anchor="t" bIns="45700" lIns="91425" spcFirstLastPara="1" rIns="91425" wrap="square" tIns="45700">
+          <a:bodyPr spcFirstLastPara="1" wrap="square" lIns="91425" tIns="45700" rIns="91425" bIns="45700" anchor="t" anchorCtr="0">
             <a:normAutofit/>
           </a:bodyPr>
           <a:lstStyle>
-            <a:lvl1pPr indent="-567436" lvl="0" marL="457200" algn="l">
+            <a:lvl1pPr marL="457200" lvl="0" indent="-567436" algn="l">
               <a:lnSpc>
                 <a:spcPct val="100000"/>
               </a:lnSpc>
@@ -6838,7 +6993,7 @@
               <a:buChar char="•"/>
               <a:defRPr sz="5336"/>
             </a:lvl1pPr>
-            <a:lvl2pPr indent="-519049" lvl="1" marL="914400" algn="l">
+            <a:lvl2pPr marL="914400" lvl="1" indent="-519049" algn="l">
               <a:lnSpc>
                 <a:spcPct val="100000"/>
               </a:lnSpc>
@@ -6855,7 +7010,7 @@
               <a:buChar char="–"/>
               <a:defRPr sz="4574"/>
             </a:lvl2pPr>
-            <a:lvl3pPr indent="-470599" lvl="2" marL="1371600" algn="l">
+            <a:lvl3pPr marL="1371600" lvl="2" indent="-470599" algn="l">
               <a:lnSpc>
                 <a:spcPct val="100000"/>
               </a:lnSpc>
@@ -6872,7 +7027,7 @@
               <a:buChar char="•"/>
               <a:defRPr sz="3811"/>
             </a:lvl3pPr>
-            <a:lvl4pPr indent="-446405" lvl="3" marL="1828800" algn="l">
+            <a:lvl4pPr marL="1828800" lvl="3" indent="-446405" algn="l">
               <a:lnSpc>
                 <a:spcPct val="100000"/>
               </a:lnSpc>
@@ -6889,7 +7044,7 @@
               <a:buChar char="–"/>
               <a:defRPr sz="3430"/>
             </a:lvl4pPr>
-            <a:lvl5pPr indent="-446405" lvl="4" marL="2286000" algn="l">
+            <a:lvl5pPr marL="2286000" lvl="4" indent="-446405" algn="l">
               <a:lnSpc>
                 <a:spcPct val="100000"/>
               </a:lnSpc>
@@ -6906,7 +7061,7 @@
               <a:buChar char="»"/>
               <a:defRPr sz="3430"/>
             </a:lvl5pPr>
-            <a:lvl6pPr indent="-446405" lvl="5" marL="2743200" algn="l">
+            <a:lvl6pPr marL="2743200" lvl="5" indent="-446405" algn="l">
               <a:lnSpc>
                 <a:spcPct val="100000"/>
               </a:lnSpc>
@@ -6923,7 +7078,7 @@
               <a:buChar char="•"/>
               <a:defRPr sz="3430"/>
             </a:lvl6pPr>
-            <a:lvl7pPr indent="-446405" lvl="6" marL="3200400" algn="l">
+            <a:lvl7pPr marL="3200400" lvl="6" indent="-446405" algn="l">
               <a:lnSpc>
                 <a:spcPct val="100000"/>
               </a:lnSpc>
@@ -6940,7 +7095,7 @@
               <a:buChar char="•"/>
               <a:defRPr sz="3430"/>
             </a:lvl7pPr>
-            <a:lvl8pPr indent="-446405" lvl="7" marL="3657600" algn="l">
+            <a:lvl8pPr marL="3657600" lvl="7" indent="-446405" algn="l">
               <a:lnSpc>
                 <a:spcPct val="100000"/>
               </a:lnSpc>
@@ -6957,7 +7112,7 @@
               <a:buChar char="•"/>
               <a:defRPr sz="3430"/>
             </a:lvl8pPr>
-            <a:lvl9pPr indent="-446405" lvl="8" marL="4114800" algn="l">
+            <a:lvl9pPr marL="4114800" lvl="8" indent="-446405" algn="l">
               <a:lnSpc>
                 <a:spcPct val="100000"/>
               </a:lnSpc>
@@ -6975,15 +7130,19 @@
               <a:defRPr sz="3430"/>
             </a:lvl9pPr>
           </a:lstStyle>
-          <a:p/>
+          <a:p>
+            <a:endParaRPr/>
+          </a:p>
         </p:txBody>
       </p:sp>
       <p:sp>
         <p:nvSpPr>
           <p:cNvPr id="37" name="Google Shape;37;p7"/>
-          <p:cNvSpPr txBox="1"/>
+          <p:cNvSpPr txBox="1">
+            <a:spLocks noGrp="1"/>
+          </p:cNvSpPr>
           <p:nvPr>
-            <p:ph idx="10" type="dt"/>
+            <p:ph type="dt" idx="10"/>
           </p:nvPr>
         </p:nvSpPr>
         <p:spPr>
@@ -7000,7 +7159,7 @@
           </a:ln>
         </p:spPr>
         <p:txBody>
-          <a:bodyPr anchorCtr="0" anchor="ctr" bIns="45700" lIns="91425" spcFirstLastPara="1" rIns="91425" wrap="square" tIns="45700">
+          <a:bodyPr spcFirstLastPara="1" wrap="square" lIns="91425" tIns="45700" rIns="91425" bIns="45700" anchor="ctr" anchorCtr="0">
             <a:noAutofit/>
           </a:bodyPr>
           <a:lstStyle>
@@ -7131,15 +7290,19 @@
               <a:defRPr/>
             </a:lvl9pPr>
           </a:lstStyle>
-          <a:p/>
+          <a:p>
+            <a:endParaRPr/>
+          </a:p>
         </p:txBody>
       </p:sp>
       <p:sp>
         <p:nvSpPr>
           <p:cNvPr id="38" name="Google Shape;38;p7"/>
-          <p:cNvSpPr txBox="1"/>
+          <p:cNvSpPr txBox="1">
+            <a:spLocks noGrp="1"/>
+          </p:cNvSpPr>
           <p:nvPr>
-            <p:ph idx="11" type="ftr"/>
+            <p:ph type="ftr" idx="11"/>
           </p:nvPr>
         </p:nvSpPr>
         <p:spPr>
@@ -7156,7 +7319,7 @@
           </a:ln>
         </p:spPr>
         <p:txBody>
-          <a:bodyPr anchorCtr="0" anchor="ctr" bIns="45700" lIns="91425" spcFirstLastPara="1" rIns="91425" wrap="square" tIns="45700">
+          <a:bodyPr spcFirstLastPara="1" wrap="square" lIns="91425" tIns="45700" rIns="91425" bIns="45700" anchor="ctr" anchorCtr="0">
             <a:noAutofit/>
           </a:bodyPr>
           <a:lstStyle>
@@ -7287,15 +7450,19 @@
               <a:defRPr/>
             </a:lvl9pPr>
           </a:lstStyle>
-          <a:p/>
+          <a:p>
+            <a:endParaRPr/>
+          </a:p>
         </p:txBody>
       </p:sp>
       <p:sp>
         <p:nvSpPr>
           <p:cNvPr id="39" name="Google Shape;39;p7"/>
-          <p:cNvSpPr txBox="1"/>
+          <p:cNvSpPr txBox="1">
+            <a:spLocks noGrp="1"/>
+          </p:cNvSpPr>
           <p:nvPr>
-            <p:ph idx="12" type="sldNum"/>
+            <p:ph type="sldNum" idx="12"/>
           </p:nvPr>
         </p:nvSpPr>
         <p:spPr>
@@ -7312,11 +7479,11 @@
           </a:ln>
         </p:spPr>
         <p:txBody>
-          <a:bodyPr anchorCtr="0" anchor="ctr" bIns="45700" lIns="91425" spcFirstLastPara="1" rIns="91425" wrap="square" tIns="45700">
+          <a:bodyPr spcFirstLastPara="1" wrap="square" lIns="91425" tIns="45700" rIns="91425" bIns="45700" anchor="ctr" anchorCtr="0">
             <a:noAutofit/>
           </a:bodyPr>
           <a:lstStyle>
-            <a:lvl1pPr indent="0" lvl="0" marL="0" marR="0" algn="r">
+            <a:lvl1pPr marL="0" marR="0" lvl="0" indent="0" algn="r">
               <a:lnSpc>
                 <a:spcPct val="100000"/>
               </a:lnSpc>
@@ -7332,7 +7499,7 @@
               <a:buSzPts val="2287"/>
               <a:buFont typeface="Arial"/>
               <a:buNone/>
-              <a:defRPr b="0" i="0" sz="2287" u="none" cap="none" strike="noStrike">
+              <a:defRPr sz="2287" b="0" i="0" u="none" strike="noStrike" cap="none">
                 <a:solidFill>
                   <a:srgbClr val="888888"/>
                 </a:solidFill>
@@ -7342,7 +7509,7 @@
                 <a:sym typeface="Calibri"/>
               </a:defRPr>
             </a:lvl1pPr>
-            <a:lvl2pPr indent="0" lvl="1" marL="0" marR="0" algn="r">
+            <a:lvl2pPr marL="0" marR="0" lvl="1" indent="0" algn="r">
               <a:lnSpc>
                 <a:spcPct val="100000"/>
               </a:lnSpc>
@@ -7358,7 +7525,7 @@
               <a:buSzPts val="2287"/>
               <a:buFont typeface="Arial"/>
               <a:buNone/>
-              <a:defRPr b="0" i="0" sz="2287" u="none" cap="none" strike="noStrike">
+              <a:defRPr sz="2287" b="0" i="0" u="none" strike="noStrike" cap="none">
                 <a:solidFill>
                   <a:srgbClr val="888888"/>
                 </a:solidFill>
@@ -7368,7 +7535,7 @@
                 <a:sym typeface="Calibri"/>
               </a:defRPr>
             </a:lvl2pPr>
-            <a:lvl3pPr indent="0" lvl="2" marL="0" marR="0" algn="r">
+            <a:lvl3pPr marL="0" marR="0" lvl="2" indent="0" algn="r">
               <a:lnSpc>
                 <a:spcPct val="100000"/>
               </a:lnSpc>
@@ -7384,7 +7551,7 @@
               <a:buSzPts val="2287"/>
               <a:buFont typeface="Arial"/>
               <a:buNone/>
-              <a:defRPr b="0" i="0" sz="2287" u="none" cap="none" strike="noStrike">
+              <a:defRPr sz="2287" b="0" i="0" u="none" strike="noStrike" cap="none">
                 <a:solidFill>
                   <a:srgbClr val="888888"/>
                 </a:solidFill>
@@ -7394,7 +7561,7 @@
                 <a:sym typeface="Calibri"/>
               </a:defRPr>
             </a:lvl3pPr>
-            <a:lvl4pPr indent="0" lvl="3" marL="0" marR="0" algn="r">
+            <a:lvl4pPr marL="0" marR="0" lvl="3" indent="0" algn="r">
               <a:lnSpc>
                 <a:spcPct val="100000"/>
               </a:lnSpc>
@@ -7410,7 +7577,7 @@
               <a:buSzPts val="2287"/>
               <a:buFont typeface="Arial"/>
               <a:buNone/>
-              <a:defRPr b="0" i="0" sz="2287" u="none" cap="none" strike="noStrike">
+              <a:defRPr sz="2287" b="0" i="0" u="none" strike="noStrike" cap="none">
                 <a:solidFill>
                   <a:srgbClr val="888888"/>
                 </a:solidFill>
@@ -7420,7 +7587,7 @@
                 <a:sym typeface="Calibri"/>
               </a:defRPr>
             </a:lvl4pPr>
-            <a:lvl5pPr indent="0" lvl="4" marL="0" marR="0" algn="r">
+            <a:lvl5pPr marL="0" marR="0" lvl="4" indent="0" algn="r">
               <a:lnSpc>
                 <a:spcPct val="100000"/>
               </a:lnSpc>
@@ -7436,7 +7603,7 @@
               <a:buSzPts val="2287"/>
               <a:buFont typeface="Arial"/>
               <a:buNone/>
-              <a:defRPr b="0" i="0" sz="2287" u="none" cap="none" strike="noStrike">
+              <a:defRPr sz="2287" b="0" i="0" u="none" strike="noStrike" cap="none">
                 <a:solidFill>
                   <a:srgbClr val="888888"/>
                 </a:solidFill>
@@ -7446,7 +7613,7 @@
                 <a:sym typeface="Calibri"/>
               </a:defRPr>
             </a:lvl5pPr>
-            <a:lvl6pPr indent="0" lvl="5" marL="0" marR="0" algn="r">
+            <a:lvl6pPr marL="0" marR="0" lvl="5" indent="0" algn="r">
               <a:lnSpc>
                 <a:spcPct val="100000"/>
               </a:lnSpc>
@@ -7462,7 +7629,7 @@
               <a:buSzPts val="2287"/>
               <a:buFont typeface="Arial"/>
               <a:buNone/>
-              <a:defRPr b="0" i="0" sz="2287" u="none" cap="none" strike="noStrike">
+              <a:defRPr sz="2287" b="0" i="0" u="none" strike="noStrike" cap="none">
                 <a:solidFill>
                   <a:srgbClr val="888888"/>
                 </a:solidFill>
@@ -7472,7 +7639,7 @@
                 <a:sym typeface="Calibri"/>
               </a:defRPr>
             </a:lvl6pPr>
-            <a:lvl7pPr indent="0" lvl="6" marL="0" marR="0" algn="r">
+            <a:lvl7pPr marL="0" marR="0" lvl="6" indent="0" algn="r">
               <a:lnSpc>
                 <a:spcPct val="100000"/>
               </a:lnSpc>
@@ -7488,7 +7655,7 @@
               <a:buSzPts val="2287"/>
               <a:buFont typeface="Arial"/>
               <a:buNone/>
-              <a:defRPr b="0" i="0" sz="2287" u="none" cap="none" strike="noStrike">
+              <a:defRPr sz="2287" b="0" i="0" u="none" strike="noStrike" cap="none">
                 <a:solidFill>
                   <a:srgbClr val="888888"/>
                 </a:solidFill>
@@ -7498,7 +7665,7 @@
                 <a:sym typeface="Calibri"/>
               </a:defRPr>
             </a:lvl7pPr>
-            <a:lvl8pPr indent="0" lvl="7" marL="0" marR="0" algn="r">
+            <a:lvl8pPr marL="0" marR="0" lvl="7" indent="0" algn="r">
               <a:lnSpc>
                 <a:spcPct val="100000"/>
               </a:lnSpc>
@@ -7514,7 +7681,7 @@
               <a:buSzPts val="2287"/>
               <a:buFont typeface="Arial"/>
               <a:buNone/>
-              <a:defRPr b="0" i="0" sz="2287" u="none" cap="none" strike="noStrike">
+              <a:defRPr sz="2287" b="0" i="0" u="none" strike="noStrike" cap="none">
                 <a:solidFill>
                   <a:srgbClr val="888888"/>
                 </a:solidFill>
@@ -7524,7 +7691,7 @@
                 <a:sym typeface="Calibri"/>
               </a:defRPr>
             </a:lvl8pPr>
-            <a:lvl9pPr indent="0" lvl="8" marL="0" marR="0" algn="r">
+            <a:lvl9pPr marL="0" marR="0" lvl="8" indent="0" algn="r">
               <a:lnSpc>
                 <a:spcPct val="100000"/>
               </a:lnSpc>
@@ -7540,7 +7707,7 @@
               <a:buSzPts val="2287"/>
               <a:buFont typeface="Arial"/>
               <a:buNone/>
-              <a:defRPr b="0" i="0" sz="2287" u="none" cap="none" strike="noStrike">
+              <a:defRPr sz="2287" b="0" i="0" u="none" strike="noStrike" cap="none">
                 <a:solidFill>
                   <a:srgbClr val="888888"/>
                 </a:solidFill>
@@ -7552,7 +7719,7 @@
             </a:lvl9pPr>
           </a:lstStyle>
           <a:p>
-            <a:pPr indent="0" lvl="0" marL="0" rtl="0" algn="r">
+            <a:pPr marL="0" lvl="0" indent="0" algn="r" rtl="0">
               <a:spcBef>
                 <a:spcPts val="0"/>
               </a:spcBef>
@@ -7563,7 +7730,7 @@
             </a:pPr>
             <a:fld id="{00000000-1234-1234-1234-123412341234}" type="slidenum">
               <a:rPr lang="en-US"/>
-              <a:t>‹#›</a:t>
+              <a:t>‹nº›</a:t>
             </a:fld>
             <a:endParaRPr/>
           </a:p>
@@ -7578,11 +7745,11 @@
 </file>
 
 <file path=ppt/slideLayouts/slideLayout6.xml><?xml version="1.0" encoding="utf-8"?>
-<p:sldLayout xmlns:a="http://schemas.openxmlformats.org/drawingml/2006/main" xmlns:r="http://schemas.openxmlformats.org/officeDocument/2006/relationships" xmlns:mc="http://schemas.openxmlformats.org/markup-compatibility/2006" xmlns:mv="urn:schemas-microsoft-com:mac:vml" xmlns:p="http://schemas.openxmlformats.org/presentationml/2006/main" xmlns:c="http://schemas.openxmlformats.org/drawingml/2006/chart" xmlns:dgm="http://schemas.openxmlformats.org/drawingml/2006/diagram" xmlns:o="urn:schemas-microsoft-com:office:office" xmlns:v="urn:schemas-microsoft-com:vml" xmlns:pvml="urn:schemas-microsoft-com:office:powerpoint" xmlns:com="http://schemas.openxmlformats.org/drawingml/2006/compatibility" xmlns:p14="http://schemas.microsoft.com/office/powerpoint/2010/main" xmlns:p15="http://schemas.microsoft.com/office/powerpoint/2012/main" xmlns:ahyp="http://schemas.microsoft.com/office/drawing/2018/hyperlinkcolor" matchingName="Comparison" type="twoTxTwoObj">
+<p:sldLayout xmlns:a="http://schemas.openxmlformats.org/drawingml/2006/main" xmlns:r="http://schemas.openxmlformats.org/officeDocument/2006/relationships" xmlns:p="http://schemas.openxmlformats.org/presentationml/2006/main" matchingName="Comparison" type="twoTxTwoObj">
   <p:cSld name="TWO_OBJECTS_WITH_TEXT">
     <p:spTree>
       <p:nvGrpSpPr>
-        <p:cNvPr id="40" name="Shape 40"/>
+        <p:cNvPr id="1" name="Shape 40"/>
         <p:cNvGrpSpPr/>
         <p:nvPr/>
       </p:nvGrpSpPr>
@@ -7597,7 +7764,9 @@
       <p:sp>
         <p:nvSpPr>
           <p:cNvPr id="41" name="Google Shape;41;p8"/>
-          <p:cNvSpPr txBox="1"/>
+          <p:cNvSpPr txBox="1">
+            <a:spLocks noGrp="1"/>
+          </p:cNvSpPr>
           <p:nvPr>
             <p:ph type="title"/>
           </p:nvPr>
@@ -7616,7 +7785,7 @@
           </a:ln>
         </p:spPr>
         <p:txBody>
-          <a:bodyPr anchorCtr="0" anchor="ctr" bIns="45700" lIns="91425" spcFirstLastPara="1" rIns="91425" wrap="square" tIns="45700">
+          <a:bodyPr spcFirstLastPara="1" wrap="square" lIns="91425" tIns="45700" rIns="91425" bIns="45700" anchor="ctr" anchorCtr="0">
             <a:normAutofit/>
           </a:bodyPr>
           <a:lstStyle>
@@ -7751,15 +7920,19 @@
               <a:defRPr/>
             </a:lvl9pPr>
           </a:lstStyle>
-          <a:p/>
+          <a:p>
+            <a:endParaRPr/>
+          </a:p>
         </p:txBody>
       </p:sp>
       <p:sp>
         <p:nvSpPr>
           <p:cNvPr id="42" name="Google Shape;42;p8"/>
-          <p:cNvSpPr txBox="1"/>
+          <p:cNvSpPr txBox="1">
+            <a:spLocks noGrp="1"/>
+          </p:cNvSpPr>
           <p:nvPr>
-            <p:ph idx="1" type="body"/>
+            <p:ph type="body" idx="1"/>
           </p:nvPr>
         </p:nvSpPr>
         <p:spPr>
@@ -7776,11 +7949,11 @@
           </a:ln>
         </p:spPr>
         <p:txBody>
-          <a:bodyPr anchorCtr="0" anchor="b" bIns="45700" lIns="91425" spcFirstLastPara="1" rIns="91425" wrap="square" tIns="45700">
+          <a:bodyPr spcFirstLastPara="1" wrap="square" lIns="91425" tIns="45700" rIns="91425" bIns="45700" anchor="b" anchorCtr="0">
             <a:normAutofit/>
           </a:bodyPr>
           <a:lstStyle>
-            <a:lvl1pPr indent="-228600" lvl="0" marL="457200" algn="l">
+            <a:lvl1pPr marL="457200" lvl="0" indent="-228600" algn="l">
               <a:lnSpc>
                 <a:spcPct val="100000"/>
               </a:lnSpc>
@@ -7795,9 +7968,9 @@
               </a:buClr>
               <a:buSzPts val="4574"/>
               <a:buNone/>
-              <a:defRPr b="1" sz="4574"/>
+              <a:defRPr sz="4574" b="1"/>
             </a:lvl1pPr>
-            <a:lvl2pPr indent="-228600" lvl="1" marL="914400" algn="l">
+            <a:lvl2pPr marL="914400" lvl="1" indent="-228600" algn="l">
               <a:lnSpc>
                 <a:spcPct val="100000"/>
               </a:lnSpc>
@@ -7812,9 +7985,9 @@
               </a:buClr>
               <a:buSzPts val="3811"/>
               <a:buNone/>
-              <a:defRPr b="1" sz="3811"/>
+              <a:defRPr sz="3811" b="1"/>
             </a:lvl2pPr>
-            <a:lvl3pPr indent="-228600" lvl="2" marL="1371600" algn="l">
+            <a:lvl3pPr marL="1371600" lvl="2" indent="-228600" algn="l">
               <a:lnSpc>
                 <a:spcPct val="100000"/>
               </a:lnSpc>
@@ -7829,9 +8002,9 @@
               </a:buClr>
               <a:buSzPts val="3430"/>
               <a:buNone/>
-              <a:defRPr b="1" sz="3430"/>
+              <a:defRPr sz="3430" b="1"/>
             </a:lvl3pPr>
-            <a:lvl4pPr indent="-228600" lvl="3" marL="1828800" algn="l">
+            <a:lvl4pPr marL="1828800" lvl="3" indent="-228600" algn="l">
               <a:lnSpc>
                 <a:spcPct val="100000"/>
               </a:lnSpc>
@@ -7846,9 +8019,9 @@
               </a:buClr>
               <a:buSzPts val="3049"/>
               <a:buNone/>
-              <a:defRPr b="1" sz="3049"/>
+              <a:defRPr sz="3049" b="1"/>
             </a:lvl4pPr>
-            <a:lvl5pPr indent="-228600" lvl="4" marL="2286000" algn="l">
+            <a:lvl5pPr marL="2286000" lvl="4" indent="-228600" algn="l">
               <a:lnSpc>
                 <a:spcPct val="100000"/>
               </a:lnSpc>
@@ -7863,9 +8036,9 @@
               </a:buClr>
               <a:buSzPts val="3049"/>
               <a:buNone/>
-              <a:defRPr b="1" sz="3049"/>
+              <a:defRPr sz="3049" b="1"/>
             </a:lvl5pPr>
-            <a:lvl6pPr indent="-228600" lvl="5" marL="2743200" algn="l">
+            <a:lvl6pPr marL="2743200" lvl="5" indent="-228600" algn="l">
               <a:lnSpc>
                 <a:spcPct val="100000"/>
               </a:lnSpc>
@@ -7880,9 +8053,9 @@
               </a:buClr>
               <a:buSzPts val="3049"/>
               <a:buNone/>
-              <a:defRPr b="1" sz="3049"/>
+              <a:defRPr sz="3049" b="1"/>
             </a:lvl6pPr>
-            <a:lvl7pPr indent="-228600" lvl="6" marL="3200400" algn="l">
+            <a:lvl7pPr marL="3200400" lvl="6" indent="-228600" algn="l">
               <a:lnSpc>
                 <a:spcPct val="100000"/>
               </a:lnSpc>
@@ -7897,9 +8070,9 @@
               </a:buClr>
               <a:buSzPts val="3049"/>
               <a:buNone/>
-              <a:defRPr b="1" sz="3049"/>
+              <a:defRPr sz="3049" b="1"/>
             </a:lvl7pPr>
-            <a:lvl8pPr indent="-228600" lvl="7" marL="3657600" algn="l">
+            <a:lvl8pPr marL="3657600" lvl="7" indent="-228600" algn="l">
               <a:lnSpc>
                 <a:spcPct val="100000"/>
               </a:lnSpc>
@@ -7914,9 +8087,9 @@
               </a:buClr>
               <a:buSzPts val="3049"/>
               <a:buNone/>
-              <a:defRPr b="1" sz="3049"/>
+              <a:defRPr sz="3049" b="1"/>
             </a:lvl8pPr>
-            <a:lvl9pPr indent="-228600" lvl="8" marL="4114800" algn="l">
+            <a:lvl9pPr marL="4114800" lvl="8" indent="-228600" algn="l">
               <a:lnSpc>
                 <a:spcPct val="100000"/>
               </a:lnSpc>
@@ -7931,18 +8104,22 @@
               </a:buClr>
               <a:buSzPts val="3049"/>
               <a:buNone/>
-              <a:defRPr b="1" sz="3049"/>
+              <a:defRPr sz="3049" b="1"/>
             </a:lvl9pPr>
           </a:lstStyle>
-          <a:p/>
+          <a:p>
+            <a:endParaRPr/>
+          </a:p>
         </p:txBody>
       </p:sp>
       <p:sp>
         <p:nvSpPr>
           <p:cNvPr id="43" name="Google Shape;43;p8"/>
-          <p:cNvSpPr txBox="1"/>
+          <p:cNvSpPr txBox="1">
+            <a:spLocks noGrp="1"/>
+          </p:cNvSpPr>
           <p:nvPr>
-            <p:ph idx="2" type="body"/>
+            <p:ph type="body" idx="2"/>
           </p:nvPr>
         </p:nvSpPr>
         <p:spPr>
@@ -7959,11 +8136,11 @@
           </a:ln>
         </p:spPr>
         <p:txBody>
-          <a:bodyPr anchorCtr="0" anchor="t" bIns="45700" lIns="91425" spcFirstLastPara="1" rIns="91425" wrap="square" tIns="45700">
+          <a:bodyPr spcFirstLastPara="1" wrap="square" lIns="91425" tIns="45700" rIns="91425" bIns="45700" anchor="t" anchorCtr="0">
             <a:normAutofit/>
           </a:bodyPr>
           <a:lstStyle>
-            <a:lvl1pPr indent="-519049" lvl="0" marL="457200" algn="l">
+            <a:lvl1pPr marL="457200" lvl="0" indent="-519049" algn="l">
               <a:lnSpc>
                 <a:spcPct val="100000"/>
               </a:lnSpc>
@@ -7980,7 +8157,7 @@
               <a:buChar char="•"/>
               <a:defRPr sz="4574"/>
             </a:lvl1pPr>
-            <a:lvl2pPr indent="-470599" lvl="1" marL="914400" algn="l">
+            <a:lvl2pPr marL="914400" lvl="1" indent="-470599" algn="l">
               <a:lnSpc>
                 <a:spcPct val="100000"/>
               </a:lnSpc>
@@ -7997,7 +8174,7 @@
               <a:buChar char="–"/>
               <a:defRPr sz="3811"/>
             </a:lvl2pPr>
-            <a:lvl3pPr indent="-446405" lvl="2" marL="1371600" algn="l">
+            <a:lvl3pPr marL="1371600" lvl="2" indent="-446405" algn="l">
               <a:lnSpc>
                 <a:spcPct val="100000"/>
               </a:lnSpc>
@@ -8014,7 +8191,7 @@
               <a:buChar char="•"/>
               <a:defRPr sz="3430"/>
             </a:lvl3pPr>
-            <a:lvl4pPr indent="-422212" lvl="3" marL="1828800" algn="l">
+            <a:lvl4pPr marL="1828800" lvl="3" indent="-422212" algn="l">
               <a:lnSpc>
                 <a:spcPct val="100000"/>
               </a:lnSpc>
@@ -8031,7 +8208,7 @@
               <a:buChar char="–"/>
               <a:defRPr sz="3049"/>
             </a:lvl4pPr>
-            <a:lvl5pPr indent="-422211" lvl="4" marL="2286000" algn="l">
+            <a:lvl5pPr marL="2286000" lvl="4" indent="-422211" algn="l">
               <a:lnSpc>
                 <a:spcPct val="100000"/>
               </a:lnSpc>
@@ -8048,7 +8225,7 @@
               <a:buChar char="»"/>
               <a:defRPr sz="3049"/>
             </a:lvl5pPr>
-            <a:lvl6pPr indent="-422211" lvl="5" marL="2743200" algn="l">
+            <a:lvl6pPr marL="2743200" lvl="5" indent="-422211" algn="l">
               <a:lnSpc>
                 <a:spcPct val="100000"/>
               </a:lnSpc>
@@ -8065,7 +8242,7 @@
               <a:buChar char="•"/>
               <a:defRPr sz="3049"/>
             </a:lvl6pPr>
-            <a:lvl7pPr indent="-422211" lvl="6" marL="3200400" algn="l">
+            <a:lvl7pPr marL="3200400" lvl="6" indent="-422211" algn="l">
               <a:lnSpc>
                 <a:spcPct val="100000"/>
               </a:lnSpc>
@@ -8082,7 +8259,7 @@
               <a:buChar char="•"/>
               <a:defRPr sz="3049"/>
             </a:lvl7pPr>
-            <a:lvl8pPr indent="-422211" lvl="7" marL="3657600" algn="l">
+            <a:lvl8pPr marL="3657600" lvl="7" indent="-422211" algn="l">
               <a:lnSpc>
                 <a:spcPct val="100000"/>
               </a:lnSpc>
@@ -8099,7 +8276,7 @@
               <a:buChar char="•"/>
               <a:defRPr sz="3049"/>
             </a:lvl8pPr>
-            <a:lvl9pPr indent="-422211" lvl="8" marL="4114800" algn="l">
+            <a:lvl9pPr marL="4114800" lvl="8" indent="-422211" algn="l">
               <a:lnSpc>
                 <a:spcPct val="100000"/>
               </a:lnSpc>
@@ -8117,15 +8294,19 @@
               <a:defRPr sz="3049"/>
             </a:lvl9pPr>
           </a:lstStyle>
-          <a:p/>
+          <a:p>
+            <a:endParaRPr/>
+          </a:p>
         </p:txBody>
       </p:sp>
       <p:sp>
         <p:nvSpPr>
           <p:cNvPr id="44" name="Google Shape;44;p8"/>
-          <p:cNvSpPr txBox="1"/>
+          <p:cNvSpPr txBox="1">
+            <a:spLocks noGrp="1"/>
+          </p:cNvSpPr>
           <p:nvPr>
-            <p:ph idx="3" type="body"/>
+            <p:ph type="body" idx="3"/>
           </p:nvPr>
         </p:nvSpPr>
         <p:spPr>
@@ -8142,11 +8323,11 @@
           </a:ln>
         </p:spPr>
         <p:txBody>
-          <a:bodyPr anchorCtr="0" anchor="b" bIns="45700" lIns="91425" spcFirstLastPara="1" rIns="91425" wrap="square" tIns="45700">
+          <a:bodyPr spcFirstLastPara="1" wrap="square" lIns="91425" tIns="45700" rIns="91425" bIns="45700" anchor="b" anchorCtr="0">
             <a:normAutofit/>
           </a:bodyPr>
           <a:lstStyle>
-            <a:lvl1pPr indent="-228600" lvl="0" marL="457200" algn="l">
+            <a:lvl1pPr marL="457200" lvl="0" indent="-228600" algn="l">
               <a:lnSpc>
                 <a:spcPct val="100000"/>
               </a:lnSpc>
@@ -8161,9 +8342,9 @@
               </a:buClr>
               <a:buSzPts val="4574"/>
               <a:buNone/>
-              <a:defRPr b="1" sz="4574"/>
+              <a:defRPr sz="4574" b="1"/>
             </a:lvl1pPr>
-            <a:lvl2pPr indent="-228600" lvl="1" marL="914400" algn="l">
+            <a:lvl2pPr marL="914400" lvl="1" indent="-228600" algn="l">
               <a:lnSpc>
                 <a:spcPct val="100000"/>
               </a:lnSpc>
@@ -8178,9 +8359,9 @@
               </a:buClr>
               <a:buSzPts val="3811"/>
               <a:buNone/>
-              <a:defRPr b="1" sz="3811"/>
+              <a:defRPr sz="3811" b="1"/>
             </a:lvl2pPr>
-            <a:lvl3pPr indent="-228600" lvl="2" marL="1371600" algn="l">
+            <a:lvl3pPr marL="1371600" lvl="2" indent="-228600" algn="l">
               <a:lnSpc>
                 <a:spcPct val="100000"/>
               </a:lnSpc>
@@ -8195,9 +8376,9 @@
               </a:buClr>
               <a:buSzPts val="3430"/>
               <a:buNone/>
-              <a:defRPr b="1" sz="3430"/>
+              <a:defRPr sz="3430" b="1"/>
             </a:lvl3pPr>
-            <a:lvl4pPr indent="-228600" lvl="3" marL="1828800" algn="l">
+            <a:lvl4pPr marL="1828800" lvl="3" indent="-228600" algn="l">
               <a:lnSpc>
                 <a:spcPct val="100000"/>
               </a:lnSpc>
@@ -8212,9 +8393,9 @@
               </a:buClr>
               <a:buSzPts val="3049"/>
               <a:buNone/>
-              <a:defRPr b="1" sz="3049"/>
+              <a:defRPr sz="3049" b="1"/>
             </a:lvl4pPr>
-            <a:lvl5pPr indent="-228600" lvl="4" marL="2286000" algn="l">
+            <a:lvl5pPr marL="2286000" lvl="4" indent="-228600" algn="l">
               <a:lnSpc>
                 <a:spcPct val="100000"/>
               </a:lnSpc>
@@ -8229,9 +8410,9 @@
               </a:buClr>
               <a:buSzPts val="3049"/>
               <a:buNone/>
-              <a:defRPr b="1" sz="3049"/>
+              <a:defRPr sz="3049" b="1"/>
             </a:lvl5pPr>
-            <a:lvl6pPr indent="-228600" lvl="5" marL="2743200" algn="l">
+            <a:lvl6pPr marL="2743200" lvl="5" indent="-228600" algn="l">
               <a:lnSpc>
                 <a:spcPct val="100000"/>
               </a:lnSpc>
@@ -8246,9 +8427,9 @@
               </a:buClr>
               <a:buSzPts val="3049"/>
               <a:buNone/>
-              <a:defRPr b="1" sz="3049"/>
+              <a:defRPr sz="3049" b="1"/>
             </a:lvl6pPr>
-            <a:lvl7pPr indent="-228600" lvl="6" marL="3200400" algn="l">
+            <a:lvl7pPr marL="3200400" lvl="6" indent="-228600" algn="l">
               <a:lnSpc>
                 <a:spcPct val="100000"/>
               </a:lnSpc>
@@ -8263,9 +8444,9 @@
               </a:buClr>
               <a:buSzPts val="3049"/>
               <a:buNone/>
-              <a:defRPr b="1" sz="3049"/>
+              <a:defRPr sz="3049" b="1"/>
             </a:lvl7pPr>
-            <a:lvl8pPr indent="-228600" lvl="7" marL="3657600" algn="l">
+            <a:lvl8pPr marL="3657600" lvl="7" indent="-228600" algn="l">
               <a:lnSpc>
                 <a:spcPct val="100000"/>
               </a:lnSpc>
@@ -8280,9 +8461,9 @@
               </a:buClr>
               <a:buSzPts val="3049"/>
               <a:buNone/>
-              <a:defRPr b="1" sz="3049"/>
+              <a:defRPr sz="3049" b="1"/>
             </a:lvl8pPr>
-            <a:lvl9pPr indent="-228600" lvl="8" marL="4114800" algn="l">
+            <a:lvl9pPr marL="4114800" lvl="8" indent="-228600" algn="l">
               <a:lnSpc>
                 <a:spcPct val="100000"/>
               </a:lnSpc>
@@ -8297,18 +8478,22 @@
               </a:buClr>
               <a:buSzPts val="3049"/>
               <a:buNone/>
-              <a:defRPr b="1" sz="3049"/>
+              <a:defRPr sz="3049" b="1"/>
             </a:lvl9pPr>
           </a:lstStyle>
-          <a:p/>
+          <a:p>
+            <a:endParaRPr/>
+          </a:p>
         </p:txBody>
       </p:sp>
       <p:sp>
         <p:nvSpPr>
           <p:cNvPr id="45" name="Google Shape;45;p8"/>
-          <p:cNvSpPr txBox="1"/>
+          <p:cNvSpPr txBox="1">
+            <a:spLocks noGrp="1"/>
+          </p:cNvSpPr>
           <p:nvPr>
-            <p:ph idx="4" type="body"/>
+            <p:ph type="body" idx="4"/>
           </p:nvPr>
         </p:nvSpPr>
         <p:spPr>
@@ -8325,11 +8510,11 @@
           </a:ln>
         </p:spPr>
         <p:txBody>
-          <a:bodyPr anchorCtr="0" anchor="t" bIns="45700" lIns="91425" spcFirstLastPara="1" rIns="91425" wrap="square" tIns="45700">
+          <a:bodyPr spcFirstLastPara="1" wrap="square" lIns="91425" tIns="45700" rIns="91425" bIns="45700" anchor="t" anchorCtr="0">
             <a:normAutofit/>
           </a:bodyPr>
           <a:lstStyle>
-            <a:lvl1pPr indent="-519049" lvl="0" marL="457200" algn="l">
+            <a:lvl1pPr marL="457200" lvl="0" indent="-519049" algn="l">
               <a:lnSpc>
                 <a:spcPct val="100000"/>
               </a:lnSpc>
@@ -8346,7 +8531,7 @@
               <a:buChar char="•"/>
               <a:defRPr sz="4574"/>
             </a:lvl1pPr>
-            <a:lvl2pPr indent="-470599" lvl="1" marL="914400" algn="l">
+            <a:lvl2pPr marL="914400" lvl="1" indent="-470599" algn="l">
               <a:lnSpc>
                 <a:spcPct val="100000"/>
               </a:lnSpc>
@@ -8363,7 +8548,7 @@
               <a:buChar char="–"/>
               <a:defRPr sz="3811"/>
             </a:lvl2pPr>
-            <a:lvl3pPr indent="-446405" lvl="2" marL="1371600" algn="l">
+            <a:lvl3pPr marL="1371600" lvl="2" indent="-446405" algn="l">
               <a:lnSpc>
                 <a:spcPct val="100000"/>
               </a:lnSpc>
@@ -8380,7 +8565,7 @@
               <a:buChar char="•"/>
               <a:defRPr sz="3430"/>
             </a:lvl3pPr>
-            <a:lvl4pPr indent="-422212" lvl="3" marL="1828800" algn="l">
+            <a:lvl4pPr marL="1828800" lvl="3" indent="-422212" algn="l">
               <a:lnSpc>
                 <a:spcPct val="100000"/>
               </a:lnSpc>
@@ -8397,7 +8582,7 @@
               <a:buChar char="–"/>
               <a:defRPr sz="3049"/>
             </a:lvl4pPr>
-            <a:lvl5pPr indent="-422211" lvl="4" marL="2286000" algn="l">
+            <a:lvl5pPr marL="2286000" lvl="4" indent="-422211" algn="l">
               <a:lnSpc>
                 <a:spcPct val="100000"/>
               </a:lnSpc>
@@ -8414,7 +8599,7 @@
               <a:buChar char="»"/>
               <a:defRPr sz="3049"/>
             </a:lvl5pPr>
-            <a:lvl6pPr indent="-422211" lvl="5" marL="2743200" algn="l">
+            <a:lvl6pPr marL="2743200" lvl="5" indent="-422211" algn="l">
               <a:lnSpc>
                 <a:spcPct val="100000"/>
               </a:lnSpc>
@@ -8431,7 +8616,7 @@
               <a:buChar char="•"/>
               <a:defRPr sz="3049"/>
             </a:lvl6pPr>
-            <a:lvl7pPr indent="-422211" lvl="6" marL="3200400" algn="l">
+            <a:lvl7pPr marL="3200400" lvl="6" indent="-422211" algn="l">
               <a:lnSpc>
                 <a:spcPct val="100000"/>
               </a:lnSpc>
@@ -8448,7 +8633,7 @@
               <a:buChar char="•"/>
               <a:defRPr sz="3049"/>
             </a:lvl7pPr>
-            <a:lvl8pPr indent="-422211" lvl="7" marL="3657600" algn="l">
+            <a:lvl8pPr marL="3657600" lvl="7" indent="-422211" algn="l">
               <a:lnSpc>
                 <a:spcPct val="100000"/>
               </a:lnSpc>
@@ -8465,7 +8650,7 @@
               <a:buChar char="•"/>
               <a:defRPr sz="3049"/>
             </a:lvl8pPr>
-            <a:lvl9pPr indent="-422211" lvl="8" marL="4114800" algn="l">
+            <a:lvl9pPr marL="4114800" lvl="8" indent="-422211" algn="l">
               <a:lnSpc>
                 <a:spcPct val="100000"/>
               </a:lnSpc>
@@ -8483,15 +8668,19 @@
               <a:defRPr sz="3049"/>
             </a:lvl9pPr>
           </a:lstStyle>
-          <a:p/>
+          <a:p>
+            <a:endParaRPr/>
+          </a:p>
         </p:txBody>
       </p:sp>
       <p:sp>
         <p:nvSpPr>
           <p:cNvPr id="46" name="Google Shape;46;p8"/>
-          <p:cNvSpPr txBox="1"/>
+          <p:cNvSpPr txBox="1">
+            <a:spLocks noGrp="1"/>
+          </p:cNvSpPr>
           <p:nvPr>
-            <p:ph idx="10" type="dt"/>
+            <p:ph type="dt" idx="10"/>
           </p:nvPr>
         </p:nvSpPr>
         <p:spPr>
@@ -8508,7 +8697,7 @@
           </a:ln>
         </p:spPr>
         <p:txBody>
-          <a:bodyPr anchorCtr="0" anchor="ctr" bIns="45700" lIns="91425" spcFirstLastPara="1" rIns="91425" wrap="square" tIns="45700">
+          <a:bodyPr spcFirstLastPara="1" wrap="square" lIns="91425" tIns="45700" rIns="91425" bIns="45700" anchor="ctr" anchorCtr="0">
             <a:noAutofit/>
           </a:bodyPr>
           <a:lstStyle>
@@ -8639,15 +8828,19 @@
               <a:defRPr/>
             </a:lvl9pPr>
           </a:lstStyle>
-          <a:p/>
+          <a:p>
+            <a:endParaRPr/>
+          </a:p>
         </p:txBody>
       </p:sp>
       <p:sp>
         <p:nvSpPr>
           <p:cNvPr id="47" name="Google Shape;47;p8"/>
-          <p:cNvSpPr txBox="1"/>
+          <p:cNvSpPr txBox="1">
+            <a:spLocks noGrp="1"/>
+          </p:cNvSpPr>
           <p:nvPr>
-            <p:ph idx="11" type="ftr"/>
+            <p:ph type="ftr" idx="11"/>
           </p:nvPr>
         </p:nvSpPr>
         <p:spPr>
@@ -8664,7 +8857,7 @@
           </a:ln>
         </p:spPr>
         <p:txBody>
-          <a:bodyPr anchorCtr="0" anchor="ctr" bIns="45700" lIns="91425" spcFirstLastPara="1" rIns="91425" wrap="square" tIns="45700">
+          <a:bodyPr spcFirstLastPara="1" wrap="square" lIns="91425" tIns="45700" rIns="91425" bIns="45700" anchor="ctr" anchorCtr="0">
             <a:noAutofit/>
           </a:bodyPr>
           <a:lstStyle>
@@ -8795,15 +8988,19 @@
               <a:defRPr/>
             </a:lvl9pPr>
           </a:lstStyle>
-          <a:p/>
+          <a:p>
+            <a:endParaRPr/>
+          </a:p>
         </p:txBody>
       </p:sp>
       <p:sp>
         <p:nvSpPr>
           <p:cNvPr id="48" name="Google Shape;48;p8"/>
-          <p:cNvSpPr txBox="1"/>
+          <p:cNvSpPr txBox="1">
+            <a:spLocks noGrp="1"/>
+          </p:cNvSpPr>
           <p:nvPr>
-            <p:ph idx="12" type="sldNum"/>
+            <p:ph type="sldNum" idx="12"/>
           </p:nvPr>
         </p:nvSpPr>
         <p:spPr>
@@ -8820,11 +9017,11 @@
           </a:ln>
         </p:spPr>
         <p:txBody>
-          <a:bodyPr anchorCtr="0" anchor="ctr" bIns="45700" lIns="91425" spcFirstLastPara="1" rIns="91425" wrap="square" tIns="45700">
+          <a:bodyPr spcFirstLastPara="1" wrap="square" lIns="91425" tIns="45700" rIns="91425" bIns="45700" anchor="ctr" anchorCtr="0">
             <a:noAutofit/>
           </a:bodyPr>
           <a:lstStyle>
-            <a:lvl1pPr indent="0" lvl="0" marL="0" marR="0" algn="r">
+            <a:lvl1pPr marL="0" marR="0" lvl="0" indent="0" algn="r">
               <a:lnSpc>
                 <a:spcPct val="100000"/>
               </a:lnSpc>
@@ -8840,7 +9037,7 @@
               <a:buSzPts val="2287"/>
               <a:buFont typeface="Arial"/>
               <a:buNone/>
-              <a:defRPr b="0" i="0" sz="2287" u="none" cap="none" strike="noStrike">
+              <a:defRPr sz="2287" b="0" i="0" u="none" strike="noStrike" cap="none">
                 <a:solidFill>
                   <a:srgbClr val="888888"/>
                 </a:solidFill>
@@ -8850,7 +9047,7 @@
                 <a:sym typeface="Calibri"/>
               </a:defRPr>
             </a:lvl1pPr>
-            <a:lvl2pPr indent="0" lvl="1" marL="0" marR="0" algn="r">
+            <a:lvl2pPr marL="0" marR="0" lvl="1" indent="0" algn="r">
               <a:lnSpc>
                 <a:spcPct val="100000"/>
               </a:lnSpc>
@@ -8866,7 +9063,7 @@
               <a:buSzPts val="2287"/>
               <a:buFont typeface="Arial"/>
               <a:buNone/>
-              <a:defRPr b="0" i="0" sz="2287" u="none" cap="none" strike="noStrike">
+              <a:defRPr sz="2287" b="0" i="0" u="none" strike="noStrike" cap="none">
                 <a:solidFill>
                   <a:srgbClr val="888888"/>
                 </a:solidFill>
@@ -8876,7 +9073,7 @@
                 <a:sym typeface="Calibri"/>
               </a:defRPr>
             </a:lvl2pPr>
-            <a:lvl3pPr indent="0" lvl="2" marL="0" marR="0" algn="r">
+            <a:lvl3pPr marL="0" marR="0" lvl="2" indent="0" algn="r">
               <a:lnSpc>
                 <a:spcPct val="100000"/>
               </a:lnSpc>
@@ -8892,7 +9089,7 @@
               <a:buSzPts val="2287"/>
               <a:buFont typeface="Arial"/>
               <a:buNone/>
-              <a:defRPr b="0" i="0" sz="2287" u="none" cap="none" strike="noStrike">
+              <a:defRPr sz="2287" b="0" i="0" u="none" strike="noStrike" cap="none">
                 <a:solidFill>
                   <a:srgbClr val="888888"/>
                 </a:solidFill>
@@ -8902,7 +9099,7 @@
                 <a:sym typeface="Calibri"/>
               </a:defRPr>
             </a:lvl3pPr>
-            <a:lvl4pPr indent="0" lvl="3" marL="0" marR="0" algn="r">
+            <a:lvl4pPr marL="0" marR="0" lvl="3" indent="0" algn="r">
               <a:lnSpc>
                 <a:spcPct val="100000"/>
               </a:lnSpc>
@@ -8918,7 +9115,7 @@
               <a:buSzPts val="2287"/>
               <a:buFont typeface="Arial"/>
               <a:buNone/>
-              <a:defRPr b="0" i="0" sz="2287" u="none" cap="none" strike="noStrike">
+              <a:defRPr sz="2287" b="0" i="0" u="none" strike="noStrike" cap="none">
                 <a:solidFill>
                   <a:srgbClr val="888888"/>
                 </a:solidFill>
@@ -8928,7 +9125,7 @@
                 <a:sym typeface="Calibri"/>
               </a:defRPr>
             </a:lvl4pPr>
-            <a:lvl5pPr indent="0" lvl="4" marL="0" marR="0" algn="r">
+            <a:lvl5pPr marL="0" marR="0" lvl="4" indent="0" algn="r">
               <a:lnSpc>
                 <a:spcPct val="100000"/>
               </a:lnSpc>
@@ -8944,7 +9141,7 @@
               <a:buSzPts val="2287"/>
               <a:buFont typeface="Arial"/>
               <a:buNone/>
-              <a:defRPr b="0" i="0" sz="2287" u="none" cap="none" strike="noStrike">
+              <a:defRPr sz="2287" b="0" i="0" u="none" strike="noStrike" cap="none">
                 <a:solidFill>
                   <a:srgbClr val="888888"/>
                 </a:solidFill>
@@ -8954,7 +9151,7 @@
                 <a:sym typeface="Calibri"/>
               </a:defRPr>
             </a:lvl5pPr>
-            <a:lvl6pPr indent="0" lvl="5" marL="0" marR="0" algn="r">
+            <a:lvl6pPr marL="0" marR="0" lvl="5" indent="0" algn="r">
               <a:lnSpc>
                 <a:spcPct val="100000"/>
               </a:lnSpc>
@@ -8970,7 +9167,7 @@
               <a:buSzPts val="2287"/>
               <a:buFont typeface="Arial"/>
               <a:buNone/>
-              <a:defRPr b="0" i="0" sz="2287" u="none" cap="none" strike="noStrike">
+              <a:defRPr sz="2287" b="0" i="0" u="none" strike="noStrike" cap="none">
                 <a:solidFill>
                   <a:srgbClr val="888888"/>
                 </a:solidFill>
@@ -8980,7 +9177,7 @@
                 <a:sym typeface="Calibri"/>
               </a:defRPr>
             </a:lvl6pPr>
-            <a:lvl7pPr indent="0" lvl="6" marL="0" marR="0" algn="r">
+            <a:lvl7pPr marL="0" marR="0" lvl="6" indent="0" algn="r">
               <a:lnSpc>
                 <a:spcPct val="100000"/>
               </a:lnSpc>
@@ -8996,7 +9193,7 @@
               <a:buSzPts val="2287"/>
               <a:buFont typeface="Arial"/>
               <a:buNone/>
-              <a:defRPr b="0" i="0" sz="2287" u="none" cap="none" strike="noStrike">
+              <a:defRPr sz="2287" b="0" i="0" u="none" strike="noStrike" cap="none">
                 <a:solidFill>
                   <a:srgbClr val="888888"/>
                 </a:solidFill>
@@ -9006,7 +9203,7 @@
                 <a:sym typeface="Calibri"/>
               </a:defRPr>
             </a:lvl7pPr>
-            <a:lvl8pPr indent="0" lvl="7" marL="0" marR="0" algn="r">
+            <a:lvl8pPr marL="0" marR="0" lvl="7" indent="0" algn="r">
               <a:lnSpc>
                 <a:spcPct val="100000"/>
               </a:lnSpc>
@@ -9022,7 +9219,7 @@
               <a:buSzPts val="2287"/>
               <a:buFont typeface="Arial"/>
               <a:buNone/>
-              <a:defRPr b="0" i="0" sz="2287" u="none" cap="none" strike="noStrike">
+              <a:defRPr sz="2287" b="0" i="0" u="none" strike="noStrike" cap="none">
                 <a:solidFill>
                   <a:srgbClr val="888888"/>
                 </a:solidFill>
@@ -9032,7 +9229,7 @@
                 <a:sym typeface="Calibri"/>
               </a:defRPr>
             </a:lvl8pPr>
-            <a:lvl9pPr indent="0" lvl="8" marL="0" marR="0" algn="r">
+            <a:lvl9pPr marL="0" marR="0" lvl="8" indent="0" algn="r">
               <a:lnSpc>
                 <a:spcPct val="100000"/>
               </a:lnSpc>
@@ -9048,7 +9245,7 @@
               <a:buSzPts val="2287"/>
               <a:buFont typeface="Arial"/>
               <a:buNone/>
-              <a:defRPr b="0" i="0" sz="2287" u="none" cap="none" strike="noStrike">
+              <a:defRPr sz="2287" b="0" i="0" u="none" strike="noStrike" cap="none">
                 <a:solidFill>
                   <a:srgbClr val="888888"/>
                 </a:solidFill>
@@ -9060,7 +9257,7 @@
             </a:lvl9pPr>
           </a:lstStyle>
           <a:p>
-            <a:pPr indent="0" lvl="0" marL="0" rtl="0" algn="r">
+            <a:pPr marL="0" lvl="0" indent="0" algn="r" rtl="0">
               <a:spcBef>
                 <a:spcPts val="0"/>
               </a:spcBef>
@@ -9071,7 +9268,7 @@
             </a:pPr>
             <a:fld id="{00000000-1234-1234-1234-123412341234}" type="slidenum">
               <a:rPr lang="en-US"/>
-              <a:t>‹#›</a:t>
+              <a:t>‹nº›</a:t>
             </a:fld>
             <a:endParaRPr/>
           </a:p>
@@ -9086,11 +9283,11 @@
 </file>
 
 <file path=ppt/slideLayouts/slideLayout7.xml><?xml version="1.0" encoding="utf-8"?>
-<p:sldLayout xmlns:a="http://schemas.openxmlformats.org/drawingml/2006/main" xmlns:r="http://schemas.openxmlformats.org/officeDocument/2006/relationships" xmlns:mc="http://schemas.openxmlformats.org/markup-compatibility/2006" xmlns:mv="urn:schemas-microsoft-com:mac:vml" xmlns:p="http://schemas.openxmlformats.org/presentationml/2006/main" xmlns:c="http://schemas.openxmlformats.org/drawingml/2006/chart" xmlns:dgm="http://schemas.openxmlformats.org/drawingml/2006/diagram" xmlns:o="urn:schemas-microsoft-com:office:office" xmlns:v="urn:schemas-microsoft-com:vml" xmlns:pvml="urn:schemas-microsoft-com:office:powerpoint" xmlns:com="http://schemas.openxmlformats.org/drawingml/2006/compatibility" xmlns:p14="http://schemas.microsoft.com/office/powerpoint/2010/main" xmlns:p15="http://schemas.microsoft.com/office/powerpoint/2012/main" xmlns:ahyp="http://schemas.microsoft.com/office/drawing/2018/hyperlinkcolor" matchingName="Title Only" type="titleOnly">
+<p:sldLayout xmlns:a="http://schemas.openxmlformats.org/drawingml/2006/main" xmlns:r="http://schemas.openxmlformats.org/officeDocument/2006/relationships" xmlns:p="http://schemas.openxmlformats.org/presentationml/2006/main" matchingName="Title Only" type="titleOnly">
   <p:cSld name="TITLE_ONLY">
     <p:spTree>
       <p:nvGrpSpPr>
-        <p:cNvPr id="49" name="Shape 49"/>
+        <p:cNvPr id="1" name="Shape 49"/>
         <p:cNvGrpSpPr/>
         <p:nvPr/>
       </p:nvGrpSpPr>
@@ -9105,7 +9302,9 @@
       <p:sp>
         <p:nvSpPr>
           <p:cNvPr id="50" name="Google Shape;50;p9"/>
-          <p:cNvSpPr txBox="1"/>
+          <p:cNvSpPr txBox="1">
+            <a:spLocks noGrp="1"/>
+          </p:cNvSpPr>
           <p:nvPr>
             <p:ph type="title"/>
           </p:nvPr>
@@ -9124,7 +9323,7 @@
           </a:ln>
         </p:spPr>
         <p:txBody>
-          <a:bodyPr anchorCtr="0" anchor="ctr" bIns="45700" lIns="91425" spcFirstLastPara="1" rIns="91425" wrap="square" tIns="45700">
+          <a:bodyPr spcFirstLastPara="1" wrap="square" lIns="91425" tIns="45700" rIns="91425" bIns="45700" anchor="ctr" anchorCtr="0">
             <a:normAutofit/>
           </a:bodyPr>
           <a:lstStyle>
@@ -9258,15 +9457,19 @@
               <a:defRPr/>
             </a:lvl9pPr>
           </a:lstStyle>
-          <a:p/>
+          <a:p>
+            <a:endParaRPr/>
+          </a:p>
         </p:txBody>
       </p:sp>
       <p:sp>
         <p:nvSpPr>
           <p:cNvPr id="51" name="Google Shape;51;p9"/>
-          <p:cNvSpPr txBox="1"/>
+          <p:cNvSpPr txBox="1">
+            <a:spLocks noGrp="1"/>
+          </p:cNvSpPr>
           <p:nvPr>
-            <p:ph idx="10" type="dt"/>
+            <p:ph type="dt" idx="10"/>
           </p:nvPr>
         </p:nvSpPr>
         <p:spPr>
@@ -9283,7 +9486,7 @@
           </a:ln>
         </p:spPr>
         <p:txBody>
-          <a:bodyPr anchorCtr="0" anchor="ctr" bIns="45700" lIns="91425" spcFirstLastPara="1" rIns="91425" wrap="square" tIns="45700">
+          <a:bodyPr spcFirstLastPara="1" wrap="square" lIns="91425" tIns="45700" rIns="91425" bIns="45700" anchor="ctr" anchorCtr="0">
             <a:noAutofit/>
           </a:bodyPr>
           <a:lstStyle>
@@ -9414,15 +9617,19 @@
               <a:defRPr/>
             </a:lvl9pPr>
           </a:lstStyle>
-          <a:p/>
+          <a:p>
+            <a:endParaRPr/>
+          </a:p>
         </p:txBody>
       </p:sp>
       <p:sp>
         <p:nvSpPr>
           <p:cNvPr id="52" name="Google Shape;52;p9"/>
-          <p:cNvSpPr txBox="1"/>
+          <p:cNvSpPr txBox="1">
+            <a:spLocks noGrp="1"/>
+          </p:cNvSpPr>
           <p:nvPr>
-            <p:ph idx="11" type="ftr"/>
+            <p:ph type="ftr" idx="11"/>
           </p:nvPr>
         </p:nvSpPr>
         <p:spPr>
@@ -9439,7 +9646,7 @@
           </a:ln>
         </p:spPr>
         <p:txBody>
-          <a:bodyPr anchorCtr="0" anchor="ctr" bIns="45700" lIns="91425" spcFirstLastPara="1" rIns="91425" wrap="square" tIns="45700">
+          <a:bodyPr spcFirstLastPara="1" wrap="square" lIns="91425" tIns="45700" rIns="91425" bIns="45700" anchor="ctr" anchorCtr="0">
             <a:noAutofit/>
           </a:bodyPr>
           <a:lstStyle>
@@ -9570,15 +9777,19 @@
               <a:defRPr/>
             </a:lvl9pPr>
           </a:lstStyle>
-          <a:p/>
+          <a:p>
+            <a:endParaRPr/>
+          </a:p>
         </p:txBody>
       </p:sp>
       <p:sp>
         <p:nvSpPr>
           <p:cNvPr id="53" name="Google Shape;53;p9"/>
-          <p:cNvSpPr txBox="1"/>
+          <p:cNvSpPr txBox="1">
+            <a:spLocks noGrp="1"/>
+          </p:cNvSpPr>
           <p:nvPr>
-            <p:ph idx="12" type="sldNum"/>
+            <p:ph type="sldNum" idx="12"/>
           </p:nvPr>
         </p:nvSpPr>
         <p:spPr>
@@ -9595,11 +9806,11 @@
           </a:ln>
         </p:spPr>
         <p:txBody>
-          <a:bodyPr anchorCtr="0" anchor="ctr" bIns="45700" lIns="91425" spcFirstLastPara="1" rIns="91425" wrap="square" tIns="45700">
+          <a:bodyPr spcFirstLastPara="1" wrap="square" lIns="91425" tIns="45700" rIns="91425" bIns="45700" anchor="ctr" anchorCtr="0">
             <a:noAutofit/>
           </a:bodyPr>
           <a:lstStyle>
-            <a:lvl1pPr indent="0" lvl="0" marL="0" marR="0" algn="r">
+            <a:lvl1pPr marL="0" marR="0" lvl="0" indent="0" algn="r">
               <a:lnSpc>
                 <a:spcPct val="100000"/>
               </a:lnSpc>
@@ -9615,7 +9826,7 @@
               <a:buSzPts val="2287"/>
               <a:buFont typeface="Arial"/>
               <a:buNone/>
-              <a:defRPr b="0" i="0" sz="2287" u="none" cap="none" strike="noStrike">
+              <a:defRPr sz="2287" b="0" i="0" u="none" strike="noStrike" cap="none">
                 <a:solidFill>
                   <a:srgbClr val="888888"/>
                 </a:solidFill>
@@ -9625,7 +9836,7 @@
                 <a:sym typeface="Calibri"/>
               </a:defRPr>
             </a:lvl1pPr>
-            <a:lvl2pPr indent="0" lvl="1" marL="0" marR="0" algn="r">
+            <a:lvl2pPr marL="0" marR="0" lvl="1" indent="0" algn="r">
               <a:lnSpc>
                 <a:spcPct val="100000"/>
               </a:lnSpc>
@@ -9641,7 +9852,7 @@
               <a:buSzPts val="2287"/>
               <a:buFont typeface="Arial"/>
               <a:buNone/>
-              <a:defRPr b="0" i="0" sz="2287" u="none" cap="none" strike="noStrike">
+              <a:defRPr sz="2287" b="0" i="0" u="none" strike="noStrike" cap="none">
                 <a:solidFill>
                   <a:srgbClr val="888888"/>
                 </a:solidFill>
@@ -9651,7 +9862,7 @@
                 <a:sym typeface="Calibri"/>
               </a:defRPr>
             </a:lvl2pPr>
-            <a:lvl3pPr indent="0" lvl="2" marL="0" marR="0" algn="r">
+            <a:lvl3pPr marL="0" marR="0" lvl="2" indent="0" algn="r">
               <a:lnSpc>
                 <a:spcPct val="100000"/>
               </a:lnSpc>
@@ -9667,7 +9878,7 @@
               <a:buSzPts val="2287"/>
               <a:buFont typeface="Arial"/>
               <a:buNone/>
-              <a:defRPr b="0" i="0" sz="2287" u="none" cap="none" strike="noStrike">
+              <a:defRPr sz="2287" b="0" i="0" u="none" strike="noStrike" cap="none">
                 <a:solidFill>
                   <a:srgbClr val="888888"/>
                 </a:solidFill>
@@ -9677,7 +9888,7 @@
                 <a:sym typeface="Calibri"/>
               </a:defRPr>
             </a:lvl3pPr>
-            <a:lvl4pPr indent="0" lvl="3" marL="0" marR="0" algn="r">
+            <a:lvl4pPr marL="0" marR="0" lvl="3" indent="0" algn="r">
               <a:lnSpc>
                 <a:spcPct val="100000"/>
               </a:lnSpc>
@@ -9693,7 +9904,7 @@
               <a:buSzPts val="2287"/>
               <a:buFont typeface="Arial"/>
               <a:buNone/>
-              <a:defRPr b="0" i="0" sz="2287" u="none" cap="none" strike="noStrike">
+              <a:defRPr sz="2287" b="0" i="0" u="none" strike="noStrike" cap="none">
                 <a:solidFill>
                   <a:srgbClr val="888888"/>
                 </a:solidFill>
@@ -9703,7 +9914,7 @@
                 <a:sym typeface="Calibri"/>
               </a:defRPr>
             </a:lvl4pPr>
-            <a:lvl5pPr indent="0" lvl="4" marL="0" marR="0" algn="r">
+            <a:lvl5pPr marL="0" marR="0" lvl="4" indent="0" algn="r">
               <a:lnSpc>
                 <a:spcPct val="100000"/>
               </a:lnSpc>
@@ -9719,7 +9930,7 @@
               <a:buSzPts val="2287"/>
               <a:buFont typeface="Arial"/>
               <a:buNone/>
-              <a:defRPr b="0" i="0" sz="2287" u="none" cap="none" strike="noStrike">
+              <a:defRPr sz="2287" b="0" i="0" u="none" strike="noStrike" cap="none">
                 <a:solidFill>
                   <a:srgbClr val="888888"/>
                 </a:solidFill>
@@ -9729,7 +9940,7 @@
                 <a:sym typeface="Calibri"/>
               </a:defRPr>
             </a:lvl5pPr>
-            <a:lvl6pPr indent="0" lvl="5" marL="0" marR="0" algn="r">
+            <a:lvl6pPr marL="0" marR="0" lvl="5" indent="0" algn="r">
               <a:lnSpc>
                 <a:spcPct val="100000"/>
               </a:lnSpc>
@@ -9745,7 +9956,7 @@
               <a:buSzPts val="2287"/>
               <a:buFont typeface="Arial"/>
               <a:buNone/>
-              <a:defRPr b="0" i="0" sz="2287" u="none" cap="none" strike="noStrike">
+              <a:defRPr sz="2287" b="0" i="0" u="none" strike="noStrike" cap="none">
                 <a:solidFill>
                   <a:srgbClr val="888888"/>
                 </a:solidFill>
@@ -9755,7 +9966,7 @@
                 <a:sym typeface="Calibri"/>
               </a:defRPr>
             </a:lvl6pPr>
-            <a:lvl7pPr indent="0" lvl="6" marL="0" marR="0" algn="r">
+            <a:lvl7pPr marL="0" marR="0" lvl="6" indent="0" algn="r">
               <a:lnSpc>
                 <a:spcPct val="100000"/>
               </a:lnSpc>
@@ -9771,7 +9982,7 @@
               <a:buSzPts val="2287"/>
               <a:buFont typeface="Arial"/>
               <a:buNone/>
-              <a:defRPr b="0" i="0" sz="2287" u="none" cap="none" strike="noStrike">
+              <a:defRPr sz="2287" b="0" i="0" u="none" strike="noStrike" cap="none">
                 <a:solidFill>
                   <a:srgbClr val="888888"/>
                 </a:solidFill>
@@ -9781,7 +9992,7 @@
                 <a:sym typeface="Calibri"/>
               </a:defRPr>
             </a:lvl7pPr>
-            <a:lvl8pPr indent="0" lvl="7" marL="0" marR="0" algn="r">
+            <a:lvl8pPr marL="0" marR="0" lvl="7" indent="0" algn="r">
               <a:lnSpc>
                 <a:spcPct val="100000"/>
               </a:lnSpc>
@@ -9797,7 +10008,7 @@
               <a:buSzPts val="2287"/>
               <a:buFont typeface="Arial"/>
               <a:buNone/>
-              <a:defRPr b="0" i="0" sz="2287" u="none" cap="none" strike="noStrike">
+              <a:defRPr sz="2287" b="0" i="0" u="none" strike="noStrike" cap="none">
                 <a:solidFill>
                   <a:srgbClr val="888888"/>
                 </a:solidFill>
@@ -9807,7 +10018,7 @@
                 <a:sym typeface="Calibri"/>
               </a:defRPr>
             </a:lvl8pPr>
-            <a:lvl9pPr indent="0" lvl="8" marL="0" marR="0" algn="r">
+            <a:lvl9pPr marL="0" marR="0" lvl="8" indent="0" algn="r">
               <a:lnSpc>
                 <a:spcPct val="100000"/>
               </a:lnSpc>
@@ -9823,7 +10034,7 @@
               <a:buSzPts val="2287"/>
               <a:buFont typeface="Arial"/>
               <a:buNone/>
-              <a:defRPr b="0" i="0" sz="2287" u="none" cap="none" strike="noStrike">
+              <a:defRPr sz="2287" b="0" i="0" u="none" strike="noStrike" cap="none">
                 <a:solidFill>
                   <a:srgbClr val="888888"/>
                 </a:solidFill>
@@ -9835,7 +10046,7 @@
             </a:lvl9pPr>
           </a:lstStyle>
           <a:p>
-            <a:pPr indent="0" lvl="0" marL="0" rtl="0" algn="r">
+            <a:pPr marL="0" lvl="0" indent="0" algn="r" rtl="0">
               <a:spcBef>
                 <a:spcPts val="0"/>
               </a:spcBef>
@@ -9846,7 +10057,7 @@
             </a:pPr>
             <a:fld id="{00000000-1234-1234-1234-123412341234}" type="slidenum">
               <a:rPr lang="en-US"/>
-              <a:t>‹#›</a:t>
+              <a:t>‹nº›</a:t>
             </a:fld>
             <a:endParaRPr/>
           </a:p>
@@ -9861,11 +10072,11 @@
 </file>
 
 <file path=ppt/slideLayouts/slideLayout8.xml><?xml version="1.0" encoding="utf-8"?>
-<p:sldLayout xmlns:a="http://schemas.openxmlformats.org/drawingml/2006/main" xmlns:r="http://schemas.openxmlformats.org/officeDocument/2006/relationships" xmlns:mc="http://schemas.openxmlformats.org/markup-compatibility/2006" xmlns:mv="urn:schemas-microsoft-com:mac:vml" xmlns:p="http://schemas.openxmlformats.org/presentationml/2006/main" xmlns:c="http://schemas.openxmlformats.org/drawingml/2006/chart" xmlns:dgm="http://schemas.openxmlformats.org/drawingml/2006/diagram" xmlns:o="urn:schemas-microsoft-com:office:office" xmlns:v="urn:schemas-microsoft-com:vml" xmlns:pvml="urn:schemas-microsoft-com:office:powerpoint" xmlns:com="http://schemas.openxmlformats.org/drawingml/2006/compatibility" xmlns:p14="http://schemas.microsoft.com/office/powerpoint/2010/main" xmlns:p15="http://schemas.microsoft.com/office/powerpoint/2012/main" xmlns:ahyp="http://schemas.microsoft.com/office/drawing/2018/hyperlinkcolor" matchingName="Content with Caption" type="objTx">
+<p:sldLayout xmlns:a="http://schemas.openxmlformats.org/drawingml/2006/main" xmlns:r="http://schemas.openxmlformats.org/officeDocument/2006/relationships" xmlns:p="http://schemas.openxmlformats.org/presentationml/2006/main" matchingName="Content with Caption" type="objTx">
   <p:cSld name="OBJECT_WITH_CAPTION_TEXT">
     <p:spTree>
       <p:nvGrpSpPr>
-        <p:cNvPr id="54" name="Shape 54"/>
+        <p:cNvPr id="1" name="Shape 54"/>
         <p:cNvGrpSpPr/>
         <p:nvPr/>
       </p:nvGrpSpPr>
@@ -9880,7 +10091,9 @@
       <p:sp>
         <p:nvSpPr>
           <p:cNvPr id="55" name="Google Shape;55;p10"/>
-          <p:cNvSpPr txBox="1"/>
+          <p:cNvSpPr txBox="1">
+            <a:spLocks noGrp="1"/>
+          </p:cNvSpPr>
           <p:nvPr>
             <p:ph type="title"/>
           </p:nvPr>
@@ -9899,7 +10112,7 @@
           </a:ln>
         </p:spPr>
         <p:txBody>
-          <a:bodyPr anchorCtr="0" anchor="b" bIns="45700" lIns="91425" spcFirstLastPara="1" rIns="91425" wrap="square" tIns="45700">
+          <a:bodyPr spcFirstLastPara="1" wrap="square" lIns="91425" tIns="45700" rIns="91425" bIns="45700" anchor="b" anchorCtr="0">
             <a:normAutofit/>
           </a:bodyPr>
           <a:lstStyle>
@@ -9919,7 +10132,7 @@
               <a:buSzPts val="3811"/>
               <a:buFont typeface="Calibri"/>
               <a:buNone/>
-              <a:defRPr b="1" sz="3811"/>
+              <a:defRPr sz="3811" b="1"/>
             </a:lvl1pPr>
             <a:lvl2pPr lvl="1" algn="l">
               <a:lnSpc>
@@ -10034,15 +10247,19 @@
               <a:defRPr/>
             </a:lvl9pPr>
           </a:lstStyle>
-          <a:p/>
+          <a:p>
+            <a:endParaRPr/>
+          </a:p>
         </p:txBody>
       </p:sp>
       <p:sp>
         <p:nvSpPr>
           <p:cNvPr id="56" name="Google Shape;56;p10"/>
-          <p:cNvSpPr txBox="1"/>
+          <p:cNvSpPr txBox="1">
+            <a:spLocks noGrp="1"/>
+          </p:cNvSpPr>
           <p:nvPr>
-            <p:ph idx="1" type="body"/>
+            <p:ph type="body" idx="1"/>
           </p:nvPr>
         </p:nvSpPr>
         <p:spPr>
@@ -10059,11 +10276,11 @@
           </a:ln>
         </p:spPr>
         <p:txBody>
-          <a:bodyPr anchorCtr="0" anchor="t" bIns="45700" lIns="91425" spcFirstLastPara="1" rIns="91425" wrap="square" tIns="45700">
+          <a:bodyPr spcFirstLastPara="1" wrap="square" lIns="91425" tIns="45700" rIns="91425" bIns="45700" anchor="t" anchorCtr="0">
             <a:normAutofit/>
           </a:bodyPr>
           <a:lstStyle>
-            <a:lvl1pPr indent="-615823" lvl="0" marL="457200" algn="l">
+            <a:lvl1pPr marL="457200" lvl="0" indent="-615823" algn="l">
               <a:lnSpc>
                 <a:spcPct val="100000"/>
               </a:lnSpc>
@@ -10080,7 +10297,7 @@
               <a:buChar char="•"/>
               <a:defRPr sz="6098"/>
             </a:lvl1pPr>
-            <a:lvl2pPr indent="-567436" lvl="1" marL="914400" algn="l">
+            <a:lvl2pPr marL="914400" lvl="1" indent="-567436" algn="l">
               <a:lnSpc>
                 <a:spcPct val="100000"/>
               </a:lnSpc>
@@ -10097,7 +10314,7 @@
               <a:buChar char="–"/>
               <a:defRPr sz="5336"/>
             </a:lvl2pPr>
-            <a:lvl3pPr indent="-519049" lvl="2" marL="1371600" algn="l">
+            <a:lvl3pPr marL="1371600" lvl="2" indent="-519049" algn="l">
               <a:lnSpc>
                 <a:spcPct val="100000"/>
               </a:lnSpc>
@@ -10114,7 +10331,7 @@
               <a:buChar char="•"/>
               <a:defRPr sz="4574"/>
             </a:lvl3pPr>
-            <a:lvl4pPr indent="-470599" lvl="3" marL="1828800" algn="l">
+            <a:lvl4pPr marL="1828800" lvl="3" indent="-470599" algn="l">
               <a:lnSpc>
                 <a:spcPct val="100000"/>
               </a:lnSpc>
@@ -10131,7 +10348,7 @@
               <a:buChar char="–"/>
               <a:defRPr sz="3811"/>
             </a:lvl4pPr>
-            <a:lvl5pPr indent="-470598" lvl="4" marL="2286000" algn="l">
+            <a:lvl5pPr marL="2286000" lvl="4" indent="-470598" algn="l">
               <a:lnSpc>
                 <a:spcPct val="100000"/>
               </a:lnSpc>
@@ -10148,7 +10365,7 @@
               <a:buChar char="»"/>
               <a:defRPr sz="3811"/>
             </a:lvl5pPr>
-            <a:lvl6pPr indent="-470598" lvl="5" marL="2743200" algn="l">
+            <a:lvl6pPr marL="2743200" lvl="5" indent="-470598" algn="l">
               <a:lnSpc>
                 <a:spcPct val="100000"/>
               </a:lnSpc>
@@ -10165,7 +10382,7 @@
               <a:buChar char="•"/>
               <a:defRPr sz="3811"/>
             </a:lvl6pPr>
-            <a:lvl7pPr indent="-470598" lvl="6" marL="3200400" algn="l">
+            <a:lvl7pPr marL="3200400" lvl="6" indent="-470598" algn="l">
               <a:lnSpc>
                 <a:spcPct val="100000"/>
               </a:lnSpc>
@@ -10182,7 +10399,7 @@
               <a:buChar char="•"/>
               <a:defRPr sz="3811"/>
             </a:lvl7pPr>
-            <a:lvl8pPr indent="-470598" lvl="7" marL="3657600" algn="l">
+            <a:lvl8pPr marL="3657600" lvl="7" indent="-470598" algn="l">
               <a:lnSpc>
                 <a:spcPct val="100000"/>
               </a:lnSpc>
@@ -10199,7 +10416,7 @@
               <a:buChar char="•"/>
               <a:defRPr sz="3811"/>
             </a:lvl8pPr>
-            <a:lvl9pPr indent="-470598" lvl="8" marL="4114800" algn="l">
+            <a:lvl9pPr marL="4114800" lvl="8" indent="-470598" algn="l">
               <a:lnSpc>
                 <a:spcPct val="100000"/>
               </a:lnSpc>
@@ -10217,15 +10434,19 @@
               <a:defRPr sz="3811"/>
             </a:lvl9pPr>
           </a:lstStyle>
-          <a:p/>
+          <a:p>
+            <a:endParaRPr/>
+          </a:p>
         </p:txBody>
       </p:sp>
       <p:sp>
         <p:nvSpPr>
           <p:cNvPr id="57" name="Google Shape;57;p10"/>
-          <p:cNvSpPr txBox="1"/>
+          <p:cNvSpPr txBox="1">
+            <a:spLocks noGrp="1"/>
+          </p:cNvSpPr>
           <p:nvPr>
-            <p:ph idx="2" type="body"/>
+            <p:ph type="body" idx="2"/>
           </p:nvPr>
         </p:nvSpPr>
         <p:spPr>
@@ -10242,11 +10463,11 @@
           </a:ln>
         </p:spPr>
         <p:txBody>
-          <a:bodyPr anchorCtr="0" anchor="t" bIns="45700" lIns="91425" spcFirstLastPara="1" rIns="91425" wrap="square" tIns="45700">
+          <a:bodyPr spcFirstLastPara="1" wrap="square" lIns="91425" tIns="45700" rIns="91425" bIns="45700" anchor="t" anchorCtr="0">
             <a:normAutofit/>
           </a:bodyPr>
           <a:lstStyle>
-            <a:lvl1pPr indent="-228600" lvl="0" marL="457200" algn="l">
+            <a:lvl1pPr marL="457200" lvl="0" indent="-228600" algn="l">
               <a:lnSpc>
                 <a:spcPct val="100000"/>
               </a:lnSpc>
@@ -10263,7 +10484,7 @@
               <a:buNone/>
               <a:defRPr sz="2668"/>
             </a:lvl1pPr>
-            <a:lvl2pPr indent="-228600" lvl="1" marL="914400" algn="l">
+            <a:lvl2pPr marL="914400" lvl="1" indent="-228600" algn="l">
               <a:lnSpc>
                 <a:spcPct val="100000"/>
               </a:lnSpc>
@@ -10280,7 +10501,7 @@
               <a:buNone/>
               <a:defRPr sz="2287"/>
             </a:lvl2pPr>
-            <a:lvl3pPr indent="-228600" lvl="2" marL="1371600" algn="l">
+            <a:lvl3pPr marL="1371600" lvl="2" indent="-228600" algn="l">
               <a:lnSpc>
                 <a:spcPct val="100000"/>
               </a:lnSpc>
@@ -10297,7 +10518,7 @@
               <a:buNone/>
               <a:defRPr sz="1906"/>
             </a:lvl3pPr>
-            <a:lvl4pPr indent="-228600" lvl="3" marL="1828800" algn="l">
+            <a:lvl4pPr marL="1828800" lvl="3" indent="-228600" algn="l">
               <a:lnSpc>
                 <a:spcPct val="100000"/>
               </a:lnSpc>
@@ -10314,7 +10535,7 @@
               <a:buNone/>
               <a:defRPr sz="1715"/>
             </a:lvl4pPr>
-            <a:lvl5pPr indent="-228600" lvl="4" marL="2286000" algn="l">
+            <a:lvl5pPr marL="2286000" lvl="4" indent="-228600" algn="l">
               <a:lnSpc>
                 <a:spcPct val="100000"/>
               </a:lnSpc>
@@ -10331,7 +10552,7 @@
               <a:buNone/>
               <a:defRPr sz="1715"/>
             </a:lvl5pPr>
-            <a:lvl6pPr indent="-228600" lvl="5" marL="2743200" algn="l">
+            <a:lvl6pPr marL="2743200" lvl="5" indent="-228600" algn="l">
               <a:lnSpc>
                 <a:spcPct val="100000"/>
               </a:lnSpc>
@@ -10348,7 +10569,7 @@
               <a:buNone/>
               <a:defRPr sz="1715"/>
             </a:lvl6pPr>
-            <a:lvl7pPr indent="-228600" lvl="6" marL="3200400" algn="l">
+            <a:lvl7pPr marL="3200400" lvl="6" indent="-228600" algn="l">
               <a:lnSpc>
                 <a:spcPct val="100000"/>
               </a:lnSpc>
@@ -10365,7 +10586,7 @@
               <a:buNone/>
               <a:defRPr sz="1715"/>
             </a:lvl7pPr>
-            <a:lvl8pPr indent="-228600" lvl="7" marL="3657600" algn="l">
+            <a:lvl8pPr marL="3657600" lvl="7" indent="-228600" algn="l">
               <a:lnSpc>
                 <a:spcPct val="100000"/>
               </a:lnSpc>
@@ -10382,7 +10603,7 @@
               <a:buNone/>
               <a:defRPr sz="1715"/>
             </a:lvl8pPr>
-            <a:lvl9pPr indent="-228600" lvl="8" marL="4114800" algn="l">
+            <a:lvl9pPr marL="4114800" lvl="8" indent="-228600" algn="l">
               <a:lnSpc>
                 <a:spcPct val="100000"/>
               </a:lnSpc>
@@ -10400,15 +10621,19 @@
               <a:defRPr sz="1715"/>
             </a:lvl9pPr>
           </a:lstStyle>
-          <a:p/>
+          <a:p>
+            <a:endParaRPr/>
+          </a:p>
         </p:txBody>
       </p:sp>
       <p:sp>
         <p:nvSpPr>
           <p:cNvPr id="58" name="Google Shape;58;p10"/>
-          <p:cNvSpPr txBox="1"/>
+          <p:cNvSpPr txBox="1">
+            <a:spLocks noGrp="1"/>
+          </p:cNvSpPr>
           <p:nvPr>
-            <p:ph idx="10" type="dt"/>
+            <p:ph type="dt" idx="10"/>
           </p:nvPr>
         </p:nvSpPr>
         <p:spPr>
@@ -10425,7 +10650,7 @@
           </a:ln>
         </p:spPr>
         <p:txBody>
-          <a:bodyPr anchorCtr="0" anchor="ctr" bIns="45700" lIns="91425" spcFirstLastPara="1" rIns="91425" wrap="square" tIns="45700">
+          <a:bodyPr spcFirstLastPara="1" wrap="square" lIns="91425" tIns="45700" rIns="91425" bIns="45700" anchor="ctr" anchorCtr="0">
             <a:noAutofit/>
           </a:bodyPr>
           <a:lstStyle>
@@ -10556,15 +10781,19 @@
               <a:defRPr/>
             </a:lvl9pPr>
           </a:lstStyle>
-          <a:p/>
+          <a:p>
+            <a:endParaRPr/>
+          </a:p>
         </p:txBody>
       </p:sp>
       <p:sp>
         <p:nvSpPr>
           <p:cNvPr id="59" name="Google Shape;59;p10"/>
-          <p:cNvSpPr txBox="1"/>
+          <p:cNvSpPr txBox="1">
+            <a:spLocks noGrp="1"/>
+          </p:cNvSpPr>
           <p:nvPr>
-            <p:ph idx="11" type="ftr"/>
+            <p:ph type="ftr" idx="11"/>
           </p:nvPr>
         </p:nvSpPr>
         <p:spPr>
@@ -10581,7 +10810,7 @@
           </a:ln>
         </p:spPr>
         <p:txBody>
-          <a:bodyPr anchorCtr="0" anchor="ctr" bIns="45700" lIns="91425" spcFirstLastPara="1" rIns="91425" wrap="square" tIns="45700">
+          <a:bodyPr spcFirstLastPara="1" wrap="square" lIns="91425" tIns="45700" rIns="91425" bIns="45700" anchor="ctr" anchorCtr="0">
             <a:noAutofit/>
           </a:bodyPr>
           <a:lstStyle>
@@ -10712,15 +10941,19 @@
               <a:defRPr/>
             </a:lvl9pPr>
           </a:lstStyle>
-          <a:p/>
+          <a:p>
+            <a:endParaRPr/>
+          </a:p>
         </p:txBody>
       </p:sp>
       <p:sp>
         <p:nvSpPr>
           <p:cNvPr id="60" name="Google Shape;60;p10"/>
-          <p:cNvSpPr txBox="1"/>
+          <p:cNvSpPr txBox="1">
+            <a:spLocks noGrp="1"/>
+          </p:cNvSpPr>
           <p:nvPr>
-            <p:ph idx="12" type="sldNum"/>
+            <p:ph type="sldNum" idx="12"/>
           </p:nvPr>
         </p:nvSpPr>
         <p:spPr>
@@ -10737,11 +10970,11 @@
           </a:ln>
         </p:spPr>
         <p:txBody>
-          <a:bodyPr anchorCtr="0" anchor="ctr" bIns="45700" lIns="91425" spcFirstLastPara="1" rIns="91425" wrap="square" tIns="45700">
+          <a:bodyPr spcFirstLastPara="1" wrap="square" lIns="91425" tIns="45700" rIns="91425" bIns="45700" anchor="ctr" anchorCtr="0">
             <a:noAutofit/>
           </a:bodyPr>
           <a:lstStyle>
-            <a:lvl1pPr indent="0" lvl="0" marL="0" marR="0" algn="r">
+            <a:lvl1pPr marL="0" marR="0" lvl="0" indent="0" algn="r">
               <a:lnSpc>
                 <a:spcPct val="100000"/>
               </a:lnSpc>
@@ -10757,7 +10990,7 @@
               <a:buSzPts val="2287"/>
               <a:buFont typeface="Arial"/>
               <a:buNone/>
-              <a:defRPr b="0" i="0" sz="2287" u="none" cap="none" strike="noStrike">
+              <a:defRPr sz="2287" b="0" i="0" u="none" strike="noStrike" cap="none">
                 <a:solidFill>
                   <a:srgbClr val="888888"/>
                 </a:solidFill>
@@ -10767,7 +11000,7 @@
                 <a:sym typeface="Calibri"/>
               </a:defRPr>
             </a:lvl1pPr>
-            <a:lvl2pPr indent="0" lvl="1" marL="0" marR="0" algn="r">
+            <a:lvl2pPr marL="0" marR="0" lvl="1" indent="0" algn="r">
               <a:lnSpc>
                 <a:spcPct val="100000"/>
               </a:lnSpc>
@@ -10783,7 +11016,7 @@
               <a:buSzPts val="2287"/>
               <a:buFont typeface="Arial"/>
               <a:buNone/>
-              <a:defRPr b="0" i="0" sz="2287" u="none" cap="none" strike="noStrike">
+              <a:defRPr sz="2287" b="0" i="0" u="none" strike="noStrike" cap="none">
                 <a:solidFill>
                   <a:srgbClr val="888888"/>
                 </a:solidFill>
@@ -10793,7 +11026,7 @@
                 <a:sym typeface="Calibri"/>
               </a:defRPr>
             </a:lvl2pPr>
-            <a:lvl3pPr indent="0" lvl="2" marL="0" marR="0" algn="r">
+            <a:lvl3pPr marL="0" marR="0" lvl="2" indent="0" algn="r">
               <a:lnSpc>
                 <a:spcPct val="100000"/>
               </a:lnSpc>
@@ -10809,7 +11042,7 @@
               <a:buSzPts val="2287"/>
               <a:buFont typeface="Arial"/>
               <a:buNone/>
-              <a:defRPr b="0" i="0" sz="2287" u="none" cap="none" strike="noStrike">
+              <a:defRPr sz="2287" b="0" i="0" u="none" strike="noStrike" cap="none">
                 <a:solidFill>
                   <a:srgbClr val="888888"/>
                 </a:solidFill>
@@ -10819,7 +11052,7 @@
                 <a:sym typeface="Calibri"/>
               </a:defRPr>
             </a:lvl3pPr>
-            <a:lvl4pPr indent="0" lvl="3" marL="0" marR="0" algn="r">
+            <a:lvl4pPr marL="0" marR="0" lvl="3" indent="0" algn="r">
               <a:lnSpc>
                 <a:spcPct val="100000"/>
               </a:lnSpc>
@@ -10835,7 +11068,7 @@
               <a:buSzPts val="2287"/>
               <a:buFont typeface="Arial"/>
               <a:buNone/>
-              <a:defRPr b="0" i="0" sz="2287" u="none" cap="none" strike="noStrike">
+              <a:defRPr sz="2287" b="0" i="0" u="none" strike="noStrike" cap="none">
                 <a:solidFill>
                   <a:srgbClr val="888888"/>
                 </a:solidFill>
@@ -10845,7 +11078,7 @@
                 <a:sym typeface="Calibri"/>
               </a:defRPr>
             </a:lvl4pPr>
-            <a:lvl5pPr indent="0" lvl="4" marL="0" marR="0" algn="r">
+            <a:lvl5pPr marL="0" marR="0" lvl="4" indent="0" algn="r">
               <a:lnSpc>
                 <a:spcPct val="100000"/>
               </a:lnSpc>
@@ -10861,7 +11094,7 @@
               <a:buSzPts val="2287"/>
               <a:buFont typeface="Arial"/>
               <a:buNone/>
-              <a:defRPr b="0" i="0" sz="2287" u="none" cap="none" strike="noStrike">
+              <a:defRPr sz="2287" b="0" i="0" u="none" strike="noStrike" cap="none">
                 <a:solidFill>
                   <a:srgbClr val="888888"/>
                 </a:solidFill>
@@ -10871,7 +11104,7 @@
                 <a:sym typeface="Calibri"/>
               </a:defRPr>
             </a:lvl5pPr>
-            <a:lvl6pPr indent="0" lvl="5" marL="0" marR="0" algn="r">
+            <a:lvl6pPr marL="0" marR="0" lvl="5" indent="0" algn="r">
               <a:lnSpc>
                 <a:spcPct val="100000"/>
               </a:lnSpc>
@@ -10887,7 +11120,7 @@
               <a:buSzPts val="2287"/>
               <a:buFont typeface="Arial"/>
               <a:buNone/>
-              <a:defRPr b="0" i="0" sz="2287" u="none" cap="none" strike="noStrike">
+              <a:defRPr sz="2287" b="0" i="0" u="none" strike="noStrike" cap="none">
                 <a:solidFill>
                   <a:srgbClr val="888888"/>
                 </a:solidFill>
@@ -10897,7 +11130,7 @@
                 <a:sym typeface="Calibri"/>
               </a:defRPr>
             </a:lvl6pPr>
-            <a:lvl7pPr indent="0" lvl="6" marL="0" marR="0" algn="r">
+            <a:lvl7pPr marL="0" marR="0" lvl="6" indent="0" algn="r">
               <a:lnSpc>
                 <a:spcPct val="100000"/>
               </a:lnSpc>
@@ -10913,7 +11146,7 @@
               <a:buSzPts val="2287"/>
               <a:buFont typeface="Arial"/>
               <a:buNone/>
-              <a:defRPr b="0" i="0" sz="2287" u="none" cap="none" strike="noStrike">
+              <a:defRPr sz="2287" b="0" i="0" u="none" strike="noStrike" cap="none">
                 <a:solidFill>
                   <a:srgbClr val="888888"/>
                 </a:solidFill>
@@ -10923,7 +11156,7 @@
                 <a:sym typeface="Calibri"/>
               </a:defRPr>
             </a:lvl7pPr>
-            <a:lvl8pPr indent="0" lvl="7" marL="0" marR="0" algn="r">
+            <a:lvl8pPr marL="0" marR="0" lvl="7" indent="0" algn="r">
               <a:lnSpc>
                 <a:spcPct val="100000"/>
               </a:lnSpc>
@@ -10939,7 +11172,7 @@
               <a:buSzPts val="2287"/>
               <a:buFont typeface="Arial"/>
               <a:buNone/>
-              <a:defRPr b="0" i="0" sz="2287" u="none" cap="none" strike="noStrike">
+              <a:defRPr sz="2287" b="0" i="0" u="none" strike="noStrike" cap="none">
                 <a:solidFill>
                   <a:srgbClr val="888888"/>
                 </a:solidFill>
@@ -10949,7 +11182,7 @@
                 <a:sym typeface="Calibri"/>
               </a:defRPr>
             </a:lvl8pPr>
-            <a:lvl9pPr indent="0" lvl="8" marL="0" marR="0" algn="r">
+            <a:lvl9pPr marL="0" marR="0" lvl="8" indent="0" algn="r">
               <a:lnSpc>
                 <a:spcPct val="100000"/>
               </a:lnSpc>
@@ -10965,7 +11198,7 @@
               <a:buSzPts val="2287"/>
               <a:buFont typeface="Arial"/>
               <a:buNone/>
-              <a:defRPr b="0" i="0" sz="2287" u="none" cap="none" strike="noStrike">
+              <a:defRPr sz="2287" b="0" i="0" u="none" strike="noStrike" cap="none">
                 <a:solidFill>
                   <a:srgbClr val="888888"/>
                 </a:solidFill>
@@ -10977,7 +11210,7 @@
             </a:lvl9pPr>
           </a:lstStyle>
           <a:p>
-            <a:pPr indent="0" lvl="0" marL="0" rtl="0" algn="r">
+            <a:pPr marL="0" lvl="0" indent="0" algn="r" rtl="0">
               <a:spcBef>
                 <a:spcPts val="0"/>
               </a:spcBef>
@@ -10988,7 +11221,7 @@
             </a:pPr>
             <a:fld id="{00000000-1234-1234-1234-123412341234}" type="slidenum">
               <a:rPr lang="en-US"/>
-              <a:t>‹#›</a:t>
+              <a:t>‹nº›</a:t>
             </a:fld>
             <a:endParaRPr/>
           </a:p>
@@ -11003,11 +11236,11 @@
 </file>
 
 <file path=ppt/slideLayouts/slideLayout9.xml><?xml version="1.0" encoding="utf-8"?>
-<p:sldLayout xmlns:a="http://schemas.openxmlformats.org/drawingml/2006/main" xmlns:r="http://schemas.openxmlformats.org/officeDocument/2006/relationships" xmlns:mc="http://schemas.openxmlformats.org/markup-compatibility/2006" xmlns:mv="urn:schemas-microsoft-com:mac:vml" xmlns:p="http://schemas.openxmlformats.org/presentationml/2006/main" xmlns:c="http://schemas.openxmlformats.org/drawingml/2006/chart" xmlns:dgm="http://schemas.openxmlformats.org/drawingml/2006/diagram" xmlns:o="urn:schemas-microsoft-com:office:office" xmlns:v="urn:schemas-microsoft-com:vml" xmlns:pvml="urn:schemas-microsoft-com:office:powerpoint" xmlns:com="http://schemas.openxmlformats.org/drawingml/2006/compatibility" xmlns:p14="http://schemas.microsoft.com/office/powerpoint/2010/main" xmlns:p15="http://schemas.microsoft.com/office/powerpoint/2012/main" xmlns:ahyp="http://schemas.microsoft.com/office/drawing/2018/hyperlinkcolor" matchingName="Picture with Caption" type="picTx">
+<p:sldLayout xmlns:a="http://schemas.openxmlformats.org/drawingml/2006/main" xmlns:r="http://schemas.openxmlformats.org/officeDocument/2006/relationships" xmlns:p="http://schemas.openxmlformats.org/presentationml/2006/main" matchingName="Picture with Caption" type="picTx">
   <p:cSld name="PICTURE_WITH_CAPTION_TEXT">
     <p:spTree>
       <p:nvGrpSpPr>
-        <p:cNvPr id="61" name="Shape 61"/>
+        <p:cNvPr id="1" name="Shape 61"/>
         <p:cNvGrpSpPr/>
         <p:nvPr/>
       </p:nvGrpSpPr>
@@ -11022,7 +11255,9 @@
       <p:sp>
         <p:nvSpPr>
           <p:cNvPr id="62" name="Google Shape;62;p11"/>
-          <p:cNvSpPr txBox="1"/>
+          <p:cNvSpPr txBox="1">
+            <a:spLocks noGrp="1"/>
+          </p:cNvSpPr>
           <p:nvPr>
             <p:ph type="title"/>
           </p:nvPr>
@@ -11041,7 +11276,7 @@
           </a:ln>
         </p:spPr>
         <p:txBody>
-          <a:bodyPr anchorCtr="0" anchor="b" bIns="45700" lIns="91425" spcFirstLastPara="1" rIns="91425" wrap="square" tIns="45700">
+          <a:bodyPr spcFirstLastPara="1" wrap="square" lIns="91425" tIns="45700" rIns="91425" bIns="45700" anchor="b" anchorCtr="0">
             <a:normAutofit/>
           </a:bodyPr>
           <a:lstStyle>
@@ -11061,7 +11296,7 @@
               <a:buSzPts val="3811"/>
               <a:buFont typeface="Calibri"/>
               <a:buNone/>
-              <a:defRPr b="1" sz="3811"/>
+              <a:defRPr sz="3811" b="1"/>
             </a:lvl1pPr>
             <a:lvl2pPr lvl="1" algn="l">
               <a:lnSpc>
@@ -11176,15 +11411,19 @@
               <a:defRPr/>
             </a:lvl9pPr>
           </a:lstStyle>
-          <a:p/>
+          <a:p>
+            <a:endParaRPr/>
+          </a:p>
         </p:txBody>
       </p:sp>
       <p:sp>
         <p:nvSpPr>
           <p:cNvPr id="63" name="Google Shape;63;p11"/>
-          <p:cNvSpPr/>
+          <p:cNvSpPr>
+            <a:spLocks noGrp="1"/>
+          </p:cNvSpPr>
           <p:nvPr>
-            <p:ph idx="2" type="pic"/>
+            <p:ph type="pic" idx="2"/>
           </p:nvPr>
         </p:nvSpPr>
         <p:spPr>
@@ -11204,9 +11443,11 @@
       <p:sp>
         <p:nvSpPr>
           <p:cNvPr id="64" name="Google Shape;64;p11"/>
-          <p:cNvSpPr txBox="1"/>
+          <p:cNvSpPr txBox="1">
+            <a:spLocks noGrp="1"/>
+          </p:cNvSpPr>
           <p:nvPr>
-            <p:ph idx="1" type="body"/>
+            <p:ph type="body" idx="1"/>
           </p:nvPr>
         </p:nvSpPr>
         <p:spPr>
@@ -11223,11 +11464,11 @@
           </a:ln>
         </p:spPr>
         <p:txBody>
-          <a:bodyPr anchorCtr="0" anchor="t" bIns="45700" lIns="91425" spcFirstLastPara="1" rIns="91425" wrap="square" tIns="45700">
+          <a:bodyPr spcFirstLastPara="1" wrap="square" lIns="91425" tIns="45700" rIns="91425" bIns="45700" anchor="t" anchorCtr="0">
             <a:normAutofit/>
           </a:bodyPr>
           <a:lstStyle>
-            <a:lvl1pPr indent="-228600" lvl="0" marL="457200" algn="l">
+            <a:lvl1pPr marL="457200" lvl="0" indent="-228600" algn="l">
               <a:lnSpc>
                 <a:spcPct val="100000"/>
               </a:lnSpc>
@@ -11244,7 +11485,7 @@
               <a:buNone/>
               <a:defRPr sz="2668"/>
             </a:lvl1pPr>
-            <a:lvl2pPr indent="-228600" lvl="1" marL="914400" algn="l">
+            <a:lvl2pPr marL="914400" lvl="1" indent="-228600" algn="l">
               <a:lnSpc>
                 <a:spcPct val="100000"/>
               </a:lnSpc>
@@ -11261,7 +11502,7 @@
               <a:buNone/>
               <a:defRPr sz="2287"/>
             </a:lvl2pPr>
-            <a:lvl3pPr indent="-228600" lvl="2" marL="1371600" algn="l">
+            <a:lvl3pPr marL="1371600" lvl="2" indent="-228600" algn="l">
               <a:lnSpc>
                 <a:spcPct val="100000"/>
               </a:lnSpc>
@@ -11278,7 +11519,7 @@
               <a:buNone/>
               <a:defRPr sz="1906"/>
             </a:lvl3pPr>
-            <a:lvl4pPr indent="-228600" lvl="3" marL="1828800" algn="l">
+            <a:lvl4pPr marL="1828800" lvl="3" indent="-228600" algn="l">
               <a:lnSpc>
                 <a:spcPct val="100000"/>
               </a:lnSpc>
@@ -11295,7 +11536,7 @@
               <a:buNone/>
               <a:defRPr sz="1715"/>
             </a:lvl4pPr>
-            <a:lvl5pPr indent="-228600" lvl="4" marL="2286000" algn="l">
+            <a:lvl5pPr marL="2286000" lvl="4" indent="-228600" algn="l">
               <a:lnSpc>
                 <a:spcPct val="100000"/>
               </a:lnSpc>
@@ -11312,7 +11553,7 @@
               <a:buNone/>
               <a:defRPr sz="1715"/>
             </a:lvl5pPr>
-            <a:lvl6pPr indent="-228600" lvl="5" marL="2743200" algn="l">
+            <a:lvl6pPr marL="2743200" lvl="5" indent="-228600" algn="l">
               <a:lnSpc>
                 <a:spcPct val="100000"/>
               </a:lnSpc>
@@ -11329,7 +11570,7 @@
               <a:buNone/>
               <a:defRPr sz="1715"/>
             </a:lvl6pPr>
-            <a:lvl7pPr indent="-228600" lvl="6" marL="3200400" algn="l">
+            <a:lvl7pPr marL="3200400" lvl="6" indent="-228600" algn="l">
               <a:lnSpc>
                 <a:spcPct val="100000"/>
               </a:lnSpc>
@@ -11346,7 +11587,7 @@
               <a:buNone/>
               <a:defRPr sz="1715"/>
             </a:lvl7pPr>
-            <a:lvl8pPr indent="-228600" lvl="7" marL="3657600" algn="l">
+            <a:lvl8pPr marL="3657600" lvl="7" indent="-228600" algn="l">
               <a:lnSpc>
                 <a:spcPct val="100000"/>
               </a:lnSpc>
@@ -11363,7 +11604,7 @@
               <a:buNone/>
               <a:defRPr sz="1715"/>
             </a:lvl8pPr>
-            <a:lvl9pPr indent="-228600" lvl="8" marL="4114800" algn="l">
+            <a:lvl9pPr marL="4114800" lvl="8" indent="-228600" algn="l">
               <a:lnSpc>
                 <a:spcPct val="100000"/>
               </a:lnSpc>
@@ -11381,15 +11622,19 @@
               <a:defRPr sz="1715"/>
             </a:lvl9pPr>
           </a:lstStyle>
-          <a:p/>
+          <a:p>
+            <a:endParaRPr/>
+          </a:p>
         </p:txBody>
       </p:sp>
       <p:sp>
         <p:nvSpPr>
           <p:cNvPr id="65" name="Google Shape;65;p11"/>
-          <p:cNvSpPr txBox="1"/>
+          <p:cNvSpPr txBox="1">
+            <a:spLocks noGrp="1"/>
+          </p:cNvSpPr>
           <p:nvPr>
-            <p:ph idx="10" type="dt"/>
+            <p:ph type="dt" idx="10"/>
           </p:nvPr>
         </p:nvSpPr>
         <p:spPr>
@@ -11406,7 +11651,7 @@
           </a:ln>
         </p:spPr>
         <p:txBody>
-          <a:bodyPr anchorCtr="0" anchor="ctr" bIns="45700" lIns="91425" spcFirstLastPara="1" rIns="91425" wrap="square" tIns="45700">
+          <a:bodyPr spcFirstLastPara="1" wrap="square" lIns="91425" tIns="45700" rIns="91425" bIns="45700" anchor="ctr" anchorCtr="0">
             <a:noAutofit/>
           </a:bodyPr>
           <a:lstStyle>
@@ -11537,15 +11782,19 @@
               <a:defRPr/>
             </a:lvl9pPr>
           </a:lstStyle>
-          <a:p/>
+          <a:p>
+            <a:endParaRPr/>
+          </a:p>
         </p:txBody>
       </p:sp>
       <p:sp>
         <p:nvSpPr>
           <p:cNvPr id="66" name="Google Shape;66;p11"/>
-          <p:cNvSpPr txBox="1"/>
+          <p:cNvSpPr txBox="1">
+            <a:spLocks noGrp="1"/>
+          </p:cNvSpPr>
           <p:nvPr>
-            <p:ph idx="11" type="ftr"/>
+            <p:ph type="ftr" idx="11"/>
           </p:nvPr>
         </p:nvSpPr>
         <p:spPr>
@@ -11562,7 +11811,7 @@
           </a:ln>
         </p:spPr>
         <p:txBody>
-          <a:bodyPr anchorCtr="0" anchor="ctr" bIns="45700" lIns="91425" spcFirstLastPara="1" rIns="91425" wrap="square" tIns="45700">
+          <a:bodyPr spcFirstLastPara="1" wrap="square" lIns="91425" tIns="45700" rIns="91425" bIns="45700" anchor="ctr" anchorCtr="0">
             <a:noAutofit/>
           </a:bodyPr>
           <a:lstStyle>
@@ -11693,15 +11942,19 @@
               <a:defRPr/>
             </a:lvl9pPr>
           </a:lstStyle>
-          <a:p/>
+          <a:p>
+            <a:endParaRPr/>
+          </a:p>
         </p:txBody>
       </p:sp>
       <p:sp>
         <p:nvSpPr>
           <p:cNvPr id="67" name="Google Shape;67;p11"/>
-          <p:cNvSpPr txBox="1"/>
+          <p:cNvSpPr txBox="1">
+            <a:spLocks noGrp="1"/>
+          </p:cNvSpPr>
           <p:nvPr>
-            <p:ph idx="12" type="sldNum"/>
+            <p:ph type="sldNum" idx="12"/>
           </p:nvPr>
         </p:nvSpPr>
         <p:spPr>
@@ -11718,11 +11971,11 @@
           </a:ln>
         </p:spPr>
         <p:txBody>
-          <a:bodyPr anchorCtr="0" anchor="ctr" bIns="45700" lIns="91425" spcFirstLastPara="1" rIns="91425" wrap="square" tIns="45700">
+          <a:bodyPr spcFirstLastPara="1" wrap="square" lIns="91425" tIns="45700" rIns="91425" bIns="45700" anchor="ctr" anchorCtr="0">
             <a:noAutofit/>
           </a:bodyPr>
           <a:lstStyle>
-            <a:lvl1pPr indent="0" lvl="0" marL="0" marR="0" algn="r">
+            <a:lvl1pPr marL="0" marR="0" lvl="0" indent="0" algn="r">
               <a:lnSpc>
                 <a:spcPct val="100000"/>
               </a:lnSpc>
@@ -11738,7 +11991,7 @@
               <a:buSzPts val="2287"/>
               <a:buFont typeface="Arial"/>
               <a:buNone/>
-              <a:defRPr b="0" i="0" sz="2287" u="none" cap="none" strike="noStrike">
+              <a:defRPr sz="2287" b="0" i="0" u="none" strike="noStrike" cap="none">
                 <a:solidFill>
                   <a:srgbClr val="888888"/>
                 </a:solidFill>
@@ -11748,7 +12001,7 @@
                 <a:sym typeface="Calibri"/>
               </a:defRPr>
             </a:lvl1pPr>
-            <a:lvl2pPr indent="0" lvl="1" marL="0" marR="0" algn="r">
+            <a:lvl2pPr marL="0" marR="0" lvl="1" indent="0" algn="r">
               <a:lnSpc>
                 <a:spcPct val="100000"/>
               </a:lnSpc>
@@ -11764,7 +12017,7 @@
               <a:buSzPts val="2287"/>
               <a:buFont typeface="Arial"/>
               <a:buNone/>
-              <a:defRPr b="0" i="0" sz="2287" u="none" cap="none" strike="noStrike">
+              <a:defRPr sz="2287" b="0" i="0" u="none" strike="noStrike" cap="none">
                 <a:solidFill>
                   <a:srgbClr val="888888"/>
                 </a:solidFill>
@@ -11774,7 +12027,7 @@
                 <a:sym typeface="Calibri"/>
               </a:defRPr>
             </a:lvl2pPr>
-            <a:lvl3pPr indent="0" lvl="2" marL="0" marR="0" algn="r">
+            <a:lvl3pPr marL="0" marR="0" lvl="2" indent="0" algn="r">
               <a:lnSpc>
                 <a:spcPct val="100000"/>
               </a:lnSpc>
@@ -11790,7 +12043,7 @@
               <a:buSzPts val="2287"/>
               <a:buFont typeface="Arial"/>
               <a:buNone/>
-              <a:defRPr b="0" i="0" sz="2287" u="none" cap="none" strike="noStrike">
+              <a:defRPr sz="2287" b="0" i="0" u="none" strike="noStrike" cap="none">
                 <a:solidFill>
                   <a:srgbClr val="888888"/>
                 </a:solidFill>
@@ -11800,7 +12053,7 @@
                 <a:sym typeface="Calibri"/>
               </a:defRPr>
             </a:lvl3pPr>
-            <a:lvl4pPr indent="0" lvl="3" marL="0" marR="0" algn="r">
+            <a:lvl4pPr marL="0" marR="0" lvl="3" indent="0" algn="r">
               <a:lnSpc>
                 <a:spcPct val="100000"/>
               </a:lnSpc>
@@ -11816,7 +12069,7 @@
               <a:buSzPts val="2287"/>
               <a:buFont typeface="Arial"/>
               <a:buNone/>
-              <a:defRPr b="0" i="0" sz="2287" u="none" cap="none" strike="noStrike">
+              <a:defRPr sz="2287" b="0" i="0" u="none" strike="noStrike" cap="none">
                 <a:solidFill>
                   <a:srgbClr val="888888"/>
                 </a:solidFill>
@@ -11826,7 +12079,7 @@
                 <a:sym typeface="Calibri"/>
               </a:defRPr>
             </a:lvl4pPr>
-            <a:lvl5pPr indent="0" lvl="4" marL="0" marR="0" algn="r">
+            <a:lvl5pPr marL="0" marR="0" lvl="4" indent="0" algn="r">
               <a:lnSpc>
                 <a:spcPct val="100000"/>
               </a:lnSpc>
@@ -11842,7 +12095,7 @@
               <a:buSzPts val="2287"/>
               <a:buFont typeface="Arial"/>
               <a:buNone/>
-              <a:defRPr b="0" i="0" sz="2287" u="none" cap="none" strike="noStrike">
+              <a:defRPr sz="2287" b="0" i="0" u="none" strike="noStrike" cap="none">
                 <a:solidFill>
                   <a:srgbClr val="888888"/>
                 </a:solidFill>
@@ -11852,7 +12105,7 @@
                 <a:sym typeface="Calibri"/>
               </a:defRPr>
             </a:lvl5pPr>
-            <a:lvl6pPr indent="0" lvl="5" marL="0" marR="0" algn="r">
+            <a:lvl6pPr marL="0" marR="0" lvl="5" indent="0" algn="r">
               <a:lnSpc>
                 <a:spcPct val="100000"/>
               </a:lnSpc>
@@ -11868,7 +12121,7 @@
               <a:buSzPts val="2287"/>
               <a:buFont typeface="Arial"/>
               <a:buNone/>
-              <a:defRPr b="0" i="0" sz="2287" u="none" cap="none" strike="noStrike">
+              <a:defRPr sz="2287" b="0" i="0" u="none" strike="noStrike" cap="none">
                 <a:solidFill>
                   <a:srgbClr val="888888"/>
                 </a:solidFill>
@@ -11878,7 +12131,7 @@
                 <a:sym typeface="Calibri"/>
               </a:defRPr>
             </a:lvl6pPr>
-            <a:lvl7pPr indent="0" lvl="6" marL="0" marR="0" algn="r">
+            <a:lvl7pPr marL="0" marR="0" lvl="6" indent="0" algn="r">
               <a:lnSpc>
                 <a:spcPct val="100000"/>
               </a:lnSpc>
@@ -11894,7 +12147,7 @@
               <a:buSzPts val="2287"/>
               <a:buFont typeface="Arial"/>
               <a:buNone/>
-              <a:defRPr b="0" i="0" sz="2287" u="none" cap="none" strike="noStrike">
+              <a:defRPr sz="2287" b="0" i="0" u="none" strike="noStrike" cap="none">
                 <a:solidFill>
                   <a:srgbClr val="888888"/>
                 </a:solidFill>
@@ -11904,7 +12157,7 @@
                 <a:sym typeface="Calibri"/>
               </a:defRPr>
             </a:lvl7pPr>
-            <a:lvl8pPr indent="0" lvl="7" marL="0" marR="0" algn="r">
+            <a:lvl8pPr marL="0" marR="0" lvl="7" indent="0" algn="r">
               <a:lnSpc>
                 <a:spcPct val="100000"/>
               </a:lnSpc>
@@ -11920,7 +12173,7 @@
               <a:buSzPts val="2287"/>
               <a:buFont typeface="Arial"/>
               <a:buNone/>
-              <a:defRPr b="0" i="0" sz="2287" u="none" cap="none" strike="noStrike">
+              <a:defRPr sz="2287" b="0" i="0" u="none" strike="noStrike" cap="none">
                 <a:solidFill>
                   <a:srgbClr val="888888"/>
                 </a:solidFill>
@@ -11930,7 +12183,7 @@
                 <a:sym typeface="Calibri"/>
               </a:defRPr>
             </a:lvl8pPr>
-            <a:lvl9pPr indent="0" lvl="8" marL="0" marR="0" algn="r">
+            <a:lvl9pPr marL="0" marR="0" lvl="8" indent="0" algn="r">
               <a:lnSpc>
                 <a:spcPct val="100000"/>
               </a:lnSpc>
@@ -11946,7 +12199,7 @@
               <a:buSzPts val="2287"/>
               <a:buFont typeface="Arial"/>
               <a:buNone/>
-              <a:defRPr b="0" i="0" sz="2287" u="none" cap="none" strike="noStrike">
+              <a:defRPr sz="2287" b="0" i="0" u="none" strike="noStrike" cap="none">
                 <a:solidFill>
                   <a:srgbClr val="888888"/>
                 </a:solidFill>
@@ -11958,7 +12211,7 @@
             </a:lvl9pPr>
           </a:lstStyle>
           <a:p>
-            <a:pPr indent="0" lvl="0" marL="0" rtl="0" algn="r">
+            <a:pPr marL="0" lvl="0" indent="0" algn="r" rtl="0">
               <a:spcBef>
                 <a:spcPts val="0"/>
               </a:spcBef>
@@ -11969,7 +12222,7 @@
             </a:pPr>
             <a:fld id="{00000000-1234-1234-1234-123412341234}" type="slidenum">
               <a:rPr lang="en-US"/>
-              <a:t>‹#›</a:t>
+              <a:t>‹nº›</a:t>
             </a:fld>
             <a:endParaRPr/>
           </a:p>
@@ -11984,18 +12237,19 @@
 </file>
 
 <file path=ppt/slideMasters/slideMaster1.xml><?xml version="1.0" encoding="utf-8"?>
-<p:sldMaster xmlns:a="http://schemas.openxmlformats.org/drawingml/2006/main" xmlns:r="http://schemas.openxmlformats.org/officeDocument/2006/relationships" xmlns:mc="http://schemas.openxmlformats.org/markup-compatibility/2006" xmlns:mv="urn:schemas-microsoft-com:mac:vml" xmlns:p="http://schemas.openxmlformats.org/presentationml/2006/main" xmlns:c="http://schemas.openxmlformats.org/drawingml/2006/chart" xmlns:dgm="http://schemas.openxmlformats.org/drawingml/2006/diagram" xmlns:o="urn:schemas-microsoft-com:office:office" xmlns:v="urn:schemas-microsoft-com:vml" xmlns:pvml="urn:schemas-microsoft-com:office:powerpoint" xmlns:com="http://schemas.openxmlformats.org/drawingml/2006/compatibility" xmlns:p14="http://schemas.microsoft.com/office/powerpoint/2010/main" xmlns:p15="http://schemas.microsoft.com/office/powerpoint/2012/main" xmlns:ahyp="http://schemas.microsoft.com/office/drawing/2018/hyperlinkcolor">
+<p:sldMaster xmlns:a="http://schemas.openxmlformats.org/drawingml/2006/main" xmlns:r="http://schemas.openxmlformats.org/officeDocument/2006/relationships" xmlns:p="http://schemas.openxmlformats.org/presentationml/2006/main">
   <p:cSld>
     <p:bg>
       <p:bgPr>
         <a:solidFill>
           <a:schemeClr val="lt1"/>
         </a:solidFill>
+        <a:effectLst/>
       </p:bgPr>
     </p:bg>
     <p:spTree>
       <p:nvGrpSpPr>
-        <p:cNvPr id="5" name="Shape 5"/>
+        <p:cNvPr id="1" name="Shape 5"/>
         <p:cNvGrpSpPr/>
         <p:nvPr/>
       </p:nvGrpSpPr>
@@ -12010,7 +12264,9 @@
       <p:sp>
         <p:nvSpPr>
           <p:cNvPr id="6" name="Google Shape;6;p2"/>
-          <p:cNvSpPr txBox="1"/>
+          <p:cNvSpPr txBox="1">
+            <a:spLocks noGrp="1"/>
+          </p:cNvSpPr>
           <p:nvPr>
             <p:ph type="title"/>
           </p:nvPr>
@@ -12029,11 +12285,11 @@
           </a:ln>
         </p:spPr>
         <p:txBody>
-          <a:bodyPr anchorCtr="0" anchor="ctr" bIns="45700" lIns="91425" spcFirstLastPara="1" rIns="91425" wrap="square" tIns="45700">
+          <a:bodyPr spcFirstLastPara="1" wrap="square" lIns="91425" tIns="45700" rIns="91425" bIns="45700" anchor="ctr" anchorCtr="0">
             <a:normAutofit/>
           </a:bodyPr>
           <a:lstStyle>
-            <a:lvl1pPr lvl="0" marR="0" rtl="0" algn="ctr">
+            <a:lvl1pPr marR="0" lvl="0" algn="ctr" rtl="0">
               <a:lnSpc>
                 <a:spcPct val="100000"/>
               </a:lnSpc>
@@ -12049,7 +12305,7 @@
               <a:buSzPts val="8385"/>
               <a:buFont typeface="Calibri"/>
               <a:buNone/>
-              <a:defRPr b="0" i="0" sz="8385" u="none" cap="none" strike="noStrike">
+              <a:defRPr sz="8385" b="0" i="0" u="none" strike="noStrike" cap="none">
                 <a:solidFill>
                   <a:schemeClr val="dk1"/>
                 </a:solidFill>
@@ -12059,7 +12315,7 @@
                 <a:sym typeface="Calibri"/>
               </a:defRPr>
             </a:lvl1pPr>
-            <a:lvl2pPr lvl="1" marR="0" rtl="0" algn="l">
+            <a:lvl2pPr marR="0" lvl="1" algn="l" rtl="0">
               <a:lnSpc>
                 <a:spcPct val="100000"/>
               </a:lnSpc>
@@ -12075,7 +12331,7 @@
               <a:buSzPts val="1400"/>
               <a:buFont typeface="Arial"/>
               <a:buNone/>
-              <a:defRPr b="0" i="0" sz="1800" u="none" cap="none" strike="noStrike">
+              <a:defRPr sz="1800" b="0" i="0" u="none" strike="noStrike" cap="none">
                 <a:solidFill>
                   <a:srgbClr val="000000"/>
                 </a:solidFill>
@@ -12085,7 +12341,7 @@
                 <a:sym typeface="Arial"/>
               </a:defRPr>
             </a:lvl2pPr>
-            <a:lvl3pPr lvl="2" marR="0" rtl="0" algn="l">
+            <a:lvl3pPr marR="0" lvl="2" algn="l" rtl="0">
               <a:lnSpc>
                 <a:spcPct val="100000"/>
               </a:lnSpc>
@@ -12101,7 +12357,7 @@
               <a:buSzPts val="1400"/>
               <a:buFont typeface="Arial"/>
               <a:buNone/>
-              <a:defRPr b="0" i="0" sz="1800" u="none" cap="none" strike="noStrike">
+              <a:defRPr sz="1800" b="0" i="0" u="none" strike="noStrike" cap="none">
                 <a:solidFill>
                   <a:srgbClr val="000000"/>
                 </a:solidFill>
@@ -12111,7 +12367,7 @@
                 <a:sym typeface="Arial"/>
               </a:defRPr>
             </a:lvl3pPr>
-            <a:lvl4pPr lvl="3" marR="0" rtl="0" algn="l">
+            <a:lvl4pPr marR="0" lvl="3" algn="l" rtl="0">
               <a:lnSpc>
                 <a:spcPct val="100000"/>
               </a:lnSpc>
@@ -12127,7 +12383,7 @@
               <a:buSzPts val="1400"/>
               <a:buFont typeface="Arial"/>
               <a:buNone/>
-              <a:defRPr b="0" i="0" sz="1800" u="none" cap="none" strike="noStrike">
+              <a:defRPr sz="1800" b="0" i="0" u="none" strike="noStrike" cap="none">
                 <a:solidFill>
                   <a:srgbClr val="000000"/>
                 </a:solidFill>
@@ -12137,7 +12393,7 @@
                 <a:sym typeface="Arial"/>
               </a:defRPr>
             </a:lvl4pPr>
-            <a:lvl5pPr lvl="4" marR="0" rtl="0" algn="l">
+            <a:lvl5pPr marR="0" lvl="4" algn="l" rtl="0">
               <a:lnSpc>
                 <a:spcPct val="100000"/>
               </a:lnSpc>
@@ -12153,7 +12409,7 @@
               <a:buSzPts val="1400"/>
               <a:buFont typeface="Arial"/>
               <a:buNone/>
-              <a:defRPr b="0" i="0" sz="1800" u="none" cap="none" strike="noStrike">
+              <a:defRPr sz="1800" b="0" i="0" u="none" strike="noStrike" cap="none">
                 <a:solidFill>
                   <a:srgbClr val="000000"/>
                 </a:solidFill>
@@ -12163,7 +12419,7 @@
                 <a:sym typeface="Arial"/>
               </a:defRPr>
             </a:lvl5pPr>
-            <a:lvl6pPr lvl="5" marR="0" rtl="0" algn="l">
+            <a:lvl6pPr marR="0" lvl="5" algn="l" rtl="0">
               <a:lnSpc>
                 <a:spcPct val="100000"/>
               </a:lnSpc>
@@ -12179,7 +12435,7 @@
               <a:buSzPts val="1400"/>
               <a:buFont typeface="Arial"/>
               <a:buNone/>
-              <a:defRPr b="0" i="0" sz="1800" u="none" cap="none" strike="noStrike">
+              <a:defRPr sz="1800" b="0" i="0" u="none" strike="noStrike" cap="none">
                 <a:solidFill>
                   <a:srgbClr val="000000"/>
                 </a:solidFill>
@@ -12189,7 +12445,7 @@
                 <a:sym typeface="Arial"/>
               </a:defRPr>
             </a:lvl6pPr>
-            <a:lvl7pPr lvl="6" marR="0" rtl="0" algn="l">
+            <a:lvl7pPr marR="0" lvl="6" algn="l" rtl="0">
               <a:lnSpc>
                 <a:spcPct val="100000"/>
               </a:lnSpc>
@@ -12205,7 +12461,7 @@
               <a:buSzPts val="1400"/>
               <a:buFont typeface="Arial"/>
               <a:buNone/>
-              <a:defRPr b="0" i="0" sz="1800" u="none" cap="none" strike="noStrike">
+              <a:defRPr sz="1800" b="0" i="0" u="none" strike="noStrike" cap="none">
                 <a:solidFill>
                   <a:srgbClr val="000000"/>
                 </a:solidFill>
@@ -12215,7 +12471,7 @@
                 <a:sym typeface="Arial"/>
               </a:defRPr>
             </a:lvl7pPr>
-            <a:lvl8pPr lvl="7" marR="0" rtl="0" algn="l">
+            <a:lvl8pPr marR="0" lvl="7" algn="l" rtl="0">
               <a:lnSpc>
                 <a:spcPct val="100000"/>
               </a:lnSpc>
@@ -12231,7 +12487,7 @@
               <a:buSzPts val="1400"/>
               <a:buFont typeface="Arial"/>
               <a:buNone/>
-              <a:defRPr b="0" i="0" sz="1800" u="none" cap="none" strike="noStrike">
+              <a:defRPr sz="1800" b="0" i="0" u="none" strike="noStrike" cap="none">
                 <a:solidFill>
                   <a:srgbClr val="000000"/>
                 </a:solidFill>
@@ -12241,7 +12497,7 @@
                 <a:sym typeface="Arial"/>
               </a:defRPr>
             </a:lvl8pPr>
-            <a:lvl9pPr lvl="8" marR="0" rtl="0" algn="l">
+            <a:lvl9pPr marR="0" lvl="8" algn="l" rtl="0">
               <a:lnSpc>
                 <a:spcPct val="100000"/>
               </a:lnSpc>
@@ -12257,7 +12513,7 @@
               <a:buSzPts val="1400"/>
               <a:buFont typeface="Arial"/>
               <a:buNone/>
-              <a:defRPr b="0" i="0" sz="1800" u="none" cap="none" strike="noStrike">
+              <a:defRPr sz="1800" b="0" i="0" u="none" strike="noStrike" cap="none">
                 <a:solidFill>
                   <a:srgbClr val="000000"/>
                 </a:solidFill>
@@ -12268,15 +12524,19 @@
               </a:defRPr>
             </a:lvl9pPr>
           </a:lstStyle>
-          <a:p/>
+          <a:p>
+            <a:endParaRPr/>
+          </a:p>
         </p:txBody>
       </p:sp>
       <p:sp>
         <p:nvSpPr>
           <p:cNvPr id="7" name="Google Shape;7;p2"/>
-          <p:cNvSpPr txBox="1"/>
+          <p:cNvSpPr txBox="1">
+            <a:spLocks noGrp="1"/>
+          </p:cNvSpPr>
           <p:nvPr>
-            <p:ph idx="1" type="body"/>
+            <p:ph type="body" idx="1"/>
           </p:nvPr>
         </p:nvSpPr>
         <p:spPr>
@@ -12293,11 +12553,11 @@
           </a:ln>
         </p:spPr>
         <p:txBody>
-          <a:bodyPr anchorCtr="0" anchor="t" bIns="45700" lIns="91425" spcFirstLastPara="1" rIns="91425" wrap="square" tIns="45700">
+          <a:bodyPr spcFirstLastPara="1" wrap="square" lIns="91425" tIns="45700" rIns="91425" bIns="45700" anchor="t" anchorCtr="0">
             <a:normAutofit/>
           </a:bodyPr>
           <a:lstStyle>
-            <a:lvl1pPr indent="-615823" lvl="0" marL="457200" marR="0" rtl="0" algn="l">
+            <a:lvl1pPr marL="457200" marR="0" lvl="0" indent="-615823" algn="l" rtl="0">
               <a:lnSpc>
                 <a:spcPct val="100000"/>
               </a:lnSpc>
@@ -12313,7 +12573,7 @@
               <a:buSzPts val="6098"/>
               <a:buFont typeface="Arial"/>
               <a:buChar char="•"/>
-              <a:defRPr b="0" i="0" sz="6098" u="none" cap="none" strike="noStrike">
+              <a:defRPr sz="6098" b="0" i="0" u="none" strike="noStrike" cap="none">
                 <a:solidFill>
                   <a:schemeClr val="dk1"/>
                 </a:solidFill>
@@ -12323,7 +12583,7 @@
                 <a:sym typeface="Calibri"/>
               </a:defRPr>
             </a:lvl1pPr>
-            <a:lvl2pPr indent="-567436" lvl="1" marL="914400" marR="0" rtl="0" algn="l">
+            <a:lvl2pPr marL="914400" marR="0" lvl="1" indent="-567436" algn="l" rtl="0">
               <a:lnSpc>
                 <a:spcPct val="100000"/>
               </a:lnSpc>
@@ -12339,7 +12599,7 @@
               <a:buSzPts val="5336"/>
               <a:buFont typeface="Arial"/>
               <a:buChar char="–"/>
-              <a:defRPr b="0" i="0" sz="5336" u="none" cap="none" strike="noStrike">
+              <a:defRPr sz="5336" b="0" i="0" u="none" strike="noStrike" cap="none">
                 <a:solidFill>
                   <a:schemeClr val="dk1"/>
                 </a:solidFill>
@@ -12349,7 +12609,7 @@
                 <a:sym typeface="Calibri"/>
               </a:defRPr>
             </a:lvl2pPr>
-            <a:lvl3pPr indent="-519049" lvl="2" marL="1371600" marR="0" rtl="0" algn="l">
+            <a:lvl3pPr marL="1371600" marR="0" lvl="2" indent="-519049" algn="l" rtl="0">
               <a:lnSpc>
                 <a:spcPct val="100000"/>
               </a:lnSpc>
@@ -12365,7 +12625,7 @@
               <a:buSzPts val="4574"/>
               <a:buFont typeface="Arial"/>
               <a:buChar char="•"/>
-              <a:defRPr b="0" i="0" sz="4574" u="none" cap="none" strike="noStrike">
+              <a:defRPr sz="4574" b="0" i="0" u="none" strike="noStrike" cap="none">
                 <a:solidFill>
                   <a:schemeClr val="dk1"/>
                 </a:solidFill>
@@ -12375,7 +12635,7 @@
                 <a:sym typeface="Calibri"/>
               </a:defRPr>
             </a:lvl3pPr>
-            <a:lvl4pPr indent="-470599" lvl="3" marL="1828800" marR="0" rtl="0" algn="l">
+            <a:lvl4pPr marL="1828800" marR="0" lvl="3" indent="-470599" algn="l" rtl="0">
               <a:lnSpc>
                 <a:spcPct val="100000"/>
               </a:lnSpc>
@@ -12391,7 +12651,7 @@
               <a:buSzPts val="3811"/>
               <a:buFont typeface="Arial"/>
               <a:buChar char="–"/>
-              <a:defRPr b="0" i="0" sz="3811" u="none" cap="none" strike="noStrike">
+              <a:defRPr sz="3811" b="0" i="0" u="none" strike="noStrike" cap="none">
                 <a:solidFill>
                   <a:schemeClr val="dk1"/>
                 </a:solidFill>
@@ -12401,7 +12661,7 @@
                 <a:sym typeface="Calibri"/>
               </a:defRPr>
             </a:lvl4pPr>
-            <a:lvl5pPr indent="-470598" lvl="4" marL="2286000" marR="0" rtl="0" algn="l">
+            <a:lvl5pPr marL="2286000" marR="0" lvl="4" indent="-470598" algn="l" rtl="0">
               <a:lnSpc>
                 <a:spcPct val="100000"/>
               </a:lnSpc>
@@ -12417,7 +12677,7 @@
               <a:buSzPts val="3811"/>
               <a:buFont typeface="Arial"/>
               <a:buChar char="»"/>
-              <a:defRPr b="0" i="0" sz="3811" u="none" cap="none" strike="noStrike">
+              <a:defRPr sz="3811" b="0" i="0" u="none" strike="noStrike" cap="none">
                 <a:solidFill>
                   <a:schemeClr val="dk1"/>
                 </a:solidFill>
@@ -12427,7 +12687,7 @@
                 <a:sym typeface="Calibri"/>
               </a:defRPr>
             </a:lvl5pPr>
-            <a:lvl6pPr indent="-470598" lvl="5" marL="2743200" marR="0" rtl="0" algn="l">
+            <a:lvl6pPr marL="2743200" marR="0" lvl="5" indent="-470598" algn="l" rtl="0">
               <a:lnSpc>
                 <a:spcPct val="100000"/>
               </a:lnSpc>
@@ -12443,7 +12703,7 @@
               <a:buSzPts val="3811"/>
               <a:buFont typeface="Arial"/>
               <a:buChar char="•"/>
-              <a:defRPr b="0" i="0" sz="3811" u="none" cap="none" strike="noStrike">
+              <a:defRPr sz="3811" b="0" i="0" u="none" strike="noStrike" cap="none">
                 <a:solidFill>
                   <a:schemeClr val="dk1"/>
                 </a:solidFill>
@@ -12453,7 +12713,7 @@
                 <a:sym typeface="Calibri"/>
               </a:defRPr>
             </a:lvl6pPr>
-            <a:lvl7pPr indent="-470598" lvl="6" marL="3200400" marR="0" rtl="0" algn="l">
+            <a:lvl7pPr marL="3200400" marR="0" lvl="6" indent="-470598" algn="l" rtl="0">
               <a:lnSpc>
                 <a:spcPct val="100000"/>
               </a:lnSpc>
@@ -12469,7 +12729,7 @@
               <a:buSzPts val="3811"/>
               <a:buFont typeface="Arial"/>
               <a:buChar char="•"/>
-              <a:defRPr b="0" i="0" sz="3811" u="none" cap="none" strike="noStrike">
+              <a:defRPr sz="3811" b="0" i="0" u="none" strike="noStrike" cap="none">
                 <a:solidFill>
                   <a:schemeClr val="dk1"/>
                 </a:solidFill>
@@ -12479,7 +12739,7 @@
                 <a:sym typeface="Calibri"/>
               </a:defRPr>
             </a:lvl7pPr>
-            <a:lvl8pPr indent="-470598" lvl="7" marL="3657600" marR="0" rtl="0" algn="l">
+            <a:lvl8pPr marL="3657600" marR="0" lvl="7" indent="-470598" algn="l" rtl="0">
               <a:lnSpc>
                 <a:spcPct val="100000"/>
               </a:lnSpc>
@@ -12495,7 +12755,7 @@
               <a:buSzPts val="3811"/>
               <a:buFont typeface="Arial"/>
               <a:buChar char="•"/>
-              <a:defRPr b="0" i="0" sz="3811" u="none" cap="none" strike="noStrike">
+              <a:defRPr sz="3811" b="0" i="0" u="none" strike="noStrike" cap="none">
                 <a:solidFill>
                   <a:schemeClr val="dk1"/>
                 </a:solidFill>
@@ -12505,7 +12765,7 @@
                 <a:sym typeface="Calibri"/>
               </a:defRPr>
             </a:lvl8pPr>
-            <a:lvl9pPr indent="-470598" lvl="8" marL="4114800" marR="0" rtl="0" algn="l">
+            <a:lvl9pPr marL="4114800" marR="0" lvl="8" indent="-470598" algn="l" rtl="0">
               <a:lnSpc>
                 <a:spcPct val="100000"/>
               </a:lnSpc>
@@ -12521,7 +12781,7 @@
               <a:buSzPts val="3811"/>
               <a:buFont typeface="Arial"/>
               <a:buChar char="•"/>
-              <a:defRPr b="0" i="0" sz="3811" u="none" cap="none" strike="noStrike">
+              <a:defRPr sz="3811" b="0" i="0" u="none" strike="noStrike" cap="none">
                 <a:solidFill>
                   <a:schemeClr val="dk1"/>
                 </a:solidFill>
@@ -12532,15 +12792,19 @@
               </a:defRPr>
             </a:lvl9pPr>
           </a:lstStyle>
-          <a:p/>
+          <a:p>
+            <a:endParaRPr/>
+          </a:p>
         </p:txBody>
       </p:sp>
       <p:sp>
         <p:nvSpPr>
           <p:cNvPr id="8" name="Google Shape;8;p2"/>
-          <p:cNvSpPr txBox="1"/>
+          <p:cNvSpPr txBox="1">
+            <a:spLocks noGrp="1"/>
+          </p:cNvSpPr>
           <p:nvPr>
-            <p:ph idx="10" type="dt"/>
+            <p:ph type="dt" idx="10"/>
           </p:nvPr>
         </p:nvSpPr>
         <p:spPr>
@@ -12557,11 +12821,11 @@
           </a:ln>
         </p:spPr>
         <p:txBody>
-          <a:bodyPr anchorCtr="0" anchor="ctr" bIns="45700" lIns="91425" spcFirstLastPara="1" rIns="91425" wrap="square" tIns="45700">
+          <a:bodyPr spcFirstLastPara="1" wrap="square" lIns="91425" tIns="45700" rIns="91425" bIns="45700" anchor="ctr" anchorCtr="0">
             <a:noAutofit/>
           </a:bodyPr>
           <a:lstStyle>
-            <a:lvl1pPr lvl="0" marR="0" rtl="0" algn="l">
+            <a:lvl1pPr marR="0" lvl="0" algn="l" rtl="0">
               <a:lnSpc>
                 <a:spcPct val="100000"/>
               </a:lnSpc>
@@ -12577,7 +12841,7 @@
               <a:buSzPts val="1400"/>
               <a:buFont typeface="Arial"/>
               <a:buNone/>
-              <a:defRPr b="0" i="0" sz="2287" u="none" cap="none" strike="noStrike">
+              <a:defRPr sz="2287" b="0" i="0" u="none" strike="noStrike" cap="none">
                 <a:solidFill>
                   <a:srgbClr val="888888"/>
                 </a:solidFill>
@@ -12587,7 +12851,7 @@
                 <a:sym typeface="Calibri"/>
               </a:defRPr>
             </a:lvl1pPr>
-            <a:lvl2pPr lvl="1" marR="0" rtl="0" algn="l">
+            <a:lvl2pPr marR="0" lvl="1" algn="l" rtl="0">
               <a:lnSpc>
                 <a:spcPct val="100000"/>
               </a:lnSpc>
@@ -12603,7 +12867,7 @@
               <a:buSzPts val="1400"/>
               <a:buFont typeface="Arial"/>
               <a:buNone/>
-              <a:defRPr b="0" i="0" sz="3552" u="none" cap="none" strike="noStrike">
+              <a:defRPr sz="3552" b="0" i="0" u="none" strike="noStrike" cap="none">
                 <a:solidFill>
                   <a:schemeClr val="dk1"/>
                 </a:solidFill>
@@ -12613,7 +12877,7 @@
                 <a:sym typeface="Calibri"/>
               </a:defRPr>
             </a:lvl2pPr>
-            <a:lvl3pPr lvl="2" marR="0" rtl="0" algn="l">
+            <a:lvl3pPr marR="0" lvl="2" algn="l" rtl="0">
               <a:lnSpc>
                 <a:spcPct val="100000"/>
               </a:lnSpc>
@@ -12629,7 +12893,7 @@
               <a:buSzPts val="1400"/>
               <a:buFont typeface="Arial"/>
               <a:buNone/>
-              <a:defRPr b="0" i="0" sz="3552" u="none" cap="none" strike="noStrike">
+              <a:defRPr sz="3552" b="0" i="0" u="none" strike="noStrike" cap="none">
                 <a:solidFill>
                   <a:schemeClr val="dk1"/>
                 </a:solidFill>
@@ -12639,7 +12903,7 @@
                 <a:sym typeface="Calibri"/>
               </a:defRPr>
             </a:lvl3pPr>
-            <a:lvl4pPr lvl="3" marR="0" rtl="0" algn="l">
+            <a:lvl4pPr marR="0" lvl="3" algn="l" rtl="0">
               <a:lnSpc>
                 <a:spcPct val="100000"/>
               </a:lnSpc>
@@ -12655,7 +12919,7 @@
               <a:buSzPts val="1400"/>
               <a:buFont typeface="Arial"/>
               <a:buNone/>
-              <a:defRPr b="0" i="0" sz="3552" u="none" cap="none" strike="noStrike">
+              <a:defRPr sz="3552" b="0" i="0" u="none" strike="noStrike" cap="none">
                 <a:solidFill>
                   <a:schemeClr val="dk1"/>
                 </a:solidFill>
@@ -12665,7 +12929,7 @@
                 <a:sym typeface="Calibri"/>
               </a:defRPr>
             </a:lvl4pPr>
-            <a:lvl5pPr lvl="4" marR="0" rtl="0" algn="l">
+            <a:lvl5pPr marR="0" lvl="4" algn="l" rtl="0">
               <a:lnSpc>
                 <a:spcPct val="100000"/>
               </a:lnSpc>
@@ -12681,7 +12945,7 @@
               <a:buSzPts val="1400"/>
               <a:buFont typeface="Arial"/>
               <a:buNone/>
-              <a:defRPr b="0" i="0" sz="3552" u="none" cap="none" strike="noStrike">
+              <a:defRPr sz="3552" b="0" i="0" u="none" strike="noStrike" cap="none">
                 <a:solidFill>
                   <a:schemeClr val="dk1"/>
                 </a:solidFill>
@@ -12691,7 +12955,7 @@
                 <a:sym typeface="Calibri"/>
               </a:defRPr>
             </a:lvl5pPr>
-            <a:lvl6pPr lvl="5" marR="0" rtl="0" algn="l">
+            <a:lvl6pPr marR="0" lvl="5" algn="l" rtl="0">
               <a:lnSpc>
                 <a:spcPct val="100000"/>
               </a:lnSpc>
@@ -12707,7 +12971,7 @@
               <a:buSzPts val="1400"/>
               <a:buFont typeface="Arial"/>
               <a:buNone/>
-              <a:defRPr b="0" i="0" sz="3552" u="none" cap="none" strike="noStrike">
+              <a:defRPr sz="3552" b="0" i="0" u="none" strike="noStrike" cap="none">
                 <a:solidFill>
                   <a:schemeClr val="dk1"/>
                 </a:solidFill>
@@ -12717,7 +12981,7 @@
                 <a:sym typeface="Calibri"/>
               </a:defRPr>
             </a:lvl6pPr>
-            <a:lvl7pPr lvl="6" marR="0" rtl="0" algn="l">
+            <a:lvl7pPr marR="0" lvl="6" algn="l" rtl="0">
               <a:lnSpc>
                 <a:spcPct val="100000"/>
               </a:lnSpc>
@@ -12733,7 +12997,7 @@
               <a:buSzPts val="1400"/>
               <a:buFont typeface="Arial"/>
               <a:buNone/>
-              <a:defRPr b="0" i="0" sz="3552" u="none" cap="none" strike="noStrike">
+              <a:defRPr sz="3552" b="0" i="0" u="none" strike="noStrike" cap="none">
                 <a:solidFill>
                   <a:schemeClr val="dk1"/>
                 </a:solidFill>
@@ -12743,7 +13007,7 @@
                 <a:sym typeface="Calibri"/>
               </a:defRPr>
             </a:lvl7pPr>
-            <a:lvl8pPr lvl="7" marR="0" rtl="0" algn="l">
+            <a:lvl8pPr marR="0" lvl="7" algn="l" rtl="0">
               <a:lnSpc>
                 <a:spcPct val="100000"/>
               </a:lnSpc>
@@ -12759,7 +13023,7 @@
               <a:buSzPts val="1400"/>
               <a:buFont typeface="Arial"/>
               <a:buNone/>
-              <a:defRPr b="0" i="0" sz="3552" u="none" cap="none" strike="noStrike">
+              <a:defRPr sz="3552" b="0" i="0" u="none" strike="noStrike" cap="none">
                 <a:solidFill>
                   <a:schemeClr val="dk1"/>
                 </a:solidFill>
@@ -12769,7 +13033,7 @@
                 <a:sym typeface="Calibri"/>
               </a:defRPr>
             </a:lvl8pPr>
-            <a:lvl9pPr lvl="8" marR="0" rtl="0" algn="l">
+            <a:lvl9pPr marR="0" lvl="8" algn="l" rtl="0">
               <a:lnSpc>
                 <a:spcPct val="100000"/>
               </a:lnSpc>
@@ -12785,7 +13049,7 @@
               <a:buSzPts val="1400"/>
               <a:buFont typeface="Arial"/>
               <a:buNone/>
-              <a:defRPr b="0" i="0" sz="3552" u="none" cap="none" strike="noStrike">
+              <a:defRPr sz="3552" b="0" i="0" u="none" strike="noStrike" cap="none">
                 <a:solidFill>
                   <a:schemeClr val="dk1"/>
                 </a:solidFill>
@@ -12796,15 +13060,19 @@
               </a:defRPr>
             </a:lvl9pPr>
           </a:lstStyle>
-          <a:p/>
+          <a:p>
+            <a:endParaRPr/>
+          </a:p>
         </p:txBody>
       </p:sp>
       <p:sp>
         <p:nvSpPr>
           <p:cNvPr id="9" name="Google Shape;9;p2"/>
-          <p:cNvSpPr txBox="1"/>
+          <p:cNvSpPr txBox="1">
+            <a:spLocks noGrp="1"/>
+          </p:cNvSpPr>
           <p:nvPr>
-            <p:ph idx="11" type="ftr"/>
+            <p:ph type="ftr" idx="11"/>
           </p:nvPr>
         </p:nvSpPr>
         <p:spPr>
@@ -12821,11 +13089,11 @@
           </a:ln>
         </p:spPr>
         <p:txBody>
-          <a:bodyPr anchorCtr="0" anchor="ctr" bIns="45700" lIns="91425" spcFirstLastPara="1" rIns="91425" wrap="square" tIns="45700">
+          <a:bodyPr spcFirstLastPara="1" wrap="square" lIns="91425" tIns="45700" rIns="91425" bIns="45700" anchor="ctr" anchorCtr="0">
             <a:noAutofit/>
           </a:bodyPr>
           <a:lstStyle>
-            <a:lvl1pPr lvl="0" marR="0" rtl="0" algn="ctr">
+            <a:lvl1pPr marR="0" lvl="0" algn="ctr" rtl="0">
               <a:lnSpc>
                 <a:spcPct val="100000"/>
               </a:lnSpc>
@@ -12841,7 +13109,7 @@
               <a:buSzPts val="1400"/>
               <a:buFont typeface="Arial"/>
               <a:buNone/>
-              <a:defRPr b="0" i="0" sz="2287" u="none" cap="none" strike="noStrike">
+              <a:defRPr sz="2287" b="0" i="0" u="none" strike="noStrike" cap="none">
                 <a:solidFill>
                   <a:srgbClr val="888888"/>
                 </a:solidFill>
@@ -12851,7 +13119,7 @@
                 <a:sym typeface="Calibri"/>
               </a:defRPr>
             </a:lvl1pPr>
-            <a:lvl2pPr lvl="1" marR="0" rtl="0" algn="l">
+            <a:lvl2pPr marR="0" lvl="1" algn="l" rtl="0">
               <a:lnSpc>
                 <a:spcPct val="100000"/>
               </a:lnSpc>
@@ -12867,7 +13135,7 @@
               <a:buSzPts val="1400"/>
               <a:buFont typeface="Arial"/>
               <a:buNone/>
-              <a:defRPr b="0" i="0" sz="3552" u="none" cap="none" strike="noStrike">
+              <a:defRPr sz="3552" b="0" i="0" u="none" strike="noStrike" cap="none">
                 <a:solidFill>
                   <a:schemeClr val="dk1"/>
                 </a:solidFill>
@@ -12877,7 +13145,7 @@
                 <a:sym typeface="Calibri"/>
               </a:defRPr>
             </a:lvl2pPr>
-            <a:lvl3pPr lvl="2" marR="0" rtl="0" algn="l">
+            <a:lvl3pPr marR="0" lvl="2" algn="l" rtl="0">
               <a:lnSpc>
                 <a:spcPct val="100000"/>
               </a:lnSpc>
@@ -12893,7 +13161,7 @@
               <a:buSzPts val="1400"/>
               <a:buFont typeface="Arial"/>
               <a:buNone/>
-              <a:defRPr b="0" i="0" sz="3552" u="none" cap="none" strike="noStrike">
+              <a:defRPr sz="3552" b="0" i="0" u="none" strike="noStrike" cap="none">
                 <a:solidFill>
                   <a:schemeClr val="dk1"/>
                 </a:solidFill>
@@ -12903,7 +13171,7 @@
                 <a:sym typeface="Calibri"/>
               </a:defRPr>
             </a:lvl3pPr>
-            <a:lvl4pPr lvl="3" marR="0" rtl="0" algn="l">
+            <a:lvl4pPr marR="0" lvl="3" algn="l" rtl="0">
               <a:lnSpc>
                 <a:spcPct val="100000"/>
               </a:lnSpc>
@@ -12919,7 +13187,7 @@
               <a:buSzPts val="1400"/>
               <a:buFont typeface="Arial"/>
               <a:buNone/>
-              <a:defRPr b="0" i="0" sz="3552" u="none" cap="none" strike="noStrike">
+              <a:defRPr sz="3552" b="0" i="0" u="none" strike="noStrike" cap="none">
                 <a:solidFill>
                   <a:schemeClr val="dk1"/>
                 </a:solidFill>
@@ -12929,7 +13197,7 @@
                 <a:sym typeface="Calibri"/>
               </a:defRPr>
             </a:lvl4pPr>
-            <a:lvl5pPr lvl="4" marR="0" rtl="0" algn="l">
+            <a:lvl5pPr marR="0" lvl="4" algn="l" rtl="0">
               <a:lnSpc>
                 <a:spcPct val="100000"/>
               </a:lnSpc>
@@ -12945,7 +13213,7 @@
               <a:buSzPts val="1400"/>
               <a:buFont typeface="Arial"/>
               <a:buNone/>
-              <a:defRPr b="0" i="0" sz="3552" u="none" cap="none" strike="noStrike">
+              <a:defRPr sz="3552" b="0" i="0" u="none" strike="noStrike" cap="none">
                 <a:solidFill>
                   <a:schemeClr val="dk1"/>
                 </a:solidFill>
@@ -12955,7 +13223,7 @@
                 <a:sym typeface="Calibri"/>
               </a:defRPr>
             </a:lvl5pPr>
-            <a:lvl6pPr lvl="5" marR="0" rtl="0" algn="l">
+            <a:lvl6pPr marR="0" lvl="5" algn="l" rtl="0">
               <a:lnSpc>
                 <a:spcPct val="100000"/>
               </a:lnSpc>
@@ -12971,7 +13239,7 @@
               <a:buSzPts val="1400"/>
               <a:buFont typeface="Arial"/>
               <a:buNone/>
-              <a:defRPr b="0" i="0" sz="3552" u="none" cap="none" strike="noStrike">
+              <a:defRPr sz="3552" b="0" i="0" u="none" strike="noStrike" cap="none">
                 <a:solidFill>
                   <a:schemeClr val="dk1"/>
                 </a:solidFill>
@@ -12981,7 +13249,7 @@
                 <a:sym typeface="Calibri"/>
               </a:defRPr>
             </a:lvl6pPr>
-            <a:lvl7pPr lvl="6" marR="0" rtl="0" algn="l">
+            <a:lvl7pPr marR="0" lvl="6" algn="l" rtl="0">
               <a:lnSpc>
                 <a:spcPct val="100000"/>
               </a:lnSpc>
@@ -12997,7 +13265,7 @@
               <a:buSzPts val="1400"/>
               <a:buFont typeface="Arial"/>
               <a:buNone/>
-              <a:defRPr b="0" i="0" sz="3552" u="none" cap="none" strike="noStrike">
+              <a:defRPr sz="3552" b="0" i="0" u="none" strike="noStrike" cap="none">
                 <a:solidFill>
                   <a:schemeClr val="dk1"/>
                 </a:solidFill>
@@ -13007,7 +13275,7 @@
                 <a:sym typeface="Calibri"/>
               </a:defRPr>
             </a:lvl7pPr>
-            <a:lvl8pPr lvl="7" marR="0" rtl="0" algn="l">
+            <a:lvl8pPr marR="0" lvl="7" algn="l" rtl="0">
               <a:lnSpc>
                 <a:spcPct val="100000"/>
               </a:lnSpc>
@@ -13023,7 +13291,7 @@
               <a:buSzPts val="1400"/>
               <a:buFont typeface="Arial"/>
               <a:buNone/>
-              <a:defRPr b="0" i="0" sz="3552" u="none" cap="none" strike="noStrike">
+              <a:defRPr sz="3552" b="0" i="0" u="none" strike="noStrike" cap="none">
                 <a:solidFill>
                   <a:schemeClr val="dk1"/>
                 </a:solidFill>
@@ -13033,7 +13301,7 @@
                 <a:sym typeface="Calibri"/>
               </a:defRPr>
             </a:lvl8pPr>
-            <a:lvl9pPr lvl="8" marR="0" rtl="0" algn="l">
+            <a:lvl9pPr marR="0" lvl="8" algn="l" rtl="0">
               <a:lnSpc>
                 <a:spcPct val="100000"/>
               </a:lnSpc>
@@ -13049,7 +13317,7 @@
               <a:buSzPts val="1400"/>
               <a:buFont typeface="Arial"/>
               <a:buNone/>
-              <a:defRPr b="0" i="0" sz="3552" u="none" cap="none" strike="noStrike">
+              <a:defRPr sz="3552" b="0" i="0" u="none" strike="noStrike" cap="none">
                 <a:solidFill>
                   <a:schemeClr val="dk1"/>
                 </a:solidFill>
@@ -13060,15 +13328,19 @@
               </a:defRPr>
             </a:lvl9pPr>
           </a:lstStyle>
-          <a:p/>
+          <a:p>
+            <a:endParaRPr/>
+          </a:p>
         </p:txBody>
       </p:sp>
       <p:sp>
         <p:nvSpPr>
           <p:cNvPr id="10" name="Google Shape;10;p2"/>
-          <p:cNvSpPr txBox="1"/>
+          <p:cNvSpPr txBox="1">
+            <a:spLocks noGrp="1"/>
+          </p:cNvSpPr>
           <p:nvPr>
-            <p:ph idx="12" type="sldNum"/>
+            <p:ph type="sldNum" idx="12"/>
           </p:nvPr>
         </p:nvSpPr>
         <p:spPr>
@@ -13085,11 +13357,11 @@
           </a:ln>
         </p:spPr>
         <p:txBody>
-          <a:bodyPr anchorCtr="0" anchor="ctr" bIns="45700" lIns="91425" spcFirstLastPara="1" rIns="91425" wrap="square" tIns="45700">
+          <a:bodyPr spcFirstLastPara="1" wrap="square" lIns="91425" tIns="45700" rIns="91425" bIns="45700" anchor="ctr" anchorCtr="0">
             <a:noAutofit/>
           </a:bodyPr>
           <a:lstStyle>
-            <a:lvl1pPr indent="0" lvl="0" marL="0" marR="0" rtl="0" algn="r">
+            <a:lvl1pPr marL="0" marR="0" lvl="0" indent="0" algn="r" rtl="0">
               <a:lnSpc>
                 <a:spcPct val="100000"/>
               </a:lnSpc>
@@ -13105,7 +13377,7 @@
               <a:buSzPts val="2287"/>
               <a:buFont typeface="Arial"/>
               <a:buNone/>
-              <a:defRPr b="0" i="0" sz="2287" u="none" cap="none" strike="noStrike">
+              <a:defRPr sz="2287" b="0" i="0" u="none" strike="noStrike" cap="none">
                 <a:solidFill>
                   <a:srgbClr val="888888"/>
                 </a:solidFill>
@@ -13115,7 +13387,7 @@
                 <a:sym typeface="Calibri"/>
               </a:defRPr>
             </a:lvl1pPr>
-            <a:lvl2pPr indent="0" lvl="1" marL="0" marR="0" rtl="0" algn="r">
+            <a:lvl2pPr marL="0" marR="0" lvl="1" indent="0" algn="r" rtl="0">
               <a:lnSpc>
                 <a:spcPct val="100000"/>
               </a:lnSpc>
@@ -13131,7 +13403,7 @@
               <a:buSzPts val="2287"/>
               <a:buFont typeface="Arial"/>
               <a:buNone/>
-              <a:defRPr b="0" i="0" sz="2287" u="none" cap="none" strike="noStrike">
+              <a:defRPr sz="2287" b="0" i="0" u="none" strike="noStrike" cap="none">
                 <a:solidFill>
                   <a:srgbClr val="888888"/>
                 </a:solidFill>
@@ -13141,7 +13413,7 @@
                 <a:sym typeface="Calibri"/>
               </a:defRPr>
             </a:lvl2pPr>
-            <a:lvl3pPr indent="0" lvl="2" marL="0" marR="0" rtl="0" algn="r">
+            <a:lvl3pPr marL="0" marR="0" lvl="2" indent="0" algn="r" rtl="0">
               <a:lnSpc>
                 <a:spcPct val="100000"/>
               </a:lnSpc>
@@ -13157,7 +13429,7 @@
               <a:buSzPts val="2287"/>
               <a:buFont typeface="Arial"/>
               <a:buNone/>
-              <a:defRPr b="0" i="0" sz="2287" u="none" cap="none" strike="noStrike">
+              <a:defRPr sz="2287" b="0" i="0" u="none" strike="noStrike" cap="none">
                 <a:solidFill>
                   <a:srgbClr val="888888"/>
                 </a:solidFill>
@@ -13167,7 +13439,7 @@
                 <a:sym typeface="Calibri"/>
               </a:defRPr>
             </a:lvl3pPr>
-            <a:lvl4pPr indent="0" lvl="3" marL="0" marR="0" rtl="0" algn="r">
+            <a:lvl4pPr marL="0" marR="0" lvl="3" indent="0" algn="r" rtl="0">
               <a:lnSpc>
                 <a:spcPct val="100000"/>
               </a:lnSpc>
@@ -13183,7 +13455,7 @@
               <a:buSzPts val="2287"/>
               <a:buFont typeface="Arial"/>
               <a:buNone/>
-              <a:defRPr b="0" i="0" sz="2287" u="none" cap="none" strike="noStrike">
+              <a:defRPr sz="2287" b="0" i="0" u="none" strike="noStrike" cap="none">
                 <a:solidFill>
                   <a:srgbClr val="888888"/>
                 </a:solidFill>
@@ -13193,7 +13465,7 @@
                 <a:sym typeface="Calibri"/>
               </a:defRPr>
             </a:lvl4pPr>
-            <a:lvl5pPr indent="0" lvl="4" marL="0" marR="0" rtl="0" algn="r">
+            <a:lvl5pPr marL="0" marR="0" lvl="4" indent="0" algn="r" rtl="0">
               <a:lnSpc>
                 <a:spcPct val="100000"/>
               </a:lnSpc>
@@ -13209,7 +13481,7 @@
               <a:buSzPts val="2287"/>
               <a:buFont typeface="Arial"/>
               <a:buNone/>
-              <a:defRPr b="0" i="0" sz="2287" u="none" cap="none" strike="noStrike">
+              <a:defRPr sz="2287" b="0" i="0" u="none" strike="noStrike" cap="none">
                 <a:solidFill>
                   <a:srgbClr val="888888"/>
                 </a:solidFill>
@@ -13219,7 +13491,7 @@
                 <a:sym typeface="Calibri"/>
               </a:defRPr>
             </a:lvl5pPr>
-            <a:lvl6pPr indent="0" lvl="5" marL="0" marR="0" rtl="0" algn="r">
+            <a:lvl6pPr marL="0" marR="0" lvl="5" indent="0" algn="r" rtl="0">
               <a:lnSpc>
                 <a:spcPct val="100000"/>
               </a:lnSpc>
@@ -13235,7 +13507,7 @@
               <a:buSzPts val="2287"/>
               <a:buFont typeface="Arial"/>
               <a:buNone/>
-              <a:defRPr b="0" i="0" sz="2287" u="none" cap="none" strike="noStrike">
+              <a:defRPr sz="2287" b="0" i="0" u="none" strike="noStrike" cap="none">
                 <a:solidFill>
                   <a:srgbClr val="888888"/>
                 </a:solidFill>
@@ -13245,7 +13517,7 @@
                 <a:sym typeface="Calibri"/>
               </a:defRPr>
             </a:lvl6pPr>
-            <a:lvl7pPr indent="0" lvl="6" marL="0" marR="0" rtl="0" algn="r">
+            <a:lvl7pPr marL="0" marR="0" lvl="6" indent="0" algn="r" rtl="0">
               <a:lnSpc>
                 <a:spcPct val="100000"/>
               </a:lnSpc>
@@ -13261,7 +13533,7 @@
               <a:buSzPts val="2287"/>
               <a:buFont typeface="Arial"/>
               <a:buNone/>
-              <a:defRPr b="0" i="0" sz="2287" u="none" cap="none" strike="noStrike">
+              <a:defRPr sz="2287" b="0" i="0" u="none" strike="noStrike" cap="none">
                 <a:solidFill>
                   <a:srgbClr val="888888"/>
                 </a:solidFill>
@@ -13271,7 +13543,7 @@
                 <a:sym typeface="Calibri"/>
               </a:defRPr>
             </a:lvl7pPr>
-            <a:lvl8pPr indent="0" lvl="7" marL="0" marR="0" rtl="0" algn="r">
+            <a:lvl8pPr marL="0" marR="0" lvl="7" indent="0" algn="r" rtl="0">
               <a:lnSpc>
                 <a:spcPct val="100000"/>
               </a:lnSpc>
@@ -13287,7 +13559,7 @@
               <a:buSzPts val="2287"/>
               <a:buFont typeface="Arial"/>
               <a:buNone/>
-              <a:defRPr b="0" i="0" sz="2287" u="none" cap="none" strike="noStrike">
+              <a:defRPr sz="2287" b="0" i="0" u="none" strike="noStrike" cap="none">
                 <a:solidFill>
                   <a:srgbClr val="888888"/>
                 </a:solidFill>
@@ -13297,7 +13569,7 @@
                 <a:sym typeface="Calibri"/>
               </a:defRPr>
             </a:lvl8pPr>
-            <a:lvl9pPr indent="0" lvl="8" marL="0" marR="0" rtl="0" algn="r">
+            <a:lvl9pPr marL="0" marR="0" lvl="8" indent="0" algn="r" rtl="0">
               <a:lnSpc>
                 <a:spcPct val="100000"/>
               </a:lnSpc>
@@ -13313,7 +13585,7 @@
               <a:buSzPts val="2287"/>
               <a:buFont typeface="Arial"/>
               <a:buNone/>
-              <a:defRPr b="0" i="0" sz="2287" u="none" cap="none" strike="noStrike">
+              <a:defRPr sz="2287" b="0" i="0" u="none" strike="noStrike" cap="none">
                 <a:solidFill>
                   <a:srgbClr val="888888"/>
                 </a:solidFill>
@@ -13325,7 +13597,7 @@
             </a:lvl9pPr>
           </a:lstStyle>
           <a:p>
-            <a:pPr indent="0" lvl="0" marL="0" rtl="0" algn="r">
+            <a:pPr marL="0" lvl="0" indent="0" algn="r" rtl="0">
               <a:spcBef>
                 <a:spcPts val="0"/>
               </a:spcBef>
@@ -13336,7 +13608,7 @@
             </a:pPr>
             <a:fld id="{00000000-1234-1234-1234-123412341234}" type="slidenum">
               <a:rPr lang="en-US"/>
-              <a:t>‹#›</a:t>
+              <a:t>‹nº›</a:t>
             </a:fld>
             <a:endParaRPr/>
           </a:p>
@@ -13344,7 +13616,7 @@
       </p:sp>
     </p:spTree>
   </p:cSld>
-  <p:clrMap accent1="accent1" accent2="accent2" accent3="accent3" accent4="accent4" accent5="accent5" accent6="accent6" bg1="lt1" bg2="dk2" tx1="dk1" tx2="lt2" folHlink="folHlink" hlink="hlink"/>
+  <p:clrMap bg1="lt1" tx1="dk1" bg2="dk2" tx2="lt2" accent1="accent1" accent2="accent2" accent3="accent3" accent4="accent4" accent5="accent5" accent6="accent6" hlink="hlink" folHlink="folHlink"/>
   <p:sldLayoutIdLst>
     <p:sldLayoutId id="2147483649" r:id="rId1"/>
     <p:sldLayoutId id="2147483650" r:id="rId2"/>
@@ -13358,10 +13630,10 @@
     <p:sldLayoutId id="2147483658" r:id="rId10"/>
     <p:sldLayoutId id="2147483659" r:id="rId11"/>
   </p:sldLayoutIdLst>
-  <p:hf dt="0" ftr="0" hdr="0" sldNum="0"/>
+  <p:hf sldNum="0" hdr="0" ftr="0" dt="0"/>
   <p:txStyles>
     <p:titleStyle>
-      <a:defPPr lvl="0" marR="0" rtl="0" algn="l">
+      <a:defPPr marR="0" lvl="0" algn="l" rtl="0">
         <a:lnSpc>
           <a:spcPct val="100000"/>
         </a:lnSpc>
@@ -13372,7 +13644,7 @@
           <a:spcPts val="0"/>
         </a:spcAft>
       </a:defPPr>
-      <a:lvl1pPr lvl="0" marR="0" rtl="0" algn="l">
+      <a:lvl1pPr marR="0" lvl="0" algn="l" rtl="0">
         <a:lnSpc>
           <a:spcPct val="100000"/>
         </a:lnSpc>
@@ -13386,7 +13658,7 @@
           <a:srgbClr val="000000"/>
         </a:buClr>
         <a:buFont typeface="Arial"/>
-        <a:defRPr b="0" i="0" sz="1400" u="none" cap="none" strike="noStrike">
+        <a:defRPr sz="1400" b="0" i="0" u="none" strike="noStrike" cap="none">
           <a:solidFill>
             <a:srgbClr val="000000"/>
           </a:solidFill>
@@ -13396,7 +13668,7 @@
           <a:sym typeface="Arial"/>
         </a:defRPr>
       </a:lvl1pPr>
-      <a:lvl2pPr lvl="1" marR="0" rtl="0" algn="l">
+      <a:lvl2pPr marR="0" lvl="1" algn="l" rtl="0">
         <a:lnSpc>
           <a:spcPct val="100000"/>
         </a:lnSpc>
@@ -13410,7 +13682,7 @@
           <a:srgbClr val="000000"/>
         </a:buClr>
         <a:buFont typeface="Arial"/>
-        <a:defRPr b="0" i="0" sz="1400" u="none" cap="none" strike="noStrike">
+        <a:defRPr sz="1400" b="0" i="0" u="none" strike="noStrike" cap="none">
           <a:solidFill>
             <a:srgbClr val="000000"/>
           </a:solidFill>
@@ -13420,7 +13692,7 @@
           <a:sym typeface="Arial"/>
         </a:defRPr>
       </a:lvl2pPr>
-      <a:lvl3pPr lvl="2" marR="0" rtl="0" algn="l">
+      <a:lvl3pPr marR="0" lvl="2" algn="l" rtl="0">
         <a:lnSpc>
           <a:spcPct val="100000"/>
         </a:lnSpc>
@@ -13434,7 +13706,7 @@
           <a:srgbClr val="000000"/>
         </a:buClr>
         <a:buFont typeface="Arial"/>
-        <a:defRPr b="0" i="0" sz="1400" u="none" cap="none" strike="noStrike">
+        <a:defRPr sz="1400" b="0" i="0" u="none" strike="noStrike" cap="none">
           <a:solidFill>
             <a:srgbClr val="000000"/>
           </a:solidFill>
@@ -13444,7 +13716,7 @@
           <a:sym typeface="Arial"/>
         </a:defRPr>
       </a:lvl3pPr>
-      <a:lvl4pPr lvl="3" marR="0" rtl="0" algn="l">
+      <a:lvl4pPr marR="0" lvl="3" algn="l" rtl="0">
         <a:lnSpc>
           <a:spcPct val="100000"/>
         </a:lnSpc>
@@ -13458,7 +13730,7 @@
           <a:srgbClr val="000000"/>
         </a:buClr>
         <a:buFont typeface="Arial"/>
-        <a:defRPr b="0" i="0" sz="1400" u="none" cap="none" strike="noStrike">
+        <a:defRPr sz="1400" b="0" i="0" u="none" strike="noStrike" cap="none">
           <a:solidFill>
             <a:srgbClr val="000000"/>
           </a:solidFill>
@@ -13468,7 +13740,7 @@
           <a:sym typeface="Arial"/>
         </a:defRPr>
       </a:lvl4pPr>
-      <a:lvl5pPr lvl="4" marR="0" rtl="0" algn="l">
+      <a:lvl5pPr marR="0" lvl="4" algn="l" rtl="0">
         <a:lnSpc>
           <a:spcPct val="100000"/>
         </a:lnSpc>
@@ -13482,7 +13754,7 @@
           <a:srgbClr val="000000"/>
         </a:buClr>
         <a:buFont typeface="Arial"/>
-        <a:defRPr b="0" i="0" sz="1400" u="none" cap="none" strike="noStrike">
+        <a:defRPr sz="1400" b="0" i="0" u="none" strike="noStrike" cap="none">
           <a:solidFill>
             <a:srgbClr val="000000"/>
           </a:solidFill>
@@ -13492,7 +13764,7 @@
           <a:sym typeface="Arial"/>
         </a:defRPr>
       </a:lvl5pPr>
-      <a:lvl6pPr lvl="5" marR="0" rtl="0" algn="l">
+      <a:lvl6pPr marR="0" lvl="5" algn="l" rtl="0">
         <a:lnSpc>
           <a:spcPct val="100000"/>
         </a:lnSpc>
@@ -13506,7 +13778,7 @@
           <a:srgbClr val="000000"/>
         </a:buClr>
         <a:buFont typeface="Arial"/>
-        <a:defRPr b="0" i="0" sz="1400" u="none" cap="none" strike="noStrike">
+        <a:defRPr sz="1400" b="0" i="0" u="none" strike="noStrike" cap="none">
           <a:solidFill>
             <a:srgbClr val="000000"/>
           </a:solidFill>
@@ -13516,7 +13788,7 @@
           <a:sym typeface="Arial"/>
         </a:defRPr>
       </a:lvl6pPr>
-      <a:lvl7pPr lvl="6" marR="0" rtl="0" algn="l">
+      <a:lvl7pPr marR="0" lvl="6" algn="l" rtl="0">
         <a:lnSpc>
           <a:spcPct val="100000"/>
         </a:lnSpc>
@@ -13530,7 +13802,7 @@
           <a:srgbClr val="000000"/>
         </a:buClr>
         <a:buFont typeface="Arial"/>
-        <a:defRPr b="0" i="0" sz="1400" u="none" cap="none" strike="noStrike">
+        <a:defRPr sz="1400" b="0" i="0" u="none" strike="noStrike" cap="none">
           <a:solidFill>
             <a:srgbClr val="000000"/>
           </a:solidFill>
@@ -13540,7 +13812,7 @@
           <a:sym typeface="Arial"/>
         </a:defRPr>
       </a:lvl7pPr>
-      <a:lvl8pPr lvl="7" marR="0" rtl="0" algn="l">
+      <a:lvl8pPr marR="0" lvl="7" algn="l" rtl="0">
         <a:lnSpc>
           <a:spcPct val="100000"/>
         </a:lnSpc>
@@ -13554,7 +13826,7 @@
           <a:srgbClr val="000000"/>
         </a:buClr>
         <a:buFont typeface="Arial"/>
-        <a:defRPr b="0" i="0" sz="1400" u="none" cap="none" strike="noStrike">
+        <a:defRPr sz="1400" b="0" i="0" u="none" strike="noStrike" cap="none">
           <a:solidFill>
             <a:srgbClr val="000000"/>
           </a:solidFill>
@@ -13564,7 +13836,7 @@
           <a:sym typeface="Arial"/>
         </a:defRPr>
       </a:lvl8pPr>
-      <a:lvl9pPr lvl="8" marR="0" rtl="0" algn="l">
+      <a:lvl9pPr marR="0" lvl="8" algn="l" rtl="0">
         <a:lnSpc>
           <a:spcPct val="100000"/>
         </a:lnSpc>
@@ -13578,7 +13850,7 @@
           <a:srgbClr val="000000"/>
         </a:buClr>
         <a:buFont typeface="Arial"/>
-        <a:defRPr b="0" i="0" sz="1400" u="none" cap="none" strike="noStrike">
+        <a:defRPr sz="1400" b="0" i="0" u="none" strike="noStrike" cap="none">
           <a:solidFill>
             <a:srgbClr val="000000"/>
           </a:solidFill>
@@ -13590,7 +13862,7 @@
       </a:lvl9pPr>
     </p:titleStyle>
     <p:bodyStyle>
-      <a:defPPr lvl="0" marR="0" rtl="0" algn="l">
+      <a:defPPr marR="0" lvl="0" algn="l" rtl="0">
         <a:lnSpc>
           <a:spcPct val="100000"/>
         </a:lnSpc>
@@ -13601,7 +13873,7 @@
           <a:spcPts val="0"/>
         </a:spcAft>
       </a:defPPr>
-      <a:lvl1pPr lvl="0" marR="0" rtl="0" algn="l">
+      <a:lvl1pPr marR="0" lvl="0" algn="l" rtl="0">
         <a:lnSpc>
           <a:spcPct val="100000"/>
         </a:lnSpc>
@@ -13615,7 +13887,7 @@
           <a:srgbClr val="000000"/>
         </a:buClr>
         <a:buFont typeface="Arial"/>
-        <a:defRPr b="0" i="0" sz="1400" u="none" cap="none" strike="noStrike">
+        <a:defRPr sz="1400" b="0" i="0" u="none" strike="noStrike" cap="none">
           <a:solidFill>
             <a:srgbClr val="000000"/>
           </a:solidFill>
@@ -13625,7 +13897,7 @@
           <a:sym typeface="Arial"/>
         </a:defRPr>
       </a:lvl1pPr>
-      <a:lvl2pPr lvl="1" marR="0" rtl="0" algn="l">
+      <a:lvl2pPr marR="0" lvl="1" algn="l" rtl="0">
         <a:lnSpc>
           <a:spcPct val="100000"/>
         </a:lnSpc>
@@ -13639,7 +13911,7 @@
           <a:srgbClr val="000000"/>
         </a:buClr>
         <a:buFont typeface="Arial"/>
-        <a:defRPr b="0" i="0" sz="1400" u="none" cap="none" strike="noStrike">
+        <a:defRPr sz="1400" b="0" i="0" u="none" strike="noStrike" cap="none">
           <a:solidFill>
             <a:srgbClr val="000000"/>
           </a:solidFill>
@@ -13649,7 +13921,7 @@
           <a:sym typeface="Arial"/>
         </a:defRPr>
       </a:lvl2pPr>
-      <a:lvl3pPr lvl="2" marR="0" rtl="0" algn="l">
+      <a:lvl3pPr marR="0" lvl="2" algn="l" rtl="0">
         <a:lnSpc>
           <a:spcPct val="100000"/>
         </a:lnSpc>
@@ -13663,7 +13935,7 @@
           <a:srgbClr val="000000"/>
         </a:buClr>
         <a:buFont typeface="Arial"/>
-        <a:defRPr b="0" i="0" sz="1400" u="none" cap="none" strike="noStrike">
+        <a:defRPr sz="1400" b="0" i="0" u="none" strike="noStrike" cap="none">
           <a:solidFill>
             <a:srgbClr val="000000"/>
           </a:solidFill>
@@ -13673,7 +13945,7 @@
           <a:sym typeface="Arial"/>
         </a:defRPr>
       </a:lvl3pPr>
-      <a:lvl4pPr lvl="3" marR="0" rtl="0" algn="l">
+      <a:lvl4pPr marR="0" lvl="3" algn="l" rtl="0">
         <a:lnSpc>
           <a:spcPct val="100000"/>
         </a:lnSpc>
@@ -13687,7 +13959,7 @@
           <a:srgbClr val="000000"/>
         </a:buClr>
         <a:buFont typeface="Arial"/>
-        <a:defRPr b="0" i="0" sz="1400" u="none" cap="none" strike="noStrike">
+        <a:defRPr sz="1400" b="0" i="0" u="none" strike="noStrike" cap="none">
           <a:solidFill>
             <a:srgbClr val="000000"/>
           </a:solidFill>
@@ -13697,7 +13969,7 @@
           <a:sym typeface="Arial"/>
         </a:defRPr>
       </a:lvl4pPr>
-      <a:lvl5pPr lvl="4" marR="0" rtl="0" algn="l">
+      <a:lvl5pPr marR="0" lvl="4" algn="l" rtl="0">
         <a:lnSpc>
           <a:spcPct val="100000"/>
         </a:lnSpc>
@@ -13711,7 +13983,7 @@
           <a:srgbClr val="000000"/>
         </a:buClr>
         <a:buFont typeface="Arial"/>
-        <a:defRPr b="0" i="0" sz="1400" u="none" cap="none" strike="noStrike">
+        <a:defRPr sz="1400" b="0" i="0" u="none" strike="noStrike" cap="none">
           <a:solidFill>
             <a:srgbClr val="000000"/>
           </a:solidFill>
@@ -13721,7 +13993,7 @@
           <a:sym typeface="Arial"/>
         </a:defRPr>
       </a:lvl5pPr>
-      <a:lvl6pPr lvl="5" marR="0" rtl="0" algn="l">
+      <a:lvl6pPr marR="0" lvl="5" algn="l" rtl="0">
         <a:lnSpc>
           <a:spcPct val="100000"/>
         </a:lnSpc>
@@ -13735,7 +14007,7 @@
           <a:srgbClr val="000000"/>
         </a:buClr>
         <a:buFont typeface="Arial"/>
-        <a:defRPr b="0" i="0" sz="1400" u="none" cap="none" strike="noStrike">
+        <a:defRPr sz="1400" b="0" i="0" u="none" strike="noStrike" cap="none">
           <a:solidFill>
             <a:srgbClr val="000000"/>
           </a:solidFill>
@@ -13745,7 +14017,7 @@
           <a:sym typeface="Arial"/>
         </a:defRPr>
       </a:lvl6pPr>
-      <a:lvl7pPr lvl="6" marR="0" rtl="0" algn="l">
+      <a:lvl7pPr marR="0" lvl="6" algn="l" rtl="0">
         <a:lnSpc>
           <a:spcPct val="100000"/>
         </a:lnSpc>
@@ -13759,7 +14031,7 @@
           <a:srgbClr val="000000"/>
         </a:buClr>
         <a:buFont typeface="Arial"/>
-        <a:defRPr b="0" i="0" sz="1400" u="none" cap="none" strike="noStrike">
+        <a:defRPr sz="1400" b="0" i="0" u="none" strike="noStrike" cap="none">
           <a:solidFill>
             <a:srgbClr val="000000"/>
           </a:solidFill>
@@ -13769,7 +14041,7 @@
           <a:sym typeface="Arial"/>
         </a:defRPr>
       </a:lvl7pPr>
-      <a:lvl8pPr lvl="7" marR="0" rtl="0" algn="l">
+      <a:lvl8pPr marR="0" lvl="7" algn="l" rtl="0">
         <a:lnSpc>
           <a:spcPct val="100000"/>
         </a:lnSpc>
@@ -13783,7 +14055,7 @@
           <a:srgbClr val="000000"/>
         </a:buClr>
         <a:buFont typeface="Arial"/>
-        <a:defRPr b="0" i="0" sz="1400" u="none" cap="none" strike="noStrike">
+        <a:defRPr sz="1400" b="0" i="0" u="none" strike="noStrike" cap="none">
           <a:solidFill>
             <a:srgbClr val="000000"/>
           </a:solidFill>
@@ -13793,7 +14065,7 @@
           <a:sym typeface="Arial"/>
         </a:defRPr>
       </a:lvl8pPr>
-      <a:lvl9pPr lvl="8" marR="0" rtl="0" algn="l">
+      <a:lvl9pPr marR="0" lvl="8" algn="l" rtl="0">
         <a:lnSpc>
           <a:spcPct val="100000"/>
         </a:lnSpc>
@@ -13807,7 +14079,7 @@
           <a:srgbClr val="000000"/>
         </a:buClr>
         <a:buFont typeface="Arial"/>
-        <a:defRPr b="0" i="0" sz="1400" u="none" cap="none" strike="noStrike">
+        <a:defRPr sz="1400" b="0" i="0" u="none" strike="noStrike" cap="none">
           <a:solidFill>
             <a:srgbClr val="000000"/>
           </a:solidFill>
@@ -13819,7 +14091,7 @@
       </a:lvl9pPr>
     </p:bodyStyle>
     <p:otherStyle>
-      <a:defPPr lvl="0" marR="0" rtl="0" algn="l">
+      <a:defPPr marR="0" lvl="0" algn="l" rtl="0">
         <a:lnSpc>
           <a:spcPct val="100000"/>
         </a:lnSpc>
@@ -13830,7 +14102,7 @@
           <a:spcPts val="0"/>
         </a:spcAft>
       </a:defPPr>
-      <a:lvl1pPr lvl="0" marR="0" rtl="0" algn="l">
+      <a:lvl1pPr marR="0" lvl="0" algn="l" rtl="0">
         <a:lnSpc>
           <a:spcPct val="100000"/>
         </a:lnSpc>
@@ -13844,7 +14116,7 @@
           <a:srgbClr val="000000"/>
         </a:buClr>
         <a:buFont typeface="Arial"/>
-        <a:defRPr b="0" i="0" sz="1400" u="none" cap="none" strike="noStrike">
+        <a:defRPr sz="1400" b="0" i="0" u="none" strike="noStrike" cap="none">
           <a:solidFill>
             <a:srgbClr val="000000"/>
           </a:solidFill>
@@ -13854,7 +14126,7 @@
           <a:sym typeface="Arial"/>
         </a:defRPr>
       </a:lvl1pPr>
-      <a:lvl2pPr lvl="1" marR="0" rtl="0" algn="l">
+      <a:lvl2pPr marR="0" lvl="1" algn="l" rtl="0">
         <a:lnSpc>
           <a:spcPct val="100000"/>
         </a:lnSpc>
@@ -13868,7 +14140,7 @@
           <a:srgbClr val="000000"/>
         </a:buClr>
         <a:buFont typeface="Arial"/>
-        <a:defRPr b="0" i="0" sz="1400" u="none" cap="none" strike="noStrike">
+        <a:defRPr sz="1400" b="0" i="0" u="none" strike="noStrike" cap="none">
           <a:solidFill>
             <a:srgbClr val="000000"/>
           </a:solidFill>
@@ -13878,7 +14150,7 @@
           <a:sym typeface="Arial"/>
         </a:defRPr>
       </a:lvl2pPr>
-      <a:lvl3pPr lvl="2" marR="0" rtl="0" algn="l">
+      <a:lvl3pPr marR="0" lvl="2" algn="l" rtl="0">
         <a:lnSpc>
           <a:spcPct val="100000"/>
         </a:lnSpc>
@@ -13892,7 +14164,7 @@
           <a:srgbClr val="000000"/>
         </a:buClr>
         <a:buFont typeface="Arial"/>
-        <a:defRPr b="0" i="0" sz="1400" u="none" cap="none" strike="noStrike">
+        <a:defRPr sz="1400" b="0" i="0" u="none" strike="noStrike" cap="none">
           <a:solidFill>
             <a:srgbClr val="000000"/>
           </a:solidFill>
@@ -13902,7 +14174,7 @@
           <a:sym typeface="Arial"/>
         </a:defRPr>
       </a:lvl3pPr>
-      <a:lvl4pPr lvl="3" marR="0" rtl="0" algn="l">
+      <a:lvl4pPr marR="0" lvl="3" algn="l" rtl="0">
         <a:lnSpc>
           <a:spcPct val="100000"/>
         </a:lnSpc>
@@ -13916,7 +14188,7 @@
           <a:srgbClr val="000000"/>
         </a:buClr>
         <a:buFont typeface="Arial"/>
-        <a:defRPr b="0" i="0" sz="1400" u="none" cap="none" strike="noStrike">
+        <a:defRPr sz="1400" b="0" i="0" u="none" strike="noStrike" cap="none">
           <a:solidFill>
             <a:srgbClr val="000000"/>
           </a:solidFill>
@@ -13926,7 +14198,7 @@
           <a:sym typeface="Arial"/>
         </a:defRPr>
       </a:lvl4pPr>
-      <a:lvl5pPr lvl="4" marR="0" rtl="0" algn="l">
+      <a:lvl5pPr marR="0" lvl="4" algn="l" rtl="0">
         <a:lnSpc>
           <a:spcPct val="100000"/>
         </a:lnSpc>
@@ -13940,7 +14212,7 @@
           <a:srgbClr val="000000"/>
         </a:buClr>
         <a:buFont typeface="Arial"/>
-        <a:defRPr b="0" i="0" sz="1400" u="none" cap="none" strike="noStrike">
+        <a:defRPr sz="1400" b="0" i="0" u="none" strike="noStrike" cap="none">
           <a:solidFill>
             <a:srgbClr val="000000"/>
           </a:solidFill>
@@ -13950,7 +14222,7 @@
           <a:sym typeface="Arial"/>
         </a:defRPr>
       </a:lvl5pPr>
-      <a:lvl6pPr lvl="5" marR="0" rtl="0" algn="l">
+      <a:lvl6pPr marR="0" lvl="5" algn="l" rtl="0">
         <a:lnSpc>
           <a:spcPct val="100000"/>
         </a:lnSpc>
@@ -13964,7 +14236,7 @@
           <a:srgbClr val="000000"/>
         </a:buClr>
         <a:buFont typeface="Arial"/>
-        <a:defRPr b="0" i="0" sz="1400" u="none" cap="none" strike="noStrike">
+        <a:defRPr sz="1400" b="0" i="0" u="none" strike="noStrike" cap="none">
           <a:solidFill>
             <a:srgbClr val="000000"/>
           </a:solidFill>
@@ -13974,7 +14246,7 @@
           <a:sym typeface="Arial"/>
         </a:defRPr>
       </a:lvl6pPr>
-      <a:lvl7pPr lvl="6" marR="0" rtl="0" algn="l">
+      <a:lvl7pPr marR="0" lvl="6" algn="l" rtl="0">
         <a:lnSpc>
           <a:spcPct val="100000"/>
         </a:lnSpc>
@@ -13988,7 +14260,7 @@
           <a:srgbClr val="000000"/>
         </a:buClr>
         <a:buFont typeface="Arial"/>
-        <a:defRPr b="0" i="0" sz="1400" u="none" cap="none" strike="noStrike">
+        <a:defRPr sz="1400" b="0" i="0" u="none" strike="noStrike" cap="none">
           <a:solidFill>
             <a:srgbClr val="000000"/>
           </a:solidFill>
@@ -13998,7 +14270,7 @@
           <a:sym typeface="Arial"/>
         </a:defRPr>
       </a:lvl7pPr>
-      <a:lvl8pPr lvl="7" marR="0" rtl="0" algn="l">
+      <a:lvl8pPr marR="0" lvl="7" algn="l" rtl="0">
         <a:lnSpc>
           <a:spcPct val="100000"/>
         </a:lnSpc>
@@ -14012,7 +14284,7 @@
           <a:srgbClr val="000000"/>
         </a:buClr>
         <a:buFont typeface="Arial"/>
-        <a:defRPr b="0" i="0" sz="1400" u="none" cap="none" strike="noStrike">
+        <a:defRPr sz="1400" b="0" i="0" u="none" strike="noStrike" cap="none">
           <a:solidFill>
             <a:srgbClr val="000000"/>
           </a:solidFill>
@@ -14022,7 +14294,7 @@
           <a:sym typeface="Arial"/>
         </a:defRPr>
       </a:lvl8pPr>
-      <a:lvl9pPr lvl="8" marR="0" rtl="0" algn="l">
+      <a:lvl9pPr marR="0" lvl="8" algn="l" rtl="0">
         <a:lnSpc>
           <a:spcPct val="100000"/>
         </a:lnSpc>
@@ -14036,7 +14308,7 @@
           <a:srgbClr val="000000"/>
         </a:buClr>
         <a:buFont typeface="Arial"/>
-        <a:defRPr b="0" i="0" sz="1400" u="none" cap="none" strike="noStrike">
+        <a:defRPr sz="1400" b="0" i="0" u="none" strike="noStrike" cap="none">
           <a:solidFill>
             <a:srgbClr val="000000"/>
           </a:solidFill>
@@ -14052,18 +14324,19 @@
 </file>
 
 <file path=ppt/slides/slide1.xml><?xml version="1.0" encoding="utf-8"?>
-<p:sld xmlns:a="http://schemas.openxmlformats.org/drawingml/2006/main" xmlns:r="http://schemas.openxmlformats.org/officeDocument/2006/relationships" xmlns:mc="http://schemas.openxmlformats.org/markup-compatibility/2006" xmlns:mv="urn:schemas-microsoft-com:mac:vml" xmlns:p="http://schemas.openxmlformats.org/presentationml/2006/main" xmlns:c="http://schemas.openxmlformats.org/drawingml/2006/chart" xmlns:dgm="http://schemas.openxmlformats.org/drawingml/2006/diagram" xmlns:o="urn:schemas-microsoft-com:office:office" xmlns:v="urn:schemas-microsoft-com:vml" xmlns:pvml="urn:schemas-microsoft-com:office:powerpoint" xmlns:com="http://schemas.openxmlformats.org/drawingml/2006/compatibility" xmlns:p14="http://schemas.microsoft.com/office/powerpoint/2010/main" xmlns:p15="http://schemas.microsoft.com/office/powerpoint/2012/main" xmlns:ahyp="http://schemas.microsoft.com/office/drawing/2018/hyperlinkcolor">
+<p:sld xmlns:a="http://schemas.openxmlformats.org/drawingml/2006/main" xmlns:r="http://schemas.openxmlformats.org/officeDocument/2006/relationships" xmlns:p="http://schemas.openxmlformats.org/presentationml/2006/main">
   <p:cSld>
     <p:bg>
       <p:bgPr>
         <a:solidFill>
           <a:srgbClr val="044F37"/>
         </a:solidFill>
+        <a:effectLst/>
       </p:bgPr>
     </p:bg>
     <p:spTree>
       <p:nvGrpSpPr>
-        <p:cNvPr id="83" name="Shape 83"/>
+        <p:cNvPr id="1" name="Shape 83"/>
         <p:cNvGrpSpPr/>
         <p:nvPr/>
       </p:nvGrpSpPr>
@@ -14101,9 +14374,13 @@
               <a:ext cx="3032124" cy="607578"/>
             </a:xfrm>
             <a:custGeom>
-              <a:rect b="b" l="l" r="r" t="t"/>
+              <a:avLst/>
+              <a:gdLst/>
+              <a:ahLst/>
+              <a:cxnLst/>
+              <a:rect l="l" t="t" r="r" b="b"/>
               <a:pathLst>
-                <a:path extrusionOk="0" h="607578" w="3032124">
+                <a:path w="3032124" h="607578" extrusionOk="0">
                   <a:moveTo>
                     <a:pt x="0" y="0"/>
                   </a:moveTo>
@@ -14128,12 +14405,12 @@
             </a:ln>
           </p:spPr>
           <p:txBody>
-            <a:bodyPr anchorCtr="0" anchor="t" bIns="45700" lIns="91425" spcFirstLastPara="1" rIns="91425" wrap="square" tIns="45700">
+            <a:bodyPr spcFirstLastPara="1" wrap="square" lIns="91425" tIns="45700" rIns="91425" bIns="45700" anchor="t" anchorCtr="0">
               <a:noAutofit/>
             </a:bodyPr>
             <a:lstStyle/>
             <a:p>
-              <a:pPr indent="0" lvl="0" marL="0" marR="0" rtl="0" algn="l">
+              <a:pPr marL="0" marR="0" lvl="0" indent="0" algn="l" rtl="0">
                 <a:lnSpc>
                   <a:spcPct val="100000"/>
                 </a:lnSpc>
@@ -14150,10 +14427,7 @@
                 <a:buFont typeface="Arial"/>
                 <a:buNone/>
               </a:pPr>
-              <a:r>
-                <a:t/>
-              </a:r>
-              <a:endParaRPr b="0" i="0" sz="6769" u="none" cap="none" strike="noStrike">
+              <a:endParaRPr sz="6769" b="0" i="0" u="none" strike="noStrike" cap="none">
                 <a:solidFill>
                   <a:schemeClr val="dk1"/>
                 </a:solidFill>
@@ -14185,12 +14459,12 @@
             </a:ln>
           </p:spPr>
           <p:txBody>
-            <a:bodyPr anchorCtr="0" anchor="ctr" bIns="88925" lIns="88925" spcFirstLastPara="1" rIns="88925" wrap="square" tIns="88925">
+            <a:bodyPr spcFirstLastPara="1" wrap="square" lIns="88925" tIns="88925" rIns="88925" bIns="88925" anchor="ctr" anchorCtr="0">
               <a:noAutofit/>
             </a:bodyPr>
             <a:lstStyle/>
             <a:p>
-              <a:pPr indent="0" lvl="0" marL="0" marR="0" rtl="0" algn="ctr">
+              <a:pPr marL="0" marR="0" lvl="0" indent="0" algn="ctr" rtl="0">
                 <a:lnSpc>
                   <a:spcPct val="112217"/>
                 </a:lnSpc>
@@ -14207,10 +14481,7 @@
                 <a:buFont typeface="Arial"/>
                 <a:buNone/>
               </a:pPr>
-              <a:r>
-                <a:t/>
-              </a:r>
-              <a:endParaRPr b="0" i="0" sz="6769" u="none" cap="none" strike="noStrike">
+              <a:endParaRPr sz="6769" b="0" i="0" u="none" strike="noStrike" cap="none">
                 <a:solidFill>
                   <a:schemeClr val="dk1"/>
                 </a:solidFill>
@@ -14235,9 +14506,13 @@
             <a:ext cx="22769151" cy="14311010"/>
           </a:xfrm>
           <a:custGeom>
-            <a:rect b="b" l="l" r="r" t="t"/>
+            <a:avLst/>
+            <a:gdLst/>
+            <a:ahLst/>
+            <a:cxnLst/>
+            <a:rect l="l" t="t" r="r" b="b"/>
             <a:pathLst>
-              <a:path extrusionOk="0" h="7509691" w="11948094">
+              <a:path w="11948094" h="7509691" extrusionOk="0">
                 <a:moveTo>
                   <a:pt x="0" y="0"/>
                 </a:moveTo>
@@ -14262,7 +14537,7 @@
               <a:alphaModFix/>
             </a:blip>
             <a:stretch>
-              <a:fillRect b="-48958" l="0" r="0" t="0"/>
+              <a:fillRect b="-48958"/>
             </a:stretch>
           </a:blipFill>
           <a:ln>
@@ -14270,12 +14545,12 @@
           </a:ln>
         </p:spPr>
         <p:txBody>
-          <a:bodyPr anchorCtr="0" anchor="t" bIns="45700" lIns="91425" spcFirstLastPara="1" rIns="91425" wrap="square" tIns="45700">
+          <a:bodyPr spcFirstLastPara="1" wrap="square" lIns="91425" tIns="45700" rIns="91425" bIns="45700" anchor="t" anchorCtr="0">
             <a:noAutofit/>
           </a:bodyPr>
           <a:lstStyle/>
           <a:p>
-            <a:pPr indent="0" lvl="0" marL="0" marR="0" rtl="0" algn="l">
+            <a:pPr marL="0" marR="0" lvl="0" indent="0" algn="l" rtl="0">
               <a:lnSpc>
                 <a:spcPct val="100000"/>
               </a:lnSpc>
@@ -14292,10 +14567,7 @@
               <a:buFont typeface="Arial"/>
               <a:buNone/>
             </a:pPr>
-            <a:r>
-              <a:t/>
-            </a:r>
-            <a:endParaRPr b="0" i="0" sz="6769" u="none" cap="none" strike="noStrike">
+            <a:endParaRPr sz="6769" b="0" i="0" u="none" strike="noStrike" cap="none">
               <a:solidFill>
                 <a:schemeClr val="dk1"/>
               </a:solidFill>
@@ -14333,9 +14605,13 @@
               <a:ext cx="3163653" cy="870076"/>
             </a:xfrm>
             <a:custGeom>
-              <a:rect b="b" l="l" r="r" t="t"/>
+              <a:avLst/>
+              <a:gdLst/>
+              <a:ahLst/>
+              <a:cxnLst/>
+              <a:rect l="l" t="t" r="r" b="b"/>
               <a:pathLst>
-                <a:path extrusionOk="0" h="870076" w="3163653">
+                <a:path w="3163653" h="870076" extrusionOk="0">
                   <a:moveTo>
                     <a:pt x="0" y="0"/>
                   </a:moveTo>
@@ -14360,12 +14636,12 @@
             </a:ln>
           </p:spPr>
           <p:txBody>
-            <a:bodyPr anchorCtr="0" anchor="t" bIns="45700" lIns="91425" spcFirstLastPara="1" rIns="91425" wrap="square" tIns="45700">
+            <a:bodyPr spcFirstLastPara="1" wrap="square" lIns="91425" tIns="45700" rIns="91425" bIns="45700" anchor="t" anchorCtr="0">
               <a:noAutofit/>
             </a:bodyPr>
             <a:lstStyle/>
             <a:p>
-              <a:pPr indent="0" lvl="0" marL="0" marR="0" rtl="0" algn="l">
+              <a:pPr marL="0" marR="0" lvl="0" indent="0" algn="l" rtl="0">
                 <a:lnSpc>
                   <a:spcPct val="100000"/>
                 </a:lnSpc>
@@ -14382,10 +14658,7 @@
                 <a:buFont typeface="Arial"/>
                 <a:buNone/>
               </a:pPr>
-              <a:r>
-                <a:t/>
-              </a:r>
-              <a:endParaRPr b="0" i="0" sz="6769" u="none" cap="none" strike="noStrike">
+              <a:endParaRPr sz="6769" b="0" i="0" u="none" strike="noStrike" cap="none">
                 <a:solidFill>
                   <a:schemeClr val="dk1"/>
                 </a:solidFill>
@@ -14417,12 +14690,12 @@
             </a:ln>
           </p:spPr>
           <p:txBody>
-            <a:bodyPr anchorCtr="0" anchor="ctr" bIns="88925" lIns="88925" spcFirstLastPara="1" rIns="88925" wrap="square" tIns="88925">
+            <a:bodyPr spcFirstLastPara="1" wrap="square" lIns="88925" tIns="88925" rIns="88925" bIns="88925" anchor="ctr" anchorCtr="0">
               <a:noAutofit/>
             </a:bodyPr>
             <a:lstStyle/>
             <a:p>
-              <a:pPr indent="0" lvl="0" marL="0" marR="0" rtl="0" algn="l">
+              <a:pPr marL="0" marR="0" lvl="0" indent="0" algn="l" rtl="0">
                 <a:lnSpc>
                   <a:spcPct val="112217"/>
                 </a:lnSpc>
@@ -14439,10 +14712,7 @@
                 <a:buFont typeface="Arial"/>
                 <a:buNone/>
               </a:pPr>
-              <a:r>
-                <a:t/>
-              </a:r>
-              <a:endParaRPr b="0" i="0" sz="6769" u="none" cap="none" strike="noStrike">
+              <a:endParaRPr sz="6769" b="0" i="0" u="none" strike="noStrike" cap="none">
                 <a:solidFill>
                   <a:schemeClr val="dk1"/>
                 </a:solidFill>
@@ -14481,9 +14751,13 @@
               <a:ext cx="3225442" cy="841941"/>
             </a:xfrm>
             <a:custGeom>
-              <a:rect b="b" l="l" r="r" t="t"/>
+              <a:avLst/>
+              <a:gdLst/>
+              <a:ahLst/>
+              <a:cxnLst/>
+              <a:rect l="l" t="t" r="r" b="b"/>
               <a:pathLst>
-                <a:path extrusionOk="0" h="841941" w="3225442">
+                <a:path w="3225442" h="841941" extrusionOk="0">
                   <a:moveTo>
                     <a:pt x="0" y="0"/>
                   </a:moveTo>
@@ -14508,12 +14782,12 @@
             </a:ln>
           </p:spPr>
           <p:txBody>
-            <a:bodyPr anchorCtr="0" anchor="t" bIns="45700" lIns="91425" spcFirstLastPara="1" rIns="91425" wrap="square" tIns="45700">
+            <a:bodyPr spcFirstLastPara="1" wrap="square" lIns="91425" tIns="45700" rIns="91425" bIns="45700" anchor="t" anchorCtr="0">
               <a:noAutofit/>
             </a:bodyPr>
             <a:lstStyle/>
             <a:p>
-              <a:pPr indent="0" lvl="0" marL="0" marR="0" rtl="0" algn="l">
+              <a:pPr marL="0" marR="0" lvl="0" indent="0" algn="l" rtl="0">
                 <a:lnSpc>
                   <a:spcPct val="100000"/>
                 </a:lnSpc>
@@ -14530,10 +14804,7 @@
                 <a:buFont typeface="Arial"/>
                 <a:buNone/>
               </a:pPr>
-              <a:r>
-                <a:t/>
-              </a:r>
-              <a:endParaRPr b="0" i="0" sz="6769" u="none" cap="none" strike="noStrike">
+              <a:endParaRPr sz="6769" b="0" i="0" u="none" strike="noStrike" cap="none">
                 <a:solidFill>
                   <a:schemeClr val="dk1"/>
                 </a:solidFill>
@@ -14565,12 +14836,12 @@
             </a:ln>
           </p:spPr>
           <p:txBody>
-            <a:bodyPr anchorCtr="0" anchor="ctr" bIns="88925" lIns="88925" spcFirstLastPara="1" rIns="88925" wrap="square" tIns="88925">
+            <a:bodyPr spcFirstLastPara="1" wrap="square" lIns="88925" tIns="88925" rIns="88925" bIns="88925" anchor="ctr" anchorCtr="0">
               <a:noAutofit/>
             </a:bodyPr>
             <a:lstStyle/>
             <a:p>
-              <a:pPr indent="0" lvl="0" marL="0" marR="0" rtl="0" algn="ctr">
+              <a:pPr marL="0" marR="0" lvl="0" indent="0" algn="ctr" rtl="0">
                 <a:lnSpc>
                   <a:spcPct val="112217"/>
                 </a:lnSpc>
@@ -14587,10 +14858,7 @@
                 <a:buFont typeface="Arial"/>
                 <a:buNone/>
               </a:pPr>
-              <a:r>
-                <a:t/>
-              </a:r>
-              <a:endParaRPr b="0" i="0" sz="6769" u="none" cap="none" strike="noStrike">
+              <a:endParaRPr sz="6769" b="0" i="0" u="none" strike="noStrike" cap="none">
                 <a:solidFill>
                   <a:schemeClr val="dk1"/>
                 </a:solidFill>
@@ -14629,9 +14897,13 @@
               <a:ext cx="3032124" cy="739677"/>
             </a:xfrm>
             <a:custGeom>
-              <a:rect b="b" l="l" r="r" t="t"/>
+              <a:avLst/>
+              <a:gdLst/>
+              <a:ahLst/>
+              <a:cxnLst/>
+              <a:rect l="l" t="t" r="r" b="b"/>
               <a:pathLst>
-                <a:path extrusionOk="0" h="739677" w="3032124">
+                <a:path w="3032124" h="739677" extrusionOk="0">
                   <a:moveTo>
                     <a:pt x="0" y="0"/>
                   </a:moveTo>
@@ -14656,12 +14928,12 @@
             </a:ln>
           </p:spPr>
           <p:txBody>
-            <a:bodyPr anchorCtr="0" anchor="t" bIns="45700" lIns="91425" spcFirstLastPara="1" rIns="91425" wrap="square" tIns="45700">
+            <a:bodyPr spcFirstLastPara="1" wrap="square" lIns="91425" tIns="45700" rIns="91425" bIns="45700" anchor="t" anchorCtr="0">
               <a:noAutofit/>
             </a:bodyPr>
             <a:lstStyle/>
             <a:p>
-              <a:pPr indent="0" lvl="0" marL="0" marR="0" rtl="0" algn="l">
+              <a:pPr marL="0" marR="0" lvl="0" indent="0" algn="l" rtl="0">
                 <a:lnSpc>
                   <a:spcPct val="100000"/>
                 </a:lnSpc>
@@ -14678,10 +14950,7 @@
                 <a:buFont typeface="Arial"/>
                 <a:buNone/>
               </a:pPr>
-              <a:r>
-                <a:t/>
-              </a:r>
-              <a:endParaRPr b="0" i="0" sz="6769" u="none" cap="none" strike="noStrike">
+              <a:endParaRPr sz="6769" b="0" i="0" u="none" strike="noStrike" cap="none">
                 <a:solidFill>
                   <a:schemeClr val="dk1"/>
                 </a:solidFill>
@@ -14713,12 +14982,12 @@
             </a:ln>
           </p:spPr>
           <p:txBody>
-            <a:bodyPr anchorCtr="0" anchor="ctr" bIns="88925" lIns="88925" spcFirstLastPara="1" rIns="88925" wrap="square" tIns="88925">
+            <a:bodyPr spcFirstLastPara="1" wrap="square" lIns="88925" tIns="88925" rIns="88925" bIns="88925" anchor="ctr" anchorCtr="0">
               <a:noAutofit/>
             </a:bodyPr>
             <a:lstStyle/>
             <a:p>
-              <a:pPr indent="0" lvl="0" marL="0" marR="0" rtl="0" algn="ctr">
+              <a:pPr marL="0" marR="0" lvl="0" indent="0" algn="ctr" rtl="0">
                 <a:lnSpc>
                   <a:spcPct val="112217"/>
                 </a:lnSpc>
@@ -14735,10 +15004,7 @@
                 <a:buFont typeface="Arial"/>
                 <a:buNone/>
               </a:pPr>
-              <a:r>
-                <a:t/>
-              </a:r>
-              <a:endParaRPr b="0" i="0" sz="6769" u="none" cap="none" strike="noStrike">
+              <a:endParaRPr sz="6769" b="0" i="0" u="none" strike="noStrike" cap="none">
                 <a:solidFill>
                   <a:schemeClr val="dk1"/>
                 </a:solidFill>
@@ -14777,9 +15043,13 @@
               <a:ext cx="3218728" cy="819899"/>
             </a:xfrm>
             <a:custGeom>
-              <a:rect b="b" l="l" r="r" t="t"/>
+              <a:avLst/>
+              <a:gdLst/>
+              <a:ahLst/>
+              <a:cxnLst/>
+              <a:rect l="l" t="t" r="r" b="b"/>
               <a:pathLst>
-                <a:path extrusionOk="0" h="819899" w="3218728">
+                <a:path w="3218728" h="819899" extrusionOk="0">
                   <a:moveTo>
                     <a:pt x="0" y="0"/>
                   </a:moveTo>
@@ -14804,12 +15074,12 @@
             </a:ln>
           </p:spPr>
           <p:txBody>
-            <a:bodyPr anchorCtr="0" anchor="t" bIns="45700" lIns="91425" spcFirstLastPara="1" rIns="91425" wrap="square" tIns="45700">
+            <a:bodyPr spcFirstLastPara="1" wrap="square" lIns="91425" tIns="45700" rIns="91425" bIns="45700" anchor="t" anchorCtr="0">
               <a:noAutofit/>
             </a:bodyPr>
             <a:lstStyle/>
             <a:p>
-              <a:pPr indent="0" lvl="0" marL="0" marR="0" rtl="0" algn="l">
+              <a:pPr marL="0" marR="0" lvl="0" indent="0" algn="l" rtl="0">
                 <a:lnSpc>
                   <a:spcPct val="100000"/>
                 </a:lnSpc>
@@ -14826,10 +15096,7 @@
                 <a:buFont typeface="Arial"/>
                 <a:buNone/>
               </a:pPr>
-              <a:r>
-                <a:t/>
-              </a:r>
-              <a:endParaRPr b="0" i="0" sz="6769" u="none" cap="none" strike="noStrike">
+              <a:endParaRPr sz="6769" b="0" i="0" u="none" strike="noStrike" cap="none">
                 <a:solidFill>
                   <a:schemeClr val="dk1"/>
                 </a:solidFill>
@@ -14861,12 +15128,12 @@
             </a:ln>
           </p:spPr>
           <p:txBody>
-            <a:bodyPr anchorCtr="0" anchor="ctr" bIns="88925" lIns="88925" spcFirstLastPara="1" rIns="88925" wrap="square" tIns="88925">
+            <a:bodyPr spcFirstLastPara="1" wrap="square" lIns="88925" tIns="88925" rIns="88925" bIns="88925" anchor="ctr" anchorCtr="0">
               <a:noAutofit/>
             </a:bodyPr>
             <a:lstStyle/>
             <a:p>
-              <a:pPr indent="0" lvl="0" marL="0" marR="0" rtl="0" algn="ctr">
+              <a:pPr marL="0" marR="0" lvl="0" indent="0" algn="ctr" rtl="0">
                 <a:lnSpc>
                   <a:spcPct val="112217"/>
                 </a:lnSpc>
@@ -14883,10 +15150,7 @@
                 <a:buFont typeface="Arial"/>
                 <a:buNone/>
               </a:pPr>
-              <a:r>
-                <a:t/>
-              </a:r>
-              <a:endParaRPr b="0" i="0" sz="6769" u="none" cap="none" strike="noStrike">
+              <a:endParaRPr sz="6769" b="0" i="0" u="none" strike="noStrike" cap="none">
                 <a:solidFill>
                   <a:schemeClr val="dk1"/>
                 </a:solidFill>
@@ -14925,9 +15189,13 @@
               <a:ext cx="2755436" cy="803341"/>
             </a:xfrm>
             <a:custGeom>
-              <a:rect b="b" l="l" r="r" t="t"/>
+              <a:avLst/>
+              <a:gdLst/>
+              <a:ahLst/>
+              <a:cxnLst/>
+              <a:rect l="l" t="t" r="r" b="b"/>
               <a:pathLst>
-                <a:path extrusionOk="0" h="803341" w="2755436">
+                <a:path w="2755436" h="803341" extrusionOk="0">
                   <a:moveTo>
                     <a:pt x="0" y="0"/>
                   </a:moveTo>
@@ -14952,12 +15220,12 @@
             </a:ln>
           </p:spPr>
           <p:txBody>
-            <a:bodyPr anchorCtr="0" anchor="t" bIns="45700" lIns="91425" spcFirstLastPara="1" rIns="91425" wrap="square" tIns="45700">
+            <a:bodyPr spcFirstLastPara="1" wrap="square" lIns="91425" tIns="45700" rIns="91425" bIns="45700" anchor="t" anchorCtr="0">
               <a:noAutofit/>
             </a:bodyPr>
             <a:lstStyle/>
             <a:p>
-              <a:pPr indent="0" lvl="0" marL="0" marR="0" rtl="0" algn="l">
+              <a:pPr marL="0" marR="0" lvl="0" indent="0" algn="l" rtl="0">
                 <a:lnSpc>
                   <a:spcPct val="100000"/>
                 </a:lnSpc>
@@ -14974,10 +15242,7 @@
                 <a:buFont typeface="Arial"/>
                 <a:buNone/>
               </a:pPr>
-              <a:r>
-                <a:t/>
-              </a:r>
-              <a:endParaRPr b="0" i="0" sz="6769" u="none" cap="none" strike="noStrike">
+              <a:endParaRPr sz="6769" b="0" i="0" u="none" strike="noStrike" cap="none">
                 <a:solidFill>
                   <a:schemeClr val="dk1"/>
                 </a:solidFill>
@@ -15009,12 +15274,12 @@
             </a:ln>
           </p:spPr>
           <p:txBody>
-            <a:bodyPr anchorCtr="0" anchor="ctr" bIns="88925" lIns="88925" spcFirstLastPara="1" rIns="88925" wrap="square" tIns="88925">
+            <a:bodyPr spcFirstLastPara="1" wrap="square" lIns="88925" tIns="88925" rIns="88925" bIns="88925" anchor="ctr" anchorCtr="0">
               <a:noAutofit/>
             </a:bodyPr>
             <a:lstStyle/>
             <a:p>
-              <a:pPr indent="0" lvl="0" marL="0" marR="0" rtl="0" algn="ctr">
+              <a:pPr marL="0" marR="0" lvl="0" indent="0" algn="ctr" rtl="0">
                 <a:lnSpc>
                   <a:spcPct val="112217"/>
                 </a:lnSpc>
@@ -15031,10 +15296,7 @@
                 <a:buFont typeface="Arial"/>
                 <a:buNone/>
               </a:pPr>
-              <a:r>
-                <a:t/>
-              </a:r>
-              <a:endParaRPr b="0" i="0" sz="6769" u="none" cap="none" strike="noStrike">
+              <a:endParaRPr sz="6769" b="0" i="0" u="none" strike="noStrike" cap="none">
                 <a:solidFill>
                   <a:schemeClr val="dk1"/>
                 </a:solidFill>
@@ -15073,9 +15335,13 @@
               <a:ext cx="1922704" cy="1176995"/>
             </a:xfrm>
             <a:custGeom>
-              <a:rect b="b" l="l" r="r" t="t"/>
+              <a:avLst/>
+              <a:gdLst/>
+              <a:ahLst/>
+              <a:cxnLst/>
+              <a:rect l="l" t="t" r="r" b="b"/>
               <a:pathLst>
-                <a:path extrusionOk="0" h="1176995" w="1922704">
+                <a:path w="1922704" h="1176995" extrusionOk="0">
                   <a:moveTo>
                     <a:pt x="0" y="0"/>
                   </a:moveTo>
@@ -15095,23 +15361,23 @@
             <a:solidFill>
               <a:srgbClr val="FFFFFF"/>
             </a:solidFill>
-            <a:ln cap="sq" cmpd="sng" w="19050">
+            <a:ln w="19050" cap="sq" cmpd="sng">
               <a:solidFill>
                 <a:srgbClr val="000000"/>
               </a:solidFill>
               <a:prstDash val="solid"/>
               <a:miter lim="8000"/>
-              <a:headEnd len="sm" w="sm" type="none"/>
-              <a:tailEnd len="sm" w="sm" type="none"/>
+              <a:headEnd type="none" w="sm" len="sm"/>
+              <a:tailEnd type="none" w="sm" len="sm"/>
             </a:ln>
           </p:spPr>
           <p:txBody>
-            <a:bodyPr anchorCtr="0" anchor="t" bIns="45700" lIns="91425" spcFirstLastPara="1" rIns="91425" wrap="square" tIns="45700">
+            <a:bodyPr spcFirstLastPara="1" wrap="square" lIns="91425" tIns="45700" rIns="91425" bIns="45700" anchor="t" anchorCtr="0">
               <a:noAutofit/>
             </a:bodyPr>
             <a:lstStyle/>
             <a:p>
-              <a:pPr indent="0" lvl="0" marL="0" marR="0" rtl="0" algn="l">
+              <a:pPr marL="0" marR="0" lvl="0" indent="0" algn="l" rtl="0">
                 <a:lnSpc>
                   <a:spcPct val="100000"/>
                 </a:lnSpc>
@@ -15128,10 +15394,7 @@
                 <a:buFont typeface="Arial"/>
                 <a:buNone/>
               </a:pPr>
-              <a:r>
-                <a:t/>
-              </a:r>
-              <a:endParaRPr b="0" i="0" sz="6769" u="none" cap="none" strike="noStrike">
+              <a:endParaRPr sz="6769" b="0" i="0" u="none" strike="noStrike" cap="none">
                 <a:solidFill>
                   <a:schemeClr val="dk1"/>
                 </a:solidFill>
@@ -15163,12 +15426,12 @@
             </a:ln>
           </p:spPr>
           <p:txBody>
-            <a:bodyPr anchorCtr="0" anchor="ctr" bIns="89000" lIns="89000" spcFirstLastPara="1" rIns="89000" wrap="square" tIns="89000">
+            <a:bodyPr spcFirstLastPara="1" wrap="square" lIns="89000" tIns="89000" rIns="89000" bIns="89000" anchor="ctr" anchorCtr="0">
               <a:noAutofit/>
             </a:bodyPr>
             <a:lstStyle/>
             <a:p>
-              <a:pPr indent="0" lvl="0" marL="0" marR="0" rtl="0" algn="ctr">
+              <a:pPr marL="0" marR="0" lvl="0" indent="0" algn="ctr" rtl="0">
                 <a:lnSpc>
                   <a:spcPct val="112217"/>
                 </a:lnSpc>
@@ -15185,10 +15448,7 @@
                 <a:buFont typeface="Arial"/>
                 <a:buNone/>
               </a:pPr>
-              <a:r>
-                <a:t/>
-              </a:r>
-              <a:endParaRPr b="0" i="0" sz="6769" u="none" cap="none" strike="noStrike">
+              <a:endParaRPr sz="6769" b="0" i="0" u="none" strike="noStrike" cap="none">
                 <a:solidFill>
                   <a:schemeClr val="dk1"/>
                 </a:solidFill>
@@ -15227,9 +15487,13 @@
               <a:ext cx="1302166" cy="820732"/>
             </a:xfrm>
             <a:custGeom>
-              <a:rect b="b" l="l" r="r" t="t"/>
+              <a:avLst/>
+              <a:gdLst/>
+              <a:ahLst/>
+              <a:cxnLst/>
+              <a:rect l="l" t="t" r="r" b="b"/>
               <a:pathLst>
-                <a:path extrusionOk="0" h="820732" w="1302166">
+                <a:path w="1302166" h="820732" extrusionOk="0">
                   <a:moveTo>
                     <a:pt x="0" y="0"/>
                   </a:moveTo>
@@ -15249,23 +15513,23 @@
             <a:solidFill>
               <a:srgbClr val="FFFFFF"/>
             </a:solidFill>
-            <a:ln cap="sq" cmpd="sng" w="19050">
+            <a:ln w="19050" cap="sq" cmpd="sng">
               <a:solidFill>
                 <a:srgbClr val="000000"/>
               </a:solidFill>
               <a:prstDash val="solid"/>
               <a:miter lim="8000"/>
-              <a:headEnd len="sm" w="sm" type="none"/>
-              <a:tailEnd len="sm" w="sm" type="none"/>
+              <a:headEnd type="none" w="sm" len="sm"/>
+              <a:tailEnd type="none" w="sm" len="sm"/>
             </a:ln>
           </p:spPr>
           <p:txBody>
-            <a:bodyPr anchorCtr="0" anchor="t" bIns="45700" lIns="91425" spcFirstLastPara="1" rIns="91425" wrap="square" tIns="45700">
+            <a:bodyPr spcFirstLastPara="1" wrap="square" lIns="91425" tIns="45700" rIns="91425" bIns="45700" anchor="t" anchorCtr="0">
               <a:noAutofit/>
             </a:bodyPr>
             <a:lstStyle/>
             <a:p>
-              <a:pPr indent="0" lvl="0" marL="0" marR="0" rtl="0" algn="l">
+              <a:pPr marL="0" marR="0" lvl="0" indent="0" algn="l" rtl="0">
                 <a:lnSpc>
                   <a:spcPct val="100000"/>
                 </a:lnSpc>
@@ -15282,10 +15546,7 @@
                 <a:buFont typeface="Arial"/>
                 <a:buNone/>
               </a:pPr>
-              <a:r>
-                <a:t/>
-              </a:r>
-              <a:endParaRPr b="0" i="0" sz="6769" u="none" cap="none" strike="noStrike">
+              <a:endParaRPr sz="6769" b="0" i="0" u="none" strike="noStrike" cap="none">
                 <a:solidFill>
                   <a:schemeClr val="dk1"/>
                 </a:solidFill>
@@ -15317,12 +15578,12 @@
             </a:ln>
           </p:spPr>
           <p:txBody>
-            <a:bodyPr anchorCtr="0" anchor="ctr" bIns="88925" lIns="88925" spcFirstLastPara="1" rIns="88925" wrap="square" tIns="88925">
+            <a:bodyPr spcFirstLastPara="1" wrap="square" lIns="88925" tIns="88925" rIns="88925" bIns="88925" anchor="ctr" anchorCtr="0">
               <a:noAutofit/>
             </a:bodyPr>
             <a:lstStyle/>
             <a:p>
-              <a:pPr indent="0" lvl="0" marL="0" marR="0" rtl="0" algn="ctr">
+              <a:pPr marL="0" marR="0" lvl="0" indent="0" algn="ctr" rtl="0">
                 <a:lnSpc>
                   <a:spcPct val="112217"/>
                 </a:lnSpc>
@@ -15339,10 +15600,7 @@
                 <a:buFont typeface="Arial"/>
                 <a:buNone/>
               </a:pPr>
-              <a:r>
-                <a:t/>
-              </a:r>
-              <a:endParaRPr b="0" i="0" sz="6769" u="none" cap="none" strike="noStrike">
+              <a:endParaRPr sz="6769" b="0" i="0" u="none" strike="noStrike" cap="none">
                 <a:solidFill>
                   <a:schemeClr val="dk1"/>
                 </a:solidFill>
@@ -15395,9 +15653,13 @@
                 <a:ext cx="1329056" cy="814469"/>
               </a:xfrm>
               <a:custGeom>
-                <a:rect b="b" l="l" r="r" t="t"/>
+                <a:avLst/>
+                <a:gdLst/>
+                <a:ahLst/>
+                <a:cxnLst/>
+                <a:rect l="l" t="t" r="r" b="b"/>
                 <a:pathLst>
-                  <a:path extrusionOk="0" h="814469" w="1329056">
+                  <a:path w="1329056" h="814469" extrusionOk="0">
                     <a:moveTo>
                       <a:pt x="0" y="0"/>
                     </a:moveTo>
@@ -15417,23 +15679,23 @@
               <a:solidFill>
                 <a:srgbClr val="FFFFFF"/>
               </a:solidFill>
-              <a:ln cap="sq" cmpd="sng" w="19050">
+              <a:ln w="19050" cap="sq" cmpd="sng">
                 <a:solidFill>
                   <a:srgbClr val="000000"/>
                 </a:solidFill>
                 <a:prstDash val="solid"/>
                 <a:miter lim="8000"/>
-                <a:headEnd len="sm" w="sm" type="none"/>
-                <a:tailEnd len="sm" w="sm" type="none"/>
+                <a:headEnd type="none" w="sm" len="sm"/>
+                <a:tailEnd type="none" w="sm" len="sm"/>
               </a:ln>
             </p:spPr>
             <p:txBody>
-              <a:bodyPr anchorCtr="0" anchor="t" bIns="45700" lIns="91425" spcFirstLastPara="1" rIns="91425" wrap="square" tIns="45700">
+              <a:bodyPr spcFirstLastPara="1" wrap="square" lIns="91425" tIns="45700" rIns="91425" bIns="45700" anchor="t" anchorCtr="0">
                 <a:noAutofit/>
               </a:bodyPr>
               <a:lstStyle/>
               <a:p>
-                <a:pPr indent="0" lvl="0" marL="0" marR="0" rtl="0" algn="l">
+                <a:pPr marL="0" marR="0" lvl="0" indent="0" algn="l" rtl="0">
                   <a:lnSpc>
                     <a:spcPct val="100000"/>
                   </a:lnSpc>
@@ -15450,10 +15712,7 @@
                   <a:buFont typeface="Arial"/>
                   <a:buNone/>
                 </a:pPr>
-                <a:r>
-                  <a:t/>
-                </a:r>
-                <a:endParaRPr b="0" i="0" sz="6769" u="none" cap="none" strike="noStrike">
+                <a:endParaRPr sz="6769" b="0" i="0" u="none" strike="noStrike" cap="none">
                   <a:solidFill>
                     <a:schemeClr val="dk1"/>
                   </a:solidFill>
@@ -15485,12 +15744,12 @@
               </a:ln>
             </p:spPr>
             <p:txBody>
-              <a:bodyPr anchorCtr="0" anchor="ctr" bIns="96800" lIns="96800" spcFirstLastPara="1" rIns="96800" wrap="square" tIns="96800">
+              <a:bodyPr spcFirstLastPara="1" wrap="square" lIns="96800" tIns="96800" rIns="96800" bIns="96800" anchor="ctr" anchorCtr="0">
                 <a:noAutofit/>
               </a:bodyPr>
               <a:lstStyle/>
               <a:p>
-                <a:pPr indent="0" lvl="0" marL="0" marR="0" rtl="0" algn="ctr">
+                <a:pPr marL="0" marR="0" lvl="0" indent="0" algn="ctr" rtl="0">
                   <a:lnSpc>
                     <a:spcPct val="112217"/>
                   </a:lnSpc>
@@ -15507,10 +15766,7 @@
                   <a:buFont typeface="Arial"/>
                   <a:buNone/>
                 </a:pPr>
-                <a:r>
-                  <a:t/>
-                </a:r>
-                <a:endParaRPr b="0" i="0" sz="6769" u="none" cap="none" strike="noStrike">
+                <a:endParaRPr sz="6769" b="0" i="0" u="none" strike="noStrike" cap="none">
                   <a:solidFill>
                     <a:schemeClr val="dk1"/>
                   </a:solidFill>
@@ -15543,12 +15799,12 @@
             </a:ln>
           </p:spPr>
           <p:txBody>
-            <a:bodyPr anchorCtr="0" anchor="t" bIns="0" lIns="0" spcFirstLastPara="1" rIns="0" wrap="square" tIns="0">
+            <a:bodyPr spcFirstLastPara="1" wrap="square" lIns="0" tIns="0" rIns="0" bIns="0" anchor="t" anchorCtr="0">
               <a:spAutoFit/>
             </a:bodyPr>
             <a:lstStyle/>
             <a:p>
-              <a:pPr indent="0" lvl="0" marL="0" marR="0" rtl="0" algn="ctr">
+              <a:pPr marL="0" marR="0" lvl="0" indent="0" algn="ctr" rtl="0">
                 <a:lnSpc>
                   <a:spcPct val="101007"/>
                 </a:lnSpc>
@@ -15566,7 +15822,7 @@
                 <a:buNone/>
               </a:pPr>
               <a:r>
-                <a:rPr b="1" i="0" lang="en-US" sz="4762" u="none" cap="none" strike="noStrike">
+                <a:rPr lang="en-US" sz="4762" b="1" i="0" u="none" strike="noStrike" cap="none">
                   <a:solidFill>
                     <a:srgbClr val="000000"/>
                   </a:solidFill>
@@ -15577,7 +15833,7 @@
                 </a:rPr>
                 <a:t>REFERÊNCIAS</a:t>
               </a:r>
-              <a:endParaRPr b="0" i="0" sz="1400" u="none" cap="none" strike="noStrike">
+              <a:endParaRPr sz="1400" b="0" i="0" u="none" strike="noStrike" cap="none">
                 <a:solidFill>
                   <a:srgbClr val="000000"/>
                 </a:solidFill>
@@ -15602,9 +15858,13 @@
             <a:ext cx="8571184" cy="2454222"/>
           </a:xfrm>
           <a:custGeom>
-            <a:rect b="b" l="l" r="r" t="t"/>
+            <a:avLst/>
+            <a:gdLst/>
+            <a:ahLst/>
+            <a:cxnLst/>
+            <a:rect l="l" t="t" r="r" b="b"/>
             <a:pathLst>
-              <a:path extrusionOk="0" h="1287851" w="4497722">
+              <a:path w="4497722" h="1287851" extrusionOk="0">
                 <a:moveTo>
                   <a:pt x="0" y="0"/>
                 </a:moveTo>
@@ -15629,7 +15889,7 @@
               <a:alphaModFix/>
             </a:blip>
             <a:stretch>
-              <a:fillRect b="0" l="0" r="0" t="0"/>
+              <a:fillRect/>
             </a:stretch>
           </a:blipFill>
           <a:ln>
@@ -15637,12 +15897,12 @@
           </a:ln>
         </p:spPr>
         <p:txBody>
-          <a:bodyPr anchorCtr="0" anchor="t" bIns="45700" lIns="91425" spcFirstLastPara="1" rIns="91425" wrap="square" tIns="45700">
+          <a:bodyPr spcFirstLastPara="1" wrap="square" lIns="91425" tIns="45700" rIns="91425" bIns="45700" anchor="t" anchorCtr="0">
             <a:noAutofit/>
           </a:bodyPr>
           <a:lstStyle/>
           <a:p>
-            <a:pPr indent="0" lvl="0" marL="0" marR="0" rtl="0" algn="l">
+            <a:pPr marL="0" marR="0" lvl="0" indent="0" algn="l" rtl="0">
               <a:lnSpc>
                 <a:spcPct val="100000"/>
               </a:lnSpc>
@@ -15659,10 +15919,7 @@
               <a:buFont typeface="Arial"/>
               <a:buNone/>
             </a:pPr>
-            <a:r>
-              <a:t/>
-            </a:r>
-            <a:endParaRPr b="0" i="0" sz="6769" u="none" cap="none" strike="noStrike">
+            <a:endParaRPr sz="6769" b="0" i="0" u="none" strike="noStrike" cap="none">
               <a:solidFill>
                 <a:schemeClr val="dk1"/>
               </a:solidFill>
@@ -15686,9 +15943,13 @@
             <a:ext cx="22769151" cy="14311010"/>
           </a:xfrm>
           <a:custGeom>
-            <a:rect b="b" l="l" r="r" t="t"/>
+            <a:avLst/>
+            <a:gdLst/>
+            <a:ahLst/>
+            <a:cxnLst/>
+            <a:rect l="l" t="t" r="r" b="b"/>
             <a:pathLst>
-              <a:path extrusionOk="0" h="7509691" w="11948094">
+              <a:path w="11948094" h="7509691" extrusionOk="0">
                 <a:moveTo>
                   <a:pt x="0" y="0"/>
                 </a:moveTo>
@@ -15713,7 +15974,7 @@
               <a:alphaModFix/>
             </a:blip>
             <a:stretch>
-              <a:fillRect b="-48958" l="0" r="0" t="0"/>
+              <a:fillRect b="-48958"/>
             </a:stretch>
           </a:blipFill>
           <a:ln>
@@ -15721,12 +15982,12 @@
           </a:ln>
         </p:spPr>
         <p:txBody>
-          <a:bodyPr anchorCtr="0" anchor="t" bIns="45700" lIns="91425" spcFirstLastPara="1" rIns="91425" wrap="square" tIns="45700">
+          <a:bodyPr spcFirstLastPara="1" wrap="square" lIns="91425" tIns="45700" rIns="91425" bIns="45700" anchor="t" anchorCtr="0">
             <a:noAutofit/>
           </a:bodyPr>
           <a:lstStyle/>
           <a:p>
-            <a:pPr indent="0" lvl="0" marL="0" marR="0" rtl="0" algn="l">
+            <a:pPr marL="0" marR="0" lvl="0" indent="0" algn="l" rtl="0">
               <a:lnSpc>
                 <a:spcPct val="100000"/>
               </a:lnSpc>
@@ -15743,10 +16004,7 @@
               <a:buFont typeface="Arial"/>
               <a:buNone/>
             </a:pPr>
-            <a:r>
-              <a:t/>
-            </a:r>
-            <a:endParaRPr b="0" i="0" sz="6769" u="none" cap="none" strike="noStrike">
+            <a:endParaRPr sz="6769" b="0" i="0" u="none" strike="noStrike" cap="none">
               <a:solidFill>
                 <a:schemeClr val="dk1"/>
               </a:solidFill>
@@ -15770,9 +16028,13 @@
             <a:ext cx="7228385" cy="2335060"/>
           </a:xfrm>
           <a:custGeom>
-            <a:rect b="b" l="l" r="r" t="t"/>
+            <a:avLst/>
+            <a:gdLst/>
+            <a:ahLst/>
+            <a:cxnLst/>
+            <a:rect l="l" t="t" r="r" b="b"/>
             <a:pathLst>
-              <a:path extrusionOk="0" h="1225321" w="3793089">
+              <a:path w="3793089" h="1225321" extrusionOk="0">
                 <a:moveTo>
                   <a:pt x="0" y="0"/>
                 </a:moveTo>
@@ -15797,7 +16059,7 @@
               <a:alphaModFix/>
             </a:blip>
             <a:stretch>
-              <a:fillRect b="0" l="0" r="0" t="0"/>
+              <a:fillRect/>
             </a:stretch>
           </a:blipFill>
           <a:ln>
@@ -15805,12 +16067,12 @@
           </a:ln>
         </p:spPr>
         <p:txBody>
-          <a:bodyPr anchorCtr="0" anchor="t" bIns="45700" lIns="91425" spcFirstLastPara="1" rIns="91425" wrap="square" tIns="45700">
+          <a:bodyPr spcFirstLastPara="1" wrap="square" lIns="91425" tIns="45700" rIns="91425" bIns="45700" anchor="t" anchorCtr="0">
             <a:noAutofit/>
           </a:bodyPr>
           <a:lstStyle/>
           <a:p>
-            <a:pPr indent="0" lvl="0" marL="0" marR="0" rtl="0" algn="l">
+            <a:pPr marL="0" marR="0" lvl="0" indent="0" algn="l" rtl="0">
               <a:lnSpc>
                 <a:spcPct val="100000"/>
               </a:lnSpc>
@@ -15827,10 +16089,7 @@
               <a:buFont typeface="Arial"/>
               <a:buNone/>
             </a:pPr>
-            <a:r>
-              <a:t/>
-            </a:r>
-            <a:endParaRPr b="0" i="0" sz="6769" u="none" cap="none" strike="noStrike">
+            <a:endParaRPr sz="6769" b="0" i="0" u="none" strike="noStrike" cap="none">
               <a:solidFill>
                 <a:schemeClr val="dk1"/>
               </a:solidFill>
@@ -15862,12 +16121,12 @@
           </a:ln>
         </p:spPr>
         <p:txBody>
-          <a:bodyPr anchorCtr="0" anchor="t" bIns="0" lIns="0" spcFirstLastPara="1" rIns="0" wrap="square" tIns="0">
+          <a:bodyPr spcFirstLastPara="1" wrap="square" lIns="0" tIns="0" rIns="0" bIns="0" anchor="t" anchorCtr="0">
             <a:spAutoFit/>
           </a:bodyPr>
           <a:lstStyle/>
           <a:p>
-            <a:pPr indent="0" lvl="0" marL="0" marR="0" rtl="0" algn="ctr">
+            <a:pPr marL="0" marR="0" lvl="0" indent="0" algn="ctr" rtl="0">
               <a:lnSpc>
                 <a:spcPct val="100965"/>
               </a:lnSpc>
@@ -15885,7 +16144,7 @@
               <a:buNone/>
             </a:pPr>
             <a:r>
-              <a:rPr b="1" i="0" lang="en-US" sz="5077" u="none" cap="none" strike="noStrike">
+              <a:rPr lang="en-US" sz="5077" b="1" i="0" u="none" strike="noStrike" cap="none">
                 <a:solidFill>
                   <a:srgbClr val="000000"/>
                 </a:solidFill>
@@ -15896,7 +16155,7 @@
               </a:rPr>
               <a:t>INTRODUÇÃO</a:t>
             </a:r>
-            <a:endParaRPr b="0" i="0" sz="1400" u="none" cap="none" strike="noStrike">
+            <a:endParaRPr sz="1400" b="0" i="0" u="none" strike="noStrike" cap="none">
               <a:solidFill>
                 <a:srgbClr val="000000"/>
               </a:solidFill>
@@ -15934,9 +16193,13 @@
               <a:ext cx="958980" cy="1301139"/>
             </a:xfrm>
             <a:custGeom>
-              <a:rect b="b" l="l" r="r" t="t"/>
+              <a:avLst/>
+              <a:gdLst/>
+              <a:ahLst/>
+              <a:cxnLst/>
+              <a:rect l="l" t="t" r="r" b="b"/>
               <a:pathLst>
-                <a:path extrusionOk="0" h="1301139" w="958980">
+                <a:path w="958980" h="1301139" extrusionOk="0">
                   <a:moveTo>
                     <a:pt x="0" y="0"/>
                   </a:moveTo>
@@ -15956,23 +16219,23 @@
             <a:solidFill>
               <a:srgbClr val="FFFFFF"/>
             </a:solidFill>
-            <a:ln cap="sq" cmpd="sng" w="19050">
+            <a:ln w="19050" cap="sq" cmpd="sng">
               <a:solidFill>
                 <a:srgbClr val="000000"/>
               </a:solidFill>
               <a:prstDash val="solid"/>
               <a:miter lim="8000"/>
-              <a:headEnd len="sm" w="sm" type="none"/>
-              <a:tailEnd len="sm" w="sm" type="none"/>
+              <a:headEnd type="none" w="sm" len="sm"/>
+              <a:tailEnd type="none" w="sm" len="sm"/>
             </a:ln>
           </p:spPr>
           <p:txBody>
-            <a:bodyPr anchorCtr="0" anchor="t" bIns="45700" lIns="91425" spcFirstLastPara="1" rIns="91425" wrap="square" tIns="45700">
+            <a:bodyPr spcFirstLastPara="1" wrap="square" lIns="91425" tIns="45700" rIns="91425" bIns="45700" anchor="t" anchorCtr="0">
               <a:noAutofit/>
             </a:bodyPr>
             <a:lstStyle/>
             <a:p>
-              <a:pPr indent="0" lvl="0" marL="0" marR="0" rtl="0" algn="l">
+              <a:pPr marL="0" marR="0" lvl="0" indent="0" algn="l" rtl="0">
                 <a:lnSpc>
                   <a:spcPct val="100000"/>
                 </a:lnSpc>
@@ -15989,10 +16252,7 @@
                 <a:buFont typeface="Arial"/>
                 <a:buNone/>
               </a:pPr>
-              <a:r>
-                <a:t/>
-              </a:r>
-              <a:endParaRPr b="0" i="0" sz="6769" u="none" cap="none" strike="noStrike">
+              <a:endParaRPr sz="6769" b="0" i="0" u="none" strike="noStrike" cap="none">
                 <a:solidFill>
                   <a:schemeClr val="dk1"/>
                 </a:solidFill>
@@ -16024,12 +16284,12 @@
             </a:ln>
           </p:spPr>
           <p:txBody>
-            <a:bodyPr anchorCtr="0" anchor="ctr" bIns="89000" lIns="89000" spcFirstLastPara="1" rIns="89000" wrap="square" tIns="89000">
+            <a:bodyPr spcFirstLastPara="1" wrap="square" lIns="89000" tIns="89000" rIns="89000" bIns="89000" anchor="ctr" anchorCtr="0">
               <a:noAutofit/>
             </a:bodyPr>
             <a:lstStyle/>
             <a:p>
-              <a:pPr indent="0" lvl="0" marL="0" marR="0" rtl="0" algn="ctr">
+              <a:pPr marL="0" marR="0" lvl="0" indent="0" algn="ctr" rtl="0">
                 <a:lnSpc>
                   <a:spcPct val="112217"/>
                 </a:lnSpc>
@@ -16046,10 +16306,7 @@
                 <a:buFont typeface="Arial"/>
                 <a:buNone/>
               </a:pPr>
-              <a:r>
-                <a:t/>
-              </a:r>
-              <a:endParaRPr b="0" i="0" sz="6769" u="none" cap="none" strike="noStrike">
+              <a:endParaRPr sz="6769" b="0" i="0" u="none" strike="noStrike" cap="none">
                 <a:solidFill>
                   <a:schemeClr val="dk1"/>
                 </a:solidFill>
@@ -16088,9 +16345,13 @@
               <a:ext cx="936167" cy="1301139"/>
             </a:xfrm>
             <a:custGeom>
-              <a:rect b="b" l="l" r="r" t="t"/>
+              <a:avLst/>
+              <a:gdLst/>
+              <a:ahLst/>
+              <a:cxnLst/>
+              <a:rect l="l" t="t" r="r" b="b"/>
               <a:pathLst>
-                <a:path extrusionOk="0" h="1301139" w="936167">
+                <a:path w="936167" h="1301139" extrusionOk="0">
                   <a:moveTo>
                     <a:pt x="0" y="0"/>
                   </a:moveTo>
@@ -16110,23 +16371,23 @@
             <a:solidFill>
               <a:srgbClr val="FFFFFF"/>
             </a:solidFill>
-            <a:ln cap="sq" cmpd="sng" w="19050">
+            <a:ln w="19050" cap="sq" cmpd="sng">
               <a:solidFill>
                 <a:srgbClr val="000000"/>
               </a:solidFill>
               <a:prstDash val="solid"/>
               <a:miter lim="8000"/>
-              <a:headEnd len="sm" w="sm" type="none"/>
-              <a:tailEnd len="sm" w="sm" type="none"/>
+              <a:headEnd type="none" w="sm" len="sm"/>
+              <a:tailEnd type="none" w="sm" len="sm"/>
             </a:ln>
           </p:spPr>
           <p:txBody>
-            <a:bodyPr anchorCtr="0" anchor="t" bIns="45700" lIns="91425" spcFirstLastPara="1" rIns="91425" wrap="square" tIns="45700">
+            <a:bodyPr spcFirstLastPara="1" wrap="square" lIns="91425" tIns="45700" rIns="91425" bIns="45700" anchor="t" anchorCtr="0">
               <a:noAutofit/>
             </a:bodyPr>
             <a:lstStyle/>
             <a:p>
-              <a:pPr indent="0" lvl="0" marL="0" marR="0" rtl="0" algn="l">
+              <a:pPr marL="0" marR="0" lvl="0" indent="0" algn="l" rtl="0">
                 <a:lnSpc>
                   <a:spcPct val="100000"/>
                 </a:lnSpc>
@@ -16143,10 +16404,7 @@
                 <a:buFont typeface="Arial"/>
                 <a:buNone/>
               </a:pPr>
-              <a:r>
-                <a:t/>
-              </a:r>
-              <a:endParaRPr b="0" i="0" sz="6769" u="none" cap="none" strike="noStrike">
+              <a:endParaRPr sz="6769" b="0" i="0" u="none" strike="noStrike" cap="none">
                 <a:solidFill>
                   <a:schemeClr val="dk1"/>
                 </a:solidFill>
@@ -16178,12 +16436,12 @@
             </a:ln>
           </p:spPr>
           <p:txBody>
-            <a:bodyPr anchorCtr="0" anchor="ctr" bIns="89000" lIns="89000" spcFirstLastPara="1" rIns="89000" wrap="square" tIns="89000">
+            <a:bodyPr spcFirstLastPara="1" wrap="square" lIns="89000" tIns="89000" rIns="89000" bIns="89000" anchor="ctr" anchorCtr="0">
               <a:noAutofit/>
             </a:bodyPr>
             <a:lstStyle/>
             <a:p>
-              <a:pPr indent="0" lvl="0" marL="0" marR="0" rtl="0" algn="ctr">
+              <a:pPr marL="0" marR="0" lvl="0" indent="0" algn="ctr" rtl="0">
                 <a:lnSpc>
                   <a:spcPct val="112217"/>
                 </a:lnSpc>
@@ -16200,10 +16458,7 @@
                 <a:buFont typeface="Arial"/>
                 <a:buNone/>
               </a:pPr>
-              <a:r>
-                <a:t/>
-              </a:r>
-              <a:endParaRPr b="0" i="0" sz="6769" u="none" cap="none" strike="noStrike">
+              <a:endParaRPr sz="6769" b="0" i="0" u="none" strike="noStrike" cap="none">
                 <a:solidFill>
                   <a:schemeClr val="dk1"/>
                 </a:solidFill>
@@ -16228,9 +16483,13 @@
             <a:ext cx="5609093" cy="5642282"/>
           </a:xfrm>
           <a:custGeom>
-            <a:rect b="b" l="l" r="r" t="t"/>
+            <a:avLst/>
+            <a:gdLst/>
+            <a:ahLst/>
+            <a:cxnLst/>
+            <a:rect l="l" t="t" r="r" b="b"/>
             <a:pathLst>
-              <a:path extrusionOk="0" h="2960783" w="2943367">
+              <a:path w="2943367" h="2960783" extrusionOk="0">
                 <a:moveTo>
                   <a:pt x="0" y="0"/>
                 </a:moveTo>
@@ -16255,7 +16514,7 @@
               <a:alphaModFix/>
             </a:blip>
             <a:stretch>
-              <a:fillRect b="0" l="0" r="0" t="0"/>
+              <a:fillRect/>
             </a:stretch>
           </a:blipFill>
           <a:ln>
@@ -16263,12 +16522,12 @@
           </a:ln>
         </p:spPr>
         <p:txBody>
-          <a:bodyPr anchorCtr="0" anchor="t" bIns="45700" lIns="91425" spcFirstLastPara="1" rIns="91425" wrap="square" tIns="45700">
+          <a:bodyPr spcFirstLastPara="1" wrap="square" lIns="91425" tIns="45700" rIns="91425" bIns="45700" anchor="t" anchorCtr="0">
             <a:noAutofit/>
           </a:bodyPr>
           <a:lstStyle/>
           <a:p>
-            <a:pPr indent="0" lvl="0" marL="0" marR="0" rtl="0" algn="l">
+            <a:pPr marL="0" marR="0" lvl="0" indent="0" algn="l" rtl="0">
               <a:lnSpc>
                 <a:spcPct val="100000"/>
               </a:lnSpc>
@@ -16285,10 +16544,7 @@
               <a:buFont typeface="Arial"/>
               <a:buNone/>
             </a:pPr>
-            <a:r>
-              <a:t/>
-            </a:r>
-            <a:endParaRPr b="0" i="0" sz="6769" u="none" cap="none" strike="noStrike">
+            <a:endParaRPr sz="6769" b="0" i="0" u="none" strike="noStrike" cap="none">
               <a:solidFill>
                 <a:schemeClr val="dk1"/>
               </a:solidFill>
@@ -16320,12 +16576,12 @@
           </a:ln>
         </p:spPr>
         <p:txBody>
-          <a:bodyPr anchorCtr="0" anchor="t" bIns="0" lIns="0" spcFirstLastPara="1" rIns="0" wrap="square" tIns="0">
+          <a:bodyPr spcFirstLastPara="1" wrap="square" lIns="0" tIns="0" rIns="0" bIns="0" anchor="t" anchorCtr="0">
             <a:spAutoFit/>
           </a:bodyPr>
           <a:lstStyle/>
           <a:p>
-            <a:pPr indent="0" lvl="0" marL="0" marR="0" rtl="0" algn="ctr">
+            <a:pPr marL="0" marR="0" lvl="0" indent="0" algn="ctr" rtl="0">
               <a:lnSpc>
                 <a:spcPct val="101005"/>
               </a:lnSpc>
@@ -16343,7 +16599,7 @@
               <a:buNone/>
             </a:pPr>
             <a:r>
-              <a:rPr b="1" i="0" lang="en-US" sz="11434" u="none" cap="none" strike="noStrike">
+              <a:rPr lang="en-US" sz="11434" b="1" i="0" u="none" strike="noStrike" cap="none">
                 <a:solidFill>
                   <a:srgbClr val="000000"/>
                 </a:solidFill>
@@ -16354,7 +16610,7 @@
               </a:rPr>
               <a:t>Arkanis</a:t>
             </a:r>
-            <a:endParaRPr b="0" i="0" sz="1400" u="none" cap="none" strike="noStrike">
+            <a:endParaRPr sz="1400" b="0" i="0" u="none" strike="noStrike" cap="none">
               <a:solidFill>
                 <a:srgbClr val="000000"/>
               </a:solidFill>
@@ -16386,12 +16642,12 @@
           </a:ln>
         </p:spPr>
         <p:txBody>
-          <a:bodyPr anchorCtr="0" anchor="t" bIns="0" lIns="0" spcFirstLastPara="1" rIns="0" wrap="square" tIns="0">
+          <a:bodyPr spcFirstLastPara="1" wrap="square" lIns="0" tIns="0" rIns="0" bIns="0" anchor="t" anchorCtr="0">
             <a:spAutoFit/>
           </a:bodyPr>
           <a:lstStyle/>
           <a:p>
-            <a:pPr indent="0" lvl="0" marL="0" marR="0" rtl="0" algn="ctr">
+            <a:pPr marL="0" marR="0" lvl="0" indent="0" algn="ctr" rtl="0">
               <a:lnSpc>
                 <a:spcPct val="140025"/>
               </a:lnSpc>
@@ -16409,7 +16665,7 @@
               <a:buNone/>
             </a:pPr>
             <a:r>
-              <a:rPr b="1" i="0" lang="en-US" sz="4762" u="none" cap="none" strike="noStrike">
+              <a:rPr lang="en-US" sz="4762" b="1" i="0" u="none" strike="noStrike" cap="none" dirty="0">
                 <a:solidFill>
                   <a:srgbClr val="000000"/>
                 </a:solidFill>
@@ -16420,7 +16676,7 @@
               </a:rPr>
               <a:t>Aleff Souza, João Colombo, Luciano Reis, Matheus Zimmer</a:t>
             </a:r>
-            <a:endParaRPr b="0" i="0" sz="1400" u="none" cap="none" strike="noStrike">
+            <a:endParaRPr sz="1400" b="0" i="0" u="none" strike="noStrike" cap="none" dirty="0">
               <a:solidFill>
                 <a:srgbClr val="000000"/>
               </a:solidFill>
@@ -16431,7 +16687,7 @@
             </a:endParaRPr>
           </a:p>
           <a:p>
-            <a:pPr indent="0" lvl="0" marL="0" marR="0" rtl="0" algn="ctr">
+            <a:pPr marL="0" marR="0" lvl="0" indent="0" algn="ctr" rtl="0">
               <a:lnSpc>
                 <a:spcPct val="140025"/>
               </a:lnSpc>
@@ -16444,7 +16700,7 @@
               <a:buNone/>
             </a:pPr>
             <a:r>
-              <a:rPr b="1" i="0" lang="en-US" sz="4762" u="none" cap="none" strike="noStrike">
+              <a:rPr lang="en-US" sz="4762" b="1" i="0" u="none" strike="noStrike" cap="none" dirty="0" err="1">
                 <a:solidFill>
                   <a:srgbClr val="000000"/>
                 </a:solidFill>
@@ -16453,10 +16709,10 @@
                 <a:cs typeface="Open Sans"/>
                 <a:sym typeface="Open Sans"/>
               </a:rPr>
-              <a:t>Orientadores: </a:t>
+              <a:t>Orientadores</a:t>
             </a:r>
             <a:r>
-              <a:rPr b="0" i="0" lang="en-US" sz="4762" u="none" cap="none" strike="noStrike">
+              <a:rPr lang="en-US" sz="4762" b="1" i="0" u="none" strike="noStrike" cap="none" dirty="0">
                 <a:solidFill>
                   <a:srgbClr val="000000"/>
                 </a:solidFill>
@@ -16465,9 +16721,21 @@
                 <a:cs typeface="Open Sans"/>
                 <a:sym typeface="Open Sans"/>
               </a:rPr>
-              <a:t>João Trencher, Rodnil Silva, Lucy Mari, Edson Barbeiro, Victor Roseti</a:t>
+              <a:t>: </a:t>
             </a:r>
-            <a:endParaRPr b="0" i="0" sz="1400" u="none" cap="none" strike="noStrike">
+            <a:r>
+              <a:rPr lang="en-US" sz="4762" b="0" i="0" u="none" strike="noStrike" cap="none" dirty="0">
+                <a:solidFill>
+                  <a:srgbClr val="000000"/>
+                </a:solidFill>
+                <a:latin typeface="Open Sans"/>
+                <a:ea typeface="Open Sans"/>
+                <a:cs typeface="Open Sans"/>
+                <a:sym typeface="Open Sans"/>
+              </a:rPr>
+              <a:t>João Trencher, Rodnil Silva, Lucy Mari, Edson Barbeiro, Victor Rosetti</a:t>
+            </a:r>
+            <a:endParaRPr sz="1400" b="0" i="0" u="none" strike="noStrike" cap="none" dirty="0">
               <a:solidFill>
                 <a:srgbClr val="000000"/>
               </a:solidFill>
@@ -16499,12 +16767,12 @@
           </a:ln>
         </p:spPr>
         <p:txBody>
-          <a:bodyPr anchorCtr="0" anchor="t" bIns="0" lIns="0" spcFirstLastPara="1" rIns="0" wrap="square" tIns="0">
+          <a:bodyPr spcFirstLastPara="1" wrap="square" lIns="0" tIns="0" rIns="0" bIns="0" anchor="t" anchorCtr="0">
             <a:spAutoFit/>
           </a:bodyPr>
           <a:lstStyle/>
           <a:p>
-            <a:pPr indent="0" lvl="0" marL="0" marR="0" rtl="0" algn="ctr">
+            <a:pPr marL="0" marR="0" lvl="0" indent="0" algn="ctr" rtl="0">
               <a:lnSpc>
                 <a:spcPct val="101007"/>
               </a:lnSpc>
@@ -16522,7 +16790,7 @@
               <a:buNone/>
             </a:pPr>
             <a:r>
-              <a:rPr b="1" i="0" lang="en-US" sz="4762" u="none" cap="none" strike="noStrike">
+              <a:rPr lang="en-US" sz="4762" b="1" i="0" u="none" strike="noStrike" cap="none">
                 <a:solidFill>
                   <a:srgbClr val="000000"/>
                 </a:solidFill>
@@ -16533,7 +16801,7 @@
               </a:rPr>
               <a:t>TECNOLOGIAS UTILIZADAS</a:t>
             </a:r>
-            <a:endParaRPr b="0" i="0" sz="1400" u="none" cap="none" strike="noStrike">
+            <a:endParaRPr sz="1400" b="0" i="0" u="none" strike="noStrike" cap="none">
               <a:solidFill>
                 <a:srgbClr val="000000"/>
               </a:solidFill>
@@ -16565,12 +16833,12 @@
           </a:ln>
         </p:spPr>
         <p:txBody>
-          <a:bodyPr anchorCtr="0" anchor="t" bIns="0" lIns="0" spcFirstLastPara="1" rIns="0" wrap="square" tIns="0">
+          <a:bodyPr spcFirstLastPara="1" wrap="square" lIns="0" tIns="0" rIns="0" bIns="0" anchor="t" anchorCtr="0">
             <a:spAutoFit/>
           </a:bodyPr>
           <a:lstStyle/>
           <a:p>
-            <a:pPr indent="0" lvl="0" marL="0" marR="0" rtl="0" algn="ctr">
+            <a:pPr marL="0" marR="0" lvl="0" indent="0" algn="ctr" rtl="0">
               <a:lnSpc>
                 <a:spcPct val="101007"/>
               </a:lnSpc>
@@ -16588,7 +16856,7 @@
               <a:buNone/>
             </a:pPr>
             <a:r>
-              <a:rPr b="1" i="0" lang="en-US" sz="4762" u="none" cap="none" strike="noStrike">
+              <a:rPr lang="en-US" sz="4762" b="1" i="0" u="none" strike="noStrike" cap="none">
                 <a:solidFill>
                   <a:srgbClr val="000000"/>
                 </a:solidFill>
@@ -16599,7 +16867,7 @@
               </a:rPr>
               <a:t>RESULTADOS</a:t>
             </a:r>
-            <a:endParaRPr b="0" i="0" sz="1400" u="none" cap="none" strike="noStrike">
+            <a:endParaRPr sz="1400" b="0" i="0" u="none" strike="noStrike" cap="none">
               <a:solidFill>
                 <a:srgbClr val="000000"/>
               </a:solidFill>
@@ -16631,12 +16899,12 @@
           </a:ln>
         </p:spPr>
         <p:txBody>
-          <a:bodyPr anchorCtr="0" anchor="t" bIns="0" lIns="0" spcFirstLastPara="1" rIns="0" wrap="square" tIns="0">
+          <a:bodyPr spcFirstLastPara="1" wrap="square" lIns="0" tIns="0" rIns="0" bIns="0" anchor="t" anchorCtr="0">
             <a:spAutoFit/>
           </a:bodyPr>
           <a:lstStyle/>
           <a:p>
-            <a:pPr indent="0" lvl="0" marL="0" marR="0" rtl="0" algn="ctr">
+            <a:pPr marL="0" marR="0" lvl="0" indent="0" algn="ctr" rtl="0">
               <a:lnSpc>
                 <a:spcPct val="101007"/>
               </a:lnSpc>
@@ -16654,7 +16922,7 @@
               <a:buNone/>
             </a:pPr>
             <a:r>
-              <a:rPr b="1" i="0" lang="en-US" sz="4762" u="none" cap="none" strike="noStrike">
+              <a:rPr lang="en-US" sz="4762" b="1" i="0" u="none" strike="noStrike" cap="none">
                 <a:solidFill>
                   <a:srgbClr val="000000"/>
                 </a:solidFill>
@@ -16665,7 +16933,7 @@
               </a:rPr>
               <a:t>O PROBLEMA</a:t>
             </a:r>
-            <a:endParaRPr b="0" i="0" sz="1400" u="none" cap="none" strike="noStrike">
+            <a:endParaRPr sz="1400" b="0" i="0" u="none" strike="noStrike" cap="none">
               <a:solidFill>
                 <a:srgbClr val="000000"/>
               </a:solidFill>
@@ -16697,12 +16965,12 @@
           </a:ln>
         </p:spPr>
         <p:txBody>
-          <a:bodyPr anchorCtr="0" anchor="t" bIns="0" lIns="0" spcFirstLastPara="1" rIns="0" wrap="square" tIns="0">
+          <a:bodyPr spcFirstLastPara="1" wrap="square" lIns="0" tIns="0" rIns="0" bIns="0" anchor="t" anchorCtr="0">
             <a:spAutoFit/>
           </a:bodyPr>
           <a:lstStyle/>
           <a:p>
-            <a:pPr indent="0" lvl="0" marL="0" marR="0" rtl="0" algn="ctr">
+            <a:pPr marL="0" marR="0" lvl="0" indent="0" algn="ctr" rtl="0">
               <a:lnSpc>
                 <a:spcPct val="101007"/>
               </a:lnSpc>
@@ -16720,7 +16988,7 @@
               <a:buNone/>
             </a:pPr>
             <a:r>
-              <a:rPr b="1" i="0" lang="en-US" sz="4762" u="none" cap="none" strike="noStrike">
+              <a:rPr lang="en-US" sz="4762" b="1" i="0" u="none" strike="noStrike" cap="none">
                 <a:solidFill>
                   <a:srgbClr val="000000"/>
                 </a:solidFill>
@@ -16731,7 +16999,7 @@
               </a:rPr>
               <a:t>A PROPOSTA</a:t>
             </a:r>
-            <a:endParaRPr b="0" i="0" sz="1400" u="none" cap="none" strike="noStrike">
+            <a:endParaRPr sz="1400" b="0" i="0" u="none" strike="noStrike" cap="none">
               <a:solidFill>
                 <a:srgbClr val="000000"/>
               </a:solidFill>
@@ -16763,12 +17031,12 @@
           </a:ln>
         </p:spPr>
         <p:txBody>
-          <a:bodyPr anchorCtr="0" anchor="t" bIns="0" lIns="0" spcFirstLastPara="1" rIns="0" wrap="square" tIns="0">
+          <a:bodyPr spcFirstLastPara="1" wrap="square" lIns="0" tIns="0" rIns="0" bIns="0" anchor="t" anchorCtr="0">
             <a:spAutoFit/>
           </a:bodyPr>
           <a:lstStyle/>
           <a:p>
-            <a:pPr indent="-457200" lvl="0" marL="457200" marR="0" rtl="0" algn="l">
+            <a:pPr marL="457200" marR="0" lvl="0" indent="-457200" algn="l" rtl="0">
               <a:lnSpc>
                 <a:spcPct val="100000"/>
               </a:lnSpc>
@@ -16786,7 +17054,7 @@
               <a:buChar char="•"/>
             </a:pPr>
             <a:r>
-              <a:rPr b="1" i="0" lang="en-US" sz="3600" u="none" cap="none" strike="noStrike">
+              <a:rPr lang="en-US" sz="3600" b="1" i="0" u="none" strike="noStrike" cap="none">
                 <a:solidFill>
                   <a:srgbClr val="000000"/>
                 </a:solidFill>
@@ -16798,7 +17066,7 @@
               <a:t>EN 15757:2010. </a:t>
             </a:r>
             <a:r>
-              <a:rPr b="0" i="0" lang="en-US" sz="3600" u="none" cap="none" strike="noStrike">
+              <a:rPr lang="en-US" sz="3600" b="0" i="0" u="none" strike="noStrike" cap="none">
                 <a:solidFill>
                   <a:srgbClr val="000000"/>
                 </a:solidFill>
@@ -16812,7 +17080,7 @@
             <a:endParaRPr/>
           </a:p>
           <a:p>
-            <a:pPr indent="-457200" lvl="0" marL="457200" marR="0" rtl="0" algn="l">
+            <a:pPr marL="457200" marR="0" lvl="0" indent="-457200" algn="l" rtl="0">
               <a:lnSpc>
                 <a:spcPct val="100000"/>
               </a:lnSpc>
@@ -16830,7 +17098,7 @@
               <a:buChar char="•"/>
             </a:pPr>
             <a:r>
-              <a:rPr b="1" i="0" lang="en-US" sz="3600" u="none" cap="none" strike="noStrike">
+              <a:rPr lang="en-US" sz="3600" b="1" i="0" u="none" strike="noStrike" cap="none">
                 <a:solidFill>
                   <a:srgbClr val="000000"/>
                 </a:solidFill>
@@ -16842,7 +17110,7 @@
               <a:t>HERITAGE HEALTH INDEX. </a:t>
             </a:r>
             <a:r>
-              <a:rPr b="0" i="0" lang="en-US" sz="3600" u="none" cap="none" strike="noStrike">
+              <a:rPr lang="en-US" sz="3600" b="0" i="0" u="none" strike="noStrike" cap="none">
                 <a:solidFill>
                   <a:srgbClr val="000000"/>
                 </a:solidFill>
@@ -16856,7 +17124,7 @@
             <a:endParaRPr/>
           </a:p>
           <a:p>
-            <a:pPr indent="-457200" lvl="0" marL="457200" marR="0" rtl="0" algn="l">
+            <a:pPr marL="457200" marR="0" lvl="0" indent="-457200" algn="l" rtl="0">
               <a:lnSpc>
                 <a:spcPct val="100000"/>
               </a:lnSpc>
@@ -16874,7 +17142,7 @@
               <a:buChar char="•"/>
             </a:pPr>
             <a:r>
-              <a:rPr b="1" i="0" lang="en-US" sz="3600" u="none" cap="none" strike="noStrike">
+              <a:rPr lang="en-US" sz="3600" b="1" i="0" u="none" strike="noStrike" cap="none">
                 <a:solidFill>
                   <a:srgbClr val="000000"/>
                 </a:solidFill>
@@ -16886,7 +17154,7 @@
               <a:t>IBRAM. </a:t>
             </a:r>
             <a:r>
-              <a:rPr b="0" i="0" lang="en-US" sz="3600" u="none" cap="none" strike="noStrike">
+              <a:rPr lang="en-US" sz="3600" b="0" i="0" u="none" strike="noStrike" cap="none">
                 <a:solidFill>
                   <a:srgbClr val="000000"/>
                 </a:solidFill>
@@ -16900,7 +17168,7 @@
             <a:endParaRPr/>
           </a:p>
           <a:p>
-            <a:pPr indent="-457200" lvl="0" marL="457200" marR="0" rtl="0" algn="l">
+            <a:pPr marL="457200" marR="0" lvl="0" indent="-457200" algn="l" rtl="0">
               <a:lnSpc>
                 <a:spcPct val="100000"/>
               </a:lnSpc>
@@ -16918,7 +17186,7 @@
               <a:buChar char="•"/>
             </a:pPr>
             <a:r>
-              <a:rPr b="1" i="0" lang="en-US" sz="3600" u="none" cap="none" strike="noStrike">
+              <a:rPr lang="en-US" sz="3600" b="1" i="0" u="none" strike="noStrike" cap="none">
                 <a:solidFill>
                   <a:srgbClr val="000000"/>
                 </a:solidFill>
@@ -16930,7 +17198,7 @@
               <a:t>ITHAKA S+R.</a:t>
             </a:r>
             <a:r>
-              <a:rPr b="0" i="0" lang="en-US" sz="3600" u="none" cap="none" strike="noStrike">
+              <a:rPr lang="en-US" sz="3600" b="0" i="0" u="none" strike="noStrike" cap="none">
                 <a:solidFill>
                   <a:srgbClr val="000000"/>
                 </a:solidFill>
@@ -16965,12 +17233,12 @@
           </a:ln>
         </p:spPr>
         <p:txBody>
-          <a:bodyPr anchorCtr="0" anchor="t" bIns="0" lIns="0" spcFirstLastPara="1" rIns="0" wrap="square" tIns="0">
+          <a:bodyPr spcFirstLastPara="1" wrap="square" lIns="0" tIns="0" rIns="0" bIns="0" anchor="t" anchorCtr="0">
             <a:spAutoFit/>
           </a:bodyPr>
           <a:lstStyle/>
           <a:p>
-            <a:pPr indent="-457200" lvl="0" marL="457200" marR="0" rtl="0" algn="l">
+            <a:pPr marL="457200" marR="0" lvl="0" indent="-457200" algn="l" rtl="0">
               <a:lnSpc>
                 <a:spcPct val="100000"/>
               </a:lnSpc>
@@ -16988,7 +17256,7 @@
               <a:buChar char="•"/>
             </a:pPr>
             <a:r>
-              <a:rPr b="1" i="0" lang="en-US" sz="3600" u="none" cap="none" strike="noStrike">
+              <a:rPr lang="en-US" sz="3600" b="1" i="0" u="none" strike="noStrike" cap="none">
                 <a:solidFill>
                   <a:srgbClr val="000000"/>
                 </a:solidFill>
@@ -17000,7 +17268,7 @@
               <a:t>Hardware:</a:t>
             </a:r>
             <a:r>
-              <a:rPr b="0" i="0" lang="en-US" sz="3600" u="none" cap="none" strike="noStrike">
+              <a:rPr lang="en-US" sz="3600" b="0" i="0" u="none" strike="noStrike" cap="none">
                 <a:solidFill>
                   <a:srgbClr val="000000"/>
                 </a:solidFill>
@@ -17014,7 +17282,7 @@
             <a:endParaRPr/>
           </a:p>
           <a:p>
-            <a:pPr indent="-457200" lvl="0" marL="457200" marR="0" rtl="0" algn="l">
+            <a:pPr marL="457200" marR="0" lvl="0" indent="-457200" algn="l" rtl="0">
               <a:lnSpc>
                 <a:spcPct val="100000"/>
               </a:lnSpc>
@@ -17032,7 +17300,7 @@
               <a:buChar char="•"/>
             </a:pPr>
             <a:r>
-              <a:rPr b="1" i="0" lang="en-US" sz="3600" u="none" cap="none" strike="noStrike">
+              <a:rPr lang="en-US" sz="3600" b="1" i="0" u="none" strike="noStrike" cap="none">
                 <a:solidFill>
                   <a:srgbClr val="000000"/>
                 </a:solidFill>
@@ -17044,7 +17312,7 @@
               <a:t>Conectividade: </a:t>
             </a:r>
             <a:r>
-              <a:rPr b="0" i="0" lang="en-US" sz="3600" u="none" cap="none" strike="noStrike">
+              <a:rPr lang="en-US" sz="3600" b="0" i="0" u="none" strike="noStrike" cap="none">
                 <a:solidFill>
                   <a:srgbClr val="000000"/>
                 </a:solidFill>
@@ -17058,7 +17326,7 @@
             <a:endParaRPr/>
           </a:p>
           <a:p>
-            <a:pPr indent="-457200" lvl="0" marL="457200" marR="0" rtl="0" algn="l">
+            <a:pPr marL="457200" marR="0" lvl="0" indent="-457200" algn="l" rtl="0">
               <a:lnSpc>
                 <a:spcPct val="100000"/>
               </a:lnSpc>
@@ -17076,7 +17344,7 @@
               <a:buChar char="•"/>
             </a:pPr>
             <a:r>
-              <a:rPr b="1" i="0" lang="en-US" sz="3600" u="none" cap="none" strike="noStrike">
+              <a:rPr lang="en-US" sz="3600" b="1" i="0" u="none" strike="noStrike" cap="none">
                 <a:solidFill>
                   <a:srgbClr val="000000"/>
                 </a:solidFill>
@@ -17088,7 +17356,7 @@
               <a:t>Armazenamento: </a:t>
             </a:r>
             <a:r>
-              <a:rPr b="0" i="0" lang="en-US" sz="3600" u="none" cap="none" strike="noStrike">
+              <a:rPr lang="en-US" sz="3600" b="0" i="0" u="none" strike="noStrike" cap="none">
                 <a:solidFill>
                   <a:srgbClr val="000000"/>
                 </a:solidFill>
@@ -17102,7 +17370,7 @@
             <a:endParaRPr/>
           </a:p>
           <a:p>
-            <a:pPr indent="-457200" lvl="0" marL="457200" marR="0" rtl="0" algn="l">
+            <a:pPr marL="457200" marR="0" lvl="0" indent="-457200" algn="l" rtl="0">
               <a:lnSpc>
                 <a:spcPct val="100000"/>
               </a:lnSpc>
@@ -17120,7 +17388,7 @@
               <a:buChar char="•"/>
             </a:pPr>
             <a:r>
-              <a:rPr b="1" i="0" lang="en-US" sz="3600" u="none" cap="none" strike="noStrike">
+              <a:rPr lang="en-US" sz="3600" b="1" i="0" u="none" strike="noStrike" cap="none">
                 <a:solidFill>
                   <a:srgbClr val="000000"/>
                 </a:solidFill>
@@ -17132,7 +17400,7 @@
               <a:t>Linguagens e Tecnologias:</a:t>
             </a:r>
             <a:r>
-              <a:rPr b="0" i="0" lang="en-US" sz="3600" u="none" cap="none" strike="noStrike">
+              <a:rPr lang="en-US" sz="3600" b="0" i="0" u="none" strike="noStrike" cap="none">
                 <a:solidFill>
                   <a:srgbClr val="000000"/>
                 </a:solidFill>
@@ -17143,7 +17411,7 @@
               </a:rPr>
               <a:t> C++, Node.js, JavaScript, React, Prisma.</a:t>
             </a:r>
-            <a:endParaRPr b="0" i="0" sz="3600" u="none" cap="none" strike="noStrike">
+            <a:endParaRPr sz="3600" b="0" i="0" u="none" strike="noStrike" cap="none">
               <a:solidFill>
                 <a:srgbClr val="000000"/>
               </a:solidFill>
@@ -17175,12 +17443,12 @@
           </a:ln>
         </p:spPr>
         <p:txBody>
-          <a:bodyPr anchorCtr="0" anchor="t" bIns="0" lIns="0" spcFirstLastPara="1" rIns="0" wrap="square" tIns="0">
+          <a:bodyPr spcFirstLastPara="1" wrap="square" lIns="0" tIns="0" rIns="0" bIns="0" anchor="t" anchorCtr="0">
             <a:spAutoFit/>
           </a:bodyPr>
           <a:lstStyle/>
           <a:p>
-            <a:pPr indent="0" lvl="0" marL="0" marR="0" rtl="0" algn="just">
+            <a:pPr marL="0" marR="0" lvl="0" indent="0" algn="just" rtl="0">
               <a:lnSpc>
                 <a:spcPct val="140000"/>
               </a:lnSpc>
@@ -17193,7 +17461,7 @@
               <a:buNone/>
             </a:pPr>
             <a:r>
-              <a:rPr b="0" i="0" lang="en-US" sz="3200" u="none" cap="none" strike="noStrike">
+              <a:rPr lang="en-US" sz="3200" b="0" i="0" u="none" strike="noStrike" cap="none">
                 <a:solidFill>
                   <a:srgbClr val="000000"/>
                 </a:solidFill>
@@ -17204,7 +17472,7 @@
               </a:rPr>
               <a:t>Anualmente, o Brasil perde mais de R$ 600 milhões com a deterioração de acervos culturais causada por variações ambientais. Essa ameaça silenciosa lidera as preocupações de 35% dos gestores, agravando-se pelo fato de que a falta de monitoramento contínuo frequentemente invalida apólices de seguro por ausência de provas de zelo. Para blindar as obras contra danos e a proliferação de fungos, a norma EN 15757 exige um microclima rigorosamente controlado, com temperatura entre 18°C e 22°C e umidade de 45% a 55%. Garantir a preservação definitiva do seu patrimônio, proteger seus investimentos e cumprir essas exigências requer uma solução automatizada e à prova de falhas, e é por isso que o nosso projeto é necessário. </a:t>
             </a:r>
-            <a:endParaRPr b="0" i="0" sz="3200" u="none" cap="none" strike="noStrike">
+            <a:endParaRPr sz="3200" b="0" i="0" u="none" strike="noStrike" cap="none">
               <a:solidFill>
                 <a:srgbClr val="000000"/>
               </a:solidFill>
@@ -17215,7 +17483,7 @@
             </a:endParaRPr>
           </a:p>
           <a:p>
-            <a:pPr indent="0" lvl="0" marL="0" marR="0" rtl="0" algn="just">
+            <a:pPr marL="0" marR="0" lvl="0" indent="0" algn="just" rtl="0">
               <a:lnSpc>
                 <a:spcPct val="140000"/>
               </a:lnSpc>
@@ -17232,10 +17500,7 @@
               <a:buFont typeface="Arial"/>
               <a:buNone/>
             </a:pPr>
-            <a:r>
-              <a:t/>
-            </a:r>
-            <a:endParaRPr b="0" i="0" sz="3430" u="none" cap="none" strike="noStrike">
+            <a:endParaRPr sz="3430" b="0" i="0" u="none" strike="noStrike" cap="none">
               <a:solidFill>
                 <a:srgbClr val="000000"/>
               </a:solidFill>
@@ -17267,12 +17532,12 @@
           </a:ln>
         </p:spPr>
         <p:txBody>
-          <a:bodyPr anchorCtr="0" anchor="t" bIns="0" lIns="0" spcFirstLastPara="1" rIns="0" wrap="square" tIns="0">
+          <a:bodyPr spcFirstLastPara="1" wrap="square" lIns="0" tIns="0" rIns="0" bIns="0" anchor="t" anchorCtr="0">
             <a:spAutoFit/>
           </a:bodyPr>
           <a:lstStyle/>
           <a:p>
-            <a:pPr indent="0" lvl="0" marL="0" marR="0" rtl="0" algn="just">
+            <a:pPr marL="0" marR="0" lvl="0" indent="0" algn="just" rtl="0">
               <a:lnSpc>
                 <a:spcPct val="140000"/>
               </a:lnSpc>
@@ -17285,7 +17550,7 @@
               <a:buNone/>
             </a:pPr>
             <a:r>
-              <a:rPr b="0" i="0" lang="en-US" sz="3600" u="none" cap="none" strike="noStrike">
+              <a:rPr lang="en-US" sz="3600" b="0" i="0" u="none" strike="noStrike" cap="none">
                 <a:solidFill>
                   <a:srgbClr val="000000"/>
                 </a:solidFill>
@@ -17296,7 +17561,7 @@
               </a:rPr>
               <a:t>O nosso projeto nasce para ser a resposta definitiva a essa vulnerabilidade, substituindo rondas manuais e planilhas falhas por uma camada contínua de inteligência preventiva. A ideia é tirar os gestores do escuro: qualquer desvio nas condições ideais gera uma mobilização imediata, antes que o dano se torne irreparável. Muito além de apenas monitorar, entregamos a tranquilidade da total conformidade com as normas e a garantia de um histórico digital irrefutável para seguradoras e auditorias, blindando o patrimônio através de uma abordagem acessível e desenhada para a realidade brasileira.</a:t>
             </a:r>
-            <a:endParaRPr b="0" i="0" sz="3600" u="none" cap="none" strike="noStrike">
+            <a:endParaRPr sz="3600" b="0" i="0" u="none" strike="noStrike" cap="none">
               <a:solidFill>
                 <a:srgbClr val="000000"/>
               </a:solidFill>
@@ -17328,12 +17593,12 @@
           </a:ln>
         </p:spPr>
         <p:txBody>
-          <a:bodyPr anchorCtr="0" anchor="t" bIns="0" lIns="0" spcFirstLastPara="1" rIns="0" wrap="square" tIns="0">
+          <a:bodyPr spcFirstLastPara="1" wrap="square" lIns="0" tIns="0" rIns="0" bIns="0" anchor="t" anchorCtr="0">
             <a:spAutoFit/>
           </a:bodyPr>
           <a:lstStyle/>
           <a:p>
-            <a:pPr indent="0" lvl="0" marL="0" marR="0" rtl="0" algn="ctr">
+            <a:pPr marL="0" marR="0" lvl="0" indent="0" algn="ctr" rtl="0">
               <a:lnSpc>
                 <a:spcPct val="140000"/>
               </a:lnSpc>
@@ -17351,7 +17616,7 @@
               <a:buNone/>
             </a:pPr>
             <a:r>
-              <a:rPr b="1" i="0" lang="en-US" sz="4955" u="none" cap="none" strike="noStrike">
+              <a:rPr lang="en-US" sz="4955" b="1" i="0" u="none" strike="noStrike" cap="none">
                 <a:solidFill>
                   <a:srgbClr val="000000"/>
                 </a:solidFill>
@@ -17362,7 +17627,7 @@
               </a:rPr>
               <a:t>IV SEMANA FECAP DE TECNOLOGIA - 2026</a:t>
             </a:r>
-            <a:endParaRPr b="0" i="0" sz="1400" u="none" cap="none" strike="noStrike">
+            <a:endParaRPr sz="1400" b="0" i="0" u="none" strike="noStrike" cap="none">
               <a:solidFill>
                 <a:srgbClr val="000000"/>
               </a:solidFill>
@@ -17373,7 +17638,7 @@
             </a:endParaRPr>
           </a:p>
           <a:p>
-            <a:pPr indent="0" lvl="0" marL="0" marR="0" rtl="0" algn="ctr">
+            <a:pPr marL="0" marR="0" lvl="0" indent="0" algn="ctr" rtl="0">
               <a:lnSpc>
                 <a:spcPct val="140000"/>
               </a:lnSpc>
@@ -17391,7 +17656,7 @@
               <a:buNone/>
             </a:pPr>
             <a:r>
-              <a:rPr b="0" i="0" lang="en-US" sz="4955" u="none" cap="none" strike="noStrike">
+              <a:rPr lang="en-US" sz="4955" b="0" i="0" u="none" strike="noStrike" cap="none">
                 <a:solidFill>
                   <a:srgbClr val="000000"/>
                 </a:solidFill>
@@ -17402,7 +17667,7 @@
               </a:rPr>
               <a:t>Fundação Escola de Comércio Álvares Penteado - FECAP</a:t>
             </a:r>
-            <a:endParaRPr b="0" i="0" sz="1400" u="none" cap="none" strike="noStrike">
+            <a:endParaRPr sz="1400" b="0" i="0" u="none" strike="noStrike" cap="none">
               <a:solidFill>
                 <a:srgbClr val="000000"/>
               </a:solidFill>
@@ -17434,12 +17699,12 @@
           </a:ln>
         </p:spPr>
         <p:txBody>
-          <a:bodyPr anchorCtr="0" anchor="t" bIns="0" lIns="0" spcFirstLastPara="1" rIns="0" wrap="square" tIns="0">
+          <a:bodyPr spcFirstLastPara="1" wrap="square" lIns="0" tIns="0" rIns="0" bIns="0" anchor="t" anchorCtr="0">
             <a:spAutoFit/>
           </a:bodyPr>
           <a:lstStyle/>
           <a:p>
-            <a:pPr indent="0" lvl="0" marL="0" marR="0" rtl="0" algn="just">
+            <a:pPr marL="0" marR="0" lvl="0" indent="0" algn="just" rtl="0">
               <a:lnSpc>
                 <a:spcPct val="140000"/>
               </a:lnSpc>
@@ -17452,7 +17717,7 @@
               <a:buNone/>
             </a:pPr>
             <a:r>
-              <a:rPr b="0" i="0" lang="en-US" sz="3200" u="none" cap="none" strike="noStrike">
+              <a:rPr lang="en-US" sz="3200" b="0" i="0" u="none" strike="noStrike" cap="none">
                 <a:solidFill>
                   <a:srgbClr val="000000"/>
                 </a:solidFill>
@@ -17466,7 +17731,7 @@
             <a:endParaRPr/>
           </a:p>
           <a:p>
-            <a:pPr indent="0" lvl="0" marL="0" marR="0" rtl="0" algn="just">
+            <a:pPr marL="0" marR="0" lvl="0" indent="0" algn="just" rtl="0">
               <a:lnSpc>
                 <a:spcPct val="140000"/>
               </a:lnSpc>
@@ -17478,10 +17743,7 @@
               </a:spcAft>
               <a:buNone/>
             </a:pPr>
-            <a:r>
-              <a:t/>
-            </a:r>
-            <a:endParaRPr b="0" i="0" sz="3200" u="none" cap="none" strike="noStrike">
+            <a:endParaRPr sz="3200" b="0" i="0" u="none" strike="noStrike" cap="none">
               <a:solidFill>
                 <a:srgbClr val="000000"/>
               </a:solidFill>
@@ -17492,7 +17754,7 @@
             </a:endParaRPr>
           </a:p>
           <a:p>
-            <a:pPr indent="0" lvl="0" marL="0" marR="0" rtl="0" algn="just">
+            <a:pPr marL="0" marR="0" lvl="0" indent="0" algn="just" rtl="0">
               <a:lnSpc>
                 <a:spcPct val="140000"/>
               </a:lnSpc>
@@ -17505,7 +17767,7 @@
               <a:buNone/>
             </a:pPr>
             <a:r>
-              <a:rPr b="0" i="0" lang="en-US" sz="3200" u="none" cap="none" strike="noStrike">
+              <a:rPr lang="en-US" sz="3200" b="0" i="0" u="none" strike="noStrike" cap="none">
                 <a:solidFill>
                   <a:srgbClr val="000000"/>
                 </a:solidFill>
@@ -17557,7 +17819,288 @@
 </file>
 
 <file path=ppt/theme/theme1.xml><?xml version="1.0" encoding="utf-8"?>
-<a:theme xmlns:a="http://schemas.openxmlformats.org/drawingml/2006/main" xmlns:r="http://schemas.openxmlformats.org/officeDocument/2006/relationships">
+<a:theme xmlns:a="http://schemas.openxmlformats.org/drawingml/2006/main" name="Office Theme">
+  <a:themeElements>
+    <a:clrScheme name="Office">
+      <a:dk1>
+        <a:srgbClr val="000000"/>
+      </a:dk1>
+      <a:lt1>
+        <a:srgbClr val="FFFFFF"/>
+      </a:lt1>
+      <a:dk2>
+        <a:srgbClr val="1F497D"/>
+      </a:dk2>
+      <a:lt2>
+        <a:srgbClr val="EEECE1"/>
+      </a:lt2>
+      <a:accent1>
+        <a:srgbClr val="4F81BD"/>
+      </a:accent1>
+      <a:accent2>
+        <a:srgbClr val="C0504D"/>
+      </a:accent2>
+      <a:accent3>
+        <a:srgbClr val="9BBB59"/>
+      </a:accent3>
+      <a:accent4>
+        <a:srgbClr val="8064A2"/>
+      </a:accent4>
+      <a:accent5>
+        <a:srgbClr val="4BACC6"/>
+      </a:accent5>
+      <a:accent6>
+        <a:srgbClr val="F79646"/>
+      </a:accent6>
+      <a:hlink>
+        <a:srgbClr val="0000FF"/>
+      </a:hlink>
+      <a:folHlink>
+        <a:srgbClr val="800080"/>
+      </a:folHlink>
+    </a:clrScheme>
+    <a:fontScheme name="Office">
+      <a:majorFont>
+        <a:latin typeface="Arial"/>
+        <a:ea typeface=""/>
+        <a:cs typeface=""/>
+        <a:font script="Jpan" typeface="ＭＳ Ｐゴシック"/>
+        <a:font script="Hang" typeface="맑은 고딕"/>
+        <a:font script="Hans" typeface="宋体"/>
+        <a:font script="Hant" typeface="新細明體"/>
+        <a:font script="Arab" typeface="Times New Roman"/>
+        <a:font script="Hebr" typeface="Times New Roman"/>
+        <a:font script="Thai" typeface="Angsana New"/>
+        <a:font script="Ethi" typeface="Nyala"/>
+        <a:font script="Beng" typeface="Vrinda"/>
+        <a:font script="Gujr" typeface="Shruti"/>
+        <a:font script="Khmr" typeface="MoolBoran"/>
+        <a:font script="Knda" typeface="Tunga"/>
+        <a:font script="Guru" typeface="Raavi"/>
+        <a:font script="Cans" typeface="Euphemia"/>
+        <a:font script="Cher" typeface="Plantagenet Cherokee"/>
+        <a:font script="Yiii" typeface="Microsoft Yi Baiti"/>
+        <a:font script="Tibt" typeface="Microsoft Himalaya"/>
+        <a:font script="Thaa" typeface="MV Boli"/>
+        <a:font script="Deva" typeface="Mangal"/>
+        <a:font script="Telu" typeface="Gautami"/>
+        <a:font script="Taml" typeface="Latha"/>
+        <a:font script="Syrc" typeface="Estrangelo Edessa"/>
+        <a:font script="Orya" typeface="Kalinga"/>
+        <a:font script="Mlym" typeface="Kartika"/>
+        <a:font script="Laoo" typeface="DokChampa"/>
+        <a:font script="Sinh" typeface="Iskoola Pota"/>
+        <a:font script="Mong" typeface="Mongolian Baiti"/>
+        <a:font script="Viet" typeface="Times New Roman"/>
+        <a:font script="Uigh" typeface="Microsoft Uighur"/>
+        <a:font script="Geor" typeface="Sylfaen"/>
+      </a:majorFont>
+      <a:minorFont>
+        <a:latin typeface="Arial"/>
+        <a:ea typeface=""/>
+        <a:cs typeface=""/>
+        <a:font script="Jpan" typeface="ＭＳ Ｐゴシック"/>
+        <a:font script="Hang" typeface="맑은 고딕"/>
+        <a:font script="Hans" typeface="宋体"/>
+        <a:font script="Hant" typeface="新細明體"/>
+        <a:font script="Arab" typeface="Arial"/>
+        <a:font script="Hebr" typeface="Arial"/>
+        <a:font script="Thai" typeface="Cordia New"/>
+        <a:font script="Ethi" typeface="Nyala"/>
+        <a:font script="Beng" typeface="Vrinda"/>
+        <a:font script="Gujr" typeface="Shruti"/>
+        <a:font script="Khmr" typeface="DaunPenh"/>
+        <a:font script="Knda" typeface="Tunga"/>
+        <a:font script="Guru" typeface="Raavi"/>
+        <a:font script="Cans" typeface="Euphemia"/>
+        <a:font script="Cher" typeface="Plantagenet Cherokee"/>
+        <a:font script="Yiii" typeface="Microsoft Yi Baiti"/>
+        <a:font script="Tibt" typeface="Microsoft Himalaya"/>
+        <a:font script="Thaa" typeface="MV Boli"/>
+        <a:font script="Deva" typeface="Mangal"/>
+        <a:font script="Telu" typeface="Gautami"/>
+        <a:font script="Taml" typeface="Latha"/>
+        <a:font script="Syrc" typeface="Estrangelo Edessa"/>
+        <a:font script="Orya" typeface="Kalinga"/>
+        <a:font script="Mlym" typeface="Kartika"/>
+        <a:font script="Laoo" typeface="DokChampa"/>
+        <a:font script="Sinh" typeface="Iskoola Pota"/>
+        <a:font script="Mong" typeface="Mongolian Baiti"/>
+        <a:font script="Viet" typeface="Arial"/>
+        <a:font script="Uigh" typeface="Microsoft Uighur"/>
+        <a:font script="Geor" typeface="Sylfaen"/>
+      </a:minorFont>
+    </a:fontScheme>
+    <a:fmtScheme name="Office">
+      <a:fillStyleLst>
+        <a:solidFill>
+          <a:schemeClr val="phClr"/>
+        </a:solidFill>
+        <a:gradFill rotWithShape="1">
+          <a:gsLst>
+            <a:gs pos="0">
+              <a:schemeClr val="phClr">
+                <a:tint val="50000"/>
+                <a:satMod val="300000"/>
+              </a:schemeClr>
+            </a:gs>
+            <a:gs pos="35000">
+              <a:schemeClr val="phClr">
+                <a:tint val="37000"/>
+                <a:satMod val="300000"/>
+              </a:schemeClr>
+            </a:gs>
+            <a:gs pos="100000">
+              <a:schemeClr val="phClr">
+                <a:tint val="15000"/>
+                <a:satMod val="350000"/>
+              </a:schemeClr>
+            </a:gs>
+          </a:gsLst>
+          <a:lin ang="16200000" scaled="1"/>
+        </a:gradFill>
+        <a:gradFill rotWithShape="1">
+          <a:gsLst>
+            <a:gs pos="0">
+              <a:schemeClr val="phClr">
+                <a:tint val="100000"/>
+                <a:shade val="100000"/>
+                <a:satMod val="130000"/>
+              </a:schemeClr>
+            </a:gs>
+            <a:gs pos="100000">
+              <a:schemeClr val="phClr">
+                <a:tint val="50000"/>
+                <a:shade val="100000"/>
+                <a:satMod val="350000"/>
+              </a:schemeClr>
+            </a:gs>
+          </a:gsLst>
+          <a:lin ang="16200000" scaled="0"/>
+        </a:gradFill>
+      </a:fillStyleLst>
+      <a:lnStyleLst>
+        <a:ln w="9525" cap="flat" cmpd="sng" algn="ctr">
+          <a:solidFill>
+            <a:schemeClr val="phClr">
+              <a:shade val="95000"/>
+              <a:satMod val="105000"/>
+            </a:schemeClr>
+          </a:solidFill>
+          <a:prstDash val="solid"/>
+        </a:ln>
+        <a:ln w="25400" cap="flat" cmpd="sng" algn="ctr">
+          <a:solidFill>
+            <a:schemeClr val="phClr"/>
+          </a:solidFill>
+          <a:prstDash val="solid"/>
+        </a:ln>
+        <a:ln w="38100" cap="flat" cmpd="sng" algn="ctr">
+          <a:solidFill>
+            <a:schemeClr val="phClr"/>
+          </a:solidFill>
+          <a:prstDash val="solid"/>
+        </a:ln>
+      </a:lnStyleLst>
+      <a:effectStyleLst>
+        <a:effectStyle>
+          <a:effectLst>
+            <a:outerShdw blurRad="40000" dist="20000" dir="5400000" rotWithShape="0">
+              <a:srgbClr val="000000">
+                <a:alpha val="38000"/>
+              </a:srgbClr>
+            </a:outerShdw>
+          </a:effectLst>
+        </a:effectStyle>
+        <a:effectStyle>
+          <a:effectLst>
+            <a:outerShdw blurRad="40000" dist="23000" dir="5400000" rotWithShape="0">
+              <a:srgbClr val="000000">
+                <a:alpha val="35000"/>
+              </a:srgbClr>
+            </a:outerShdw>
+          </a:effectLst>
+        </a:effectStyle>
+        <a:effectStyle>
+          <a:effectLst>
+            <a:outerShdw blurRad="40000" dist="23000" dir="5400000" rotWithShape="0">
+              <a:srgbClr val="000000">
+                <a:alpha val="35000"/>
+              </a:srgbClr>
+            </a:outerShdw>
+          </a:effectLst>
+          <a:scene3d>
+            <a:camera prst="orthographicFront">
+              <a:rot lat="0" lon="0" rev="0"/>
+            </a:camera>
+            <a:lightRig rig="threePt" dir="t">
+              <a:rot lat="0" lon="0" rev="1200000"/>
+            </a:lightRig>
+          </a:scene3d>
+          <a:sp3d>
+            <a:bevelT w="63500" h="25400"/>
+          </a:sp3d>
+        </a:effectStyle>
+      </a:effectStyleLst>
+      <a:bgFillStyleLst>
+        <a:solidFill>
+          <a:schemeClr val="phClr"/>
+        </a:solidFill>
+        <a:gradFill rotWithShape="1">
+          <a:gsLst>
+            <a:gs pos="0">
+              <a:schemeClr val="phClr">
+                <a:tint val="40000"/>
+                <a:satMod val="350000"/>
+              </a:schemeClr>
+            </a:gs>
+            <a:gs pos="40000">
+              <a:schemeClr val="phClr">
+                <a:tint val="45000"/>
+                <a:shade val="99000"/>
+                <a:satMod val="350000"/>
+              </a:schemeClr>
+            </a:gs>
+            <a:gs pos="100000">
+              <a:schemeClr val="phClr">
+                <a:shade val="20000"/>
+                <a:satMod val="255000"/>
+              </a:schemeClr>
+            </a:gs>
+          </a:gsLst>
+          <a:path path="circle">
+            <a:fillToRect l="50000" t="-80000" r="50000" b="180000"/>
+          </a:path>
+        </a:gradFill>
+        <a:gradFill rotWithShape="1">
+          <a:gsLst>
+            <a:gs pos="0">
+              <a:schemeClr val="phClr">
+                <a:tint val="80000"/>
+                <a:satMod val="300000"/>
+              </a:schemeClr>
+            </a:gs>
+            <a:gs pos="100000">
+              <a:schemeClr val="phClr">
+                <a:shade val="30000"/>
+                <a:satMod val="200000"/>
+              </a:schemeClr>
+            </a:gs>
+          </a:gsLst>
+          <a:path path="circle">
+            <a:fillToRect l="50000" t="50000" r="50000" b="50000"/>
+          </a:path>
+        </a:gradFill>
+      </a:bgFillStyleLst>
+    </a:fmtScheme>
+  </a:themeElements>
+  <a:objectDefaults/>
+  <a:extraClrSchemeLst/>
+</a:theme>
+</file>
+
+<file path=ppt/theme/theme2.xml><?xml version="1.0" encoding="utf-8"?>
+<a:theme xmlns:a="http://schemas.openxmlformats.org/drawingml/2006/main">
   <a:themeElements>
     <a:clrScheme name="Default">
       <a:dk1>
@@ -17832,284 +18375,7 @@
       </a:bgFillStyleLst>
     </a:fmtScheme>
   </a:themeElements>
-</a:theme>
-</file>
-
-<file path=ppt/theme/theme2.xml><?xml version="1.0" encoding="utf-8"?>
-<a:theme xmlns:a="http://schemas.openxmlformats.org/drawingml/2006/main" xmlns:r="http://schemas.openxmlformats.org/officeDocument/2006/relationships" name="Office Theme">
-  <a:themeElements>
-    <a:clrScheme name="Office">
-      <a:dk1>
-        <a:srgbClr val="000000"/>
-      </a:dk1>
-      <a:lt1>
-        <a:srgbClr val="FFFFFF"/>
-      </a:lt1>
-      <a:dk2>
-        <a:srgbClr val="1F497D"/>
-      </a:dk2>
-      <a:lt2>
-        <a:srgbClr val="EEECE1"/>
-      </a:lt2>
-      <a:accent1>
-        <a:srgbClr val="4F81BD"/>
-      </a:accent1>
-      <a:accent2>
-        <a:srgbClr val="C0504D"/>
-      </a:accent2>
-      <a:accent3>
-        <a:srgbClr val="9BBB59"/>
-      </a:accent3>
-      <a:accent4>
-        <a:srgbClr val="8064A2"/>
-      </a:accent4>
-      <a:accent5>
-        <a:srgbClr val="4BACC6"/>
-      </a:accent5>
-      <a:accent6>
-        <a:srgbClr val="F79646"/>
-      </a:accent6>
-      <a:hlink>
-        <a:srgbClr val="0000FF"/>
-      </a:hlink>
-      <a:folHlink>
-        <a:srgbClr val="800080"/>
-      </a:folHlink>
-    </a:clrScheme>
-    <a:fontScheme name="Office">
-      <a:majorFont>
-        <a:latin typeface="Arial"/>
-        <a:ea typeface=""/>
-        <a:cs typeface=""/>
-        <a:font script="Jpan" typeface="ＭＳ Ｐゴシック"/>
-        <a:font script="Hang" typeface="맑은 고딕"/>
-        <a:font script="Hans" typeface="宋体"/>
-        <a:font script="Hant" typeface="新細明體"/>
-        <a:font script="Arab" typeface="Times New Roman"/>
-        <a:font script="Hebr" typeface="Times New Roman"/>
-        <a:font script="Thai" typeface="Angsana New"/>
-        <a:font script="Ethi" typeface="Nyala"/>
-        <a:font script="Beng" typeface="Vrinda"/>
-        <a:font script="Gujr" typeface="Shruti"/>
-        <a:font script="Khmr" typeface="MoolBoran"/>
-        <a:font script="Knda" typeface="Tunga"/>
-        <a:font script="Guru" typeface="Raavi"/>
-        <a:font script="Cans" typeface="Euphemia"/>
-        <a:font script="Cher" typeface="Plantagenet Cherokee"/>
-        <a:font script="Yiii" typeface="Microsoft Yi Baiti"/>
-        <a:font script="Tibt" typeface="Microsoft Himalaya"/>
-        <a:font script="Thaa" typeface="MV Boli"/>
-        <a:font script="Deva" typeface="Mangal"/>
-        <a:font script="Telu" typeface="Gautami"/>
-        <a:font script="Taml" typeface="Latha"/>
-        <a:font script="Syrc" typeface="Estrangelo Edessa"/>
-        <a:font script="Orya" typeface="Kalinga"/>
-        <a:font script="Mlym" typeface="Kartika"/>
-        <a:font script="Laoo" typeface="DokChampa"/>
-        <a:font script="Sinh" typeface="Iskoola Pota"/>
-        <a:font script="Mong" typeface="Mongolian Baiti"/>
-        <a:font script="Viet" typeface="Times New Roman"/>
-        <a:font script="Uigh" typeface="Microsoft Uighur"/>
-        <a:font script="Geor" typeface="Sylfaen"/>
-      </a:majorFont>
-      <a:minorFont>
-        <a:latin typeface="Arial"/>
-        <a:ea typeface=""/>
-        <a:cs typeface=""/>
-        <a:font script="Jpan" typeface="ＭＳ Ｐゴシック"/>
-        <a:font script="Hang" typeface="맑은 고딕"/>
-        <a:font script="Hans" typeface="宋体"/>
-        <a:font script="Hant" typeface="新細明體"/>
-        <a:font script="Arab" typeface="Arial"/>
-        <a:font script="Hebr" typeface="Arial"/>
-        <a:font script="Thai" typeface="Cordia New"/>
-        <a:font script="Ethi" typeface="Nyala"/>
-        <a:font script="Beng" typeface="Vrinda"/>
-        <a:font script="Gujr" typeface="Shruti"/>
-        <a:font script="Khmr" typeface="DaunPenh"/>
-        <a:font script="Knda" typeface="Tunga"/>
-        <a:font script="Guru" typeface="Raavi"/>
-        <a:font script="Cans" typeface="Euphemia"/>
-        <a:font script="Cher" typeface="Plantagenet Cherokee"/>
-        <a:font script="Yiii" typeface="Microsoft Yi Baiti"/>
-        <a:font script="Tibt" typeface="Microsoft Himalaya"/>
-        <a:font script="Thaa" typeface="MV Boli"/>
-        <a:font script="Deva" typeface="Mangal"/>
-        <a:font script="Telu" typeface="Gautami"/>
-        <a:font script="Taml" typeface="Latha"/>
-        <a:font script="Syrc" typeface="Estrangelo Edessa"/>
-        <a:font script="Orya" typeface="Kalinga"/>
-        <a:font script="Mlym" typeface="Kartika"/>
-        <a:font script="Laoo" typeface="DokChampa"/>
-        <a:font script="Sinh" typeface="Iskoola Pota"/>
-        <a:font script="Mong" typeface="Mongolian Baiti"/>
-        <a:font script="Viet" typeface="Arial"/>
-        <a:font script="Uigh" typeface="Microsoft Uighur"/>
-        <a:font script="Geor" typeface="Sylfaen"/>
-      </a:minorFont>
-    </a:fontScheme>
-    <a:fmtScheme name="Office">
-      <a:fillStyleLst>
-        <a:solidFill>
-          <a:schemeClr val="phClr"/>
-        </a:solidFill>
-        <a:gradFill rotWithShape="1">
-          <a:gsLst>
-            <a:gs pos="0">
-              <a:schemeClr val="phClr">
-                <a:tint val="50000"/>
-                <a:satMod val="300000"/>
-              </a:schemeClr>
-            </a:gs>
-            <a:gs pos="35000">
-              <a:schemeClr val="phClr">
-                <a:tint val="37000"/>
-                <a:satMod val="300000"/>
-              </a:schemeClr>
-            </a:gs>
-            <a:gs pos="100000">
-              <a:schemeClr val="phClr">
-                <a:tint val="15000"/>
-                <a:satMod val="350000"/>
-              </a:schemeClr>
-            </a:gs>
-          </a:gsLst>
-          <a:lin ang="16200000" scaled="1"/>
-        </a:gradFill>
-        <a:gradFill rotWithShape="1">
-          <a:gsLst>
-            <a:gs pos="0">
-              <a:schemeClr val="phClr">
-                <a:tint val="100000"/>
-                <a:shade val="100000"/>
-                <a:satMod val="130000"/>
-              </a:schemeClr>
-            </a:gs>
-            <a:gs pos="100000">
-              <a:schemeClr val="phClr">
-                <a:tint val="50000"/>
-                <a:shade val="100000"/>
-                <a:satMod val="350000"/>
-              </a:schemeClr>
-            </a:gs>
-          </a:gsLst>
-          <a:lin ang="16200000" scaled="0"/>
-        </a:gradFill>
-      </a:fillStyleLst>
-      <a:lnStyleLst>
-        <a:ln w="9525" cap="flat" cmpd="sng" algn="ctr">
-          <a:solidFill>
-            <a:schemeClr val="phClr">
-              <a:shade val="95000"/>
-              <a:satMod val="105000"/>
-            </a:schemeClr>
-          </a:solidFill>
-          <a:prstDash val="solid"/>
-        </a:ln>
-        <a:ln w="25400" cap="flat" cmpd="sng" algn="ctr">
-          <a:solidFill>
-            <a:schemeClr val="phClr"/>
-          </a:solidFill>
-          <a:prstDash val="solid"/>
-        </a:ln>
-        <a:ln w="38100" cap="flat" cmpd="sng" algn="ctr">
-          <a:solidFill>
-            <a:schemeClr val="phClr"/>
-          </a:solidFill>
-          <a:prstDash val="solid"/>
-        </a:ln>
-      </a:lnStyleLst>
-      <a:effectStyleLst>
-        <a:effectStyle>
-          <a:effectLst>
-            <a:outerShdw blurRad="40000" dist="20000" dir="5400000" rotWithShape="0">
-              <a:srgbClr val="000000">
-                <a:alpha val="38000"/>
-              </a:srgbClr>
-            </a:outerShdw>
-          </a:effectLst>
-        </a:effectStyle>
-        <a:effectStyle>
-          <a:effectLst>
-            <a:outerShdw blurRad="40000" dist="23000" dir="5400000" rotWithShape="0">
-              <a:srgbClr val="000000">
-                <a:alpha val="35000"/>
-              </a:srgbClr>
-            </a:outerShdw>
-          </a:effectLst>
-        </a:effectStyle>
-        <a:effectStyle>
-          <a:effectLst>
-            <a:outerShdw blurRad="40000" dist="23000" dir="5400000" rotWithShape="0">
-              <a:srgbClr val="000000">
-                <a:alpha val="35000"/>
-              </a:srgbClr>
-            </a:outerShdw>
-          </a:effectLst>
-          <a:scene3d>
-            <a:camera prst="orthographicFront">
-              <a:rot lat="0" lon="0" rev="0"/>
-            </a:camera>
-            <a:lightRig rig="threePt" dir="t">
-              <a:rot lat="0" lon="0" rev="1200000"/>
-            </a:lightRig>
-          </a:scene3d>
-          <a:sp3d>
-            <a:bevelT w="63500" h="25400"/>
-          </a:sp3d>
-        </a:effectStyle>
-      </a:effectStyleLst>
-      <a:bgFillStyleLst>
-        <a:solidFill>
-          <a:schemeClr val="phClr"/>
-        </a:solidFill>
-        <a:gradFill rotWithShape="1">
-          <a:gsLst>
-            <a:gs pos="0">
-              <a:schemeClr val="phClr">
-                <a:tint val="40000"/>
-                <a:satMod val="350000"/>
-              </a:schemeClr>
-            </a:gs>
-            <a:gs pos="40000">
-              <a:schemeClr val="phClr">
-                <a:tint val="45000"/>
-                <a:shade val="99000"/>
-                <a:satMod val="350000"/>
-              </a:schemeClr>
-            </a:gs>
-            <a:gs pos="100000">
-              <a:schemeClr val="phClr">
-                <a:shade val="20000"/>
-                <a:satMod val="255000"/>
-              </a:schemeClr>
-            </a:gs>
-          </a:gsLst>
-          <a:path path="circle">
-            <a:fillToRect l="50000" t="-80000" r="50000" b="180000"/>
-          </a:path>
-        </a:gradFill>
-        <a:gradFill rotWithShape="1">
-          <a:gsLst>
-            <a:gs pos="0">
-              <a:schemeClr val="phClr">
-                <a:tint val="80000"/>
-                <a:satMod val="300000"/>
-              </a:schemeClr>
-            </a:gs>
-            <a:gs pos="100000">
-              <a:schemeClr val="phClr">
-                <a:shade val="30000"/>
-                <a:satMod val="200000"/>
-              </a:schemeClr>
-            </a:gs>
-          </a:gsLst>
-          <a:path path="circle">
-            <a:fillToRect l="50000" t="50000" r="50000" b="50000"/>
-          </a:path>
-        </a:gradFill>
-      </a:bgFillStyleLst>
-    </a:fmtScheme>
-  </a:themeElements>
+  <a:objectDefaults/>
+  <a:extraClrSchemeLst/>
 </a:theme>
 </file>